--- a/docs/lecture_slides/Week 1/Week1_Lecture1_Slides_1_10_2024.pptx
+++ b/docs/lecture_slides/Week 1/Week1_Lecture1_Slides_1_10_2024.pptx
@@ -18,16 +18,6 @@
     <p:sldId id="283" r:id="rId12"/>
     <p:sldId id="267" r:id="rId13"/>
     <p:sldId id="269" r:id="rId14"/>
-    <p:sldId id="275" r:id="rId15"/>
-    <p:sldId id="276" r:id="rId16"/>
-    <p:sldId id="277" r:id="rId17"/>
-    <p:sldId id="286" r:id="rId18"/>
-    <p:sldId id="288" r:id="rId19"/>
-    <p:sldId id="279" r:id="rId20"/>
-    <p:sldId id="281" r:id="rId21"/>
-    <p:sldId id="284" r:id="rId22"/>
-    <p:sldId id="273" r:id="rId23"/>
-    <p:sldId id="274" r:id="rId24"/>
   </p:sldIdLst>
   <p:sldSz cx="12192000" cy="6858000"/>
   <p:notesSz cx="6858000" cy="9144000"/>
@@ -3198,7 +3188,7 @@
           <a:p>
             <a:fld id="{D808A37A-4640-4712-9D8F-F69B6FC23B38}" type="datetimeFigureOut">
               <a:rPr lang="en-US" smtClean="0"/>
-              <a:t>8/21/2023</a:t>
+              <a:t>1/18/2024</a:t>
             </a:fld>
             <a:endParaRPr lang="en-US"/>
           </a:p>
@@ -3396,7 +3386,7 @@
           <a:p>
             <a:fld id="{D808A37A-4640-4712-9D8F-F69B6FC23B38}" type="datetimeFigureOut">
               <a:rPr lang="en-US" smtClean="0"/>
-              <a:t>8/21/2023</a:t>
+              <a:t>1/18/2024</a:t>
             </a:fld>
             <a:endParaRPr lang="en-US"/>
           </a:p>
@@ -3604,7 +3594,7 @@
           <a:p>
             <a:fld id="{D808A37A-4640-4712-9D8F-F69B6FC23B38}" type="datetimeFigureOut">
               <a:rPr lang="en-US" smtClean="0"/>
-              <a:t>8/21/2023</a:t>
+              <a:t>1/18/2024</a:t>
             </a:fld>
             <a:endParaRPr lang="en-US"/>
           </a:p>
@@ -3802,7 +3792,7 @@
           <a:p>
             <a:fld id="{D808A37A-4640-4712-9D8F-F69B6FC23B38}" type="datetimeFigureOut">
               <a:rPr lang="en-US" smtClean="0"/>
-              <a:t>8/21/2023</a:t>
+              <a:t>1/18/2024</a:t>
             </a:fld>
             <a:endParaRPr lang="en-US"/>
           </a:p>
@@ -4077,7 +4067,7 @@
           <a:p>
             <a:fld id="{D808A37A-4640-4712-9D8F-F69B6FC23B38}" type="datetimeFigureOut">
               <a:rPr lang="en-US" smtClean="0"/>
-              <a:t>8/21/2023</a:t>
+              <a:t>1/18/2024</a:t>
             </a:fld>
             <a:endParaRPr lang="en-US"/>
           </a:p>
@@ -4342,7 +4332,7 @@
           <a:p>
             <a:fld id="{D808A37A-4640-4712-9D8F-F69B6FC23B38}" type="datetimeFigureOut">
               <a:rPr lang="en-US" smtClean="0"/>
-              <a:t>8/21/2023</a:t>
+              <a:t>1/18/2024</a:t>
             </a:fld>
             <a:endParaRPr lang="en-US"/>
           </a:p>
@@ -4754,7 +4744,7 @@
           <a:p>
             <a:fld id="{D808A37A-4640-4712-9D8F-F69B6FC23B38}" type="datetimeFigureOut">
               <a:rPr lang="en-US" smtClean="0"/>
-              <a:t>8/21/2023</a:t>
+              <a:t>1/18/2024</a:t>
             </a:fld>
             <a:endParaRPr lang="en-US"/>
           </a:p>
@@ -4895,7 +4885,7 @@
           <a:p>
             <a:fld id="{D808A37A-4640-4712-9D8F-F69B6FC23B38}" type="datetimeFigureOut">
               <a:rPr lang="en-US" smtClean="0"/>
-              <a:t>8/21/2023</a:t>
+              <a:t>1/18/2024</a:t>
             </a:fld>
             <a:endParaRPr lang="en-US"/>
           </a:p>
@@ -5008,7 +4998,7 @@
           <a:p>
             <a:fld id="{D808A37A-4640-4712-9D8F-F69B6FC23B38}" type="datetimeFigureOut">
               <a:rPr lang="en-US" smtClean="0"/>
-              <a:t>8/21/2023</a:t>
+              <a:t>1/18/2024</a:t>
             </a:fld>
             <a:endParaRPr lang="en-US"/>
           </a:p>
@@ -5319,7 +5309,7 @@
           <a:p>
             <a:fld id="{D808A37A-4640-4712-9D8F-F69B6FC23B38}" type="datetimeFigureOut">
               <a:rPr lang="en-US" smtClean="0"/>
-              <a:t>8/21/2023</a:t>
+              <a:t>1/18/2024</a:t>
             </a:fld>
             <a:endParaRPr lang="en-US"/>
           </a:p>
@@ -5607,7 +5597,7 @@
           <a:p>
             <a:fld id="{D808A37A-4640-4712-9D8F-F69B6FC23B38}" type="datetimeFigureOut">
               <a:rPr lang="en-US" smtClean="0"/>
-              <a:t>8/21/2023</a:t>
+              <a:t>1/18/2024</a:t>
             </a:fld>
             <a:endParaRPr lang="en-US"/>
           </a:p>
@@ -5848,7 +5838,7 @@
           <a:p>
             <a:fld id="{D808A37A-4640-4712-9D8F-F69B6FC23B38}" type="datetimeFigureOut">
               <a:rPr lang="en-US" smtClean="0"/>
-              <a:t>8/21/2023</a:t>
+              <a:t>1/18/2024</a:t>
             </a:fld>
             <a:endParaRPr lang="en-US"/>
           </a:p>
@@ -8460,3354 +8450,6 @@
 </p:sld>
 </file>
 
-<file path=ppt/slides/slide14.xml><?xml version="1.0" encoding="utf-8"?>
-<p:sld xmlns:a="http://schemas.openxmlformats.org/drawingml/2006/main" xmlns:r="http://schemas.openxmlformats.org/officeDocument/2006/relationships" xmlns:p="http://schemas.openxmlformats.org/presentationml/2006/main">
-  <p:cSld>
-    <p:spTree>
-      <p:nvGrpSpPr>
-        <p:cNvPr id="1" name=""/>
-        <p:cNvGrpSpPr/>
-        <p:nvPr/>
-      </p:nvGrpSpPr>
-      <p:grpSpPr>
-        <a:xfrm>
-          <a:off x="0" y="0"/>
-          <a:ext cx="0" cy="0"/>
-          <a:chOff x="0" y="0"/>
-          <a:chExt cx="0" cy="0"/>
-        </a:xfrm>
-      </p:grpSpPr>
-      <p:sp>
-        <p:nvSpPr>
-          <p:cNvPr id="2" name="Title 1">
-            <a:extLst>
-              <a:ext uri="{FF2B5EF4-FFF2-40B4-BE49-F238E27FC236}">
-                <a16:creationId xmlns:a16="http://schemas.microsoft.com/office/drawing/2014/main" id="{96380C86-D709-6FB8-5A19-C2314095D583}"/>
-              </a:ext>
-            </a:extLst>
-          </p:cNvPr>
-          <p:cNvSpPr>
-            <a:spLocks noGrp="1"/>
-          </p:cNvSpPr>
-          <p:nvPr>
-            <p:ph type="title"/>
-          </p:nvPr>
-        </p:nvSpPr>
-        <p:spPr/>
-        <p:txBody>
-          <a:bodyPr/>
-          <a:lstStyle/>
-          <a:p>
-            <a:r>
-              <a:rPr lang="en-US" dirty="0"/>
-              <a:t>Sampling and Data</a:t>
-            </a:r>
-          </a:p>
-        </p:txBody>
-      </p:sp>
-      <p:sp>
-        <p:nvSpPr>
-          <p:cNvPr id="3" name="TextBox 2">
-            <a:extLst>
-              <a:ext uri="{FF2B5EF4-FFF2-40B4-BE49-F238E27FC236}">
-                <a16:creationId xmlns:a16="http://schemas.microsoft.com/office/drawing/2014/main" id="{0188B80F-E353-D6A4-82DB-12D37AECA5FA}"/>
-              </a:ext>
-            </a:extLst>
-          </p:cNvPr>
-          <p:cNvSpPr txBox="1"/>
-          <p:nvPr/>
-        </p:nvSpPr>
-        <p:spPr>
-          <a:xfrm>
-            <a:off x="306534" y="1612616"/>
-            <a:ext cx="6382326" cy="5293757"/>
-          </a:xfrm>
-          <a:prstGeom prst="rect">
-            <a:avLst/>
-          </a:prstGeom>
-          <a:noFill/>
-        </p:spPr>
-        <p:txBody>
-          <a:bodyPr wrap="square">
-            <a:spAutoFit/>
-          </a:bodyPr>
-          <a:lstStyle/>
-          <a:p>
-            <a:pPr marR="0" lvl="0" algn="l" defTabSz="914400" rtl="0" eaLnBrk="1" fontAlgn="auto" latinLnBrk="0" hangingPunct="1">
-              <a:lnSpc>
-                <a:spcPct val="90000"/>
-              </a:lnSpc>
-              <a:spcBef>
-                <a:spcPts val="1000"/>
-              </a:spcBef>
-              <a:spcAft>
-                <a:spcPts val="0"/>
-              </a:spcAft>
-              <a:buClrTx/>
-              <a:buSzTx/>
-              <a:tabLst/>
-              <a:defRPr/>
-            </a:pPr>
-            <a:r>
-              <a:rPr lang="it-IT" sz="2000" dirty="0">
-                <a:solidFill>
-                  <a:prstClr val="black"/>
-                </a:solidFill>
-                <a:latin typeface="Calibri" panose="020F0502020204030204"/>
-              </a:rPr>
-              <a:t>Statistics is generally concerned with studying properties of a </a:t>
-            </a:r>
-            <a:r>
-              <a:rPr lang="it-IT" sz="2000" b="1" dirty="0">
-                <a:solidFill>
-                  <a:prstClr val="black"/>
-                </a:solidFill>
-                <a:latin typeface="Calibri" panose="020F0502020204030204"/>
-              </a:rPr>
-              <a:t>population </a:t>
-            </a:r>
-            <a:r>
-              <a:rPr lang="it-IT" sz="2000" dirty="0">
-                <a:solidFill>
-                  <a:prstClr val="black"/>
-                </a:solidFill>
-                <a:latin typeface="Calibri" panose="020F0502020204030204"/>
-              </a:rPr>
-              <a:t>– the collection of all possible persons, events, or objects of interest </a:t>
-            </a:r>
-          </a:p>
-          <a:p>
-            <a:pPr lvl="1">
-              <a:lnSpc>
-                <a:spcPct val="90000"/>
-              </a:lnSpc>
-              <a:spcBef>
-                <a:spcPts val="1000"/>
-              </a:spcBef>
-              <a:defRPr/>
-            </a:pPr>
-            <a:r>
-              <a:rPr lang="it-IT" sz="2000" dirty="0">
-                <a:solidFill>
-                  <a:prstClr val="black"/>
-                </a:solidFill>
-                <a:latin typeface="Calibri" panose="020F0502020204030204"/>
-              </a:rPr>
-              <a:t>e.g the set of all possible observations –  observed + unobserved </a:t>
-            </a:r>
-          </a:p>
-          <a:p>
-            <a:pPr marL="342900" indent="-342900">
-              <a:lnSpc>
-                <a:spcPct val="90000"/>
-              </a:lnSpc>
-              <a:spcBef>
-                <a:spcPts val="1000"/>
-              </a:spcBef>
-              <a:buFont typeface="Arial" panose="020B0604020202020204" pitchFamily="34" charset="0"/>
-              <a:buChar char="•"/>
-              <a:defRPr/>
-            </a:pPr>
-            <a:r>
-              <a:rPr lang="it-IT" sz="2000" dirty="0">
-                <a:solidFill>
-                  <a:prstClr val="black"/>
-                </a:solidFill>
-                <a:latin typeface="Calibri" panose="020F0502020204030204"/>
-              </a:rPr>
-              <a:t>Populations can be </a:t>
-            </a:r>
-            <a:r>
-              <a:rPr lang="it-IT" sz="2000" i="1" dirty="0">
-                <a:solidFill>
-                  <a:prstClr val="black"/>
-                </a:solidFill>
-                <a:latin typeface="Calibri" panose="020F0502020204030204"/>
-              </a:rPr>
-              <a:t>real</a:t>
-            </a:r>
-            <a:r>
-              <a:rPr lang="it-IT" sz="2000" dirty="0">
-                <a:solidFill>
-                  <a:prstClr val="black"/>
-                </a:solidFill>
-                <a:latin typeface="Calibri" panose="020F0502020204030204"/>
-              </a:rPr>
-              <a:t> and </a:t>
-            </a:r>
-            <a:r>
-              <a:rPr lang="it-IT" sz="2000" i="1" dirty="0">
-                <a:solidFill>
-                  <a:prstClr val="black"/>
-                </a:solidFill>
-                <a:latin typeface="Calibri" panose="020F0502020204030204"/>
-              </a:rPr>
-              <a:t>finite/countable</a:t>
-            </a:r>
-            <a:r>
-              <a:rPr lang="it-IT" sz="2000" dirty="0">
-                <a:solidFill>
-                  <a:prstClr val="black"/>
-                </a:solidFill>
-                <a:latin typeface="Calibri" panose="020F0502020204030204"/>
-              </a:rPr>
-              <a:t>  (e.g. All employees at a company) or </a:t>
-            </a:r>
-            <a:r>
-              <a:rPr lang="it-IT" sz="2000" i="1" dirty="0">
-                <a:solidFill>
-                  <a:prstClr val="black"/>
-                </a:solidFill>
-                <a:latin typeface="Calibri" panose="020F0502020204030204"/>
-              </a:rPr>
-              <a:t>hypothetical</a:t>
-            </a:r>
-            <a:r>
-              <a:rPr lang="it-IT" sz="2000" dirty="0">
-                <a:solidFill>
-                  <a:prstClr val="black"/>
-                </a:solidFill>
-                <a:latin typeface="Calibri" panose="020F0502020204030204"/>
-              </a:rPr>
-              <a:t> and potentially </a:t>
-            </a:r>
-            <a:r>
-              <a:rPr lang="it-IT" sz="2000" i="1" dirty="0">
-                <a:solidFill>
-                  <a:prstClr val="black"/>
-                </a:solidFill>
-                <a:latin typeface="Calibri" panose="020F0502020204030204"/>
-              </a:rPr>
-              <a:t>infinite/uncountable</a:t>
-            </a:r>
-            <a:r>
-              <a:rPr lang="it-IT" sz="2000" dirty="0">
-                <a:solidFill>
-                  <a:prstClr val="black"/>
-                </a:solidFill>
-                <a:latin typeface="Calibri" panose="020F0502020204030204"/>
-              </a:rPr>
-              <a:t> (e.g all possible hands in a game of poker)</a:t>
-            </a:r>
-          </a:p>
-          <a:p>
-            <a:pPr marR="0" lvl="0" algn="l" defTabSz="914400" rtl="0" eaLnBrk="1" fontAlgn="auto" latinLnBrk="0" hangingPunct="1">
-              <a:lnSpc>
-                <a:spcPct val="90000"/>
-              </a:lnSpc>
-              <a:spcBef>
-                <a:spcPts val="1000"/>
-              </a:spcBef>
-              <a:spcAft>
-                <a:spcPts val="0"/>
-              </a:spcAft>
-              <a:buClrTx/>
-              <a:buSzTx/>
-              <a:tabLst/>
-              <a:defRPr/>
-            </a:pPr>
-            <a:endParaRPr lang="it-IT" sz="2000" dirty="0">
-              <a:solidFill>
-                <a:prstClr val="black"/>
-              </a:solidFill>
-              <a:latin typeface="Calibri" panose="020F0502020204030204"/>
-            </a:endParaRPr>
-          </a:p>
-          <a:p>
-            <a:pPr marR="0" lvl="0" algn="l" defTabSz="914400" rtl="0" eaLnBrk="1" fontAlgn="auto" latinLnBrk="0" hangingPunct="1">
-              <a:lnSpc>
-                <a:spcPct val="90000"/>
-              </a:lnSpc>
-              <a:spcBef>
-                <a:spcPts val="1000"/>
-              </a:spcBef>
-              <a:spcAft>
-                <a:spcPts val="0"/>
-              </a:spcAft>
-              <a:buClrTx/>
-              <a:buSzTx/>
-              <a:tabLst/>
-              <a:defRPr/>
-            </a:pPr>
-            <a:r>
-              <a:rPr lang="it-IT" sz="2000" dirty="0">
-                <a:solidFill>
-                  <a:prstClr val="black"/>
-                </a:solidFill>
-                <a:latin typeface="Calibri" panose="020F0502020204030204"/>
-              </a:rPr>
-              <a:t>A </a:t>
-            </a:r>
-            <a:r>
-              <a:rPr lang="it-IT" sz="2000" b="1" dirty="0">
-                <a:solidFill>
-                  <a:prstClr val="black"/>
-                </a:solidFill>
-                <a:latin typeface="Calibri" panose="020F0502020204030204"/>
-              </a:rPr>
-              <a:t>Sample </a:t>
-            </a:r>
-            <a:r>
-              <a:rPr lang="it-IT" sz="2000" dirty="0">
-                <a:solidFill>
-                  <a:prstClr val="black"/>
-                </a:solidFill>
-                <a:latin typeface="Calibri" panose="020F0502020204030204"/>
-              </a:rPr>
-              <a:t>is a subset of the population that we actually observe – the observed observations</a:t>
-            </a:r>
-          </a:p>
-          <a:p>
-            <a:pPr marL="342900" marR="0" lvl="0" indent="-342900" algn="l" defTabSz="914400" rtl="0" eaLnBrk="1" fontAlgn="auto" latinLnBrk="0" hangingPunct="1">
-              <a:lnSpc>
-                <a:spcPct val="90000"/>
-              </a:lnSpc>
-              <a:spcBef>
-                <a:spcPts val="1000"/>
-              </a:spcBef>
-              <a:spcAft>
-                <a:spcPts val="0"/>
-              </a:spcAft>
-              <a:buClrTx/>
-              <a:buSzTx/>
-              <a:buFont typeface="Arial" panose="020B0604020202020204" pitchFamily="34" charset="0"/>
-              <a:buChar char="•"/>
-              <a:tabLst/>
-              <a:defRPr/>
-            </a:pPr>
-            <a:r>
-              <a:rPr lang="it-IT" sz="2000" dirty="0">
-                <a:solidFill>
-                  <a:prstClr val="black"/>
-                </a:solidFill>
-                <a:latin typeface="Calibri" panose="020F0502020204030204"/>
-              </a:rPr>
-              <a:t>The idea of </a:t>
-            </a:r>
-            <a:r>
-              <a:rPr lang="it-IT" sz="2000" b="1" dirty="0">
-                <a:solidFill>
-                  <a:prstClr val="black"/>
-                </a:solidFill>
-                <a:latin typeface="Calibri" panose="020F0502020204030204"/>
-              </a:rPr>
-              <a:t>Sampling </a:t>
-            </a:r>
-            <a:r>
-              <a:rPr lang="it-IT" sz="2000" dirty="0">
-                <a:solidFill>
-                  <a:prstClr val="black"/>
-                </a:solidFill>
-                <a:latin typeface="Calibri" panose="020F0502020204030204"/>
-              </a:rPr>
-              <a:t>is to select a portion or individuals or objects that are </a:t>
-            </a:r>
-            <a:r>
-              <a:rPr lang="it-IT" sz="2000" i="1" dirty="0">
-                <a:solidFill>
-                  <a:prstClr val="black"/>
-                </a:solidFill>
-                <a:latin typeface="Calibri" panose="020F0502020204030204"/>
-              </a:rPr>
-              <a:t>representative</a:t>
-            </a:r>
-            <a:r>
-              <a:rPr lang="it-IT" sz="2000" dirty="0">
-                <a:solidFill>
-                  <a:prstClr val="black"/>
-                </a:solidFill>
-                <a:latin typeface="Calibri" panose="020F0502020204030204"/>
-              </a:rPr>
-              <a:t> of the population </a:t>
-            </a:r>
-          </a:p>
-          <a:p>
-            <a:pPr marL="342900" marR="0" lvl="0" indent="-342900" algn="l" defTabSz="914400" rtl="0" eaLnBrk="1" fontAlgn="auto" latinLnBrk="0" hangingPunct="1">
-              <a:lnSpc>
-                <a:spcPct val="90000"/>
-              </a:lnSpc>
-              <a:spcBef>
-                <a:spcPts val="1000"/>
-              </a:spcBef>
-              <a:spcAft>
-                <a:spcPts val="0"/>
-              </a:spcAft>
-              <a:buClrTx/>
-              <a:buSzTx/>
-              <a:buFont typeface="Arial" panose="020B0604020202020204" pitchFamily="34" charset="0"/>
-              <a:buChar char="•"/>
-              <a:tabLst/>
-              <a:defRPr/>
-            </a:pPr>
-            <a:r>
-              <a:rPr lang="it-IT" sz="2000" dirty="0">
-                <a:solidFill>
-                  <a:prstClr val="black"/>
-                </a:solidFill>
-                <a:latin typeface="Calibri" panose="020F0502020204030204"/>
-              </a:rPr>
-              <a:t>By studying the sample we can gain insights about the population</a:t>
-            </a:r>
-          </a:p>
-        </p:txBody>
-      </p:sp>
-      <p:grpSp>
-        <p:nvGrpSpPr>
-          <p:cNvPr id="4" name="Group 3">
-            <a:extLst>
-              <a:ext uri="{FF2B5EF4-FFF2-40B4-BE49-F238E27FC236}">
-                <a16:creationId xmlns:a16="http://schemas.microsoft.com/office/drawing/2014/main" id="{3BD5BC74-A5F6-D81D-31C9-841DF2BDE57D}"/>
-              </a:ext>
-            </a:extLst>
-          </p:cNvPr>
-          <p:cNvGrpSpPr/>
-          <p:nvPr/>
-        </p:nvGrpSpPr>
-        <p:grpSpPr>
-          <a:xfrm>
-            <a:off x="7509164" y="1000495"/>
-            <a:ext cx="3281218" cy="4632255"/>
-            <a:chOff x="7509164" y="1000495"/>
-            <a:chExt cx="3281218" cy="4632255"/>
-          </a:xfrm>
-        </p:grpSpPr>
-        <p:sp>
-          <p:nvSpPr>
-            <p:cNvPr id="5" name="Oval 4">
-              <a:extLst>
-                <a:ext uri="{FF2B5EF4-FFF2-40B4-BE49-F238E27FC236}">
-                  <a16:creationId xmlns:a16="http://schemas.microsoft.com/office/drawing/2014/main" id="{FE76BFFC-692A-3395-0D59-137EA4C6F72E}"/>
-                </a:ext>
-              </a:extLst>
-            </p:cNvPr>
-            <p:cNvSpPr/>
-            <p:nvPr/>
-          </p:nvSpPr>
-          <p:spPr>
-            <a:xfrm>
-              <a:off x="7509164" y="1000495"/>
-              <a:ext cx="3281218" cy="2983346"/>
-            </a:xfrm>
-            <a:prstGeom prst="ellipse">
-              <a:avLst/>
-            </a:prstGeom>
-          </p:spPr>
-          <p:style>
-            <a:lnRef idx="2">
-              <a:schemeClr val="accent1">
-                <a:shade val="15000"/>
-              </a:schemeClr>
-            </a:lnRef>
-            <a:fillRef idx="1">
-              <a:schemeClr val="accent1"/>
-            </a:fillRef>
-            <a:effectRef idx="0">
-              <a:schemeClr val="accent1"/>
-            </a:effectRef>
-            <a:fontRef idx="minor">
-              <a:schemeClr val="lt1"/>
-            </a:fontRef>
-          </p:style>
-          <p:txBody>
-            <a:bodyPr rtlCol="0" anchor="ctr"/>
-            <a:lstStyle/>
-            <a:p>
-              <a:pPr algn="ctr"/>
-              <a:r>
-                <a:rPr lang="en-US" dirty="0"/>
-                <a:t> </a:t>
-              </a:r>
-            </a:p>
-          </p:txBody>
-        </p:sp>
-        <p:sp>
-          <p:nvSpPr>
-            <p:cNvPr id="6" name="Oval 5">
-              <a:extLst>
-                <a:ext uri="{FF2B5EF4-FFF2-40B4-BE49-F238E27FC236}">
-                  <a16:creationId xmlns:a16="http://schemas.microsoft.com/office/drawing/2014/main" id="{75C755FB-8455-004A-405B-1295E68507B1}"/>
-                </a:ext>
-              </a:extLst>
-            </p:cNvPr>
-            <p:cNvSpPr/>
-            <p:nvPr/>
-          </p:nvSpPr>
-          <p:spPr>
-            <a:xfrm>
-              <a:off x="8392391" y="2807854"/>
-              <a:ext cx="1514764" cy="923637"/>
-            </a:xfrm>
-            <a:prstGeom prst="ellipse">
-              <a:avLst/>
-            </a:prstGeom>
-            <a:solidFill>
-              <a:schemeClr val="bg1"/>
-            </a:solidFill>
-          </p:spPr>
-          <p:style>
-            <a:lnRef idx="2">
-              <a:schemeClr val="accent1">
-                <a:shade val="15000"/>
-              </a:schemeClr>
-            </a:lnRef>
-            <a:fillRef idx="1">
-              <a:schemeClr val="accent1"/>
-            </a:fillRef>
-            <a:effectRef idx="0">
-              <a:schemeClr val="accent1"/>
-            </a:effectRef>
-            <a:fontRef idx="minor">
-              <a:schemeClr val="lt1"/>
-            </a:fontRef>
-          </p:style>
-          <p:txBody>
-            <a:bodyPr rtlCol="0" anchor="ctr"/>
-            <a:lstStyle/>
-            <a:p>
-              <a:pPr algn="ctr"/>
-              <a:endParaRPr lang="en-US"/>
-            </a:p>
-          </p:txBody>
-        </p:sp>
-        <p:sp>
-          <p:nvSpPr>
-            <p:cNvPr id="7" name="Oval 6">
-              <a:extLst>
-                <a:ext uri="{FF2B5EF4-FFF2-40B4-BE49-F238E27FC236}">
-                  <a16:creationId xmlns:a16="http://schemas.microsoft.com/office/drawing/2014/main" id="{8055093A-2E5D-6EDB-F52E-26AFAC794EE5}"/>
-                </a:ext>
-              </a:extLst>
-            </p:cNvPr>
-            <p:cNvSpPr/>
-            <p:nvPr/>
-          </p:nvSpPr>
-          <p:spPr>
-            <a:xfrm>
-              <a:off x="8392391" y="4709113"/>
-              <a:ext cx="1514764" cy="923637"/>
-            </a:xfrm>
-            <a:prstGeom prst="ellipse">
-              <a:avLst/>
-            </a:prstGeom>
-          </p:spPr>
-          <p:style>
-            <a:lnRef idx="2">
-              <a:schemeClr val="accent1">
-                <a:shade val="15000"/>
-              </a:schemeClr>
-            </a:lnRef>
-            <a:fillRef idx="1">
-              <a:schemeClr val="accent1"/>
-            </a:fillRef>
-            <a:effectRef idx="0">
-              <a:schemeClr val="accent1"/>
-            </a:effectRef>
-            <a:fontRef idx="minor">
-              <a:schemeClr val="lt1"/>
-            </a:fontRef>
-          </p:style>
-          <p:txBody>
-            <a:bodyPr rtlCol="0" anchor="ctr"/>
-            <a:lstStyle/>
-            <a:p>
-              <a:pPr algn="ctr"/>
-              <a:r>
-                <a:rPr lang="en-US" dirty="0"/>
-                <a:t>Sample</a:t>
-              </a:r>
-            </a:p>
-          </p:txBody>
-        </p:sp>
-        <p:sp>
-          <p:nvSpPr>
-            <p:cNvPr id="9" name="TextBox 8">
-              <a:extLst>
-                <a:ext uri="{FF2B5EF4-FFF2-40B4-BE49-F238E27FC236}">
-                  <a16:creationId xmlns:a16="http://schemas.microsoft.com/office/drawing/2014/main" id="{9D0664B3-F7D9-BBD3-87A1-5643EE5D92E7}"/>
-                </a:ext>
-              </a:extLst>
-            </p:cNvPr>
-            <p:cNvSpPr txBox="1"/>
-            <p:nvPr/>
-          </p:nvSpPr>
-          <p:spPr>
-            <a:xfrm>
-              <a:off x="8266545" y="1847273"/>
-              <a:ext cx="1199046" cy="369332"/>
-            </a:xfrm>
-            <a:prstGeom prst="rect">
-              <a:avLst/>
-            </a:prstGeom>
-            <a:noFill/>
-          </p:spPr>
-          <p:txBody>
-            <a:bodyPr wrap="none" rtlCol="0">
-              <a:spAutoFit/>
-            </a:bodyPr>
-            <a:lstStyle/>
-            <a:p>
-              <a:r>
-                <a:rPr lang="en-US" dirty="0">
-                  <a:solidFill>
-                    <a:schemeClr val="bg1"/>
-                  </a:solidFill>
-                </a:rPr>
-                <a:t>Population</a:t>
-              </a:r>
-            </a:p>
-          </p:txBody>
-        </p:sp>
-        <p:cxnSp>
-          <p:nvCxnSpPr>
-            <p:cNvPr id="11" name="Straight Arrow Connector 10">
-              <a:extLst>
-                <a:ext uri="{FF2B5EF4-FFF2-40B4-BE49-F238E27FC236}">
-                  <a16:creationId xmlns:a16="http://schemas.microsoft.com/office/drawing/2014/main" id="{186B49F7-EAAC-9B39-3238-0A6CBE507C2B}"/>
-                </a:ext>
-              </a:extLst>
-            </p:cNvPr>
-            <p:cNvCxnSpPr/>
-            <p:nvPr/>
-          </p:nvCxnSpPr>
-          <p:spPr>
-            <a:xfrm>
-              <a:off x="9149773" y="3269672"/>
-              <a:ext cx="0" cy="1349539"/>
-            </a:xfrm>
-            <a:prstGeom prst="straightConnector1">
-              <a:avLst/>
-            </a:prstGeom>
-            <a:ln w="57150">
-              <a:solidFill>
-                <a:srgbClr val="FF0000"/>
-              </a:solidFill>
-              <a:tailEnd type="triangle"/>
-            </a:ln>
-          </p:spPr>
-          <p:style>
-            <a:lnRef idx="1">
-              <a:schemeClr val="accent1"/>
-            </a:lnRef>
-            <a:fillRef idx="0">
-              <a:schemeClr val="accent1"/>
-            </a:fillRef>
-            <a:effectRef idx="0">
-              <a:schemeClr val="accent1"/>
-            </a:effectRef>
-            <a:fontRef idx="minor">
-              <a:schemeClr val="tx1"/>
-            </a:fontRef>
-          </p:style>
-        </p:cxnSp>
-      </p:grpSp>
-    </p:spTree>
-    <p:extLst>
-      <p:ext uri="{BB962C8B-B14F-4D97-AF65-F5344CB8AC3E}">
-        <p14:creationId xmlns:p14="http://schemas.microsoft.com/office/powerpoint/2010/main" val="3478471953"/>
-      </p:ext>
-    </p:extLst>
-  </p:cSld>
-  <p:clrMapOvr>
-    <a:masterClrMapping/>
-  </p:clrMapOvr>
-</p:sld>
-</file>
-
-<file path=ppt/slides/slide15.xml><?xml version="1.0" encoding="utf-8"?>
-<p:sld xmlns:a="http://schemas.openxmlformats.org/drawingml/2006/main" xmlns:r="http://schemas.openxmlformats.org/officeDocument/2006/relationships" xmlns:p="http://schemas.openxmlformats.org/presentationml/2006/main">
-  <p:cSld>
-    <p:spTree>
-      <p:nvGrpSpPr>
-        <p:cNvPr id="1" name=""/>
-        <p:cNvGrpSpPr/>
-        <p:nvPr/>
-      </p:nvGrpSpPr>
-      <p:grpSpPr>
-        <a:xfrm>
-          <a:off x="0" y="0"/>
-          <a:ext cx="0" cy="0"/>
-          <a:chOff x="0" y="0"/>
-          <a:chExt cx="0" cy="0"/>
-        </a:xfrm>
-      </p:grpSpPr>
-      <p:sp>
-        <p:nvSpPr>
-          <p:cNvPr id="2" name="Title 1">
-            <a:extLst>
-              <a:ext uri="{FF2B5EF4-FFF2-40B4-BE49-F238E27FC236}">
-                <a16:creationId xmlns:a16="http://schemas.microsoft.com/office/drawing/2014/main" id="{10999980-3A28-4123-6B5F-A6639B54C7DB}"/>
-              </a:ext>
-            </a:extLst>
-          </p:cNvPr>
-          <p:cNvSpPr>
-            <a:spLocks noGrp="1"/>
-          </p:cNvSpPr>
-          <p:nvPr>
-            <p:ph type="title"/>
-          </p:nvPr>
-        </p:nvSpPr>
-        <p:spPr>
-          <a:xfrm>
-            <a:off x="123826" y="0"/>
-            <a:ext cx="10515600" cy="1325563"/>
-          </a:xfrm>
-        </p:spPr>
-        <p:txBody>
-          <a:bodyPr/>
-          <a:lstStyle/>
-          <a:p>
-            <a:r>
-              <a:rPr lang="en-US" dirty="0"/>
-              <a:t>Example</a:t>
-            </a:r>
-          </a:p>
-        </p:txBody>
-      </p:sp>
-      <p:cxnSp>
-        <p:nvCxnSpPr>
-          <p:cNvPr id="11" name="Straight Connector 10">
-            <a:extLst>
-              <a:ext uri="{FF2B5EF4-FFF2-40B4-BE49-F238E27FC236}">
-                <a16:creationId xmlns:a16="http://schemas.microsoft.com/office/drawing/2014/main" id="{13AED8ED-F3E1-EB93-F48F-DAD47DDD846A}"/>
-              </a:ext>
-            </a:extLst>
-          </p:cNvPr>
-          <p:cNvCxnSpPr>
-            <a:cxnSpLocks/>
-          </p:cNvCxnSpPr>
-          <p:nvPr/>
-        </p:nvCxnSpPr>
-        <p:spPr>
-          <a:xfrm>
-            <a:off x="6560360" y="2438400"/>
-            <a:ext cx="459042" cy="1330036"/>
-          </a:xfrm>
-          <a:prstGeom prst="line">
-            <a:avLst/>
-          </a:prstGeom>
-          <a:ln w="12700"/>
-        </p:spPr>
-        <p:style>
-          <a:lnRef idx="1">
-            <a:schemeClr val="dk1"/>
-          </a:lnRef>
-          <a:fillRef idx="0">
-            <a:schemeClr val="dk1"/>
-          </a:fillRef>
-          <a:effectRef idx="0">
-            <a:schemeClr val="dk1"/>
-          </a:effectRef>
-          <a:fontRef idx="minor">
-            <a:schemeClr val="tx1"/>
-          </a:fontRef>
-        </p:style>
-      </p:cxnSp>
-      <p:cxnSp>
-        <p:nvCxnSpPr>
-          <p:cNvPr id="13" name="Straight Connector 12">
-            <a:extLst>
-              <a:ext uri="{FF2B5EF4-FFF2-40B4-BE49-F238E27FC236}">
-                <a16:creationId xmlns:a16="http://schemas.microsoft.com/office/drawing/2014/main" id="{0845FEF9-6712-393A-9522-615A9EE1AEAB}"/>
-              </a:ext>
-            </a:extLst>
-          </p:cNvPr>
-          <p:cNvCxnSpPr>
-            <a:cxnSpLocks/>
-          </p:cNvCxnSpPr>
-          <p:nvPr/>
-        </p:nvCxnSpPr>
-        <p:spPr>
-          <a:xfrm flipV="1">
-            <a:off x="6587823" y="5186520"/>
-            <a:ext cx="431579" cy="1403651"/>
-          </a:xfrm>
-          <a:prstGeom prst="line">
-            <a:avLst/>
-          </a:prstGeom>
-          <a:ln w="12700"/>
-        </p:spPr>
-        <p:style>
-          <a:lnRef idx="1">
-            <a:schemeClr val="dk1"/>
-          </a:lnRef>
-          <a:fillRef idx="0">
-            <a:schemeClr val="dk1"/>
-          </a:fillRef>
-          <a:effectRef idx="0">
-            <a:schemeClr val="dk1"/>
-          </a:effectRef>
-          <a:fontRef idx="minor">
-            <a:schemeClr val="tx1"/>
-          </a:fontRef>
-        </p:style>
-      </p:cxnSp>
-      <mc:AlternateContent xmlns:mc="http://schemas.openxmlformats.org/markup-compatibility/2006" xmlns:a14="http://schemas.microsoft.com/office/drawing/2010/main">
-        <mc:Choice Requires="a14">
-          <p:sp>
-            <p:nvSpPr>
-              <p:cNvPr id="18" name="TextBox 17">
-                <a:extLst>
-                  <a:ext uri="{FF2B5EF4-FFF2-40B4-BE49-F238E27FC236}">
-                    <a16:creationId xmlns:a16="http://schemas.microsoft.com/office/drawing/2014/main" id="{A95600A2-64C4-B68E-6C26-D048BDD572EC}"/>
-                  </a:ext>
-                </a:extLst>
-              </p:cNvPr>
-              <p:cNvSpPr txBox="1"/>
-              <p:nvPr/>
-            </p:nvSpPr>
-            <p:spPr>
-              <a:xfrm>
-                <a:off x="2105891" y="1671782"/>
-                <a:ext cx="2659190" cy="461665"/>
-              </a:xfrm>
-              <a:prstGeom prst="rect">
-                <a:avLst/>
-              </a:prstGeom>
-              <a:noFill/>
-            </p:spPr>
-            <p:txBody>
-              <a:bodyPr wrap="none" rtlCol="0">
-                <a:spAutoFit/>
-              </a:bodyPr>
-              <a:lstStyle/>
-              <a:p>
-                <a:r>
-                  <a:rPr lang="en-US" sz="2400" dirty="0"/>
-                  <a:t>Population: </a:t>
-                </a:r>
-                <a14:m>
-                  <m:oMath xmlns:m="http://schemas.openxmlformats.org/officeDocument/2006/math">
-                    <m:r>
-                      <a:rPr lang="en-US" sz="2400" b="0" i="1" smtClean="0">
-                        <a:latin typeface="Cambria Math" panose="02040503050406030204" pitchFamily="18" charset="0"/>
-                      </a:rPr>
-                      <m:t>𝑁</m:t>
-                    </m:r>
-                    <m:r>
-                      <a:rPr lang="en-US" sz="2400" b="0" i="1" smtClean="0">
-                        <a:latin typeface="Cambria Math" panose="02040503050406030204" pitchFamily="18" charset="0"/>
-                      </a:rPr>
-                      <m:t>=20</m:t>
-                    </m:r>
-                  </m:oMath>
-                </a14:m>
-                <a:endParaRPr lang="en-US" sz="2400" dirty="0"/>
-              </a:p>
-            </p:txBody>
-          </p:sp>
-        </mc:Choice>
-        <mc:Fallback xmlns="">
-          <p:sp>
-            <p:nvSpPr>
-              <p:cNvPr id="18" name="TextBox 17">
-                <a:extLst>
-                  <a:ext uri="{FF2B5EF4-FFF2-40B4-BE49-F238E27FC236}">
-                    <a16:creationId xmlns:a16="http://schemas.microsoft.com/office/drawing/2014/main" id="{A95600A2-64C4-B68E-6C26-D048BDD572EC}"/>
-                  </a:ext>
-                </a:extLst>
-              </p:cNvPr>
-              <p:cNvSpPr txBox="1">
-                <a:spLocks noRot="1" noChangeAspect="1" noMove="1" noResize="1" noEditPoints="1" noAdjustHandles="1" noChangeArrowheads="1" noChangeShapeType="1" noTextEdit="1"/>
-              </p:cNvSpPr>
-              <p:nvPr/>
-            </p:nvSpPr>
-            <p:spPr>
-              <a:xfrm>
-                <a:off x="2105891" y="1671782"/>
-                <a:ext cx="2659190" cy="461665"/>
-              </a:xfrm>
-              <a:prstGeom prst="rect">
-                <a:avLst/>
-              </a:prstGeom>
-              <a:blipFill>
-                <a:blip r:embed="rId4"/>
-                <a:stretch>
-                  <a:fillRect l="-3432" t="-10526" b="-28947"/>
-                </a:stretch>
-              </a:blipFill>
-            </p:spPr>
-            <p:txBody>
-              <a:bodyPr/>
-              <a:lstStyle/>
-              <a:p>
-                <a:r>
-                  <a:rPr lang="en-US">
-                    <a:noFill/>
-                  </a:rPr>
-                  <a:t> </a:t>
-                </a:r>
-              </a:p>
-            </p:txBody>
-          </p:sp>
-        </mc:Fallback>
-      </mc:AlternateContent>
-      <mc:AlternateContent xmlns:mc="http://schemas.openxmlformats.org/markup-compatibility/2006" xmlns:a14="http://schemas.microsoft.com/office/drawing/2010/main">
-        <mc:Choice Requires="a14">
-          <p:sp>
-            <p:nvSpPr>
-              <p:cNvPr id="19" name="TextBox 18">
-                <a:extLst>
-                  <a:ext uri="{FF2B5EF4-FFF2-40B4-BE49-F238E27FC236}">
-                    <a16:creationId xmlns:a16="http://schemas.microsoft.com/office/drawing/2014/main" id="{D3DD774A-2402-4286-7B26-81B6AFA6FFD0}"/>
-                  </a:ext>
-                </a:extLst>
-              </p:cNvPr>
-              <p:cNvSpPr txBox="1"/>
-              <p:nvPr/>
-            </p:nvSpPr>
-            <p:spPr>
-              <a:xfrm>
-                <a:off x="8298872" y="3225453"/>
-                <a:ext cx="1997085" cy="461665"/>
-              </a:xfrm>
-              <a:prstGeom prst="rect">
-                <a:avLst/>
-              </a:prstGeom>
-              <a:noFill/>
-            </p:spPr>
-            <p:txBody>
-              <a:bodyPr wrap="none" rtlCol="0">
-                <a:spAutoFit/>
-              </a:bodyPr>
-              <a:lstStyle/>
-              <a:p>
-                <a:r>
-                  <a:rPr lang="en-US" sz="2400" dirty="0"/>
-                  <a:t>Sample: </a:t>
-                </a:r>
-                <a14:m>
-                  <m:oMath xmlns:m="http://schemas.openxmlformats.org/officeDocument/2006/math">
-                    <m:r>
-                      <m:rPr>
-                        <m:sty m:val="p"/>
-                      </m:rPr>
-                      <a:rPr lang="en-US" sz="2400" b="0" i="0" smtClean="0">
-                        <a:latin typeface="Cambria Math" panose="02040503050406030204" pitchFamily="18" charset="0"/>
-                      </a:rPr>
-                      <m:t>n</m:t>
-                    </m:r>
-                    <m:r>
-                      <a:rPr lang="en-US" sz="2400" b="0" i="1" smtClean="0">
-                        <a:latin typeface="Cambria Math" panose="02040503050406030204" pitchFamily="18" charset="0"/>
-                      </a:rPr>
-                      <m:t>=5</m:t>
-                    </m:r>
-                  </m:oMath>
-                </a14:m>
-                <a:endParaRPr lang="en-US" sz="2400" dirty="0"/>
-              </a:p>
-            </p:txBody>
-          </p:sp>
-        </mc:Choice>
-        <mc:Fallback xmlns="">
-          <p:sp>
-            <p:nvSpPr>
-              <p:cNvPr id="19" name="TextBox 18">
-                <a:extLst>
-                  <a:ext uri="{FF2B5EF4-FFF2-40B4-BE49-F238E27FC236}">
-                    <a16:creationId xmlns:a16="http://schemas.microsoft.com/office/drawing/2014/main" id="{D3DD774A-2402-4286-7B26-81B6AFA6FFD0}"/>
-                  </a:ext>
-                </a:extLst>
-              </p:cNvPr>
-              <p:cNvSpPr txBox="1">
-                <a:spLocks noRot="1" noChangeAspect="1" noMove="1" noResize="1" noEditPoints="1" noAdjustHandles="1" noChangeArrowheads="1" noChangeShapeType="1" noTextEdit="1"/>
-              </p:cNvSpPr>
-              <p:nvPr/>
-            </p:nvSpPr>
-            <p:spPr>
-              <a:xfrm>
-                <a:off x="8298872" y="3225453"/>
-                <a:ext cx="1997085" cy="461665"/>
-              </a:xfrm>
-              <a:prstGeom prst="rect">
-                <a:avLst/>
-              </a:prstGeom>
-              <a:blipFill>
-                <a:blip r:embed="rId5"/>
-                <a:stretch>
-                  <a:fillRect l="-4573" t="-10526" r="-305" b="-28947"/>
-                </a:stretch>
-              </a:blipFill>
-            </p:spPr>
-            <p:txBody>
-              <a:bodyPr/>
-              <a:lstStyle/>
-              <a:p>
-                <a:r>
-                  <a:rPr lang="en-US">
-                    <a:noFill/>
-                  </a:rPr>
-                  <a:t> </a:t>
-                </a:r>
-              </a:p>
-            </p:txBody>
-          </p:sp>
-        </mc:Fallback>
-      </mc:AlternateContent>
-      <p:pic>
-        <p:nvPicPr>
-          <p:cNvPr id="4" name="Picture 3">
-            <a:extLst>
-              <a:ext uri="{FF2B5EF4-FFF2-40B4-BE49-F238E27FC236}">
-                <a16:creationId xmlns:a16="http://schemas.microsoft.com/office/drawing/2014/main" id="{092ECA5E-F265-CC01-3BD8-E4F3AD723AF6}"/>
-              </a:ext>
-            </a:extLst>
-          </p:cNvPr>
-          <p:cNvPicPr>
-            <a:picLocks noChangeAspect="1"/>
-          </p:cNvPicPr>
-          <p:nvPr/>
-        </p:nvPicPr>
-        <p:blipFill>
-          <a:blip r:embed="rId6"/>
-          <a:stretch>
-            <a:fillRect/>
-          </a:stretch>
-        </p:blipFill>
-        <p:spPr>
-          <a:xfrm>
-            <a:off x="0" y="2208705"/>
-            <a:ext cx="6560360" cy="4570937"/>
-          </a:xfrm>
-          <a:prstGeom prst="rect">
-            <a:avLst/>
-          </a:prstGeom>
-        </p:spPr>
-      </p:pic>
-      <p:pic>
-        <p:nvPicPr>
-          <p:cNvPr id="10" name="Picture 9">
-            <a:extLst>
-              <a:ext uri="{FF2B5EF4-FFF2-40B4-BE49-F238E27FC236}">
-                <a16:creationId xmlns:a16="http://schemas.microsoft.com/office/drawing/2014/main" id="{DE1CA0A1-E6E8-96B5-56BD-17F23AFB399F}"/>
-              </a:ext>
-            </a:extLst>
-          </p:cNvPr>
-          <p:cNvPicPr>
-            <a:picLocks noChangeAspect="1"/>
-          </p:cNvPicPr>
-          <p:nvPr/>
-        </p:nvPicPr>
-        <p:blipFill>
-          <a:blip r:embed="rId7"/>
-          <a:stretch>
-            <a:fillRect/>
-          </a:stretch>
-        </p:blipFill>
-        <p:spPr>
-          <a:xfrm>
-            <a:off x="6986574" y="3716410"/>
-            <a:ext cx="5205425" cy="1444905"/>
-          </a:xfrm>
-          <a:prstGeom prst="rect">
-            <a:avLst/>
-          </a:prstGeom>
-        </p:spPr>
-      </p:pic>
-      <mc:AlternateContent xmlns:mc="http://schemas.openxmlformats.org/markup-compatibility/2006" xmlns:a14="http://schemas.microsoft.com/office/drawing/2010/main">
-        <mc:Choice Requires="a14">
-          <p:sp>
-            <p:nvSpPr>
-              <p:cNvPr id="3" name="TextBox 2">
-                <a:extLst>
-                  <a:ext uri="{FF2B5EF4-FFF2-40B4-BE49-F238E27FC236}">
-                    <a16:creationId xmlns:a16="http://schemas.microsoft.com/office/drawing/2014/main" id="{6D3838FB-D204-9D3B-4AA1-DDCB2ED4578D}"/>
-                  </a:ext>
-                </a:extLst>
-              </p:cNvPr>
-              <p:cNvSpPr txBox="1"/>
-              <p:nvPr/>
-            </p:nvSpPr>
-            <p:spPr>
-              <a:xfrm>
-                <a:off x="7287491" y="923636"/>
-                <a:ext cx="4029629" cy="1477328"/>
-              </a:xfrm>
-              <a:prstGeom prst="rect">
-                <a:avLst/>
-              </a:prstGeom>
-              <a:noFill/>
-            </p:spPr>
-            <p:txBody>
-              <a:bodyPr wrap="none" rtlCol="0">
-                <a:spAutoFit/>
-              </a:bodyPr>
-              <a:lstStyle/>
-              <a:p>
-                <a:r>
-                  <a:rPr lang="en-US" dirty="0"/>
-                  <a:t>The population is a set of </a:t>
-                </a:r>
-                <a14:m>
-                  <m:oMath xmlns:m="http://schemas.openxmlformats.org/officeDocument/2006/math">
-                    <m:r>
-                      <a:rPr lang="en-US" b="0" i="1" smtClean="0">
-                        <a:latin typeface="Cambria Math" panose="02040503050406030204" pitchFamily="18" charset="0"/>
-                      </a:rPr>
-                      <m:t>𝑁</m:t>
-                    </m:r>
-                  </m:oMath>
-                </a14:m>
-                <a:r>
-                  <a:rPr lang="en-US" dirty="0"/>
-                  <a:t> observations</a:t>
-                </a:r>
-              </a:p>
-              <a:p>
-                <a:pPr/>
-                <a14:m>
-                  <m:oMathPara xmlns:m="http://schemas.openxmlformats.org/officeDocument/2006/math">
-                    <m:oMathParaPr>
-                      <m:jc m:val="centerGroup"/>
-                    </m:oMathParaPr>
-                    <m:oMath xmlns:m="http://schemas.openxmlformats.org/officeDocument/2006/math">
-                      <m:r>
-                        <a:rPr lang="en-US" b="0" i="1" smtClean="0">
-                          <a:latin typeface="Cambria Math" panose="02040503050406030204" pitchFamily="18" charset="0"/>
-                        </a:rPr>
-                        <m:t>{</m:t>
-                      </m:r>
-                      <m:sSub>
-                        <m:sSubPr>
-                          <m:ctrlPr>
-                            <a:rPr lang="en-US" b="0" i="1" smtClean="0">
-                              <a:latin typeface="Cambria Math" panose="02040503050406030204" pitchFamily="18" charset="0"/>
-                            </a:rPr>
-                          </m:ctrlPr>
-                        </m:sSubPr>
-                        <m:e>
-                          <m:r>
-                            <a:rPr lang="en-US" b="0" i="1" smtClean="0">
-                              <a:latin typeface="Cambria Math" panose="02040503050406030204" pitchFamily="18" charset="0"/>
-                            </a:rPr>
-                            <m:t>𝑥</m:t>
-                          </m:r>
-                        </m:e>
-                        <m:sub>
-                          <m:r>
-                            <a:rPr lang="en-US" b="0" i="1" smtClean="0">
-                              <a:latin typeface="Cambria Math" panose="02040503050406030204" pitchFamily="18" charset="0"/>
-                            </a:rPr>
-                            <m:t>1</m:t>
-                          </m:r>
-                        </m:sub>
-                      </m:sSub>
-                      <m:r>
-                        <a:rPr lang="en-US" b="0" i="1" smtClean="0">
-                          <a:latin typeface="Cambria Math" panose="02040503050406030204" pitchFamily="18" charset="0"/>
-                        </a:rPr>
-                        <m:t>, </m:t>
-                      </m:r>
-                      <m:sSub>
-                        <m:sSubPr>
-                          <m:ctrlPr>
-                            <a:rPr lang="en-US" b="0" i="1" smtClean="0">
-                              <a:latin typeface="Cambria Math" panose="02040503050406030204" pitchFamily="18" charset="0"/>
-                            </a:rPr>
-                          </m:ctrlPr>
-                        </m:sSubPr>
-                        <m:e>
-                          <m:r>
-                            <a:rPr lang="en-US" b="0" i="1" smtClean="0">
-                              <a:latin typeface="Cambria Math" panose="02040503050406030204" pitchFamily="18" charset="0"/>
-                            </a:rPr>
-                            <m:t>𝑥</m:t>
-                          </m:r>
-                        </m:e>
-                        <m:sub>
-                          <m:r>
-                            <a:rPr lang="en-US" b="0" i="1" smtClean="0">
-                              <a:latin typeface="Cambria Math" panose="02040503050406030204" pitchFamily="18" charset="0"/>
-                            </a:rPr>
-                            <m:t>2</m:t>
-                          </m:r>
-                        </m:sub>
-                      </m:sSub>
-                      <m:r>
-                        <a:rPr lang="en-US" b="0" i="1" smtClean="0">
-                          <a:latin typeface="Cambria Math" panose="02040503050406030204" pitchFamily="18" charset="0"/>
-                        </a:rPr>
-                        <m:t>,</m:t>
-                      </m:r>
-                      <m:sSub>
-                        <m:sSubPr>
-                          <m:ctrlPr>
-                            <a:rPr lang="en-US" b="0" i="1" smtClean="0">
-                              <a:latin typeface="Cambria Math" panose="02040503050406030204" pitchFamily="18" charset="0"/>
-                            </a:rPr>
-                          </m:ctrlPr>
-                        </m:sSubPr>
-                        <m:e>
-                          <m:r>
-                            <a:rPr lang="en-US" b="0" i="1" smtClean="0">
-                              <a:latin typeface="Cambria Math" panose="02040503050406030204" pitchFamily="18" charset="0"/>
-                            </a:rPr>
-                            <m:t>𝑥</m:t>
-                          </m:r>
-                        </m:e>
-                        <m:sub>
-                          <m:r>
-                            <a:rPr lang="en-US" b="0" i="1" smtClean="0">
-                              <a:latin typeface="Cambria Math" panose="02040503050406030204" pitchFamily="18" charset="0"/>
-                            </a:rPr>
-                            <m:t>3</m:t>
-                          </m:r>
-                        </m:sub>
-                      </m:sSub>
-                      <m:r>
-                        <a:rPr lang="en-US" b="0" i="1" smtClean="0">
-                          <a:latin typeface="Cambria Math" panose="02040503050406030204" pitchFamily="18" charset="0"/>
-                        </a:rPr>
-                        <m:t>,…</m:t>
-                      </m:r>
-                      <m:sSub>
-                        <m:sSubPr>
-                          <m:ctrlPr>
-                            <a:rPr lang="en-US" b="0" i="1" smtClean="0">
-                              <a:latin typeface="Cambria Math" panose="02040503050406030204" pitchFamily="18" charset="0"/>
-                            </a:rPr>
-                          </m:ctrlPr>
-                        </m:sSubPr>
-                        <m:e>
-                          <m:r>
-                            <a:rPr lang="en-US" b="0" i="1" smtClean="0">
-                              <a:latin typeface="Cambria Math" panose="02040503050406030204" pitchFamily="18" charset="0"/>
-                            </a:rPr>
-                            <m:t>𝑥</m:t>
-                          </m:r>
-                        </m:e>
-                        <m:sub>
-                          <m:r>
-                            <a:rPr lang="en-US" b="0" i="1" smtClean="0">
-                              <a:latin typeface="Cambria Math" panose="02040503050406030204" pitchFamily="18" charset="0"/>
-                            </a:rPr>
-                            <m:t>𝑁</m:t>
-                          </m:r>
-                        </m:sub>
-                      </m:sSub>
-                      <m:r>
-                        <a:rPr lang="en-US" b="0" i="1" smtClean="0">
-                          <a:latin typeface="Cambria Math" panose="02040503050406030204" pitchFamily="18" charset="0"/>
-                        </a:rPr>
-                        <m:t>}</m:t>
-                      </m:r>
-                    </m:oMath>
-                  </m:oMathPara>
-                </a14:m>
-                <a:endParaRPr lang="en-US" dirty="0"/>
-              </a:p>
-              <a:p>
-                <a:endParaRPr lang="en-US" dirty="0"/>
-              </a:p>
-              <a:p>
-                <a:r>
-                  <a:rPr lang="en-US" dirty="0"/>
-                  <a:t>The sample is a set of </a:t>
-                </a:r>
-                <a14:m>
-                  <m:oMath xmlns:m="http://schemas.openxmlformats.org/officeDocument/2006/math">
-                    <m:r>
-                      <a:rPr lang="en-US" b="0" i="1" smtClean="0">
-                        <a:latin typeface="Cambria Math" panose="02040503050406030204" pitchFamily="18" charset="0"/>
-                      </a:rPr>
-                      <m:t>𝑛</m:t>
-                    </m:r>
-                  </m:oMath>
-                </a14:m>
-                <a:r>
-                  <a:rPr lang="en-US" dirty="0"/>
-                  <a:t> observations</a:t>
-                </a:r>
-              </a:p>
-              <a:p>
-                <a:pPr/>
-                <a14:m>
-                  <m:oMathPara xmlns:m="http://schemas.openxmlformats.org/officeDocument/2006/math">
-                    <m:oMathParaPr>
-                      <m:jc m:val="centerGroup"/>
-                    </m:oMathParaPr>
-                    <m:oMath xmlns:m="http://schemas.openxmlformats.org/officeDocument/2006/math">
-                      <m:d>
-                        <m:dPr>
-                          <m:begChr m:val="{"/>
-                          <m:endChr m:val="}"/>
-                          <m:ctrlPr>
-                            <a:rPr lang="en-US" b="0" i="1" smtClean="0">
-                              <a:latin typeface="Cambria Math" panose="02040503050406030204" pitchFamily="18" charset="0"/>
-                            </a:rPr>
-                          </m:ctrlPr>
-                        </m:dPr>
-                        <m:e>
-                          <m:sSub>
-                            <m:sSubPr>
-                              <m:ctrlPr>
-                                <a:rPr lang="en-US" b="0" i="1" smtClean="0">
-                                  <a:latin typeface="Cambria Math" panose="02040503050406030204" pitchFamily="18" charset="0"/>
-                                </a:rPr>
-                              </m:ctrlPr>
-                            </m:sSubPr>
-                            <m:e>
-                              <m:r>
-                                <a:rPr lang="en-US" b="0" i="1" smtClean="0">
-                                  <a:latin typeface="Cambria Math" panose="02040503050406030204" pitchFamily="18" charset="0"/>
-                                </a:rPr>
-                                <m:t>𝑥</m:t>
-                              </m:r>
-                            </m:e>
-                            <m:sub>
-                              <m:r>
-                                <a:rPr lang="en-US" b="0" i="1" smtClean="0">
-                                  <a:latin typeface="Cambria Math" panose="02040503050406030204" pitchFamily="18" charset="0"/>
-                                </a:rPr>
-                                <m:t>1</m:t>
-                              </m:r>
-                            </m:sub>
-                          </m:sSub>
-                          <m:r>
-                            <a:rPr lang="en-US" b="0" i="1" smtClean="0">
-                              <a:latin typeface="Cambria Math" panose="02040503050406030204" pitchFamily="18" charset="0"/>
-                            </a:rPr>
-                            <m:t>,</m:t>
-                          </m:r>
-                          <m:sSub>
-                            <m:sSubPr>
-                              <m:ctrlPr>
-                                <a:rPr lang="en-US" b="0" i="1" smtClean="0">
-                                  <a:latin typeface="Cambria Math" panose="02040503050406030204" pitchFamily="18" charset="0"/>
-                                </a:rPr>
-                              </m:ctrlPr>
-                            </m:sSubPr>
-                            <m:e>
-                              <m:r>
-                                <a:rPr lang="en-US" b="0" i="1" smtClean="0">
-                                  <a:latin typeface="Cambria Math" panose="02040503050406030204" pitchFamily="18" charset="0"/>
-                                </a:rPr>
-                                <m:t>𝑥</m:t>
-                              </m:r>
-                            </m:e>
-                            <m:sub>
-                              <m:r>
-                                <a:rPr lang="en-US" b="0" i="1" smtClean="0">
-                                  <a:latin typeface="Cambria Math" panose="02040503050406030204" pitchFamily="18" charset="0"/>
-                                </a:rPr>
-                                <m:t>7</m:t>
-                              </m:r>
-                            </m:sub>
-                          </m:sSub>
-                          <m:r>
-                            <a:rPr lang="en-US" b="0" i="1" smtClean="0">
-                              <a:latin typeface="Cambria Math" panose="02040503050406030204" pitchFamily="18" charset="0"/>
-                            </a:rPr>
-                            <m:t>,</m:t>
-                          </m:r>
-                          <m:sSub>
-                            <m:sSubPr>
-                              <m:ctrlPr>
-                                <a:rPr lang="en-US" b="0" i="1" smtClean="0">
-                                  <a:latin typeface="Cambria Math" panose="02040503050406030204" pitchFamily="18" charset="0"/>
-                                </a:rPr>
-                              </m:ctrlPr>
-                            </m:sSubPr>
-                            <m:e>
-                              <m:r>
-                                <a:rPr lang="en-US" b="0" i="1" smtClean="0">
-                                  <a:latin typeface="Cambria Math" panose="02040503050406030204" pitchFamily="18" charset="0"/>
-                                </a:rPr>
-                                <m:t>𝑥</m:t>
-                              </m:r>
-                            </m:e>
-                            <m:sub>
-                              <m:r>
-                                <a:rPr lang="en-US" b="0" i="1" smtClean="0">
-                                  <a:latin typeface="Cambria Math" panose="02040503050406030204" pitchFamily="18" charset="0"/>
-                                </a:rPr>
-                                <m:t>8</m:t>
-                              </m:r>
-                            </m:sub>
-                          </m:sSub>
-                          <m:r>
-                            <a:rPr lang="en-US" b="0" i="1" smtClean="0">
-                              <a:latin typeface="Cambria Math" panose="02040503050406030204" pitchFamily="18" charset="0"/>
-                            </a:rPr>
-                            <m:t>,…</m:t>
-                          </m:r>
-                          <m:sSub>
-                            <m:sSubPr>
-                              <m:ctrlPr>
-                                <a:rPr lang="en-US" b="0" i="1" smtClean="0">
-                                  <a:latin typeface="Cambria Math" panose="02040503050406030204" pitchFamily="18" charset="0"/>
-                                </a:rPr>
-                              </m:ctrlPr>
-                            </m:sSubPr>
-                            <m:e>
-                              <m:r>
-                                <a:rPr lang="en-US" b="0" i="1" smtClean="0">
-                                  <a:latin typeface="Cambria Math" panose="02040503050406030204" pitchFamily="18" charset="0"/>
-                                </a:rPr>
-                                <m:t>𝑥</m:t>
-                              </m:r>
-                            </m:e>
-                            <m:sub>
-                              <m:r>
-                                <a:rPr lang="en-US" b="0" i="1" smtClean="0">
-                                  <a:latin typeface="Cambria Math" panose="02040503050406030204" pitchFamily="18" charset="0"/>
-                                </a:rPr>
-                                <m:t>𝑛</m:t>
-                              </m:r>
-                            </m:sub>
-                          </m:sSub>
-                        </m:e>
-                      </m:d>
-                    </m:oMath>
-                  </m:oMathPara>
-                </a14:m>
-                <a:endParaRPr lang="en-US" dirty="0"/>
-              </a:p>
-            </p:txBody>
-          </p:sp>
-        </mc:Choice>
-        <mc:Fallback xmlns="">
-          <p:sp>
-            <p:nvSpPr>
-              <p:cNvPr id="3" name="TextBox 2">
-                <a:extLst>
-                  <a:ext uri="{FF2B5EF4-FFF2-40B4-BE49-F238E27FC236}">
-                    <a16:creationId xmlns:a16="http://schemas.microsoft.com/office/drawing/2014/main" id="{6D3838FB-D204-9D3B-4AA1-DDCB2ED4578D}"/>
-                  </a:ext>
-                </a:extLst>
-              </p:cNvPr>
-              <p:cNvSpPr txBox="1">
-                <a:spLocks noRot="1" noChangeAspect="1" noMove="1" noResize="1" noEditPoints="1" noAdjustHandles="1" noChangeArrowheads="1" noChangeShapeType="1" noTextEdit="1"/>
-              </p:cNvSpPr>
-              <p:nvPr/>
-            </p:nvSpPr>
-            <p:spPr>
-              <a:xfrm>
-                <a:off x="7287491" y="923636"/>
-                <a:ext cx="4029629" cy="1477328"/>
-              </a:xfrm>
-              <a:prstGeom prst="rect">
-                <a:avLst/>
-              </a:prstGeom>
-              <a:blipFill>
-                <a:blip r:embed="rId8"/>
-                <a:stretch>
-                  <a:fillRect l="-1210" t="-2479" r="-756"/>
-                </a:stretch>
-              </a:blipFill>
-            </p:spPr>
-            <p:txBody>
-              <a:bodyPr/>
-              <a:lstStyle/>
-              <a:p>
-                <a:r>
-                  <a:rPr lang="en-US">
-                    <a:noFill/>
-                  </a:rPr>
-                  <a:t> </a:t>
-                </a:r>
-              </a:p>
-            </p:txBody>
-          </p:sp>
-        </mc:Fallback>
-      </mc:AlternateContent>
-    </p:spTree>
-    <p:extLst>
-      <p:ext uri="{BB962C8B-B14F-4D97-AF65-F5344CB8AC3E}">
-        <p14:creationId xmlns:p14="http://schemas.microsoft.com/office/powerpoint/2010/main" val="1454542169"/>
-      </p:ext>
-    </p:extLst>
-  </p:cSld>
-  <p:clrMapOvr>
-    <a:masterClrMapping/>
-  </p:clrMapOvr>
-</p:sld>
-</file>
-
-<file path=ppt/slides/slide16.xml><?xml version="1.0" encoding="utf-8"?>
-<p:sld xmlns:a="http://schemas.openxmlformats.org/drawingml/2006/main" xmlns:r="http://schemas.openxmlformats.org/officeDocument/2006/relationships" xmlns:p="http://schemas.openxmlformats.org/presentationml/2006/main">
-  <p:cSld>
-    <p:spTree>
-      <p:nvGrpSpPr>
-        <p:cNvPr id="1" name=""/>
-        <p:cNvGrpSpPr/>
-        <p:nvPr/>
-      </p:nvGrpSpPr>
-      <p:grpSpPr>
-        <a:xfrm>
-          <a:off x="0" y="0"/>
-          <a:ext cx="0" cy="0"/>
-          <a:chOff x="0" y="0"/>
-          <a:chExt cx="0" cy="0"/>
-        </a:xfrm>
-      </p:grpSpPr>
-      <p:sp>
-        <p:nvSpPr>
-          <p:cNvPr id="2" name="Title 1">
-            <a:extLst>
-              <a:ext uri="{FF2B5EF4-FFF2-40B4-BE49-F238E27FC236}">
-                <a16:creationId xmlns:a16="http://schemas.microsoft.com/office/drawing/2014/main" id="{10999980-3A28-4123-6B5F-A6639B54C7DB}"/>
-              </a:ext>
-            </a:extLst>
-          </p:cNvPr>
-          <p:cNvSpPr>
-            <a:spLocks noGrp="1"/>
-          </p:cNvSpPr>
-          <p:nvPr>
-            <p:ph type="title"/>
-          </p:nvPr>
-        </p:nvSpPr>
-        <p:spPr>
-          <a:xfrm>
-            <a:off x="123826" y="0"/>
-            <a:ext cx="10515600" cy="1325563"/>
-          </a:xfrm>
-        </p:spPr>
-        <p:txBody>
-          <a:bodyPr/>
-          <a:lstStyle/>
-          <a:p>
-            <a:r>
-              <a:rPr lang="en-US" dirty="0"/>
-              <a:t>Example 2</a:t>
-            </a:r>
-          </a:p>
-        </p:txBody>
-      </p:sp>
-      <p:pic>
-        <p:nvPicPr>
-          <p:cNvPr id="4" name="Picture 3">
-            <a:extLst>
-              <a:ext uri="{FF2B5EF4-FFF2-40B4-BE49-F238E27FC236}">
-                <a16:creationId xmlns:a16="http://schemas.microsoft.com/office/drawing/2014/main" id="{B6184E2F-3F7B-3505-BF47-FE3AF66852C1}"/>
-              </a:ext>
-            </a:extLst>
-          </p:cNvPr>
-          <p:cNvPicPr>
-            <a:picLocks noChangeAspect="1"/>
-          </p:cNvPicPr>
-          <p:nvPr/>
-        </p:nvPicPr>
-        <p:blipFill>
-          <a:blip r:embed="rId2"/>
-          <a:stretch>
-            <a:fillRect/>
-          </a:stretch>
-        </p:blipFill>
-        <p:spPr>
-          <a:xfrm>
-            <a:off x="5772150" y="361950"/>
-            <a:ext cx="6134100" cy="6134100"/>
-          </a:xfrm>
-          <a:prstGeom prst="rect">
-            <a:avLst/>
-          </a:prstGeom>
-        </p:spPr>
-      </p:pic>
-      <mc:AlternateContent xmlns:mc="http://schemas.openxmlformats.org/markup-compatibility/2006" xmlns:a14="http://schemas.microsoft.com/office/drawing/2010/main">
-        <mc:Choice Requires="a14">
-          <p:sp>
-            <p:nvSpPr>
-              <p:cNvPr id="5" name="TextBox 4">
-                <a:extLst>
-                  <a:ext uri="{FF2B5EF4-FFF2-40B4-BE49-F238E27FC236}">
-                    <a16:creationId xmlns:a16="http://schemas.microsoft.com/office/drawing/2014/main" id="{FEAE6825-F2D0-C0F3-DB57-99EC86F375A9}"/>
-                  </a:ext>
-                </a:extLst>
-              </p:cNvPr>
-              <p:cNvSpPr txBox="1"/>
-              <p:nvPr/>
-            </p:nvSpPr>
-            <p:spPr>
-              <a:xfrm>
-                <a:off x="123826" y="1325563"/>
-                <a:ext cx="5170341" cy="4057521"/>
-              </a:xfrm>
-              <a:prstGeom prst="rect">
-                <a:avLst/>
-              </a:prstGeom>
-              <a:noFill/>
-            </p:spPr>
-            <p:txBody>
-              <a:bodyPr wrap="square">
-                <a:spAutoFit/>
-              </a:bodyPr>
-              <a:lstStyle/>
-              <a:p>
-                <a:pPr marR="0" lvl="0" algn="l" defTabSz="914400" rtl="0" eaLnBrk="1" fontAlgn="auto" latinLnBrk="0" hangingPunct="1">
-                  <a:lnSpc>
-                    <a:spcPct val="90000"/>
-                  </a:lnSpc>
-                  <a:spcBef>
-                    <a:spcPts val="1000"/>
-                  </a:spcBef>
-                  <a:spcAft>
-                    <a:spcPts val="0"/>
-                  </a:spcAft>
-                  <a:buClrTx/>
-                  <a:buSzTx/>
-                  <a:tabLst/>
-                  <a:defRPr/>
-                </a:pPr>
-                <a:r>
-                  <a:rPr lang="en-US" sz="2000" dirty="0">
-                    <a:solidFill>
-                      <a:prstClr val="black"/>
-                    </a:solidFill>
-                    <a:latin typeface="Calibri" panose="020F0502020204030204"/>
-                  </a:rPr>
-                  <a:t>Consider a rectangular-shaped piece of land that has been divided into 100 smaller rectangular units, each containing something of interest (e.g., trees, burrows, archaeological artifacts). </a:t>
-                </a:r>
-              </a:p>
-              <a:p>
-                <a:pPr marR="0" lvl="0" algn="l" defTabSz="914400" rtl="0" eaLnBrk="1" fontAlgn="auto" latinLnBrk="0" hangingPunct="1">
-                  <a:lnSpc>
-                    <a:spcPct val="90000"/>
-                  </a:lnSpc>
-                  <a:spcBef>
-                    <a:spcPts val="1000"/>
-                  </a:spcBef>
-                  <a:spcAft>
-                    <a:spcPts val="0"/>
-                  </a:spcAft>
-                  <a:buClrTx/>
-                  <a:buSzTx/>
-                  <a:tabLst/>
-                  <a:defRPr/>
-                </a:pPr>
-                <a:endParaRPr lang="en-US" sz="2000" dirty="0">
-                  <a:solidFill>
-                    <a:prstClr val="black"/>
-                  </a:solidFill>
-                  <a:latin typeface="Calibri" panose="020F0502020204030204"/>
-                </a:endParaRPr>
-              </a:p>
-              <a:p>
-                <a:pPr marR="0" lvl="0" algn="l" defTabSz="914400" rtl="0" eaLnBrk="1" fontAlgn="auto" latinLnBrk="0" hangingPunct="1">
-                  <a:lnSpc>
-                    <a:spcPct val="90000"/>
-                  </a:lnSpc>
-                  <a:spcBef>
-                    <a:spcPts val="1000"/>
-                  </a:spcBef>
-                  <a:spcAft>
-                    <a:spcPts val="0"/>
-                  </a:spcAft>
-                  <a:buClrTx/>
-                  <a:buSzTx/>
-                  <a:tabLst/>
-                  <a:defRPr/>
-                </a:pPr>
-                <a:r>
-                  <a:rPr lang="en-US" sz="2000" dirty="0">
-                    <a:solidFill>
-                      <a:prstClr val="black"/>
-                    </a:solidFill>
-                    <a:latin typeface="Calibri" panose="020F0502020204030204"/>
-                  </a:rPr>
-                  <a:t>A subset of 10 of those smaller units was selected and the number of objects in each of these units was counted.</a:t>
-                </a:r>
-              </a:p>
-              <a:p>
-                <a:pPr marR="0" lvl="0" algn="l" defTabSz="914400" rtl="0" eaLnBrk="1" fontAlgn="auto" latinLnBrk="0" hangingPunct="1">
-                  <a:lnSpc>
-                    <a:spcPct val="90000"/>
-                  </a:lnSpc>
-                  <a:spcBef>
-                    <a:spcPts val="1000"/>
-                  </a:spcBef>
-                  <a:spcAft>
-                    <a:spcPts val="0"/>
-                  </a:spcAft>
-                  <a:buClrTx/>
-                  <a:buSzTx/>
-                  <a:tabLst/>
-                  <a:defRPr/>
-                </a:pPr>
-                <a:endParaRPr lang="en-US" sz="2000" dirty="0">
-                  <a:solidFill>
-                    <a:prstClr val="black"/>
-                  </a:solidFill>
-                  <a:latin typeface="Calibri" panose="020F0502020204030204"/>
-                </a:endParaRPr>
-              </a:p>
-              <a:p>
-                <a:pPr marR="0" lvl="0" algn="l" defTabSz="914400" rtl="0" eaLnBrk="1" fontAlgn="auto" latinLnBrk="0" hangingPunct="1">
-                  <a:lnSpc>
-                    <a:spcPct val="90000"/>
-                  </a:lnSpc>
-                  <a:spcBef>
-                    <a:spcPts val="1000"/>
-                  </a:spcBef>
-                  <a:spcAft>
-                    <a:spcPts val="0"/>
-                  </a:spcAft>
-                  <a:buClrTx/>
-                  <a:buSzTx/>
-                  <a:tabLst/>
-                  <a:defRPr/>
-                </a:pPr>
-                <a:r>
-                  <a:rPr lang="en-US" sz="2000" dirty="0">
-                    <a:solidFill>
-                      <a:prstClr val="black"/>
-                    </a:solidFill>
-                    <a:latin typeface="Calibri" panose="020F0502020204030204"/>
-                  </a:rPr>
-                  <a:t>Population Size: </a:t>
-                </a:r>
-                <a14:m>
-                  <m:oMath xmlns:m="http://schemas.openxmlformats.org/officeDocument/2006/math">
-                    <m:r>
-                      <a:rPr lang="en-US" sz="2000" b="0" i="1" smtClean="0">
-                        <a:solidFill>
-                          <a:prstClr val="black"/>
-                        </a:solidFill>
-                        <a:latin typeface="Cambria Math" panose="02040503050406030204" pitchFamily="18" charset="0"/>
-                      </a:rPr>
-                      <m:t>𝑁</m:t>
-                    </m:r>
-                    <m:r>
-                      <a:rPr lang="en-US" sz="2000" b="0" i="1" smtClean="0">
-                        <a:solidFill>
-                          <a:prstClr val="black"/>
-                        </a:solidFill>
-                        <a:latin typeface="Cambria Math" panose="02040503050406030204" pitchFamily="18" charset="0"/>
-                      </a:rPr>
-                      <m:t>=100</m:t>
-                    </m:r>
-                  </m:oMath>
-                </a14:m>
-                <a:endParaRPr lang="it-IT" sz="2000" dirty="0">
-                  <a:solidFill>
-                    <a:prstClr val="black"/>
-                  </a:solidFill>
-                  <a:latin typeface="Calibri" panose="020F0502020204030204"/>
-                </a:endParaRPr>
-              </a:p>
-              <a:p>
-                <a:pPr marR="0" lvl="0" algn="l" defTabSz="914400" rtl="0" eaLnBrk="1" fontAlgn="auto" latinLnBrk="0" hangingPunct="1">
-                  <a:lnSpc>
-                    <a:spcPct val="90000"/>
-                  </a:lnSpc>
-                  <a:spcBef>
-                    <a:spcPts val="1000"/>
-                  </a:spcBef>
-                  <a:spcAft>
-                    <a:spcPts val="0"/>
-                  </a:spcAft>
-                  <a:buClrTx/>
-                  <a:buSzTx/>
-                  <a:tabLst/>
-                  <a:defRPr/>
-                </a:pPr>
-                <a:r>
-                  <a:rPr lang="it-IT" sz="2000" dirty="0">
-                    <a:solidFill>
-                      <a:prstClr val="black"/>
-                    </a:solidFill>
-                    <a:latin typeface="Calibri" panose="020F0502020204030204"/>
-                  </a:rPr>
-                  <a:t>Sample Size: </a:t>
-                </a:r>
-                <a14:m>
-                  <m:oMath xmlns:m="http://schemas.openxmlformats.org/officeDocument/2006/math">
-                    <m:r>
-                      <a:rPr lang="en-US" sz="2000" b="0" i="1" smtClean="0">
-                        <a:solidFill>
-                          <a:prstClr val="black"/>
-                        </a:solidFill>
-                        <a:latin typeface="Cambria Math" panose="02040503050406030204" pitchFamily="18" charset="0"/>
-                      </a:rPr>
-                      <m:t>𝑛</m:t>
-                    </m:r>
-                    <m:r>
-                      <a:rPr lang="en-US" sz="2000" b="0" i="1" smtClean="0">
-                        <a:solidFill>
-                          <a:prstClr val="black"/>
-                        </a:solidFill>
-                        <a:latin typeface="Cambria Math" panose="02040503050406030204" pitchFamily="18" charset="0"/>
-                      </a:rPr>
-                      <m:t>=10</m:t>
-                    </m:r>
-                  </m:oMath>
-                </a14:m>
-                <a:endParaRPr lang="it-IT" sz="2000" dirty="0">
-                  <a:solidFill>
-                    <a:prstClr val="black"/>
-                  </a:solidFill>
-                  <a:latin typeface="Calibri" panose="020F0502020204030204"/>
-                </a:endParaRPr>
-              </a:p>
-            </p:txBody>
-          </p:sp>
-        </mc:Choice>
-        <mc:Fallback xmlns="">
-          <p:sp>
-            <p:nvSpPr>
-              <p:cNvPr id="5" name="TextBox 4">
-                <a:extLst>
-                  <a:ext uri="{FF2B5EF4-FFF2-40B4-BE49-F238E27FC236}">
-                    <a16:creationId xmlns:a16="http://schemas.microsoft.com/office/drawing/2014/main" id="{FEAE6825-F2D0-C0F3-DB57-99EC86F375A9}"/>
-                  </a:ext>
-                </a:extLst>
-              </p:cNvPr>
-              <p:cNvSpPr txBox="1">
-                <a:spLocks noRot="1" noChangeAspect="1" noMove="1" noResize="1" noEditPoints="1" noAdjustHandles="1" noChangeArrowheads="1" noChangeShapeType="1" noTextEdit="1"/>
-              </p:cNvSpPr>
-              <p:nvPr/>
-            </p:nvSpPr>
-            <p:spPr>
-              <a:xfrm>
-                <a:off x="123826" y="1325563"/>
-                <a:ext cx="5170341" cy="4057521"/>
-              </a:xfrm>
-              <a:prstGeom prst="rect">
-                <a:avLst/>
-              </a:prstGeom>
-              <a:blipFill>
-                <a:blip r:embed="rId3"/>
-                <a:stretch>
-                  <a:fillRect l="-1179" t="-1502" r="-943" b="-1652"/>
-                </a:stretch>
-              </a:blipFill>
-            </p:spPr>
-            <p:txBody>
-              <a:bodyPr/>
-              <a:lstStyle/>
-              <a:p>
-                <a:r>
-                  <a:rPr lang="en-US">
-                    <a:noFill/>
-                  </a:rPr>
-                  <a:t> </a:t>
-                </a:r>
-              </a:p>
-            </p:txBody>
-          </p:sp>
-        </mc:Fallback>
-      </mc:AlternateContent>
-    </p:spTree>
-    <p:extLst>
-      <p:ext uri="{BB962C8B-B14F-4D97-AF65-F5344CB8AC3E}">
-        <p14:creationId xmlns:p14="http://schemas.microsoft.com/office/powerpoint/2010/main" val="3142203630"/>
-      </p:ext>
-    </p:extLst>
-  </p:cSld>
-  <p:clrMapOvr>
-    <a:masterClrMapping/>
-  </p:clrMapOvr>
-</p:sld>
-</file>
-
-<file path=ppt/slides/slide17.xml><?xml version="1.0" encoding="utf-8"?>
-<p:sld xmlns:a="http://schemas.openxmlformats.org/drawingml/2006/main" xmlns:r="http://schemas.openxmlformats.org/officeDocument/2006/relationships" xmlns:p="http://schemas.openxmlformats.org/presentationml/2006/main">
-  <p:cSld>
-    <p:spTree>
-      <p:nvGrpSpPr>
-        <p:cNvPr id="1" name=""/>
-        <p:cNvGrpSpPr/>
-        <p:nvPr/>
-      </p:nvGrpSpPr>
-      <p:grpSpPr>
-        <a:xfrm>
-          <a:off x="0" y="0"/>
-          <a:ext cx="0" cy="0"/>
-          <a:chOff x="0" y="0"/>
-          <a:chExt cx="0" cy="0"/>
-        </a:xfrm>
-      </p:grpSpPr>
-      <p:sp>
-        <p:nvSpPr>
-          <p:cNvPr id="2" name="Title 1">
-            <a:extLst>
-              <a:ext uri="{FF2B5EF4-FFF2-40B4-BE49-F238E27FC236}">
-                <a16:creationId xmlns:a16="http://schemas.microsoft.com/office/drawing/2014/main" id="{A53202C6-B426-FF39-8BA0-28DB8640F72F}"/>
-              </a:ext>
-            </a:extLst>
-          </p:cNvPr>
-          <p:cNvSpPr>
-            <a:spLocks noGrp="1"/>
-          </p:cNvSpPr>
-          <p:nvPr>
-            <p:ph type="title"/>
-          </p:nvPr>
-        </p:nvSpPr>
-        <p:spPr/>
-        <p:txBody>
-          <a:bodyPr/>
-          <a:lstStyle/>
-          <a:p>
-            <a:r>
-              <a:rPr lang="en-US" dirty="0"/>
-              <a:t>Why is statistics so valuable?</a:t>
-            </a:r>
-          </a:p>
-        </p:txBody>
-      </p:sp>
-      <p:sp>
-        <p:nvSpPr>
-          <p:cNvPr id="3" name="Content Placeholder 2">
-            <a:extLst>
-              <a:ext uri="{FF2B5EF4-FFF2-40B4-BE49-F238E27FC236}">
-                <a16:creationId xmlns:a16="http://schemas.microsoft.com/office/drawing/2014/main" id="{CE8548C3-42AC-8F5F-B1D1-3FB65154EACF}"/>
-              </a:ext>
-            </a:extLst>
-          </p:cNvPr>
-          <p:cNvSpPr>
-            <a:spLocks noGrp="1"/>
-          </p:cNvSpPr>
-          <p:nvPr>
-            <p:ph idx="1"/>
-          </p:nvPr>
-        </p:nvSpPr>
-        <p:spPr/>
-        <p:txBody>
-          <a:bodyPr/>
-          <a:lstStyle/>
-          <a:p>
-            <a:endParaRPr lang="en-US" dirty="0"/>
-          </a:p>
-          <a:p>
-            <a:r>
-              <a:rPr lang="en-US" dirty="0"/>
-              <a:t>Most of the time, we can’t measure everyone or every unit in the population and therefore must limit our measurements to a sample.</a:t>
-            </a:r>
-          </a:p>
-          <a:p>
-            <a:pPr marL="0" indent="0">
-              <a:buNone/>
-            </a:pPr>
-            <a:endParaRPr lang="en-US" dirty="0"/>
-          </a:p>
-          <a:p>
-            <a:r>
-              <a:rPr lang="en-US" dirty="0"/>
-              <a:t>Statistics primarily deals with </a:t>
-            </a:r>
-            <a:r>
-              <a:rPr lang="en-US" b="1" dirty="0"/>
-              <a:t>estimation </a:t>
-            </a:r>
-            <a:r>
-              <a:rPr lang="en-US" dirty="0"/>
-              <a:t>– the process of inferring an unknown quantity about a population using set of sample data</a:t>
-            </a:r>
-          </a:p>
-          <a:p>
-            <a:pPr marL="0" indent="0">
-              <a:buNone/>
-            </a:pPr>
-            <a:endParaRPr lang="en-US" dirty="0"/>
-          </a:p>
-          <a:p>
-            <a:r>
-              <a:rPr lang="en-US" dirty="0"/>
-              <a:t>The tools for estimation allow us to approximate almost everything about populations </a:t>
-            </a:r>
-            <a:r>
-              <a:rPr lang="en-US" b="1" dirty="0"/>
-              <a:t>using only samples</a:t>
-            </a:r>
-            <a:r>
-              <a:rPr lang="en-US" dirty="0"/>
-              <a:t>.</a:t>
-            </a:r>
-          </a:p>
-        </p:txBody>
-      </p:sp>
-    </p:spTree>
-    <p:extLst>
-      <p:ext uri="{BB962C8B-B14F-4D97-AF65-F5344CB8AC3E}">
-        <p14:creationId xmlns:p14="http://schemas.microsoft.com/office/powerpoint/2010/main" val="3769764960"/>
-      </p:ext>
-    </p:extLst>
-  </p:cSld>
-  <p:clrMapOvr>
-    <a:masterClrMapping/>
-  </p:clrMapOvr>
-</p:sld>
-</file>
-
-<file path=ppt/slides/slide18.xml><?xml version="1.0" encoding="utf-8"?>
-<p:sld xmlns:a="http://schemas.openxmlformats.org/drawingml/2006/main" xmlns:r="http://schemas.openxmlformats.org/officeDocument/2006/relationships" xmlns:p="http://schemas.openxmlformats.org/presentationml/2006/main">
-  <p:cSld>
-    <p:spTree>
-      <p:nvGrpSpPr>
-        <p:cNvPr id="1" name=""/>
-        <p:cNvGrpSpPr/>
-        <p:nvPr/>
-      </p:nvGrpSpPr>
-      <p:grpSpPr>
-        <a:xfrm>
-          <a:off x="0" y="0"/>
-          <a:ext cx="0" cy="0"/>
-          <a:chOff x="0" y="0"/>
-          <a:chExt cx="0" cy="0"/>
-        </a:xfrm>
-      </p:grpSpPr>
-      <p:sp>
-        <p:nvSpPr>
-          <p:cNvPr id="2" name="Title 1">
-            <a:extLst>
-              <a:ext uri="{FF2B5EF4-FFF2-40B4-BE49-F238E27FC236}">
-                <a16:creationId xmlns:a16="http://schemas.microsoft.com/office/drawing/2014/main" id="{189E852D-5E29-ED3F-20D1-56A2AB6EA303}"/>
-              </a:ext>
-            </a:extLst>
-          </p:cNvPr>
-          <p:cNvSpPr>
-            <a:spLocks noGrp="1"/>
-          </p:cNvSpPr>
-          <p:nvPr>
-            <p:ph type="title"/>
-          </p:nvPr>
-        </p:nvSpPr>
-        <p:spPr/>
-        <p:txBody>
-          <a:bodyPr/>
-          <a:lstStyle/>
-          <a:p>
-            <a:r>
-              <a:rPr lang="en-US" dirty="0"/>
-              <a:t>Where we can go with estimates </a:t>
-            </a:r>
-          </a:p>
-        </p:txBody>
-      </p:sp>
-      <p:sp>
-        <p:nvSpPr>
-          <p:cNvPr id="3" name="Content Placeholder 2">
-            <a:extLst>
-              <a:ext uri="{FF2B5EF4-FFF2-40B4-BE49-F238E27FC236}">
-                <a16:creationId xmlns:a16="http://schemas.microsoft.com/office/drawing/2014/main" id="{673CE5DD-7FA6-0BC3-575F-B61120EE33AE}"/>
-              </a:ext>
-            </a:extLst>
-          </p:cNvPr>
-          <p:cNvSpPr>
-            <a:spLocks noGrp="1"/>
-          </p:cNvSpPr>
-          <p:nvPr>
-            <p:ph idx="1"/>
-          </p:nvPr>
-        </p:nvSpPr>
-        <p:spPr/>
-        <p:txBody>
-          <a:bodyPr/>
-          <a:lstStyle/>
-          <a:p>
-            <a:r>
-              <a:rPr lang="en-US" dirty="0"/>
-              <a:t>With </a:t>
-            </a:r>
-            <a:r>
-              <a:rPr lang="en-US" b="1" dirty="0"/>
-              <a:t>estimates</a:t>
-            </a:r>
-            <a:r>
-              <a:rPr lang="en-US" dirty="0"/>
-              <a:t> we can </a:t>
-            </a:r>
-          </a:p>
-          <a:p>
-            <a:pPr lvl="1"/>
-            <a:r>
-              <a:rPr lang="en-US" dirty="0"/>
-              <a:t>Assess differences among groups and relationships between variables.</a:t>
-            </a:r>
-          </a:p>
-          <a:p>
-            <a:pPr lvl="1"/>
-            <a:endParaRPr lang="en-US" dirty="0"/>
-          </a:p>
-          <a:p>
-            <a:pPr lvl="1"/>
-            <a:r>
-              <a:rPr lang="en-US" dirty="0"/>
-              <a:t>Describe populations. Examples of estimates include averages, proportions, measures of variation, and measures of relationship.</a:t>
-            </a:r>
-          </a:p>
-          <a:p>
-            <a:pPr lvl="1"/>
-            <a:endParaRPr lang="en-US" dirty="0"/>
-          </a:p>
-          <a:p>
-            <a:pPr lvl="1"/>
-            <a:r>
-              <a:rPr lang="en-US" dirty="0"/>
-              <a:t>Then we can ask and answer questions or formally, test and evaluate hypotheses.</a:t>
-            </a:r>
-          </a:p>
-        </p:txBody>
-      </p:sp>
-    </p:spTree>
-    <p:extLst>
-      <p:ext uri="{BB962C8B-B14F-4D97-AF65-F5344CB8AC3E}">
-        <p14:creationId xmlns:p14="http://schemas.microsoft.com/office/powerpoint/2010/main" val="1932296647"/>
-      </p:ext>
-    </p:extLst>
-  </p:cSld>
-  <p:clrMapOvr>
-    <a:masterClrMapping/>
-  </p:clrMapOvr>
-</p:sld>
-</file>
-
-<file path=ppt/slides/slide19.xml><?xml version="1.0" encoding="utf-8"?>
-<p:sld xmlns:a="http://schemas.openxmlformats.org/drawingml/2006/main" xmlns:r="http://schemas.openxmlformats.org/officeDocument/2006/relationships" xmlns:p="http://schemas.openxmlformats.org/presentationml/2006/main">
-  <p:cSld>
-    <p:spTree>
-      <p:nvGrpSpPr>
-        <p:cNvPr id="1" name=""/>
-        <p:cNvGrpSpPr/>
-        <p:nvPr/>
-      </p:nvGrpSpPr>
-      <p:grpSpPr>
-        <a:xfrm>
-          <a:off x="0" y="0"/>
-          <a:ext cx="0" cy="0"/>
-          <a:chOff x="0" y="0"/>
-          <a:chExt cx="0" cy="0"/>
-        </a:xfrm>
-      </p:grpSpPr>
-      <p:sp>
-        <p:nvSpPr>
-          <p:cNvPr id="2" name="Title 1">
-            <a:extLst>
-              <a:ext uri="{FF2B5EF4-FFF2-40B4-BE49-F238E27FC236}">
-                <a16:creationId xmlns:a16="http://schemas.microsoft.com/office/drawing/2014/main" id="{96380C86-D709-6FB8-5A19-C2314095D583}"/>
-              </a:ext>
-            </a:extLst>
-          </p:cNvPr>
-          <p:cNvSpPr>
-            <a:spLocks noGrp="1"/>
-          </p:cNvSpPr>
-          <p:nvPr>
-            <p:ph type="title"/>
-          </p:nvPr>
-        </p:nvSpPr>
-        <p:spPr>
-          <a:xfrm>
-            <a:off x="713762" y="36014"/>
-            <a:ext cx="10515600" cy="1325563"/>
-          </a:xfrm>
-        </p:spPr>
-        <p:txBody>
-          <a:bodyPr/>
-          <a:lstStyle/>
-          <a:p>
-            <a:r>
-              <a:rPr lang="en-US" dirty="0"/>
-              <a:t>Statistics Vs Parameters</a:t>
-            </a:r>
-          </a:p>
-        </p:txBody>
-      </p:sp>
-      <p:sp>
-        <p:nvSpPr>
-          <p:cNvPr id="4" name="TextBox 3">
-            <a:extLst>
-              <a:ext uri="{FF2B5EF4-FFF2-40B4-BE49-F238E27FC236}">
-                <a16:creationId xmlns:a16="http://schemas.microsoft.com/office/drawing/2014/main" id="{D2296438-25B8-F629-7C3E-5050397B22AC}"/>
-              </a:ext>
-            </a:extLst>
-          </p:cNvPr>
-          <p:cNvSpPr txBox="1"/>
-          <p:nvPr/>
-        </p:nvSpPr>
-        <p:spPr>
-          <a:xfrm>
-            <a:off x="306534" y="1612616"/>
-            <a:ext cx="5724811" cy="3503523"/>
-          </a:xfrm>
-          <a:prstGeom prst="rect">
-            <a:avLst/>
-          </a:prstGeom>
-          <a:noFill/>
-        </p:spPr>
-        <p:txBody>
-          <a:bodyPr wrap="square">
-            <a:spAutoFit/>
-          </a:bodyPr>
-          <a:lstStyle/>
-          <a:p>
-            <a:pPr marR="0" lvl="0" algn="l" defTabSz="914400" rtl="0" eaLnBrk="1" fontAlgn="auto" latinLnBrk="0" hangingPunct="1">
-              <a:lnSpc>
-                <a:spcPct val="90000"/>
-              </a:lnSpc>
-              <a:spcBef>
-                <a:spcPts val="1000"/>
-              </a:spcBef>
-              <a:spcAft>
-                <a:spcPts val="0"/>
-              </a:spcAft>
-              <a:buClrTx/>
-              <a:buSzTx/>
-              <a:tabLst/>
-              <a:defRPr/>
-            </a:pPr>
-            <a:r>
-              <a:rPr lang="en-US" sz="2000" dirty="0">
-                <a:solidFill>
-                  <a:prstClr val="black"/>
-                </a:solidFill>
-                <a:latin typeface="Calibri" panose="020F0502020204030204"/>
-              </a:rPr>
-              <a:t>A </a:t>
-            </a:r>
-            <a:r>
-              <a:rPr lang="en-US" sz="2000" b="1" dirty="0">
-                <a:solidFill>
-                  <a:prstClr val="black"/>
-                </a:solidFill>
-                <a:latin typeface="Calibri" panose="020F0502020204030204"/>
-              </a:rPr>
-              <a:t>statistic </a:t>
-            </a:r>
-            <a:r>
-              <a:rPr lang="en-US" sz="2000" dirty="0">
-                <a:solidFill>
-                  <a:prstClr val="black"/>
-                </a:solidFill>
-                <a:latin typeface="Calibri" panose="020F0502020204030204"/>
-              </a:rPr>
-              <a:t>is a numerical characteristic of a </a:t>
-            </a:r>
-            <a:r>
-              <a:rPr lang="en-US" sz="2000" b="1" dirty="0">
-                <a:solidFill>
-                  <a:prstClr val="black"/>
-                </a:solidFill>
-                <a:latin typeface="Calibri" panose="020F0502020204030204"/>
-              </a:rPr>
-              <a:t>sample </a:t>
-            </a:r>
-            <a:r>
-              <a:rPr lang="en-US" sz="2000" dirty="0">
-                <a:solidFill>
-                  <a:prstClr val="black"/>
-                </a:solidFill>
-                <a:latin typeface="Calibri" panose="020F0502020204030204"/>
-              </a:rPr>
-              <a:t>that </a:t>
-            </a:r>
-            <a:r>
-              <a:rPr lang="en-US" sz="2000" u="sng" dirty="0">
-                <a:solidFill>
-                  <a:prstClr val="black"/>
-                </a:solidFill>
-                <a:latin typeface="Calibri" panose="020F0502020204030204"/>
-              </a:rPr>
-              <a:t>estimates</a:t>
-            </a:r>
-            <a:r>
-              <a:rPr lang="en-US" sz="2000" dirty="0">
-                <a:solidFill>
-                  <a:prstClr val="black"/>
-                </a:solidFill>
-                <a:latin typeface="Calibri" panose="020F0502020204030204"/>
-              </a:rPr>
-              <a:t> a population parameter. </a:t>
-            </a:r>
-          </a:p>
-          <a:p>
-            <a:pPr marR="0" lvl="0" algn="l" defTabSz="914400" rtl="0" eaLnBrk="1" fontAlgn="auto" latinLnBrk="0" hangingPunct="1">
-              <a:lnSpc>
-                <a:spcPct val="90000"/>
-              </a:lnSpc>
-              <a:spcBef>
-                <a:spcPts val="1000"/>
-              </a:spcBef>
-              <a:spcAft>
-                <a:spcPts val="0"/>
-              </a:spcAft>
-              <a:buClrTx/>
-              <a:buSzTx/>
-              <a:tabLst/>
-              <a:defRPr/>
-            </a:pPr>
-            <a:endParaRPr lang="en-US" sz="2000" dirty="0">
-              <a:solidFill>
-                <a:prstClr val="black"/>
-              </a:solidFill>
-              <a:latin typeface="Calibri" panose="020F0502020204030204"/>
-            </a:endParaRPr>
-          </a:p>
-          <a:p>
-            <a:pPr marR="0" lvl="0" algn="l" defTabSz="914400" rtl="0" eaLnBrk="1" fontAlgn="auto" latinLnBrk="0" hangingPunct="1">
-              <a:lnSpc>
-                <a:spcPct val="90000"/>
-              </a:lnSpc>
-              <a:spcBef>
-                <a:spcPts val="1000"/>
-              </a:spcBef>
-              <a:spcAft>
-                <a:spcPts val="0"/>
-              </a:spcAft>
-              <a:buClrTx/>
-              <a:buSzTx/>
-              <a:tabLst/>
-              <a:defRPr/>
-            </a:pPr>
-            <a:r>
-              <a:rPr lang="en-US" sz="2000" dirty="0">
-                <a:solidFill>
-                  <a:prstClr val="black"/>
-                </a:solidFill>
-                <a:latin typeface="Calibri" panose="020F0502020204030204"/>
-              </a:rPr>
-              <a:t>A </a:t>
-            </a:r>
-            <a:r>
-              <a:rPr lang="en-US" sz="2000" b="1" dirty="0">
-                <a:solidFill>
-                  <a:prstClr val="black"/>
-                </a:solidFill>
-                <a:latin typeface="Calibri" panose="020F0502020204030204"/>
-              </a:rPr>
-              <a:t>parameter </a:t>
-            </a:r>
-            <a:r>
-              <a:rPr lang="en-US" sz="2000" dirty="0">
-                <a:solidFill>
-                  <a:prstClr val="black"/>
-                </a:solidFill>
-                <a:latin typeface="Calibri" panose="020F0502020204030204"/>
-              </a:rPr>
-              <a:t>is a numerical characteristic of a </a:t>
-            </a:r>
-            <a:r>
-              <a:rPr lang="en-US" sz="2000" b="1" dirty="0">
-                <a:solidFill>
-                  <a:prstClr val="black"/>
-                </a:solidFill>
-                <a:latin typeface="Calibri" panose="020F0502020204030204"/>
-              </a:rPr>
-              <a:t>population</a:t>
-            </a:r>
-            <a:r>
-              <a:rPr lang="en-US" sz="2000" dirty="0">
-                <a:solidFill>
-                  <a:prstClr val="black"/>
-                </a:solidFill>
-                <a:latin typeface="Calibri" panose="020F0502020204030204"/>
-              </a:rPr>
-              <a:t> that can be estimated by a statistic. </a:t>
-            </a:r>
-          </a:p>
-          <a:p>
-            <a:pPr marR="0" lvl="0" algn="l" defTabSz="914400" rtl="0" eaLnBrk="1" fontAlgn="auto" latinLnBrk="0" hangingPunct="1">
-              <a:lnSpc>
-                <a:spcPct val="90000"/>
-              </a:lnSpc>
-              <a:spcBef>
-                <a:spcPts val="1000"/>
-              </a:spcBef>
-              <a:spcAft>
-                <a:spcPts val="0"/>
-              </a:spcAft>
-              <a:buClrTx/>
-              <a:buSzTx/>
-              <a:tabLst/>
-              <a:defRPr/>
-            </a:pPr>
-            <a:endParaRPr lang="en-US" sz="2000" dirty="0">
-              <a:solidFill>
-                <a:prstClr val="black"/>
-              </a:solidFill>
-              <a:latin typeface="Calibri" panose="020F0502020204030204"/>
-            </a:endParaRPr>
-          </a:p>
-          <a:p>
-            <a:pPr marR="0" lvl="0" algn="l" defTabSz="914400" rtl="0" eaLnBrk="1" fontAlgn="auto" latinLnBrk="0" hangingPunct="1">
-              <a:lnSpc>
-                <a:spcPct val="90000"/>
-              </a:lnSpc>
-              <a:spcBef>
-                <a:spcPts val="1000"/>
-              </a:spcBef>
-              <a:spcAft>
-                <a:spcPts val="0"/>
-              </a:spcAft>
-              <a:buClrTx/>
-              <a:buSzTx/>
-              <a:tabLst/>
-              <a:defRPr/>
-            </a:pPr>
-            <a:r>
-              <a:rPr lang="en-US" sz="2000" dirty="0">
-                <a:solidFill>
-                  <a:prstClr val="black"/>
-                </a:solidFill>
-                <a:latin typeface="Calibri" panose="020F0502020204030204"/>
-              </a:rPr>
-              <a:t>Put another way…</a:t>
-            </a:r>
-          </a:p>
-          <a:p>
-            <a:pPr>
-              <a:lnSpc>
-                <a:spcPct val="90000"/>
-              </a:lnSpc>
-              <a:spcBef>
-                <a:spcPts val="1000"/>
-              </a:spcBef>
-              <a:defRPr/>
-            </a:pPr>
-            <a:r>
-              <a:rPr lang="en-US" sz="2000" dirty="0">
-                <a:solidFill>
-                  <a:prstClr val="black"/>
-                </a:solidFill>
-                <a:latin typeface="Calibri" panose="020F0502020204030204"/>
-              </a:rPr>
-              <a:t>A </a:t>
-            </a:r>
-            <a:r>
-              <a:rPr lang="en-US" sz="2000" b="1" dirty="0">
-                <a:solidFill>
-                  <a:prstClr val="black"/>
-                </a:solidFill>
-                <a:latin typeface="Calibri" panose="020F0502020204030204"/>
-              </a:rPr>
-              <a:t>statistic </a:t>
-            </a:r>
-            <a:r>
-              <a:rPr lang="en-US" sz="2000" dirty="0">
-                <a:solidFill>
-                  <a:prstClr val="black"/>
-                </a:solidFill>
-                <a:latin typeface="Calibri" panose="020F0502020204030204"/>
-              </a:rPr>
-              <a:t>is a function of the observations of in a sample</a:t>
-            </a:r>
-            <a:r>
-              <a:rPr lang="en-US" sz="2000" b="1" dirty="0">
-                <a:solidFill>
-                  <a:prstClr val="black"/>
-                </a:solidFill>
-                <a:latin typeface="Calibri" panose="020F0502020204030204"/>
-              </a:rPr>
-              <a:t> </a:t>
-            </a:r>
-            <a:r>
-              <a:rPr lang="en-US" sz="2000" dirty="0">
-                <a:solidFill>
-                  <a:prstClr val="black"/>
-                </a:solidFill>
-                <a:latin typeface="Calibri" panose="020F0502020204030204"/>
-              </a:rPr>
-              <a:t>while a </a:t>
-            </a:r>
-            <a:r>
-              <a:rPr lang="en-US" sz="2000" b="1" dirty="0">
-                <a:solidFill>
-                  <a:prstClr val="black"/>
-                </a:solidFill>
-                <a:latin typeface="Calibri" panose="020F0502020204030204"/>
-              </a:rPr>
-              <a:t>parameter</a:t>
-            </a:r>
-            <a:r>
-              <a:rPr lang="en-US" sz="2000" dirty="0">
-                <a:solidFill>
-                  <a:prstClr val="black"/>
-                </a:solidFill>
-                <a:latin typeface="Calibri" panose="020F0502020204030204"/>
-              </a:rPr>
-              <a:t> is a function </a:t>
-            </a:r>
-            <a:r>
-              <a:rPr lang="en-US" sz="2000" u="sng" dirty="0">
-                <a:solidFill>
-                  <a:prstClr val="black"/>
-                </a:solidFill>
-                <a:latin typeface="Calibri" panose="020F0502020204030204"/>
-              </a:rPr>
-              <a:t>of all </a:t>
-            </a:r>
-            <a:r>
-              <a:rPr lang="en-US" sz="2000" dirty="0">
-                <a:solidFill>
-                  <a:prstClr val="black"/>
-                </a:solidFill>
-                <a:latin typeface="Calibri" panose="020F0502020204030204"/>
-              </a:rPr>
-              <a:t> observations in the population. </a:t>
-            </a:r>
-          </a:p>
-        </p:txBody>
-      </p:sp>
-      <p:grpSp>
-        <p:nvGrpSpPr>
-          <p:cNvPr id="17" name="Group 16">
-            <a:extLst>
-              <a:ext uri="{FF2B5EF4-FFF2-40B4-BE49-F238E27FC236}">
-                <a16:creationId xmlns:a16="http://schemas.microsoft.com/office/drawing/2014/main" id="{AC20C494-1B6D-BA41-770E-9E0DE44AF074}"/>
-              </a:ext>
-            </a:extLst>
-          </p:cNvPr>
-          <p:cNvGrpSpPr/>
-          <p:nvPr/>
-        </p:nvGrpSpPr>
-        <p:grpSpPr>
-          <a:xfrm>
-            <a:off x="6080138" y="1988893"/>
-            <a:ext cx="5901408" cy="1325563"/>
-            <a:chOff x="1468570" y="4512292"/>
-            <a:chExt cx="7820443" cy="1980583"/>
-          </a:xfrm>
-        </p:grpSpPr>
-        <p:pic>
-          <p:nvPicPr>
-            <p:cNvPr id="5" name="Picture 4" descr="A video game screen with a yellow and black striped tape&#10;&#10;Description automatically generated">
-              <a:extLst>
-                <a:ext uri="{FF2B5EF4-FFF2-40B4-BE49-F238E27FC236}">
-                  <a16:creationId xmlns:a16="http://schemas.microsoft.com/office/drawing/2014/main" id="{7B95BDDE-37EC-DD34-A267-543267700258}"/>
-                </a:ext>
-              </a:extLst>
-            </p:cNvPr>
-            <p:cNvPicPr>
-              <a:picLocks noChangeAspect="1"/>
-            </p:cNvPicPr>
-            <p:nvPr/>
-          </p:nvPicPr>
-          <p:blipFill>
-            <a:blip r:embed="rId2">
-              <a:extLst>
-                <a:ext uri="{28A0092B-C50C-407E-A947-70E740481C1C}">
-                  <a14:useLocalDpi xmlns:a14="http://schemas.microsoft.com/office/drawing/2010/main" val="0"/>
-                </a:ext>
-                <a:ext uri="{837473B0-CC2E-450A-ABE3-18F120FF3D39}">
-                  <a1611:picAttrSrcUrl xmlns:a1611="http://schemas.microsoft.com/office/drawing/2016/11/main" r:id="rId3"/>
-                </a:ext>
-              </a:extLst>
-            </a:blip>
-            <a:stretch>
-              <a:fillRect/>
-            </a:stretch>
-          </p:blipFill>
-          <p:spPr>
-            <a:xfrm>
-              <a:off x="3721075" y="5167312"/>
-              <a:ext cx="3082705" cy="1325563"/>
-            </a:xfrm>
-            <a:prstGeom prst="rect">
-              <a:avLst/>
-            </a:prstGeom>
-          </p:spPr>
-        </p:pic>
-        <p:sp>
-          <p:nvSpPr>
-            <p:cNvPr id="14" name="TextBox 13">
-              <a:extLst>
-                <a:ext uri="{FF2B5EF4-FFF2-40B4-BE49-F238E27FC236}">
-                  <a16:creationId xmlns:a16="http://schemas.microsoft.com/office/drawing/2014/main" id="{1BFF80E6-7311-2B72-F3AB-3B087616E762}"/>
-                </a:ext>
-              </a:extLst>
-            </p:cNvPr>
-            <p:cNvSpPr txBox="1"/>
-            <p:nvPr/>
-          </p:nvSpPr>
-          <p:spPr>
-            <a:xfrm>
-              <a:off x="1468570" y="4556598"/>
-              <a:ext cx="1257075" cy="523220"/>
-            </a:xfrm>
-            <a:prstGeom prst="rect">
-              <a:avLst/>
-            </a:prstGeom>
-            <a:noFill/>
-          </p:spPr>
-          <p:txBody>
-            <a:bodyPr wrap="none" rtlCol="0">
-              <a:spAutoFit/>
-            </a:bodyPr>
-            <a:lstStyle/>
-            <a:p>
-              <a:r>
-                <a:rPr lang="en-US" sz="2800" dirty="0"/>
-                <a:t>Sample</a:t>
-              </a:r>
-            </a:p>
-          </p:txBody>
-        </p:sp>
-        <p:pic>
-          <p:nvPicPr>
-            <p:cNvPr id="9" name="Picture 8" descr="A blue cylinder with three layers&#10;&#10;Description automatically generated">
-              <a:extLst>
-                <a:ext uri="{FF2B5EF4-FFF2-40B4-BE49-F238E27FC236}">
-                  <a16:creationId xmlns:a16="http://schemas.microsoft.com/office/drawing/2014/main" id="{F3A78266-9762-7A4E-A26E-7743C43437F8}"/>
-                </a:ext>
-              </a:extLst>
-            </p:cNvPr>
-            <p:cNvPicPr>
-              <a:picLocks noChangeAspect="1"/>
-            </p:cNvPicPr>
-            <p:nvPr/>
-          </p:nvPicPr>
-          <p:blipFill>
-            <a:blip r:embed="rId4">
-              <a:extLst>
-                <a:ext uri="{28A0092B-C50C-407E-A947-70E740481C1C}">
-                  <a14:useLocalDpi xmlns:a14="http://schemas.microsoft.com/office/drawing/2010/main" val="0"/>
-                </a:ext>
-                <a:ext uri="{837473B0-CC2E-450A-ABE3-18F120FF3D39}">
-                  <a1611:picAttrSrcUrl xmlns:a1611="http://schemas.microsoft.com/office/drawing/2016/11/main" r:id="rId5"/>
-                </a:ext>
-              </a:extLst>
-            </a:blip>
-            <a:stretch>
-              <a:fillRect/>
-            </a:stretch>
-          </p:blipFill>
-          <p:spPr>
-            <a:xfrm flipH="1">
-              <a:off x="1674812" y="5245384"/>
-              <a:ext cx="914612" cy="1104900"/>
-            </a:xfrm>
-            <a:prstGeom prst="rect">
-              <a:avLst/>
-            </a:prstGeom>
-          </p:spPr>
-        </p:pic>
-        <p:sp>
-          <p:nvSpPr>
-            <p:cNvPr id="10" name="TextBox 9">
-              <a:extLst>
-                <a:ext uri="{FF2B5EF4-FFF2-40B4-BE49-F238E27FC236}">
-                  <a16:creationId xmlns:a16="http://schemas.microsoft.com/office/drawing/2014/main" id="{D8C0FC19-9DD1-5A1C-9E96-A5DA070246AB}"/>
-                </a:ext>
-              </a:extLst>
-            </p:cNvPr>
-            <p:cNvSpPr txBox="1"/>
-            <p:nvPr/>
-          </p:nvSpPr>
-          <p:spPr>
-            <a:xfrm>
-              <a:off x="7652905" y="5245384"/>
-              <a:ext cx="1011815" cy="769441"/>
-            </a:xfrm>
-            <a:prstGeom prst="rect">
-              <a:avLst/>
-            </a:prstGeom>
-            <a:noFill/>
-          </p:spPr>
-          <p:txBody>
-            <a:bodyPr wrap="none" rtlCol="0">
-              <a:spAutoFit/>
-            </a:bodyPr>
-            <a:lstStyle/>
-            <a:p>
-              <a:r>
-                <a:rPr lang="en-US" sz="4400" dirty="0">
-                  <a:latin typeface="Algerian" panose="04020705040A02060702" pitchFamily="82" charset="0"/>
-                </a:rPr>
-                <a:t>7.8</a:t>
-              </a:r>
-            </a:p>
-          </p:txBody>
-        </p:sp>
-        <p:sp>
-          <p:nvSpPr>
-            <p:cNvPr id="11" name="TextBox 10">
-              <a:extLst>
-                <a:ext uri="{FF2B5EF4-FFF2-40B4-BE49-F238E27FC236}">
-                  <a16:creationId xmlns:a16="http://schemas.microsoft.com/office/drawing/2014/main" id="{8013F433-F62F-72E7-CCCD-6BC478CC428A}"/>
-                </a:ext>
-              </a:extLst>
-            </p:cNvPr>
-            <p:cNvSpPr txBox="1"/>
-            <p:nvPr/>
-          </p:nvSpPr>
-          <p:spPr>
-            <a:xfrm>
-              <a:off x="4598879" y="4538996"/>
-              <a:ext cx="1327095" cy="523220"/>
-            </a:xfrm>
-            <a:prstGeom prst="rect">
-              <a:avLst/>
-            </a:prstGeom>
-            <a:noFill/>
-          </p:spPr>
-          <p:txBody>
-            <a:bodyPr wrap="none" rtlCol="0">
-              <a:spAutoFit/>
-            </a:bodyPr>
-            <a:lstStyle/>
-            <a:p>
-              <a:r>
-                <a:rPr lang="en-US" sz="2800" dirty="0"/>
-                <a:t>Statistic</a:t>
-              </a:r>
-            </a:p>
-          </p:txBody>
-        </p:sp>
-        <p:sp>
-          <p:nvSpPr>
-            <p:cNvPr id="12" name="Arrow: Right 11">
-              <a:extLst>
-                <a:ext uri="{FF2B5EF4-FFF2-40B4-BE49-F238E27FC236}">
-                  <a16:creationId xmlns:a16="http://schemas.microsoft.com/office/drawing/2014/main" id="{CE648ED7-B244-B76E-25B5-2AEBAE5BDF13}"/>
-                </a:ext>
-              </a:extLst>
-            </p:cNvPr>
-            <p:cNvSpPr/>
-            <p:nvPr/>
-          </p:nvSpPr>
-          <p:spPr>
-            <a:xfrm>
-              <a:off x="3000375" y="5410200"/>
-              <a:ext cx="720700" cy="476250"/>
-            </a:xfrm>
-            <a:prstGeom prst="rightArrow">
-              <a:avLst/>
-            </a:prstGeom>
-          </p:spPr>
-          <p:style>
-            <a:lnRef idx="2">
-              <a:schemeClr val="accent1">
-                <a:shade val="15000"/>
-              </a:schemeClr>
-            </a:lnRef>
-            <a:fillRef idx="1">
-              <a:schemeClr val="accent1"/>
-            </a:fillRef>
-            <a:effectRef idx="0">
-              <a:schemeClr val="accent1"/>
-            </a:effectRef>
-            <a:fontRef idx="minor">
-              <a:schemeClr val="lt1"/>
-            </a:fontRef>
-          </p:style>
-          <p:txBody>
-            <a:bodyPr rtlCol="0" anchor="ctr"/>
-            <a:lstStyle/>
-            <a:p>
-              <a:pPr algn="ctr"/>
-              <a:endParaRPr lang="en-US"/>
-            </a:p>
-          </p:txBody>
-        </p:sp>
-        <p:sp>
-          <p:nvSpPr>
-            <p:cNvPr id="13" name="Arrow: Right 12">
-              <a:extLst>
-                <a:ext uri="{FF2B5EF4-FFF2-40B4-BE49-F238E27FC236}">
-                  <a16:creationId xmlns:a16="http://schemas.microsoft.com/office/drawing/2014/main" id="{9BCA37C5-5C48-6C8D-E916-E5E009B3B53E}"/>
-                </a:ext>
-              </a:extLst>
-            </p:cNvPr>
-            <p:cNvSpPr/>
-            <p:nvPr/>
-          </p:nvSpPr>
-          <p:spPr>
-            <a:xfrm>
-              <a:off x="6803780" y="5410200"/>
-              <a:ext cx="720700" cy="476250"/>
-            </a:xfrm>
-            <a:prstGeom prst="rightArrow">
-              <a:avLst/>
-            </a:prstGeom>
-          </p:spPr>
-          <p:style>
-            <a:lnRef idx="2">
-              <a:schemeClr val="accent1">
-                <a:shade val="15000"/>
-              </a:schemeClr>
-            </a:lnRef>
-            <a:fillRef idx="1">
-              <a:schemeClr val="accent1"/>
-            </a:fillRef>
-            <a:effectRef idx="0">
-              <a:schemeClr val="accent1"/>
-            </a:effectRef>
-            <a:fontRef idx="minor">
-              <a:schemeClr val="lt1"/>
-            </a:fontRef>
-          </p:style>
-          <p:txBody>
-            <a:bodyPr rtlCol="0" anchor="ctr"/>
-            <a:lstStyle/>
-            <a:p>
-              <a:pPr algn="ctr"/>
-              <a:endParaRPr lang="en-US"/>
-            </a:p>
-          </p:txBody>
-        </p:sp>
-        <p:sp>
-          <p:nvSpPr>
-            <p:cNvPr id="15" name="TextBox 14">
-              <a:extLst>
-                <a:ext uri="{FF2B5EF4-FFF2-40B4-BE49-F238E27FC236}">
-                  <a16:creationId xmlns:a16="http://schemas.microsoft.com/office/drawing/2014/main" id="{0FB810C0-6923-DFD0-5FAC-1B6D041B9ADB}"/>
-                </a:ext>
-              </a:extLst>
-            </p:cNvPr>
-            <p:cNvSpPr txBox="1"/>
-            <p:nvPr/>
-          </p:nvSpPr>
-          <p:spPr>
-            <a:xfrm>
-              <a:off x="7557654" y="4512292"/>
-              <a:ext cx="1731359" cy="680103"/>
-            </a:xfrm>
-            <a:prstGeom prst="rect">
-              <a:avLst/>
-            </a:prstGeom>
-            <a:noFill/>
-          </p:spPr>
-          <p:txBody>
-            <a:bodyPr wrap="none" rtlCol="0">
-              <a:spAutoFit/>
-            </a:bodyPr>
-            <a:lstStyle/>
-            <a:p>
-              <a:r>
-                <a:rPr lang="en-US" sz="2800" dirty="0"/>
-                <a:t>estimate</a:t>
-              </a:r>
-            </a:p>
-          </p:txBody>
-        </p:sp>
-      </p:grpSp>
-      <p:grpSp>
-        <p:nvGrpSpPr>
-          <p:cNvPr id="3" name="Group 2">
-            <a:extLst>
-              <a:ext uri="{FF2B5EF4-FFF2-40B4-BE49-F238E27FC236}">
-                <a16:creationId xmlns:a16="http://schemas.microsoft.com/office/drawing/2014/main" id="{8CBD6E19-51A2-FBB2-9330-09AFC3FBA50C}"/>
-              </a:ext>
-            </a:extLst>
-          </p:cNvPr>
-          <p:cNvGrpSpPr/>
-          <p:nvPr/>
-        </p:nvGrpSpPr>
-        <p:grpSpPr>
-          <a:xfrm>
-            <a:off x="5847359" y="4470665"/>
-            <a:ext cx="5999184" cy="1361876"/>
-            <a:chOff x="1043730" y="4458035"/>
-            <a:chExt cx="7950014" cy="2034840"/>
-          </a:xfrm>
-        </p:grpSpPr>
-        <p:pic>
-          <p:nvPicPr>
-            <p:cNvPr id="6" name="Picture 5" descr="A video game screen with a yellow and black striped tape&#10;&#10;Description automatically generated">
-              <a:extLst>
-                <a:ext uri="{FF2B5EF4-FFF2-40B4-BE49-F238E27FC236}">
-                  <a16:creationId xmlns:a16="http://schemas.microsoft.com/office/drawing/2014/main" id="{38A716E5-ACAC-2B97-AA07-7BF7A5B25FE0}"/>
-                </a:ext>
-              </a:extLst>
-            </p:cNvPr>
-            <p:cNvPicPr>
-              <a:picLocks noChangeAspect="1"/>
-            </p:cNvPicPr>
-            <p:nvPr/>
-          </p:nvPicPr>
-          <p:blipFill>
-            <a:blip r:embed="rId2">
-              <a:extLst>
-                <a:ext uri="{28A0092B-C50C-407E-A947-70E740481C1C}">
-                  <a14:useLocalDpi xmlns:a14="http://schemas.microsoft.com/office/drawing/2010/main" val="0"/>
-                </a:ext>
-                <a:ext uri="{837473B0-CC2E-450A-ABE3-18F120FF3D39}">
-                  <a1611:picAttrSrcUrl xmlns:a1611="http://schemas.microsoft.com/office/drawing/2016/11/main" r:id="rId3"/>
-                </a:ext>
-              </a:extLst>
-            </a:blip>
-            <a:stretch>
-              <a:fillRect/>
-            </a:stretch>
-          </p:blipFill>
-          <p:spPr>
-            <a:xfrm>
-              <a:off x="3721075" y="5167312"/>
-              <a:ext cx="3082705" cy="1325563"/>
-            </a:xfrm>
-            <a:prstGeom prst="rect">
-              <a:avLst/>
-            </a:prstGeom>
-          </p:spPr>
-        </p:pic>
-        <p:sp>
-          <p:nvSpPr>
-            <p:cNvPr id="7" name="TextBox 6">
-              <a:extLst>
-                <a:ext uri="{FF2B5EF4-FFF2-40B4-BE49-F238E27FC236}">
-                  <a16:creationId xmlns:a16="http://schemas.microsoft.com/office/drawing/2014/main" id="{1263FF8F-92B3-D123-FB2C-47BB74D5591E}"/>
-                </a:ext>
-              </a:extLst>
-            </p:cNvPr>
-            <p:cNvSpPr txBox="1"/>
-            <p:nvPr/>
-          </p:nvSpPr>
-          <p:spPr>
-            <a:xfrm>
-              <a:off x="1043730" y="4538995"/>
-              <a:ext cx="2333809" cy="781766"/>
-            </a:xfrm>
-            <a:prstGeom prst="rect">
-              <a:avLst/>
-            </a:prstGeom>
-            <a:noFill/>
-          </p:spPr>
-          <p:txBody>
-            <a:bodyPr wrap="none" rtlCol="0">
-              <a:spAutoFit/>
-            </a:bodyPr>
-            <a:lstStyle/>
-            <a:p>
-              <a:r>
-                <a:rPr lang="en-US" sz="2800" dirty="0"/>
-                <a:t>Population</a:t>
-              </a:r>
-            </a:p>
-          </p:txBody>
-        </p:sp>
-        <p:pic>
-          <p:nvPicPr>
-            <p:cNvPr id="8" name="Picture 7" descr="A blue cylinder with three layers&#10;&#10;Description automatically generated">
-              <a:extLst>
-                <a:ext uri="{FF2B5EF4-FFF2-40B4-BE49-F238E27FC236}">
-                  <a16:creationId xmlns:a16="http://schemas.microsoft.com/office/drawing/2014/main" id="{4D3D10D1-96A9-D71C-2EC1-D63F4BB9E164}"/>
-                </a:ext>
-              </a:extLst>
-            </p:cNvPr>
-            <p:cNvPicPr>
-              <a:picLocks noChangeAspect="1"/>
-            </p:cNvPicPr>
-            <p:nvPr/>
-          </p:nvPicPr>
-          <p:blipFill>
-            <a:blip r:embed="rId4">
-              <a:extLst>
-                <a:ext uri="{28A0092B-C50C-407E-A947-70E740481C1C}">
-                  <a14:useLocalDpi xmlns:a14="http://schemas.microsoft.com/office/drawing/2010/main" val="0"/>
-                </a:ext>
-                <a:ext uri="{837473B0-CC2E-450A-ABE3-18F120FF3D39}">
-                  <a1611:picAttrSrcUrl xmlns:a1611="http://schemas.microsoft.com/office/drawing/2016/11/main" r:id="rId5"/>
-                </a:ext>
-              </a:extLst>
-            </a:blip>
-            <a:stretch>
-              <a:fillRect/>
-            </a:stretch>
-          </p:blipFill>
-          <p:spPr>
-            <a:xfrm flipH="1">
-              <a:off x="1674812" y="5245384"/>
-              <a:ext cx="914612" cy="1104901"/>
-            </a:xfrm>
-            <a:prstGeom prst="rect">
-              <a:avLst/>
-            </a:prstGeom>
-          </p:spPr>
-        </p:pic>
-        <p:sp>
-          <p:nvSpPr>
-            <p:cNvPr id="16" name="TextBox 15">
-              <a:extLst>
-                <a:ext uri="{FF2B5EF4-FFF2-40B4-BE49-F238E27FC236}">
-                  <a16:creationId xmlns:a16="http://schemas.microsoft.com/office/drawing/2014/main" id="{2BF0E88E-80E8-CE5A-07EA-9E53111EC853}"/>
-                </a:ext>
-              </a:extLst>
-            </p:cNvPr>
-            <p:cNvSpPr txBox="1"/>
-            <p:nvPr/>
-          </p:nvSpPr>
-          <p:spPr>
-            <a:xfrm>
-              <a:off x="7652904" y="5245384"/>
-              <a:ext cx="1340840" cy="1149656"/>
-            </a:xfrm>
-            <a:prstGeom prst="rect">
-              <a:avLst/>
-            </a:prstGeom>
-            <a:noFill/>
-          </p:spPr>
-          <p:txBody>
-            <a:bodyPr wrap="none" rtlCol="0">
-              <a:spAutoFit/>
-            </a:bodyPr>
-            <a:lstStyle/>
-            <a:p>
-              <a:r>
-                <a:rPr lang="en-US" sz="4400" dirty="0">
-                  <a:latin typeface="Algerian" panose="04020705040A02060702" pitchFamily="82" charset="0"/>
-                </a:rPr>
-                <a:t>8.2</a:t>
-              </a:r>
-            </a:p>
-          </p:txBody>
-        </p:sp>
-        <p:sp>
-          <p:nvSpPr>
-            <p:cNvPr id="18" name="TextBox 17">
-              <a:extLst>
-                <a:ext uri="{FF2B5EF4-FFF2-40B4-BE49-F238E27FC236}">
-                  <a16:creationId xmlns:a16="http://schemas.microsoft.com/office/drawing/2014/main" id="{AD720B74-3587-8C00-2FD2-DA391F3047A7}"/>
-                </a:ext>
-              </a:extLst>
-            </p:cNvPr>
-            <p:cNvSpPr txBox="1"/>
-            <p:nvPr/>
-          </p:nvSpPr>
-          <p:spPr>
-            <a:xfrm>
-              <a:off x="4315437" y="4458035"/>
-              <a:ext cx="2260650" cy="781767"/>
-            </a:xfrm>
-            <a:prstGeom prst="rect">
-              <a:avLst/>
-            </a:prstGeom>
-            <a:noFill/>
-          </p:spPr>
-          <p:txBody>
-            <a:bodyPr wrap="none" rtlCol="0">
-              <a:spAutoFit/>
-            </a:bodyPr>
-            <a:lstStyle/>
-            <a:p>
-              <a:r>
-                <a:rPr lang="en-US" sz="2800" dirty="0"/>
-                <a:t>Parameter</a:t>
-              </a:r>
-            </a:p>
-          </p:txBody>
-        </p:sp>
-        <p:sp>
-          <p:nvSpPr>
-            <p:cNvPr id="19" name="Arrow: Right 18">
-              <a:extLst>
-                <a:ext uri="{FF2B5EF4-FFF2-40B4-BE49-F238E27FC236}">
-                  <a16:creationId xmlns:a16="http://schemas.microsoft.com/office/drawing/2014/main" id="{DC1F96E2-1B02-8ACC-F6F0-4005BB576575}"/>
-                </a:ext>
-              </a:extLst>
-            </p:cNvPr>
-            <p:cNvSpPr/>
-            <p:nvPr/>
-          </p:nvSpPr>
-          <p:spPr>
-            <a:xfrm>
-              <a:off x="3000375" y="5410200"/>
-              <a:ext cx="720700" cy="476250"/>
-            </a:xfrm>
-            <a:prstGeom prst="rightArrow">
-              <a:avLst/>
-            </a:prstGeom>
-          </p:spPr>
-          <p:style>
-            <a:lnRef idx="2">
-              <a:schemeClr val="accent1">
-                <a:shade val="15000"/>
-              </a:schemeClr>
-            </a:lnRef>
-            <a:fillRef idx="1">
-              <a:schemeClr val="accent1"/>
-            </a:fillRef>
-            <a:effectRef idx="0">
-              <a:schemeClr val="accent1"/>
-            </a:effectRef>
-            <a:fontRef idx="minor">
-              <a:schemeClr val="lt1"/>
-            </a:fontRef>
-          </p:style>
-          <p:txBody>
-            <a:bodyPr rtlCol="0" anchor="ctr"/>
-            <a:lstStyle/>
-            <a:p>
-              <a:pPr algn="ctr"/>
-              <a:endParaRPr lang="en-US"/>
-            </a:p>
-          </p:txBody>
-        </p:sp>
-        <p:sp>
-          <p:nvSpPr>
-            <p:cNvPr id="20" name="Arrow: Right 19">
-              <a:extLst>
-                <a:ext uri="{FF2B5EF4-FFF2-40B4-BE49-F238E27FC236}">
-                  <a16:creationId xmlns:a16="http://schemas.microsoft.com/office/drawing/2014/main" id="{1C3D577E-54EE-C4FE-C703-4A8C6EFE9C9E}"/>
-                </a:ext>
-              </a:extLst>
-            </p:cNvPr>
-            <p:cNvSpPr/>
-            <p:nvPr/>
-          </p:nvSpPr>
-          <p:spPr>
-            <a:xfrm>
-              <a:off x="6803780" y="5410200"/>
-              <a:ext cx="720700" cy="476250"/>
-            </a:xfrm>
-            <a:prstGeom prst="rightArrow">
-              <a:avLst/>
-            </a:prstGeom>
-          </p:spPr>
-          <p:style>
-            <a:lnRef idx="2">
-              <a:schemeClr val="accent1">
-                <a:shade val="15000"/>
-              </a:schemeClr>
-            </a:lnRef>
-            <a:fillRef idx="1">
-              <a:schemeClr val="accent1"/>
-            </a:fillRef>
-            <a:effectRef idx="0">
-              <a:schemeClr val="accent1"/>
-            </a:effectRef>
-            <a:fontRef idx="minor">
-              <a:schemeClr val="lt1"/>
-            </a:fontRef>
-          </p:style>
-          <p:txBody>
-            <a:bodyPr rtlCol="0" anchor="ctr"/>
-            <a:lstStyle/>
-            <a:p>
-              <a:pPr algn="ctr"/>
-              <a:endParaRPr lang="en-US"/>
-            </a:p>
-          </p:txBody>
-        </p:sp>
-        <p:sp>
-          <p:nvSpPr>
-            <p:cNvPr id="21" name="TextBox 20">
-              <a:extLst>
-                <a:ext uri="{FF2B5EF4-FFF2-40B4-BE49-F238E27FC236}">
-                  <a16:creationId xmlns:a16="http://schemas.microsoft.com/office/drawing/2014/main" id="{2F481E2F-F5A1-517B-0585-5AC0439AD5CE}"/>
-                </a:ext>
-              </a:extLst>
-            </p:cNvPr>
-            <p:cNvSpPr txBox="1"/>
-            <p:nvPr/>
-          </p:nvSpPr>
-          <p:spPr>
-            <a:xfrm>
-              <a:off x="7557654" y="4512292"/>
-              <a:ext cx="1310081" cy="781766"/>
-            </a:xfrm>
-            <a:prstGeom prst="rect">
-              <a:avLst/>
-            </a:prstGeom>
-            <a:noFill/>
-          </p:spPr>
-          <p:txBody>
-            <a:bodyPr wrap="none" rtlCol="0">
-              <a:spAutoFit/>
-            </a:bodyPr>
-            <a:lstStyle/>
-            <a:p>
-              <a:r>
-                <a:rPr lang="en-US" sz="2800" dirty="0"/>
-                <a:t>Value</a:t>
-              </a:r>
-            </a:p>
-          </p:txBody>
-        </p:sp>
-      </p:grpSp>
-      <mc:AlternateContent xmlns:mc="http://schemas.openxmlformats.org/markup-compatibility/2006" xmlns:a14="http://schemas.microsoft.com/office/drawing/2010/main">
-        <mc:Choice Requires="a14">
-          <p:sp>
-            <p:nvSpPr>
-              <p:cNvPr id="22" name="TextBox 21">
-                <a:extLst>
-                  <a:ext uri="{FF2B5EF4-FFF2-40B4-BE49-F238E27FC236}">
-                    <a16:creationId xmlns:a16="http://schemas.microsoft.com/office/drawing/2014/main" id="{94D2E981-3963-6DDF-6554-98473E5A09D2}"/>
-                  </a:ext>
-                </a:extLst>
-              </p:cNvPr>
-              <p:cNvSpPr txBox="1"/>
-              <p:nvPr/>
-            </p:nvSpPr>
-            <p:spPr>
-              <a:xfrm>
-                <a:off x="6411455" y="3224276"/>
-                <a:ext cx="335605" cy="492443"/>
-              </a:xfrm>
-              <a:prstGeom prst="rect">
-                <a:avLst/>
-              </a:prstGeom>
-              <a:noFill/>
-            </p:spPr>
-            <p:txBody>
-              <a:bodyPr wrap="none" lIns="0" tIns="0" rIns="0" bIns="0" rtlCol="0">
-                <a:spAutoFit/>
-              </a:bodyPr>
-              <a:lstStyle/>
-              <a:p>
-                <a:pPr/>
-                <a14:m>
-                  <m:oMathPara xmlns:m="http://schemas.openxmlformats.org/officeDocument/2006/math">
-                    <m:oMathParaPr>
-                      <m:jc m:val="centerGroup"/>
-                    </m:oMathParaPr>
-                    <m:oMath xmlns:m="http://schemas.openxmlformats.org/officeDocument/2006/math">
-                      <m:r>
-                        <a:rPr lang="en-US" sz="3200" b="0" i="1" smtClean="0">
-                          <a:latin typeface="Cambria Math" panose="02040503050406030204" pitchFamily="18" charset="0"/>
-                        </a:rPr>
-                        <m:t>𝑛</m:t>
-                      </m:r>
-                    </m:oMath>
-                  </m:oMathPara>
-                </a14:m>
-                <a:endParaRPr lang="en-US" sz="3200" dirty="0"/>
-              </a:p>
-            </p:txBody>
-          </p:sp>
-        </mc:Choice>
-        <mc:Fallback xmlns="">
-          <p:sp>
-            <p:nvSpPr>
-              <p:cNvPr id="22" name="TextBox 21">
-                <a:extLst>
-                  <a:ext uri="{FF2B5EF4-FFF2-40B4-BE49-F238E27FC236}">
-                    <a16:creationId xmlns:a16="http://schemas.microsoft.com/office/drawing/2014/main" id="{94D2E981-3963-6DDF-6554-98473E5A09D2}"/>
-                  </a:ext>
-                </a:extLst>
-              </p:cNvPr>
-              <p:cNvSpPr txBox="1">
-                <a:spLocks noRot="1" noChangeAspect="1" noMove="1" noResize="1" noEditPoints="1" noAdjustHandles="1" noChangeArrowheads="1" noChangeShapeType="1" noTextEdit="1"/>
-              </p:cNvSpPr>
-              <p:nvPr/>
-            </p:nvSpPr>
-            <p:spPr>
-              <a:xfrm>
-                <a:off x="6411455" y="3224276"/>
-                <a:ext cx="335605" cy="492443"/>
-              </a:xfrm>
-              <a:prstGeom prst="rect">
-                <a:avLst/>
-              </a:prstGeom>
-              <a:blipFill>
-                <a:blip r:embed="rId6"/>
-                <a:stretch>
-                  <a:fillRect/>
-                </a:stretch>
-              </a:blipFill>
-            </p:spPr>
-            <p:txBody>
-              <a:bodyPr/>
-              <a:lstStyle/>
-              <a:p>
-                <a:r>
-                  <a:rPr lang="en-US">
-                    <a:noFill/>
-                  </a:rPr>
-                  <a:t> </a:t>
-                </a:r>
-              </a:p>
-            </p:txBody>
-          </p:sp>
-        </mc:Fallback>
-      </mc:AlternateContent>
-      <mc:AlternateContent xmlns:mc="http://schemas.openxmlformats.org/markup-compatibility/2006" xmlns:a14="http://schemas.microsoft.com/office/drawing/2010/main">
-        <mc:Choice Requires="a14">
-          <p:sp>
-            <p:nvSpPr>
-              <p:cNvPr id="23" name="TextBox 22">
-                <a:extLst>
-                  <a:ext uri="{FF2B5EF4-FFF2-40B4-BE49-F238E27FC236}">
-                    <a16:creationId xmlns:a16="http://schemas.microsoft.com/office/drawing/2014/main" id="{4A8A5DF8-FAD4-CE59-0BCB-8033D194CD80}"/>
-                  </a:ext>
-                </a:extLst>
-              </p:cNvPr>
-              <p:cNvSpPr txBox="1"/>
-              <p:nvPr/>
-            </p:nvSpPr>
-            <p:spPr>
-              <a:xfrm>
-                <a:off x="6525448" y="5702664"/>
-                <a:ext cx="404341" cy="492443"/>
-              </a:xfrm>
-              <a:prstGeom prst="rect">
-                <a:avLst/>
-              </a:prstGeom>
-              <a:noFill/>
-            </p:spPr>
-            <p:txBody>
-              <a:bodyPr wrap="none" lIns="0" tIns="0" rIns="0" bIns="0" rtlCol="0">
-                <a:spAutoFit/>
-              </a:bodyPr>
-              <a:lstStyle/>
-              <a:p>
-                <a:pPr/>
-                <a14:m>
-                  <m:oMathPara xmlns:m="http://schemas.openxmlformats.org/officeDocument/2006/math">
-                    <m:oMathParaPr>
-                      <m:jc m:val="centerGroup"/>
-                    </m:oMathParaPr>
-                    <m:oMath xmlns:m="http://schemas.openxmlformats.org/officeDocument/2006/math">
-                      <m:r>
-                        <a:rPr lang="en-US" sz="3200" b="0" i="1" smtClean="0">
-                          <a:latin typeface="Cambria Math" panose="02040503050406030204" pitchFamily="18" charset="0"/>
-                        </a:rPr>
-                        <m:t>𝑁</m:t>
-                      </m:r>
-                    </m:oMath>
-                  </m:oMathPara>
-                </a14:m>
-                <a:endParaRPr lang="en-US" sz="3200" dirty="0"/>
-              </a:p>
-            </p:txBody>
-          </p:sp>
-        </mc:Choice>
-        <mc:Fallback xmlns="">
-          <p:sp>
-            <p:nvSpPr>
-              <p:cNvPr id="23" name="TextBox 22">
-                <a:extLst>
-                  <a:ext uri="{FF2B5EF4-FFF2-40B4-BE49-F238E27FC236}">
-                    <a16:creationId xmlns:a16="http://schemas.microsoft.com/office/drawing/2014/main" id="{4A8A5DF8-FAD4-CE59-0BCB-8033D194CD80}"/>
-                  </a:ext>
-                </a:extLst>
-              </p:cNvPr>
-              <p:cNvSpPr txBox="1">
-                <a:spLocks noRot="1" noChangeAspect="1" noMove="1" noResize="1" noEditPoints="1" noAdjustHandles="1" noChangeArrowheads="1" noChangeShapeType="1" noTextEdit="1"/>
-              </p:cNvSpPr>
-              <p:nvPr/>
-            </p:nvSpPr>
-            <p:spPr>
-              <a:xfrm>
-                <a:off x="6525448" y="5702664"/>
-                <a:ext cx="404341" cy="492443"/>
-              </a:xfrm>
-              <a:prstGeom prst="rect">
-                <a:avLst/>
-              </a:prstGeom>
-              <a:blipFill>
-                <a:blip r:embed="rId7"/>
-                <a:stretch>
-                  <a:fillRect/>
-                </a:stretch>
-              </a:blipFill>
-            </p:spPr>
-            <p:txBody>
-              <a:bodyPr/>
-              <a:lstStyle/>
-              <a:p>
-                <a:r>
-                  <a:rPr lang="en-US">
-                    <a:noFill/>
-                  </a:rPr>
-                  <a:t> </a:t>
-                </a:r>
-              </a:p>
-            </p:txBody>
-          </p:sp>
-        </mc:Fallback>
-      </mc:AlternateContent>
-    </p:spTree>
-    <p:extLst>
-      <p:ext uri="{BB962C8B-B14F-4D97-AF65-F5344CB8AC3E}">
-        <p14:creationId xmlns:p14="http://schemas.microsoft.com/office/powerpoint/2010/main" val="2338621633"/>
-      </p:ext>
-    </p:extLst>
-  </p:cSld>
-  <p:clrMapOvr>
-    <a:masterClrMapping/>
-  </p:clrMapOvr>
-</p:sld>
-</file>
-
 <file path=ppt/slides/slide2.xml><?xml version="1.0" encoding="utf-8"?>
 <p:sld xmlns:a="http://schemas.openxmlformats.org/drawingml/2006/main" xmlns:r="http://schemas.openxmlformats.org/officeDocument/2006/relationships" xmlns:p="http://schemas.openxmlformats.org/presentationml/2006/main">
   <p:cSld>
@@ -11963,2550 +8605,6 @@
     <p:extLst>
       <p:ext uri="{BB962C8B-B14F-4D97-AF65-F5344CB8AC3E}">
         <p14:creationId xmlns:p14="http://schemas.microsoft.com/office/powerpoint/2010/main" val="2771044698"/>
-      </p:ext>
-    </p:extLst>
-  </p:cSld>
-  <p:clrMapOvr>
-    <a:masterClrMapping/>
-  </p:clrMapOvr>
-</p:sld>
-</file>
-
-<file path=ppt/slides/slide20.xml><?xml version="1.0" encoding="utf-8"?>
-<p:sld xmlns:a="http://schemas.openxmlformats.org/drawingml/2006/main" xmlns:r="http://schemas.openxmlformats.org/officeDocument/2006/relationships" xmlns:p="http://schemas.openxmlformats.org/presentationml/2006/main">
-  <p:cSld>
-    <p:spTree>
-      <p:nvGrpSpPr>
-        <p:cNvPr id="1" name=""/>
-        <p:cNvGrpSpPr/>
-        <p:nvPr/>
-      </p:nvGrpSpPr>
-      <p:grpSpPr>
-        <a:xfrm>
-          <a:off x="0" y="0"/>
-          <a:ext cx="0" cy="0"/>
-          <a:chOff x="0" y="0"/>
-          <a:chExt cx="0" cy="0"/>
-        </a:xfrm>
-      </p:grpSpPr>
-      <p:sp>
-        <p:nvSpPr>
-          <p:cNvPr id="2" name="Title 1">
-            <a:extLst>
-              <a:ext uri="{FF2B5EF4-FFF2-40B4-BE49-F238E27FC236}">
-                <a16:creationId xmlns:a16="http://schemas.microsoft.com/office/drawing/2014/main" id="{96380C86-D709-6FB8-5A19-C2314095D583}"/>
-              </a:ext>
-            </a:extLst>
-          </p:cNvPr>
-          <p:cNvSpPr>
-            <a:spLocks noGrp="1"/>
-          </p:cNvSpPr>
-          <p:nvPr>
-            <p:ph type="title"/>
-          </p:nvPr>
-        </p:nvSpPr>
-        <p:spPr>
-          <a:xfrm>
-            <a:off x="713762" y="36014"/>
-            <a:ext cx="10515600" cy="1325563"/>
-          </a:xfrm>
-        </p:spPr>
-        <p:txBody>
-          <a:bodyPr/>
-          <a:lstStyle/>
-          <a:p>
-            <a:r>
-              <a:rPr lang="en-US" dirty="0"/>
-              <a:t>Mean and Proportion </a:t>
-            </a:r>
-          </a:p>
-        </p:txBody>
-      </p:sp>
-      <mc:AlternateContent xmlns:mc="http://schemas.openxmlformats.org/markup-compatibility/2006" xmlns:a14="http://schemas.microsoft.com/office/drawing/2010/main">
-        <mc:Choice Requires="a14">
-          <p:sp>
-            <p:nvSpPr>
-              <p:cNvPr id="4" name="TextBox 3">
-                <a:extLst>
-                  <a:ext uri="{FF2B5EF4-FFF2-40B4-BE49-F238E27FC236}">
-                    <a16:creationId xmlns:a16="http://schemas.microsoft.com/office/drawing/2014/main" id="{D2296438-25B8-F629-7C3E-5050397B22AC}"/>
-                  </a:ext>
-                </a:extLst>
-              </p:cNvPr>
-              <p:cNvSpPr txBox="1"/>
-              <p:nvPr/>
-            </p:nvSpPr>
-            <p:spPr>
-              <a:xfrm>
-                <a:off x="306534" y="1612616"/>
-                <a:ext cx="7359648" cy="4446858"/>
-              </a:xfrm>
-              <a:prstGeom prst="rect">
-                <a:avLst/>
-              </a:prstGeom>
-              <a:noFill/>
-            </p:spPr>
-            <p:txBody>
-              <a:bodyPr wrap="square">
-                <a:spAutoFit/>
-              </a:bodyPr>
-              <a:lstStyle/>
-              <a:p>
-                <a:pPr marR="0" lvl="0" algn="l" defTabSz="914400" rtl="0" eaLnBrk="1" fontAlgn="auto" latinLnBrk="0" hangingPunct="1">
-                  <a:lnSpc>
-                    <a:spcPct val="90000"/>
-                  </a:lnSpc>
-                  <a:spcBef>
-                    <a:spcPts val="1000"/>
-                  </a:spcBef>
-                  <a:spcAft>
-                    <a:spcPts val="0"/>
-                  </a:spcAft>
-                  <a:buClrTx/>
-                  <a:buSzTx/>
-                  <a:tabLst/>
-                  <a:defRPr/>
-                </a:pPr>
-                <a:r>
-                  <a:rPr lang="en-US" sz="2000" dirty="0">
-                    <a:solidFill>
-                      <a:prstClr val="black"/>
-                    </a:solidFill>
-                    <a:latin typeface="Calibri" panose="020F0502020204030204"/>
-                  </a:rPr>
-                  <a:t>A </a:t>
-                </a:r>
-                <a:r>
-                  <a:rPr lang="en-US" sz="2000" b="1" dirty="0">
-                    <a:solidFill>
-                      <a:prstClr val="black"/>
-                    </a:solidFill>
-                    <a:latin typeface="Calibri" panose="020F0502020204030204"/>
-                  </a:rPr>
-                  <a:t>proportion </a:t>
-                </a:r>
-                <a:r>
-                  <a:rPr lang="en-US" sz="2000" dirty="0">
-                    <a:solidFill>
-                      <a:prstClr val="black"/>
-                    </a:solidFill>
-                    <a:latin typeface="Calibri" panose="020F0502020204030204"/>
-                  </a:rPr>
-                  <a:t>describes the fraction of a whole that represent some property or category. Usually, it is expressed a percentage. </a:t>
-                </a:r>
-              </a:p>
-              <a:p>
-                <a:pPr marR="0" lvl="0" algn="l" defTabSz="914400" rtl="0" eaLnBrk="1" fontAlgn="auto" latinLnBrk="0" hangingPunct="1">
-                  <a:lnSpc>
-                    <a:spcPct val="90000"/>
-                  </a:lnSpc>
-                  <a:spcBef>
-                    <a:spcPts val="1000"/>
-                  </a:spcBef>
-                  <a:spcAft>
-                    <a:spcPts val="0"/>
-                  </a:spcAft>
-                  <a:buClrTx/>
-                  <a:buSzTx/>
-                  <a:tabLst/>
-                  <a:defRPr/>
-                </a:pPr>
-                <a:r>
-                  <a:rPr lang="en-US" dirty="0">
-                    <a:solidFill>
-                      <a:prstClr val="black"/>
-                    </a:solidFill>
-                    <a:latin typeface="Calibri" panose="020F0502020204030204"/>
-                  </a:rPr>
-                  <a:t>Notation: </a:t>
-                </a:r>
-              </a:p>
-              <a:p>
-                <a:pPr marR="0" lvl="0" algn="l" defTabSz="914400" rtl="0" eaLnBrk="1" fontAlgn="auto" latinLnBrk="0" hangingPunct="1">
-                  <a:lnSpc>
-                    <a:spcPct val="90000"/>
-                  </a:lnSpc>
-                  <a:spcBef>
-                    <a:spcPts val="1000"/>
-                  </a:spcBef>
-                  <a:spcAft>
-                    <a:spcPts val="0"/>
-                  </a:spcAft>
-                  <a:buClrTx/>
-                  <a:buSzTx/>
-                  <a:tabLst/>
-                  <a:defRPr/>
-                </a:pPr>
-                <a14:m>
-                  <m:oMath xmlns:m="http://schemas.openxmlformats.org/officeDocument/2006/math">
-                    <m:acc>
-                      <m:accPr>
-                        <m:chr m:val="̂"/>
-                        <m:ctrlPr>
-                          <a:rPr lang="en-US" i="1" smtClean="0">
-                            <a:solidFill>
-                              <a:prstClr val="black"/>
-                            </a:solidFill>
-                            <a:latin typeface="Cambria Math" panose="02040503050406030204" pitchFamily="18" charset="0"/>
-                          </a:rPr>
-                        </m:ctrlPr>
-                      </m:accPr>
-                      <m:e>
-                        <m:r>
-                          <a:rPr lang="en-US" b="0" i="1" smtClean="0">
-                            <a:solidFill>
-                              <a:prstClr val="black"/>
-                            </a:solidFill>
-                            <a:latin typeface="Cambria Math" panose="02040503050406030204" pitchFamily="18" charset="0"/>
-                          </a:rPr>
-                          <m:t>𝑝</m:t>
-                        </m:r>
-                      </m:e>
-                    </m:acc>
-                  </m:oMath>
-                </a14:m>
-                <a:r>
-                  <a:rPr lang="en-US" dirty="0">
-                    <a:solidFill>
-                      <a:prstClr val="black"/>
-                    </a:solidFill>
-                    <a:latin typeface="Calibri" panose="020F0502020204030204"/>
-                  </a:rPr>
-                  <a:t> - denotes the sample proportion </a:t>
-                </a:r>
-              </a:p>
-              <a:p>
-                <a:pPr marR="0" lvl="0" algn="l" defTabSz="914400" rtl="0" eaLnBrk="1" fontAlgn="auto" latinLnBrk="0" hangingPunct="1">
-                  <a:lnSpc>
-                    <a:spcPct val="90000"/>
-                  </a:lnSpc>
-                  <a:spcBef>
-                    <a:spcPts val="1000"/>
-                  </a:spcBef>
-                  <a:spcAft>
-                    <a:spcPts val="0"/>
-                  </a:spcAft>
-                  <a:buClrTx/>
-                  <a:buSzTx/>
-                  <a:tabLst/>
-                  <a:defRPr/>
-                </a:pPr>
-                <a14:m>
-                  <m:oMath xmlns:m="http://schemas.openxmlformats.org/officeDocument/2006/math">
-                    <m:r>
-                      <a:rPr lang="en-US" b="0" i="1" smtClean="0">
-                        <a:solidFill>
-                          <a:prstClr val="black"/>
-                        </a:solidFill>
-                        <a:latin typeface="Cambria Math" panose="02040503050406030204" pitchFamily="18" charset="0"/>
-                      </a:rPr>
-                      <m:t>𝑝</m:t>
-                    </m:r>
-                  </m:oMath>
-                </a14:m>
-                <a:r>
-                  <a:rPr lang="en-US" dirty="0">
-                    <a:solidFill>
-                      <a:prstClr val="black"/>
-                    </a:solidFill>
-                    <a:latin typeface="Calibri" panose="020F0502020204030204"/>
-                  </a:rPr>
-                  <a:t> - denotes the population proportion </a:t>
-                </a:r>
-              </a:p>
-              <a:p>
-                <a:pPr marR="0" lvl="0" algn="l" defTabSz="914400" rtl="0" eaLnBrk="1" fontAlgn="auto" latinLnBrk="0" hangingPunct="1">
-                  <a:lnSpc>
-                    <a:spcPct val="90000"/>
-                  </a:lnSpc>
-                  <a:spcBef>
-                    <a:spcPts val="1000"/>
-                  </a:spcBef>
-                  <a:spcAft>
-                    <a:spcPts val="0"/>
-                  </a:spcAft>
-                  <a:buClrTx/>
-                  <a:buSzTx/>
-                  <a:tabLst/>
-                  <a:defRPr/>
-                </a:pPr>
-                <a:endParaRPr lang="en-US" sz="2000" dirty="0">
-                  <a:solidFill>
-                    <a:prstClr val="black"/>
-                  </a:solidFill>
-                  <a:latin typeface="Calibri" panose="020F0502020204030204"/>
-                </a:endParaRPr>
-              </a:p>
-              <a:p>
-                <a:pPr marR="0" lvl="0" algn="l" defTabSz="914400" rtl="0" eaLnBrk="1" fontAlgn="auto" latinLnBrk="0" hangingPunct="1">
-                  <a:lnSpc>
-                    <a:spcPct val="90000"/>
-                  </a:lnSpc>
-                  <a:spcBef>
-                    <a:spcPts val="1000"/>
-                  </a:spcBef>
-                  <a:spcAft>
-                    <a:spcPts val="0"/>
-                  </a:spcAft>
-                  <a:buClrTx/>
-                  <a:buSzTx/>
-                  <a:tabLst/>
-                  <a:defRPr/>
-                </a:pPr>
-                <a:r>
-                  <a:rPr lang="en-US" sz="2000" dirty="0">
-                    <a:solidFill>
-                      <a:prstClr val="black"/>
-                    </a:solidFill>
-                    <a:latin typeface="Calibri" panose="020F0502020204030204"/>
-                  </a:rPr>
-                  <a:t>The </a:t>
-                </a:r>
-                <a:r>
-                  <a:rPr lang="en-US" sz="2000" u="sng" dirty="0">
-                    <a:solidFill>
-                      <a:prstClr val="black"/>
-                    </a:solidFill>
-                    <a:latin typeface="Calibri" panose="020F0502020204030204"/>
-                  </a:rPr>
-                  <a:t>arithmetic</a:t>
-                </a:r>
-                <a:r>
-                  <a:rPr lang="en-US" sz="2000" dirty="0">
-                    <a:solidFill>
-                      <a:prstClr val="black"/>
-                    </a:solidFill>
-                    <a:latin typeface="Calibri" panose="020F0502020204030204"/>
-                  </a:rPr>
-                  <a:t> </a:t>
-                </a:r>
-                <a:r>
-                  <a:rPr lang="en-US" sz="2000" b="1" dirty="0">
-                    <a:solidFill>
-                      <a:prstClr val="black"/>
-                    </a:solidFill>
-                    <a:latin typeface="Calibri" panose="020F0502020204030204"/>
-                  </a:rPr>
-                  <a:t>mean </a:t>
-                </a:r>
-                <a:r>
-                  <a:rPr lang="en-US" sz="2000" dirty="0">
-                    <a:solidFill>
-                      <a:prstClr val="black"/>
-                    </a:solidFill>
-                    <a:latin typeface="Calibri" panose="020F0502020204030204"/>
-                  </a:rPr>
-                  <a:t>is the center of a set of data (we often use the words mean and average interchangeably)</a:t>
-                </a:r>
-              </a:p>
-              <a:p>
-                <a:pPr marR="0" lvl="0" algn="l" defTabSz="914400" rtl="0" eaLnBrk="1" fontAlgn="auto" latinLnBrk="0" hangingPunct="1">
-                  <a:lnSpc>
-                    <a:spcPct val="90000"/>
-                  </a:lnSpc>
-                  <a:spcBef>
-                    <a:spcPts val="1000"/>
-                  </a:spcBef>
-                  <a:spcAft>
-                    <a:spcPts val="0"/>
-                  </a:spcAft>
-                  <a:buClrTx/>
-                  <a:buSzTx/>
-                  <a:tabLst/>
-                  <a:defRPr/>
-                </a:pPr>
-                <a:r>
-                  <a:rPr lang="en-US" dirty="0">
-                    <a:solidFill>
-                      <a:prstClr val="black"/>
-                    </a:solidFill>
-                    <a:latin typeface="Calibri" panose="020F0502020204030204"/>
-                  </a:rPr>
-                  <a:t>Notation:</a:t>
-                </a:r>
-              </a:p>
-              <a:p>
-                <a:pPr marR="0" lvl="0" algn="l" defTabSz="914400" rtl="0" eaLnBrk="1" fontAlgn="auto" latinLnBrk="0" hangingPunct="1">
-                  <a:lnSpc>
-                    <a:spcPct val="90000"/>
-                  </a:lnSpc>
-                  <a:spcBef>
-                    <a:spcPts val="1000"/>
-                  </a:spcBef>
-                  <a:spcAft>
-                    <a:spcPts val="0"/>
-                  </a:spcAft>
-                  <a:buClrTx/>
-                  <a:buSzTx/>
-                  <a:tabLst/>
-                  <a:defRPr/>
-                </a:pPr>
-                <a14:m>
-                  <m:oMath xmlns:m="http://schemas.openxmlformats.org/officeDocument/2006/math">
-                    <m:acc>
-                      <m:accPr>
-                        <m:chr m:val="̅"/>
-                        <m:ctrlPr>
-                          <a:rPr lang="en-US" sz="2000" i="1" smtClean="0">
-                            <a:solidFill>
-                              <a:prstClr val="black"/>
-                            </a:solidFill>
-                            <a:latin typeface="Cambria Math" panose="02040503050406030204" pitchFamily="18" charset="0"/>
-                          </a:rPr>
-                        </m:ctrlPr>
-                      </m:accPr>
-                      <m:e>
-                        <m:r>
-                          <a:rPr lang="en-US" sz="2000" b="0" i="1" smtClean="0">
-                            <a:solidFill>
-                              <a:prstClr val="black"/>
-                            </a:solidFill>
-                            <a:latin typeface="Cambria Math" panose="02040503050406030204" pitchFamily="18" charset="0"/>
-                          </a:rPr>
-                          <m:t>𝑥</m:t>
-                        </m:r>
-                      </m:e>
-                    </m:acc>
-                    <m:r>
-                      <a:rPr lang="en-US" sz="2000" b="0" i="1" smtClean="0">
-                        <a:solidFill>
-                          <a:prstClr val="black"/>
-                        </a:solidFill>
-                        <a:latin typeface="Cambria Math" panose="02040503050406030204" pitchFamily="18" charset="0"/>
-                      </a:rPr>
-                      <m:t> </m:t>
-                    </m:r>
-                  </m:oMath>
-                </a14:m>
-                <a:r>
-                  <a:rPr lang="en-US" dirty="0">
-                    <a:solidFill>
-                      <a:prstClr val="black"/>
-                    </a:solidFill>
-                    <a:latin typeface="Calibri" panose="020F0502020204030204"/>
-                  </a:rPr>
-                  <a:t> - denotes the mean of a sample</a:t>
-                </a:r>
-              </a:p>
-              <a:p>
-                <a:pPr marR="0" lvl="0" algn="l" defTabSz="914400" rtl="0" eaLnBrk="1" fontAlgn="auto" latinLnBrk="0" hangingPunct="1">
-                  <a:lnSpc>
-                    <a:spcPct val="90000"/>
-                  </a:lnSpc>
-                  <a:spcBef>
-                    <a:spcPts val="1000"/>
-                  </a:spcBef>
-                  <a:spcAft>
-                    <a:spcPts val="0"/>
-                  </a:spcAft>
-                  <a:buClrTx/>
-                  <a:buSzTx/>
-                  <a:tabLst/>
-                  <a:defRPr/>
-                </a:pPr>
-                <a14:m>
-                  <m:oMath xmlns:m="http://schemas.openxmlformats.org/officeDocument/2006/math">
-                    <m:r>
-                      <a:rPr lang="en-US" sz="2000" i="1" smtClean="0">
-                        <a:solidFill>
-                          <a:prstClr val="black"/>
-                        </a:solidFill>
-                        <a:latin typeface="Cambria Math" panose="02040503050406030204" pitchFamily="18" charset="0"/>
-                        <a:ea typeface="Cambria Math" panose="02040503050406030204" pitchFamily="18" charset="0"/>
-                      </a:rPr>
-                      <m:t>𝜇</m:t>
-                    </m:r>
-                  </m:oMath>
-                </a14:m>
-                <a:r>
-                  <a:rPr lang="en-US" dirty="0">
-                    <a:solidFill>
-                      <a:prstClr val="black"/>
-                    </a:solidFill>
-                    <a:latin typeface="Calibri" panose="020F0502020204030204"/>
-                  </a:rPr>
-                  <a:t> – denotes the mean of a population (</a:t>
-                </a:r>
-                <a:r>
-                  <a:rPr lang="en-US" dirty="0" err="1">
-                    <a:solidFill>
-                      <a:prstClr val="black"/>
-                    </a:solidFill>
-                    <a:latin typeface="Calibri" panose="020F0502020204030204"/>
-                  </a:rPr>
-                  <a:t>i.e</a:t>
-                </a:r>
-                <a:r>
-                  <a:rPr lang="en-US" dirty="0">
-                    <a:solidFill>
-                      <a:prstClr val="black"/>
-                    </a:solidFill>
-                    <a:latin typeface="Calibri" panose="020F0502020204030204"/>
-                  </a:rPr>
-                  <a:t> the population parameter)</a:t>
-                </a:r>
-              </a:p>
-              <a:p>
-                <a:pPr marR="0" lvl="0" algn="l" defTabSz="914400" rtl="0" eaLnBrk="1" fontAlgn="auto" latinLnBrk="0" hangingPunct="1">
-                  <a:lnSpc>
-                    <a:spcPct val="90000"/>
-                  </a:lnSpc>
-                  <a:spcBef>
-                    <a:spcPts val="1000"/>
-                  </a:spcBef>
-                  <a:spcAft>
-                    <a:spcPts val="0"/>
-                  </a:spcAft>
-                  <a:buClrTx/>
-                  <a:buSzTx/>
-                  <a:tabLst/>
-                  <a:defRPr/>
-                </a:pPr>
-                <a:endParaRPr lang="en-US" sz="2000" dirty="0">
-                  <a:solidFill>
-                    <a:prstClr val="black"/>
-                  </a:solidFill>
-                  <a:latin typeface="Calibri" panose="020F0502020204030204"/>
-                </a:endParaRPr>
-              </a:p>
-            </p:txBody>
-          </p:sp>
-        </mc:Choice>
-        <mc:Fallback xmlns="">
-          <p:sp>
-            <p:nvSpPr>
-              <p:cNvPr id="4" name="TextBox 3">
-                <a:extLst>
-                  <a:ext uri="{FF2B5EF4-FFF2-40B4-BE49-F238E27FC236}">
-                    <a16:creationId xmlns:a16="http://schemas.microsoft.com/office/drawing/2014/main" id="{D2296438-25B8-F629-7C3E-5050397B22AC}"/>
-                  </a:ext>
-                </a:extLst>
-              </p:cNvPr>
-              <p:cNvSpPr txBox="1">
-                <a:spLocks noRot="1" noChangeAspect="1" noMove="1" noResize="1" noEditPoints="1" noAdjustHandles="1" noChangeArrowheads="1" noChangeShapeType="1" noTextEdit="1"/>
-              </p:cNvSpPr>
-              <p:nvPr/>
-            </p:nvSpPr>
-            <p:spPr>
-              <a:xfrm>
-                <a:off x="306534" y="1612616"/>
-                <a:ext cx="7359648" cy="4446858"/>
-              </a:xfrm>
-              <a:prstGeom prst="rect">
-                <a:avLst/>
-              </a:prstGeom>
-              <a:blipFill>
-                <a:blip r:embed="rId2"/>
-                <a:stretch>
-                  <a:fillRect l="-828" t="-1509"/>
-                </a:stretch>
-              </a:blipFill>
-            </p:spPr>
-            <p:txBody>
-              <a:bodyPr/>
-              <a:lstStyle/>
-              <a:p>
-                <a:r>
-                  <a:rPr lang="en-US">
-                    <a:noFill/>
-                  </a:rPr>
-                  <a:t> </a:t>
-                </a:r>
-              </a:p>
-            </p:txBody>
-          </p:sp>
-        </mc:Fallback>
-      </mc:AlternateContent>
-      <p:sp>
-        <p:nvSpPr>
-          <p:cNvPr id="28" name="TextBox 27">
-            <a:extLst>
-              <a:ext uri="{FF2B5EF4-FFF2-40B4-BE49-F238E27FC236}">
-                <a16:creationId xmlns:a16="http://schemas.microsoft.com/office/drawing/2014/main" id="{9966B947-10CA-1974-768E-4FC5ACDF8AED}"/>
-              </a:ext>
-            </a:extLst>
-          </p:cNvPr>
-          <p:cNvSpPr txBox="1"/>
-          <p:nvPr/>
-        </p:nvSpPr>
-        <p:spPr>
-          <a:xfrm>
-            <a:off x="6894345" y="2786441"/>
-            <a:ext cx="4089245" cy="677108"/>
-          </a:xfrm>
-          <a:prstGeom prst="rect">
-            <a:avLst/>
-          </a:prstGeom>
-          <a:noFill/>
-        </p:spPr>
-        <p:txBody>
-          <a:bodyPr wrap="square" lIns="0" tIns="0" rIns="0" bIns="0" rtlCol="0">
-            <a:spAutoFit/>
-          </a:bodyPr>
-          <a:lstStyle/>
-          <a:p>
-            <a:endParaRPr lang="en-US" sz="1600" b="0" i="1" dirty="0">
-              <a:latin typeface="Cambria Math" panose="02040503050406030204" pitchFamily="18" charset="0"/>
-            </a:endParaRPr>
-          </a:p>
-          <a:p>
-            <a:endParaRPr lang="en-US" sz="2800" dirty="0"/>
-          </a:p>
-        </p:txBody>
-      </p:sp>
-      <mc:AlternateContent xmlns:mc="http://schemas.openxmlformats.org/markup-compatibility/2006" xmlns:a14="http://schemas.microsoft.com/office/drawing/2010/main">
-        <mc:Choice Requires="a14">
-          <p:sp>
-            <p:nvSpPr>
-              <p:cNvPr id="8" name="TextBox 7">
-                <a:extLst>
-                  <a:ext uri="{FF2B5EF4-FFF2-40B4-BE49-F238E27FC236}">
-                    <a16:creationId xmlns:a16="http://schemas.microsoft.com/office/drawing/2014/main" id="{05FEBCC2-104E-6C7B-C843-FA5D73CAE221}"/>
-                  </a:ext>
-                </a:extLst>
-              </p:cNvPr>
-              <p:cNvSpPr txBox="1"/>
-              <p:nvPr/>
-            </p:nvSpPr>
-            <p:spPr>
-              <a:xfrm>
-                <a:off x="8244147" y="4293093"/>
-                <a:ext cx="3092706" cy="1554656"/>
-              </a:xfrm>
-              <a:prstGeom prst="rect">
-                <a:avLst/>
-              </a:prstGeom>
-              <a:noFill/>
-            </p:spPr>
-            <p:txBody>
-              <a:bodyPr wrap="none" lIns="0" tIns="0" rIns="0" bIns="0" rtlCol="0">
-                <a:spAutoFit/>
-              </a:bodyPr>
-              <a:lstStyle/>
-              <a:p>
-                <a:pPr/>
-                <a14:m>
-                  <m:oMathPara xmlns:m="http://schemas.openxmlformats.org/officeDocument/2006/math">
-                    <m:oMathParaPr>
-                      <m:jc m:val="centerGroup"/>
-                    </m:oMathParaPr>
-                    <m:oMath xmlns:m="http://schemas.openxmlformats.org/officeDocument/2006/math">
-                      <m:acc>
-                        <m:accPr>
-                          <m:chr m:val="̅"/>
-                          <m:ctrlPr>
-                            <a:rPr lang="en-US" sz="2000" i="1" smtClean="0">
-                              <a:latin typeface="Cambria Math" panose="02040503050406030204" pitchFamily="18" charset="0"/>
-                            </a:rPr>
-                          </m:ctrlPr>
-                        </m:accPr>
-                        <m:e>
-                          <m:r>
-                            <a:rPr lang="en-US" sz="2000" b="0" i="1" smtClean="0">
-                              <a:latin typeface="Cambria Math" panose="02040503050406030204" pitchFamily="18" charset="0"/>
-                            </a:rPr>
-                            <m:t>𝑥</m:t>
-                          </m:r>
-                        </m:e>
-                      </m:acc>
-                      <m:r>
-                        <a:rPr lang="en-US" sz="2000" b="0" i="1" smtClean="0">
-                          <a:latin typeface="Cambria Math" panose="02040503050406030204" pitchFamily="18" charset="0"/>
-                        </a:rPr>
-                        <m:t>= </m:t>
-                      </m:r>
-                      <m:f>
-                        <m:fPr>
-                          <m:ctrlPr>
-                            <a:rPr lang="en-US" sz="2000" b="0" i="1" smtClean="0">
-                              <a:latin typeface="Cambria Math" panose="02040503050406030204" pitchFamily="18" charset="0"/>
-                            </a:rPr>
-                          </m:ctrlPr>
-                        </m:fPr>
-                        <m:num>
-                          <m:r>
-                            <a:rPr lang="en-US" sz="2000" b="0" i="1" smtClean="0">
-                              <a:latin typeface="Cambria Math" panose="02040503050406030204" pitchFamily="18" charset="0"/>
-                            </a:rPr>
-                            <m:t>1</m:t>
-                          </m:r>
-                        </m:num>
-                        <m:den>
-                          <m:r>
-                            <a:rPr lang="en-US" sz="2000" b="0" i="1" smtClean="0">
-                              <a:latin typeface="Cambria Math" panose="02040503050406030204" pitchFamily="18" charset="0"/>
-                            </a:rPr>
-                            <m:t>𝑛</m:t>
-                          </m:r>
-                        </m:den>
-                      </m:f>
-                      <m:nary>
-                        <m:naryPr>
-                          <m:chr m:val="∑"/>
-                          <m:ctrlPr>
-                            <a:rPr lang="en-US" sz="2000" b="0" i="1" smtClean="0">
-                              <a:latin typeface="Cambria Math" panose="02040503050406030204" pitchFamily="18" charset="0"/>
-                            </a:rPr>
-                          </m:ctrlPr>
-                        </m:naryPr>
-                        <m:sub>
-                          <m:r>
-                            <m:rPr>
-                              <m:brk m:alnAt="23"/>
-                            </m:rPr>
-                            <a:rPr lang="en-US" sz="2000" b="0" i="1" smtClean="0">
-                              <a:latin typeface="Cambria Math" panose="02040503050406030204" pitchFamily="18" charset="0"/>
-                            </a:rPr>
-                            <m:t>𝑖</m:t>
-                          </m:r>
-                          <m:r>
-                            <a:rPr lang="en-US" sz="2000" b="0" i="1" smtClean="0">
-                              <a:latin typeface="Cambria Math" panose="02040503050406030204" pitchFamily="18" charset="0"/>
-                            </a:rPr>
-                            <m:t>=1</m:t>
-                          </m:r>
-                        </m:sub>
-                        <m:sup>
-                          <m:r>
-                            <a:rPr lang="en-US" sz="2000" b="0" i="1" smtClean="0">
-                              <a:latin typeface="Cambria Math" panose="02040503050406030204" pitchFamily="18" charset="0"/>
-                            </a:rPr>
-                            <m:t>𝑛</m:t>
-                          </m:r>
-                        </m:sup>
-                        <m:e>
-                          <m:sSub>
-                            <m:sSubPr>
-                              <m:ctrlPr>
-                                <a:rPr lang="en-US" sz="2000" b="0" i="1" smtClean="0">
-                                  <a:latin typeface="Cambria Math" panose="02040503050406030204" pitchFamily="18" charset="0"/>
-                                </a:rPr>
-                              </m:ctrlPr>
-                            </m:sSubPr>
-                            <m:e>
-                              <m:r>
-                                <a:rPr lang="en-US" sz="2000" b="0" i="1" smtClean="0">
-                                  <a:latin typeface="Cambria Math" panose="02040503050406030204" pitchFamily="18" charset="0"/>
-                                </a:rPr>
-                                <m:t>𝑥</m:t>
-                              </m:r>
-                            </m:e>
-                            <m:sub>
-                              <m:r>
-                                <a:rPr lang="en-US" sz="2000" b="0" i="1" smtClean="0">
-                                  <a:latin typeface="Cambria Math" panose="02040503050406030204" pitchFamily="18" charset="0"/>
-                                </a:rPr>
-                                <m:t>𝑖</m:t>
-                              </m:r>
-                            </m:sub>
-                          </m:sSub>
-                        </m:e>
-                      </m:nary>
-                    </m:oMath>
-                  </m:oMathPara>
-                </a14:m>
-                <a:endParaRPr lang="en-US" sz="2000" b="0" dirty="0"/>
-              </a:p>
-              <a:p>
-                <a:endParaRPr lang="en-US" sz="1600" i="1" dirty="0">
-                  <a:latin typeface="Cambria Math" panose="02040503050406030204" pitchFamily="18" charset="0"/>
-                </a:endParaRPr>
-              </a:p>
-              <a:p>
-                <a:pPr/>
-                <a14:m>
-                  <m:oMathPara xmlns:m="http://schemas.openxmlformats.org/officeDocument/2006/math">
-                    <m:oMathParaPr>
-                      <m:jc m:val="centerGroup"/>
-                    </m:oMathParaPr>
-                    <m:oMath xmlns:m="http://schemas.openxmlformats.org/officeDocument/2006/math">
-                      <m:acc>
-                        <m:accPr>
-                          <m:chr m:val="̂"/>
-                          <m:ctrlPr>
-                            <a:rPr lang="en-US" sz="1600" i="1" smtClean="0">
-                              <a:latin typeface="Cambria Math" panose="02040503050406030204" pitchFamily="18" charset="0"/>
-                            </a:rPr>
-                          </m:ctrlPr>
-                        </m:accPr>
-                        <m:e>
-                          <m:r>
-                            <a:rPr lang="en-US" sz="1600" b="0" i="1" smtClean="0">
-                              <a:latin typeface="Cambria Math" panose="02040503050406030204" pitchFamily="18" charset="0"/>
-                            </a:rPr>
-                            <m:t>𝑝</m:t>
-                          </m:r>
-                        </m:e>
-                      </m:acc>
-                      <m:r>
-                        <a:rPr lang="en-US" sz="1600" b="0" i="1" smtClean="0">
-                          <a:latin typeface="Cambria Math" panose="02040503050406030204" pitchFamily="18" charset="0"/>
-                        </a:rPr>
-                        <m:t>=</m:t>
-                      </m:r>
-                      <m:f>
-                        <m:fPr>
-                          <m:ctrlPr>
-                            <a:rPr lang="en-US" sz="1600" b="0" i="1" smtClean="0">
-                              <a:latin typeface="Cambria Math" panose="02040503050406030204" pitchFamily="18" charset="0"/>
-                            </a:rPr>
-                          </m:ctrlPr>
-                        </m:fPr>
-                        <m:num>
-                          <m:r>
-                            <m:rPr>
-                              <m:sty m:val="p"/>
-                            </m:rPr>
-                            <a:rPr lang="en-US" sz="1600" b="0" i="0" smtClean="0">
-                              <a:latin typeface="Cambria Math" panose="02040503050406030204" pitchFamily="18" charset="0"/>
-                            </a:rPr>
-                            <m:t>Number</m:t>
-                          </m:r>
-                          <m:r>
-                            <a:rPr lang="en-US" sz="1600" b="0" i="0" smtClean="0">
-                              <a:latin typeface="Cambria Math" panose="02040503050406030204" pitchFamily="18" charset="0"/>
-                            </a:rPr>
-                            <m:t> </m:t>
-                          </m:r>
-                          <m:r>
-                            <m:rPr>
-                              <m:sty m:val="p"/>
-                            </m:rPr>
-                            <a:rPr lang="en-US" sz="1600" b="0" i="0" smtClean="0">
-                              <a:latin typeface="Cambria Math" panose="02040503050406030204" pitchFamily="18" charset="0"/>
-                            </a:rPr>
-                            <m:t>of</m:t>
-                          </m:r>
-                          <m:r>
-                            <a:rPr lang="en-US" sz="1600" b="0" i="0" smtClean="0">
-                              <a:latin typeface="Cambria Math" panose="02040503050406030204" pitchFamily="18" charset="0"/>
-                            </a:rPr>
-                            <m:t> </m:t>
-                          </m:r>
-                          <m:r>
-                            <m:rPr>
-                              <m:sty m:val="p"/>
-                            </m:rPr>
-                            <a:rPr lang="en-US" sz="1600" b="0" i="0" smtClean="0">
-                              <a:latin typeface="Cambria Math" panose="02040503050406030204" pitchFamily="18" charset="0"/>
-                            </a:rPr>
-                            <m:t>objects</m:t>
-                          </m:r>
-                          <m:r>
-                            <a:rPr lang="en-US" sz="1600" b="0" i="0" smtClean="0">
-                              <a:latin typeface="Cambria Math" panose="02040503050406030204" pitchFamily="18" charset="0"/>
-                            </a:rPr>
-                            <m:t> </m:t>
-                          </m:r>
-                          <m:r>
-                            <m:rPr>
-                              <m:sty m:val="p"/>
-                            </m:rPr>
-                            <a:rPr lang="en-US" sz="1600" b="0" i="0" smtClean="0">
-                              <a:latin typeface="Cambria Math" panose="02040503050406030204" pitchFamily="18" charset="0"/>
-                            </a:rPr>
-                            <m:t>in</m:t>
-                          </m:r>
-                          <m:r>
-                            <a:rPr lang="en-US" sz="1600" b="0" i="0" smtClean="0">
-                              <a:latin typeface="Cambria Math" panose="02040503050406030204" pitchFamily="18" charset="0"/>
-                            </a:rPr>
-                            <m:t> </m:t>
-                          </m:r>
-                          <m:r>
-                            <m:rPr>
-                              <m:sty m:val="p"/>
-                            </m:rPr>
-                            <a:rPr lang="en-US" sz="1600" b="0" i="0" smtClean="0">
-                              <a:latin typeface="Cambria Math" panose="02040503050406030204" pitchFamily="18" charset="0"/>
-                            </a:rPr>
-                            <m:t>category</m:t>
-                          </m:r>
-                        </m:num>
-                        <m:den>
-                          <m:r>
-                            <a:rPr lang="en-US" sz="1600" b="0" i="1" smtClean="0">
-                              <a:latin typeface="Cambria Math" panose="02040503050406030204" pitchFamily="18" charset="0"/>
-                            </a:rPr>
-                            <m:t>𝑛</m:t>
-                          </m:r>
-                        </m:den>
-                      </m:f>
-                    </m:oMath>
-                  </m:oMathPara>
-                </a14:m>
-                <a:endParaRPr lang="en-US" sz="2800" dirty="0"/>
-              </a:p>
-            </p:txBody>
-          </p:sp>
-        </mc:Choice>
-        <mc:Fallback xmlns="">
-          <p:sp>
-            <p:nvSpPr>
-              <p:cNvPr id="8" name="TextBox 7">
-                <a:extLst>
-                  <a:ext uri="{FF2B5EF4-FFF2-40B4-BE49-F238E27FC236}">
-                    <a16:creationId xmlns:a16="http://schemas.microsoft.com/office/drawing/2014/main" id="{05FEBCC2-104E-6C7B-C843-FA5D73CAE221}"/>
-                  </a:ext>
-                </a:extLst>
-              </p:cNvPr>
-              <p:cNvSpPr txBox="1">
-                <a:spLocks noRot="1" noChangeAspect="1" noMove="1" noResize="1" noEditPoints="1" noAdjustHandles="1" noChangeArrowheads="1" noChangeShapeType="1" noTextEdit="1"/>
-              </p:cNvSpPr>
-              <p:nvPr/>
-            </p:nvSpPr>
-            <p:spPr>
-              <a:xfrm>
-                <a:off x="8244147" y="4293093"/>
-                <a:ext cx="3092706" cy="1554656"/>
-              </a:xfrm>
-              <a:prstGeom prst="rect">
-                <a:avLst/>
-              </a:prstGeom>
-              <a:blipFill>
-                <a:blip r:embed="rId3"/>
-                <a:stretch>
-                  <a:fillRect/>
-                </a:stretch>
-              </a:blipFill>
-            </p:spPr>
-            <p:txBody>
-              <a:bodyPr/>
-              <a:lstStyle/>
-              <a:p>
-                <a:r>
-                  <a:rPr lang="en-US">
-                    <a:noFill/>
-                  </a:rPr>
-                  <a:t> </a:t>
-                </a:r>
-              </a:p>
-            </p:txBody>
-          </p:sp>
-        </mc:Fallback>
-      </mc:AlternateContent>
-      <mc:AlternateContent xmlns:mc="http://schemas.openxmlformats.org/markup-compatibility/2006" xmlns:a14="http://schemas.microsoft.com/office/drawing/2010/main">
-        <mc:Choice Requires="a14">
-          <p:sp>
-            <p:nvSpPr>
-              <p:cNvPr id="9" name="TextBox 8">
-                <a:extLst>
-                  <a:ext uri="{FF2B5EF4-FFF2-40B4-BE49-F238E27FC236}">
-                    <a16:creationId xmlns:a16="http://schemas.microsoft.com/office/drawing/2014/main" id="{B733D296-CE0C-8B9E-040E-8C52B2653FEC}"/>
-                  </a:ext>
-                </a:extLst>
-              </p:cNvPr>
-              <p:cNvSpPr txBox="1"/>
-              <p:nvPr/>
-            </p:nvSpPr>
-            <p:spPr>
-              <a:xfrm>
-                <a:off x="7955493" y="1034969"/>
-                <a:ext cx="3092706" cy="1579856"/>
-              </a:xfrm>
-              <a:prstGeom prst="rect">
-                <a:avLst/>
-              </a:prstGeom>
-              <a:noFill/>
-            </p:spPr>
-            <p:txBody>
-              <a:bodyPr wrap="none" lIns="0" tIns="0" rIns="0" bIns="0" rtlCol="0">
-                <a:spAutoFit/>
-              </a:bodyPr>
-              <a:lstStyle/>
-              <a:p>
-                <a:pPr/>
-                <a14:m>
-                  <m:oMathPara xmlns:m="http://schemas.openxmlformats.org/officeDocument/2006/math">
-                    <m:oMathParaPr>
-                      <m:jc m:val="centerGroup"/>
-                    </m:oMathParaPr>
-                    <m:oMath xmlns:m="http://schemas.openxmlformats.org/officeDocument/2006/math">
-                      <m:r>
-                        <a:rPr lang="en-US" sz="2000" b="0" i="1" smtClean="0">
-                          <a:latin typeface="Cambria Math" panose="02040503050406030204" pitchFamily="18" charset="0"/>
-                          <a:ea typeface="Cambria Math" panose="02040503050406030204" pitchFamily="18" charset="0"/>
-                        </a:rPr>
-                        <m:t>𝜇</m:t>
-                      </m:r>
-                      <m:r>
-                        <a:rPr lang="en-US" sz="2000" b="0" i="1" smtClean="0">
-                          <a:latin typeface="Cambria Math" panose="02040503050406030204" pitchFamily="18" charset="0"/>
-                        </a:rPr>
-                        <m:t>= </m:t>
-                      </m:r>
-                      <m:f>
-                        <m:fPr>
-                          <m:ctrlPr>
-                            <a:rPr lang="en-US" sz="2000" b="0" i="1" smtClean="0">
-                              <a:latin typeface="Cambria Math" panose="02040503050406030204" pitchFamily="18" charset="0"/>
-                            </a:rPr>
-                          </m:ctrlPr>
-                        </m:fPr>
-                        <m:num>
-                          <m:r>
-                            <a:rPr lang="en-US" sz="2000" b="0" i="1" smtClean="0">
-                              <a:latin typeface="Cambria Math" panose="02040503050406030204" pitchFamily="18" charset="0"/>
-                            </a:rPr>
-                            <m:t>1</m:t>
-                          </m:r>
-                        </m:num>
-                        <m:den>
-                          <m:r>
-                            <a:rPr lang="en-US" sz="2000" b="0" i="1" smtClean="0">
-                              <a:latin typeface="Cambria Math" panose="02040503050406030204" pitchFamily="18" charset="0"/>
-                            </a:rPr>
-                            <m:t>𝑁</m:t>
-                          </m:r>
-                        </m:den>
-                      </m:f>
-                      <m:nary>
-                        <m:naryPr>
-                          <m:chr m:val="∑"/>
-                          <m:ctrlPr>
-                            <a:rPr lang="en-US" sz="2000" b="0" i="1" smtClean="0">
-                              <a:latin typeface="Cambria Math" panose="02040503050406030204" pitchFamily="18" charset="0"/>
-                            </a:rPr>
-                          </m:ctrlPr>
-                        </m:naryPr>
-                        <m:sub>
-                          <m:r>
-                            <m:rPr>
-                              <m:brk m:alnAt="23"/>
-                            </m:rPr>
-                            <a:rPr lang="en-US" sz="2000" b="0" i="1" smtClean="0">
-                              <a:latin typeface="Cambria Math" panose="02040503050406030204" pitchFamily="18" charset="0"/>
-                            </a:rPr>
-                            <m:t>𝑖</m:t>
-                          </m:r>
-                          <m:r>
-                            <a:rPr lang="en-US" sz="2000" b="0" i="1" smtClean="0">
-                              <a:latin typeface="Cambria Math" panose="02040503050406030204" pitchFamily="18" charset="0"/>
-                            </a:rPr>
-                            <m:t>=1</m:t>
-                          </m:r>
-                        </m:sub>
-                        <m:sup>
-                          <m:r>
-                            <a:rPr lang="en-US" sz="2000" b="0" i="1" smtClean="0">
-                              <a:latin typeface="Cambria Math" panose="02040503050406030204" pitchFamily="18" charset="0"/>
-                            </a:rPr>
-                            <m:t>𝑁</m:t>
-                          </m:r>
-                        </m:sup>
-                        <m:e>
-                          <m:sSub>
-                            <m:sSubPr>
-                              <m:ctrlPr>
-                                <a:rPr lang="en-US" sz="2000" b="0" i="1" smtClean="0">
-                                  <a:latin typeface="Cambria Math" panose="02040503050406030204" pitchFamily="18" charset="0"/>
-                                </a:rPr>
-                              </m:ctrlPr>
-                            </m:sSubPr>
-                            <m:e>
-                              <m:r>
-                                <a:rPr lang="en-US" sz="2000" b="0" i="1" smtClean="0">
-                                  <a:latin typeface="Cambria Math" panose="02040503050406030204" pitchFamily="18" charset="0"/>
-                                </a:rPr>
-                                <m:t>𝑥</m:t>
-                              </m:r>
-                            </m:e>
-                            <m:sub>
-                              <m:r>
-                                <a:rPr lang="en-US" sz="2000" b="0" i="1" smtClean="0">
-                                  <a:latin typeface="Cambria Math" panose="02040503050406030204" pitchFamily="18" charset="0"/>
-                                </a:rPr>
-                                <m:t>𝑖</m:t>
-                              </m:r>
-                            </m:sub>
-                          </m:sSub>
-                        </m:e>
-                      </m:nary>
-                    </m:oMath>
-                  </m:oMathPara>
-                </a14:m>
-                <a:endParaRPr lang="en-US" sz="2000" b="0" dirty="0"/>
-              </a:p>
-              <a:p>
-                <a:endParaRPr lang="en-US" sz="1600" b="0" i="1" dirty="0">
-                  <a:latin typeface="Cambria Math" panose="02040503050406030204" pitchFamily="18" charset="0"/>
-                </a:endParaRPr>
-              </a:p>
-              <a:p>
-                <a:pPr/>
-                <a14:m>
-                  <m:oMathPara xmlns:m="http://schemas.openxmlformats.org/officeDocument/2006/math">
-                    <m:oMathParaPr>
-                      <m:jc m:val="centerGroup"/>
-                    </m:oMathParaPr>
-                    <m:oMath xmlns:m="http://schemas.openxmlformats.org/officeDocument/2006/math">
-                      <m:r>
-                        <a:rPr lang="en-US" sz="1600" b="0" i="1" smtClean="0">
-                          <a:latin typeface="Cambria Math" panose="02040503050406030204" pitchFamily="18" charset="0"/>
-                        </a:rPr>
-                        <m:t>𝑝</m:t>
-                      </m:r>
-                      <m:r>
-                        <a:rPr lang="en-US" sz="1600" i="1">
-                          <a:latin typeface="Cambria Math" panose="02040503050406030204" pitchFamily="18" charset="0"/>
-                        </a:rPr>
-                        <m:t>=</m:t>
-                      </m:r>
-                      <m:f>
-                        <m:fPr>
-                          <m:ctrlPr>
-                            <a:rPr lang="en-US" sz="1600" i="1">
-                              <a:latin typeface="Cambria Math" panose="02040503050406030204" pitchFamily="18" charset="0"/>
-                            </a:rPr>
-                          </m:ctrlPr>
-                        </m:fPr>
-                        <m:num>
-                          <m:r>
-                            <m:rPr>
-                              <m:sty m:val="p"/>
-                            </m:rPr>
-                            <a:rPr lang="en-US" sz="1600">
-                              <a:latin typeface="Cambria Math" panose="02040503050406030204" pitchFamily="18" charset="0"/>
-                            </a:rPr>
-                            <m:t>Number</m:t>
-                          </m:r>
-                          <m:r>
-                            <a:rPr lang="en-US" sz="1600">
-                              <a:latin typeface="Cambria Math" panose="02040503050406030204" pitchFamily="18" charset="0"/>
-                            </a:rPr>
-                            <m:t> </m:t>
-                          </m:r>
-                          <m:r>
-                            <m:rPr>
-                              <m:sty m:val="p"/>
-                            </m:rPr>
-                            <a:rPr lang="en-US" sz="1600">
-                              <a:latin typeface="Cambria Math" panose="02040503050406030204" pitchFamily="18" charset="0"/>
-                            </a:rPr>
-                            <m:t>of</m:t>
-                          </m:r>
-                          <m:r>
-                            <a:rPr lang="en-US" sz="1600">
-                              <a:latin typeface="Cambria Math" panose="02040503050406030204" pitchFamily="18" charset="0"/>
-                            </a:rPr>
-                            <m:t> </m:t>
-                          </m:r>
-                          <m:r>
-                            <m:rPr>
-                              <m:sty m:val="p"/>
-                            </m:rPr>
-                            <a:rPr lang="en-US" sz="1600">
-                              <a:latin typeface="Cambria Math" panose="02040503050406030204" pitchFamily="18" charset="0"/>
-                            </a:rPr>
-                            <m:t>objects</m:t>
-                          </m:r>
-                          <m:r>
-                            <a:rPr lang="en-US" sz="1600">
-                              <a:latin typeface="Cambria Math" panose="02040503050406030204" pitchFamily="18" charset="0"/>
-                            </a:rPr>
-                            <m:t> </m:t>
-                          </m:r>
-                          <m:r>
-                            <m:rPr>
-                              <m:sty m:val="p"/>
-                            </m:rPr>
-                            <a:rPr lang="en-US" sz="1600">
-                              <a:latin typeface="Cambria Math" panose="02040503050406030204" pitchFamily="18" charset="0"/>
-                            </a:rPr>
-                            <m:t>in</m:t>
-                          </m:r>
-                          <m:r>
-                            <a:rPr lang="en-US" sz="1600">
-                              <a:latin typeface="Cambria Math" panose="02040503050406030204" pitchFamily="18" charset="0"/>
-                            </a:rPr>
-                            <m:t> </m:t>
-                          </m:r>
-                          <m:r>
-                            <m:rPr>
-                              <m:sty m:val="p"/>
-                            </m:rPr>
-                            <a:rPr lang="en-US" sz="1600">
-                              <a:latin typeface="Cambria Math" panose="02040503050406030204" pitchFamily="18" charset="0"/>
-                            </a:rPr>
-                            <m:t>category</m:t>
-                          </m:r>
-                        </m:num>
-                        <m:den>
-                          <m:r>
-                            <a:rPr lang="en-US" sz="1600" b="0" i="1" smtClean="0">
-                              <a:latin typeface="Cambria Math" panose="02040503050406030204" pitchFamily="18" charset="0"/>
-                            </a:rPr>
-                            <m:t>𝑁</m:t>
-                          </m:r>
-                        </m:den>
-                      </m:f>
-                    </m:oMath>
-                  </m:oMathPara>
-                </a14:m>
-                <a:endParaRPr lang="en-US" sz="2800" dirty="0"/>
-              </a:p>
-            </p:txBody>
-          </p:sp>
-        </mc:Choice>
-        <mc:Fallback xmlns="">
-          <p:sp>
-            <p:nvSpPr>
-              <p:cNvPr id="9" name="TextBox 8">
-                <a:extLst>
-                  <a:ext uri="{FF2B5EF4-FFF2-40B4-BE49-F238E27FC236}">
-                    <a16:creationId xmlns:a16="http://schemas.microsoft.com/office/drawing/2014/main" id="{B733D296-CE0C-8B9E-040E-8C52B2653FEC}"/>
-                  </a:ext>
-                </a:extLst>
-              </p:cNvPr>
-              <p:cNvSpPr txBox="1">
-                <a:spLocks noRot="1" noChangeAspect="1" noMove="1" noResize="1" noEditPoints="1" noAdjustHandles="1" noChangeArrowheads="1" noChangeShapeType="1" noTextEdit="1"/>
-              </p:cNvSpPr>
-              <p:nvPr/>
-            </p:nvSpPr>
-            <p:spPr>
-              <a:xfrm>
-                <a:off x="7955493" y="1034969"/>
-                <a:ext cx="3092706" cy="1579856"/>
-              </a:xfrm>
-              <a:prstGeom prst="rect">
-                <a:avLst/>
-              </a:prstGeom>
-              <a:blipFill>
-                <a:blip r:embed="rId4"/>
-                <a:stretch>
-                  <a:fillRect/>
-                </a:stretch>
-              </a:blipFill>
-            </p:spPr>
-            <p:txBody>
-              <a:bodyPr/>
-              <a:lstStyle/>
-              <a:p>
-                <a:r>
-                  <a:rPr lang="en-US">
-                    <a:noFill/>
-                  </a:rPr>
-                  <a:t> </a:t>
-                </a:r>
-              </a:p>
-            </p:txBody>
-          </p:sp>
-        </mc:Fallback>
-      </mc:AlternateContent>
-      <p:sp>
-        <p:nvSpPr>
-          <p:cNvPr id="10" name="TextBox 9">
-            <a:extLst>
-              <a:ext uri="{FF2B5EF4-FFF2-40B4-BE49-F238E27FC236}">
-                <a16:creationId xmlns:a16="http://schemas.microsoft.com/office/drawing/2014/main" id="{BDBBFD04-48B7-49DB-CB8D-875BD6D1005B}"/>
-              </a:ext>
-            </a:extLst>
-          </p:cNvPr>
-          <p:cNvSpPr txBox="1"/>
-          <p:nvPr/>
-        </p:nvSpPr>
-        <p:spPr>
-          <a:xfrm>
-            <a:off x="9208738" y="544179"/>
-            <a:ext cx="1163524" cy="369332"/>
-          </a:xfrm>
-          <a:prstGeom prst="rect">
-            <a:avLst/>
-          </a:prstGeom>
-          <a:noFill/>
-        </p:spPr>
-        <p:txBody>
-          <a:bodyPr wrap="none" rtlCol="0">
-            <a:spAutoFit/>
-          </a:bodyPr>
-          <a:lstStyle/>
-          <a:p>
-            <a:r>
-              <a:rPr lang="en-US" dirty="0"/>
-              <a:t>Parameter</a:t>
-            </a:r>
-          </a:p>
-        </p:txBody>
-      </p:sp>
-      <p:sp>
-        <p:nvSpPr>
-          <p:cNvPr id="11" name="TextBox 10">
-            <a:extLst>
-              <a:ext uri="{FF2B5EF4-FFF2-40B4-BE49-F238E27FC236}">
-                <a16:creationId xmlns:a16="http://schemas.microsoft.com/office/drawing/2014/main" id="{E2F259E1-1347-CBCF-28DF-A34EDFD10CC8}"/>
-              </a:ext>
-            </a:extLst>
-          </p:cNvPr>
-          <p:cNvSpPr txBox="1"/>
-          <p:nvPr/>
-        </p:nvSpPr>
-        <p:spPr>
-          <a:xfrm>
-            <a:off x="9331624" y="3866527"/>
-            <a:ext cx="917752" cy="369332"/>
-          </a:xfrm>
-          <a:prstGeom prst="rect">
-            <a:avLst/>
-          </a:prstGeom>
-          <a:noFill/>
-        </p:spPr>
-        <p:txBody>
-          <a:bodyPr wrap="none" rtlCol="0">
-            <a:spAutoFit/>
-          </a:bodyPr>
-          <a:lstStyle/>
-          <a:p>
-            <a:r>
-              <a:rPr lang="en-US" dirty="0"/>
-              <a:t>Statistic</a:t>
-            </a:r>
-          </a:p>
-        </p:txBody>
-      </p:sp>
-    </p:spTree>
-    <p:extLst>
-      <p:ext uri="{BB962C8B-B14F-4D97-AF65-F5344CB8AC3E}">
-        <p14:creationId xmlns:p14="http://schemas.microsoft.com/office/powerpoint/2010/main" val="667614722"/>
-      </p:ext>
-    </p:extLst>
-  </p:cSld>
-  <p:clrMapOvr>
-    <a:masterClrMapping/>
-  </p:clrMapOvr>
-</p:sld>
-</file>
-
-<file path=ppt/slides/slide21.xml><?xml version="1.0" encoding="utf-8"?>
-<p:sld xmlns:a="http://schemas.openxmlformats.org/drawingml/2006/main" xmlns:r="http://schemas.openxmlformats.org/officeDocument/2006/relationships" xmlns:p="http://schemas.openxmlformats.org/presentationml/2006/main">
-  <p:cSld>
-    <p:bg>
-      <p:bgPr>
-        <a:solidFill>
-          <a:schemeClr val="bg1"/>
-        </a:solidFill>
-        <a:effectLst/>
-      </p:bgPr>
-    </p:bg>
-    <p:spTree>
-      <p:nvGrpSpPr>
-        <p:cNvPr id="1" name=""/>
-        <p:cNvGrpSpPr/>
-        <p:nvPr/>
-      </p:nvGrpSpPr>
-      <p:grpSpPr>
-        <a:xfrm>
-          <a:off x="0" y="0"/>
-          <a:ext cx="0" cy="0"/>
-          <a:chOff x="0" y="0"/>
-          <a:chExt cx="0" cy="0"/>
-        </a:xfrm>
-      </p:grpSpPr>
-      <p:sp useBgFill="1">
-        <p:nvSpPr>
-          <p:cNvPr id="25" name="Rectangle 24">
-            <a:extLst>
-              <a:ext uri="{FF2B5EF4-FFF2-40B4-BE49-F238E27FC236}">
-                <a16:creationId xmlns:a16="http://schemas.microsoft.com/office/drawing/2014/main" id="{45D37F4E-DDB4-456B-97E0-9937730A039F}"/>
-              </a:ext>
-              <a:ext uri="{C183D7F6-B498-43B3-948B-1728B52AA6E4}">
-                <adec:decorative xmlns:adec="http://schemas.microsoft.com/office/drawing/2017/decorative" val="1"/>
-              </a:ext>
-            </a:extLst>
-          </p:cNvPr>
-          <p:cNvSpPr>
-            <a:spLocks noGrp="1" noRot="1" noChangeAspect="1" noMove="1" noResize="1" noEditPoints="1" noAdjustHandles="1" noChangeArrowheads="1" noChangeShapeType="1" noTextEdit="1"/>
-          </p:cNvSpPr>
-          <p:nvPr>
-            <p:extLst>
-              <p:ext uri="{386F3935-93C4-4BCD-93E2-E3B085C9AB24}">
-                <p16:designElem xmlns:p16="http://schemas.microsoft.com/office/powerpoint/2015/main" val="1"/>
-              </p:ext>
-            </p:extLst>
-          </p:nvPr>
-        </p:nvSpPr>
-        <p:spPr>
-          <a:xfrm>
-            <a:off x="0" y="0"/>
-            <a:ext cx="12188952" cy="6858000"/>
-          </a:xfrm>
-          <a:prstGeom prst="rect">
-            <a:avLst/>
-          </a:prstGeom>
-          <a:ln>
-            <a:noFill/>
-          </a:ln>
-        </p:spPr>
-        <p:style>
-          <a:lnRef idx="2">
-            <a:schemeClr val="accent1">
-              <a:shade val="50000"/>
-            </a:schemeClr>
-          </a:lnRef>
-          <a:fillRef idx="1">
-            <a:schemeClr val="accent1"/>
-          </a:fillRef>
-          <a:effectRef idx="0">
-            <a:schemeClr val="accent1"/>
-          </a:effectRef>
-          <a:fontRef idx="minor">
-            <a:schemeClr val="lt1"/>
-          </a:fontRef>
-        </p:style>
-        <p:txBody>
-          <a:bodyPr rtlCol="0" anchor="ctr"/>
-          <a:lstStyle/>
-          <a:p>
-            <a:pPr algn="ctr"/>
-            <a:endParaRPr lang="en-US"/>
-          </a:p>
-        </p:txBody>
-      </p:sp>
-      <p:sp>
-        <p:nvSpPr>
-          <p:cNvPr id="2" name="Title 1">
-            <a:extLst>
-              <a:ext uri="{FF2B5EF4-FFF2-40B4-BE49-F238E27FC236}">
-                <a16:creationId xmlns:a16="http://schemas.microsoft.com/office/drawing/2014/main" id="{B439A765-E82A-A046-FB51-3BB63AADC3FD}"/>
-              </a:ext>
-            </a:extLst>
-          </p:cNvPr>
-          <p:cNvSpPr>
-            <a:spLocks noGrp="1"/>
-          </p:cNvSpPr>
-          <p:nvPr>
-            <p:ph type="title"/>
-          </p:nvPr>
-        </p:nvSpPr>
-        <p:spPr>
-          <a:xfrm>
-            <a:off x="572493" y="238539"/>
-            <a:ext cx="11018520" cy="1434415"/>
-          </a:xfrm>
-        </p:spPr>
-        <p:txBody>
-          <a:bodyPr anchor="b">
-            <a:normAutofit/>
-          </a:bodyPr>
-          <a:lstStyle/>
-          <a:p>
-            <a:r>
-              <a:rPr lang="en-US" sz="5400"/>
-              <a:t>Example: Gallup Pool</a:t>
-            </a:r>
-          </a:p>
-        </p:txBody>
-      </p:sp>
-      <p:sp>
-        <p:nvSpPr>
-          <p:cNvPr id="27" name="sketchy line">
-            <a:extLst>
-              <a:ext uri="{FF2B5EF4-FFF2-40B4-BE49-F238E27FC236}">
-                <a16:creationId xmlns:a16="http://schemas.microsoft.com/office/drawing/2014/main" id="{B2DD41CD-8F47-4F56-AD12-4E2FF7696987}"/>
-              </a:ext>
-              <a:ext uri="{C183D7F6-B498-43B3-948B-1728B52AA6E4}">
-                <adec:decorative xmlns:adec="http://schemas.microsoft.com/office/drawing/2017/decorative" val="1"/>
-              </a:ext>
-            </a:extLst>
-          </p:cNvPr>
-          <p:cNvSpPr>
-            <a:spLocks noGrp="1" noRot="1" noChangeAspect="1" noMove="1" noResize="1" noEditPoints="1" noAdjustHandles="1" noChangeArrowheads="1" noChangeShapeType="1" noTextEdit="1"/>
-          </p:cNvSpPr>
-          <p:nvPr>
-            <p:extLst>
-              <p:ext uri="{386F3935-93C4-4BCD-93E2-E3B085C9AB24}">
-                <p16:designElem xmlns:p16="http://schemas.microsoft.com/office/powerpoint/2015/main" val="1"/>
-              </p:ext>
-            </p:extLst>
-          </p:nvPr>
-        </p:nvSpPr>
-        <p:spPr>
-          <a:xfrm>
-            <a:off x="572493" y="1681544"/>
-            <a:ext cx="10972800" cy="18288"/>
-          </a:xfrm>
-          <a:custGeom>
-            <a:avLst/>
-            <a:gdLst>
-              <a:gd name="connsiteX0" fmla="*/ 0 w 10972800"/>
-              <a:gd name="connsiteY0" fmla="*/ 0 h 18288"/>
-              <a:gd name="connsiteX1" fmla="*/ 356616 w 10972800"/>
-              <a:gd name="connsiteY1" fmla="*/ 0 h 18288"/>
-              <a:gd name="connsiteX2" fmla="*/ 1042416 w 10972800"/>
-              <a:gd name="connsiteY2" fmla="*/ 0 h 18288"/>
-              <a:gd name="connsiteX3" fmla="*/ 1947672 w 10972800"/>
-              <a:gd name="connsiteY3" fmla="*/ 0 h 18288"/>
-              <a:gd name="connsiteX4" fmla="*/ 2633472 w 10972800"/>
-              <a:gd name="connsiteY4" fmla="*/ 0 h 18288"/>
-              <a:gd name="connsiteX5" fmla="*/ 2990088 w 10972800"/>
-              <a:gd name="connsiteY5" fmla="*/ 0 h 18288"/>
-              <a:gd name="connsiteX6" fmla="*/ 3456432 w 10972800"/>
-              <a:gd name="connsiteY6" fmla="*/ 0 h 18288"/>
-              <a:gd name="connsiteX7" fmla="*/ 4361688 w 10972800"/>
-              <a:gd name="connsiteY7" fmla="*/ 0 h 18288"/>
-              <a:gd name="connsiteX8" fmla="*/ 5266944 w 10972800"/>
-              <a:gd name="connsiteY8" fmla="*/ 0 h 18288"/>
-              <a:gd name="connsiteX9" fmla="*/ 6172200 w 10972800"/>
-              <a:gd name="connsiteY9" fmla="*/ 0 h 18288"/>
-              <a:gd name="connsiteX10" fmla="*/ 6528816 w 10972800"/>
-              <a:gd name="connsiteY10" fmla="*/ 0 h 18288"/>
-              <a:gd name="connsiteX11" fmla="*/ 7214616 w 10972800"/>
-              <a:gd name="connsiteY11" fmla="*/ 0 h 18288"/>
-              <a:gd name="connsiteX12" fmla="*/ 7790688 w 10972800"/>
-              <a:gd name="connsiteY12" fmla="*/ 0 h 18288"/>
-              <a:gd name="connsiteX13" fmla="*/ 8147304 w 10972800"/>
-              <a:gd name="connsiteY13" fmla="*/ 0 h 18288"/>
-              <a:gd name="connsiteX14" fmla="*/ 9052560 w 10972800"/>
-              <a:gd name="connsiteY14" fmla="*/ 0 h 18288"/>
-              <a:gd name="connsiteX15" fmla="*/ 9409176 w 10972800"/>
-              <a:gd name="connsiteY15" fmla="*/ 0 h 18288"/>
-              <a:gd name="connsiteX16" fmla="*/ 9765792 w 10972800"/>
-              <a:gd name="connsiteY16" fmla="*/ 0 h 18288"/>
-              <a:gd name="connsiteX17" fmla="*/ 10341864 w 10972800"/>
-              <a:gd name="connsiteY17" fmla="*/ 0 h 18288"/>
-              <a:gd name="connsiteX18" fmla="*/ 10972800 w 10972800"/>
-              <a:gd name="connsiteY18" fmla="*/ 0 h 18288"/>
-              <a:gd name="connsiteX19" fmla="*/ 10972800 w 10972800"/>
-              <a:gd name="connsiteY19" fmla="*/ 18288 h 18288"/>
-              <a:gd name="connsiteX20" fmla="*/ 10177272 w 10972800"/>
-              <a:gd name="connsiteY20" fmla="*/ 18288 h 18288"/>
-              <a:gd name="connsiteX21" fmla="*/ 9820656 w 10972800"/>
-              <a:gd name="connsiteY21" fmla="*/ 18288 h 18288"/>
-              <a:gd name="connsiteX22" fmla="*/ 9464040 w 10972800"/>
-              <a:gd name="connsiteY22" fmla="*/ 18288 h 18288"/>
-              <a:gd name="connsiteX23" fmla="*/ 8778240 w 10972800"/>
-              <a:gd name="connsiteY23" fmla="*/ 18288 h 18288"/>
-              <a:gd name="connsiteX24" fmla="*/ 8421624 w 10972800"/>
-              <a:gd name="connsiteY24" fmla="*/ 18288 h 18288"/>
-              <a:gd name="connsiteX25" fmla="*/ 7735824 w 10972800"/>
-              <a:gd name="connsiteY25" fmla="*/ 18288 h 18288"/>
-              <a:gd name="connsiteX26" fmla="*/ 6940296 w 10972800"/>
-              <a:gd name="connsiteY26" fmla="*/ 18288 h 18288"/>
-              <a:gd name="connsiteX27" fmla="*/ 6254496 w 10972800"/>
-              <a:gd name="connsiteY27" fmla="*/ 18288 h 18288"/>
-              <a:gd name="connsiteX28" fmla="*/ 5458968 w 10972800"/>
-              <a:gd name="connsiteY28" fmla="*/ 18288 h 18288"/>
-              <a:gd name="connsiteX29" fmla="*/ 4663440 w 10972800"/>
-              <a:gd name="connsiteY29" fmla="*/ 18288 h 18288"/>
-              <a:gd name="connsiteX30" fmla="*/ 4306824 w 10972800"/>
-              <a:gd name="connsiteY30" fmla="*/ 18288 h 18288"/>
-              <a:gd name="connsiteX31" fmla="*/ 3840480 w 10972800"/>
-              <a:gd name="connsiteY31" fmla="*/ 18288 h 18288"/>
-              <a:gd name="connsiteX32" fmla="*/ 3264408 w 10972800"/>
-              <a:gd name="connsiteY32" fmla="*/ 18288 h 18288"/>
-              <a:gd name="connsiteX33" fmla="*/ 2578608 w 10972800"/>
-              <a:gd name="connsiteY33" fmla="*/ 18288 h 18288"/>
-              <a:gd name="connsiteX34" fmla="*/ 1673352 w 10972800"/>
-              <a:gd name="connsiteY34" fmla="*/ 18288 h 18288"/>
-              <a:gd name="connsiteX35" fmla="*/ 877824 w 10972800"/>
-              <a:gd name="connsiteY35" fmla="*/ 18288 h 18288"/>
-              <a:gd name="connsiteX36" fmla="*/ 0 w 10972800"/>
-              <a:gd name="connsiteY36" fmla="*/ 18288 h 18288"/>
-              <a:gd name="connsiteX37" fmla="*/ 0 w 10972800"/>
-              <a:gd name="connsiteY37" fmla="*/ 0 h 18288"/>
-            </a:gdLst>
-            <a:ahLst/>
-            <a:cxnLst>
-              <a:cxn ang="0">
-                <a:pos x="connsiteX0" y="connsiteY0"/>
-              </a:cxn>
-              <a:cxn ang="0">
-                <a:pos x="connsiteX1" y="connsiteY1"/>
-              </a:cxn>
-              <a:cxn ang="0">
-                <a:pos x="connsiteX2" y="connsiteY2"/>
-              </a:cxn>
-              <a:cxn ang="0">
-                <a:pos x="connsiteX3" y="connsiteY3"/>
-              </a:cxn>
-              <a:cxn ang="0">
-                <a:pos x="connsiteX4" y="connsiteY4"/>
-              </a:cxn>
-              <a:cxn ang="0">
-                <a:pos x="connsiteX5" y="connsiteY5"/>
-              </a:cxn>
-              <a:cxn ang="0">
-                <a:pos x="connsiteX6" y="connsiteY6"/>
-              </a:cxn>
-              <a:cxn ang="0">
-                <a:pos x="connsiteX7" y="connsiteY7"/>
-              </a:cxn>
-              <a:cxn ang="0">
-                <a:pos x="connsiteX8" y="connsiteY8"/>
-              </a:cxn>
-              <a:cxn ang="0">
-                <a:pos x="connsiteX9" y="connsiteY9"/>
-              </a:cxn>
-              <a:cxn ang="0">
-                <a:pos x="connsiteX10" y="connsiteY10"/>
-              </a:cxn>
-              <a:cxn ang="0">
-                <a:pos x="connsiteX11" y="connsiteY11"/>
-              </a:cxn>
-              <a:cxn ang="0">
-                <a:pos x="connsiteX12" y="connsiteY12"/>
-              </a:cxn>
-              <a:cxn ang="0">
-                <a:pos x="connsiteX13" y="connsiteY13"/>
-              </a:cxn>
-              <a:cxn ang="0">
-                <a:pos x="connsiteX14" y="connsiteY14"/>
-              </a:cxn>
-              <a:cxn ang="0">
-                <a:pos x="connsiteX15" y="connsiteY15"/>
-              </a:cxn>
-              <a:cxn ang="0">
-                <a:pos x="connsiteX16" y="connsiteY16"/>
-              </a:cxn>
-              <a:cxn ang="0">
-                <a:pos x="connsiteX17" y="connsiteY17"/>
-              </a:cxn>
-              <a:cxn ang="0">
-                <a:pos x="connsiteX18" y="connsiteY18"/>
-              </a:cxn>
-              <a:cxn ang="0">
-                <a:pos x="connsiteX19" y="connsiteY19"/>
-              </a:cxn>
-              <a:cxn ang="0">
-                <a:pos x="connsiteX20" y="connsiteY20"/>
-              </a:cxn>
-              <a:cxn ang="0">
-                <a:pos x="connsiteX21" y="connsiteY21"/>
-              </a:cxn>
-              <a:cxn ang="0">
-                <a:pos x="connsiteX22" y="connsiteY22"/>
-              </a:cxn>
-              <a:cxn ang="0">
-                <a:pos x="connsiteX23" y="connsiteY23"/>
-              </a:cxn>
-              <a:cxn ang="0">
-                <a:pos x="connsiteX24" y="connsiteY24"/>
-              </a:cxn>
-              <a:cxn ang="0">
-                <a:pos x="connsiteX25" y="connsiteY25"/>
-              </a:cxn>
-              <a:cxn ang="0">
-                <a:pos x="connsiteX26" y="connsiteY26"/>
-              </a:cxn>
-              <a:cxn ang="0">
-                <a:pos x="connsiteX27" y="connsiteY27"/>
-              </a:cxn>
-              <a:cxn ang="0">
-                <a:pos x="connsiteX28" y="connsiteY28"/>
-              </a:cxn>
-              <a:cxn ang="0">
-                <a:pos x="connsiteX29" y="connsiteY29"/>
-              </a:cxn>
-              <a:cxn ang="0">
-                <a:pos x="connsiteX30" y="connsiteY30"/>
-              </a:cxn>
-              <a:cxn ang="0">
-                <a:pos x="connsiteX31" y="connsiteY31"/>
-              </a:cxn>
-              <a:cxn ang="0">
-                <a:pos x="connsiteX32" y="connsiteY32"/>
-              </a:cxn>
-              <a:cxn ang="0">
-                <a:pos x="connsiteX33" y="connsiteY33"/>
-              </a:cxn>
-              <a:cxn ang="0">
-                <a:pos x="connsiteX34" y="connsiteY34"/>
-              </a:cxn>
-              <a:cxn ang="0">
-                <a:pos x="connsiteX35" y="connsiteY35"/>
-              </a:cxn>
-              <a:cxn ang="0">
-                <a:pos x="connsiteX36" y="connsiteY36"/>
-              </a:cxn>
-              <a:cxn ang="0">
-                <a:pos x="connsiteX37" y="connsiteY37"/>
-              </a:cxn>
-            </a:cxnLst>
-            <a:rect l="l" t="t" r="r" b="b"/>
-            <a:pathLst>
-              <a:path w="10972800" h="18288" fill="none" extrusionOk="0">
-                <a:moveTo>
-                  <a:pt x="0" y="0"/>
-                </a:moveTo>
-                <a:cubicBezTo>
-                  <a:pt x="165916" y="-1866"/>
-                  <a:pt x="188720" y="13756"/>
-                  <a:pt x="356616" y="0"/>
-                </a:cubicBezTo>
-                <a:cubicBezTo>
-                  <a:pt x="524512" y="-13756"/>
-                  <a:pt x="734781" y="8922"/>
-                  <a:pt x="1042416" y="0"/>
-                </a:cubicBezTo>
-                <a:cubicBezTo>
-                  <a:pt x="1350051" y="-8922"/>
-                  <a:pt x="1595982" y="-26315"/>
-                  <a:pt x="1947672" y="0"/>
-                </a:cubicBezTo>
-                <a:cubicBezTo>
-                  <a:pt x="2299362" y="26315"/>
-                  <a:pt x="2292691" y="-19526"/>
-                  <a:pt x="2633472" y="0"/>
-                </a:cubicBezTo>
-                <a:cubicBezTo>
-                  <a:pt x="2974253" y="19526"/>
-                  <a:pt x="2857309" y="10773"/>
-                  <a:pt x="2990088" y="0"/>
-                </a:cubicBezTo>
-                <a:cubicBezTo>
-                  <a:pt x="3122867" y="-10773"/>
-                  <a:pt x="3359343" y="7194"/>
-                  <a:pt x="3456432" y="0"/>
-                </a:cubicBezTo>
-                <a:cubicBezTo>
-                  <a:pt x="3553521" y="-7194"/>
-                  <a:pt x="4136258" y="5108"/>
-                  <a:pt x="4361688" y="0"/>
-                </a:cubicBezTo>
-                <a:cubicBezTo>
-                  <a:pt x="4587118" y="-5108"/>
-                  <a:pt x="4992424" y="-42958"/>
-                  <a:pt x="5266944" y="0"/>
-                </a:cubicBezTo>
-                <a:cubicBezTo>
-                  <a:pt x="5541464" y="42958"/>
-                  <a:pt x="5882966" y="-3430"/>
-                  <a:pt x="6172200" y="0"/>
-                </a:cubicBezTo>
-                <a:cubicBezTo>
-                  <a:pt x="6461434" y="3430"/>
-                  <a:pt x="6432127" y="6688"/>
-                  <a:pt x="6528816" y="0"/>
-                </a:cubicBezTo>
-                <a:cubicBezTo>
-                  <a:pt x="6625505" y="-6688"/>
-                  <a:pt x="6916805" y="-436"/>
-                  <a:pt x="7214616" y="0"/>
-                </a:cubicBezTo>
-                <a:cubicBezTo>
-                  <a:pt x="7512427" y="436"/>
-                  <a:pt x="7626159" y="-6909"/>
-                  <a:pt x="7790688" y="0"/>
-                </a:cubicBezTo>
-                <a:cubicBezTo>
-                  <a:pt x="7955217" y="6909"/>
-                  <a:pt x="8048891" y="15307"/>
-                  <a:pt x="8147304" y="0"/>
-                </a:cubicBezTo>
-                <a:cubicBezTo>
-                  <a:pt x="8245717" y="-15307"/>
-                  <a:pt x="8645618" y="-11734"/>
-                  <a:pt x="9052560" y="0"/>
-                </a:cubicBezTo>
-                <a:cubicBezTo>
-                  <a:pt x="9459502" y="11734"/>
-                  <a:pt x="9320584" y="8388"/>
-                  <a:pt x="9409176" y="0"/>
-                </a:cubicBezTo>
-                <a:cubicBezTo>
-                  <a:pt x="9497768" y="-8388"/>
-                  <a:pt x="9644192" y="8379"/>
-                  <a:pt x="9765792" y="0"/>
-                </a:cubicBezTo>
-                <a:cubicBezTo>
-                  <a:pt x="9887392" y="-8379"/>
-                  <a:pt x="10105220" y="-12663"/>
-                  <a:pt x="10341864" y="0"/>
-                </a:cubicBezTo>
-                <a:cubicBezTo>
-                  <a:pt x="10578508" y="12663"/>
-                  <a:pt x="10773103" y="-5786"/>
-                  <a:pt x="10972800" y="0"/>
-                </a:cubicBezTo>
-                <a:cubicBezTo>
-                  <a:pt x="10972146" y="8818"/>
-                  <a:pt x="10972240" y="13823"/>
-                  <a:pt x="10972800" y="18288"/>
-                </a:cubicBezTo>
-                <a:cubicBezTo>
-                  <a:pt x="10588778" y="31598"/>
-                  <a:pt x="10543381" y="-12698"/>
-                  <a:pt x="10177272" y="18288"/>
-                </a:cubicBezTo>
-                <a:cubicBezTo>
-                  <a:pt x="9811163" y="49274"/>
-                  <a:pt x="9996817" y="25662"/>
-                  <a:pt x="9820656" y="18288"/>
-                </a:cubicBezTo>
-                <a:cubicBezTo>
-                  <a:pt x="9644495" y="10914"/>
-                  <a:pt x="9607007" y="31631"/>
-                  <a:pt x="9464040" y="18288"/>
-                </a:cubicBezTo>
-                <a:cubicBezTo>
-                  <a:pt x="9321073" y="4945"/>
-                  <a:pt x="9114189" y="28940"/>
-                  <a:pt x="8778240" y="18288"/>
-                </a:cubicBezTo>
-                <a:cubicBezTo>
-                  <a:pt x="8442291" y="7636"/>
-                  <a:pt x="8594763" y="987"/>
-                  <a:pt x="8421624" y="18288"/>
-                </a:cubicBezTo>
-                <a:cubicBezTo>
-                  <a:pt x="8248485" y="35589"/>
-                  <a:pt x="7929515" y="37573"/>
-                  <a:pt x="7735824" y="18288"/>
-                </a:cubicBezTo>
-                <a:cubicBezTo>
-                  <a:pt x="7542133" y="-997"/>
-                  <a:pt x="7252504" y="33858"/>
-                  <a:pt x="6940296" y="18288"/>
-                </a:cubicBezTo>
-                <a:cubicBezTo>
-                  <a:pt x="6628088" y="2718"/>
-                  <a:pt x="6528503" y="48389"/>
-                  <a:pt x="6254496" y="18288"/>
-                </a:cubicBezTo>
-                <a:cubicBezTo>
-                  <a:pt x="5980489" y="-11813"/>
-                  <a:pt x="5695784" y="-3740"/>
-                  <a:pt x="5458968" y="18288"/>
-                </a:cubicBezTo>
-                <a:cubicBezTo>
-                  <a:pt x="5222152" y="40316"/>
-                  <a:pt x="5010751" y="19095"/>
-                  <a:pt x="4663440" y="18288"/>
-                </a:cubicBezTo>
-                <a:cubicBezTo>
-                  <a:pt x="4316129" y="17481"/>
-                  <a:pt x="4425552" y="1606"/>
-                  <a:pt x="4306824" y="18288"/>
-                </a:cubicBezTo>
-                <a:cubicBezTo>
-                  <a:pt x="4188096" y="34970"/>
-                  <a:pt x="3941535" y="7481"/>
-                  <a:pt x="3840480" y="18288"/>
-                </a:cubicBezTo>
-                <a:cubicBezTo>
-                  <a:pt x="3739425" y="29095"/>
-                  <a:pt x="3402388" y="17641"/>
-                  <a:pt x="3264408" y="18288"/>
-                </a:cubicBezTo>
-                <a:cubicBezTo>
-                  <a:pt x="3126428" y="18935"/>
-                  <a:pt x="2776779" y="9983"/>
-                  <a:pt x="2578608" y="18288"/>
-                </a:cubicBezTo>
-                <a:cubicBezTo>
-                  <a:pt x="2380437" y="26593"/>
-                  <a:pt x="1909468" y="25818"/>
-                  <a:pt x="1673352" y="18288"/>
-                </a:cubicBezTo>
-                <a:cubicBezTo>
-                  <a:pt x="1437236" y="10758"/>
-                  <a:pt x="1131180" y="49884"/>
-                  <a:pt x="877824" y="18288"/>
-                </a:cubicBezTo>
-                <a:cubicBezTo>
-                  <a:pt x="624468" y="-13308"/>
-                  <a:pt x="206753" y="2195"/>
-                  <a:pt x="0" y="18288"/>
-                </a:cubicBezTo>
-                <a:cubicBezTo>
-                  <a:pt x="313" y="10654"/>
-                  <a:pt x="-263" y="4056"/>
-                  <a:pt x="0" y="0"/>
-                </a:cubicBezTo>
-                <a:close/>
-              </a:path>
-              <a:path w="10972800" h="18288" stroke="0" extrusionOk="0">
-                <a:moveTo>
-                  <a:pt x="0" y="0"/>
-                </a:moveTo>
-                <a:cubicBezTo>
-                  <a:pt x="164017" y="-17675"/>
-                  <a:pt x="309425" y="9913"/>
-                  <a:pt x="466344" y="0"/>
-                </a:cubicBezTo>
-                <a:cubicBezTo>
-                  <a:pt x="623263" y="-9913"/>
-                  <a:pt x="659300" y="-14524"/>
-                  <a:pt x="822960" y="0"/>
-                </a:cubicBezTo>
-                <a:cubicBezTo>
-                  <a:pt x="986620" y="14524"/>
-                  <a:pt x="1105222" y="-16481"/>
-                  <a:pt x="1289304" y="0"/>
-                </a:cubicBezTo>
-                <a:cubicBezTo>
-                  <a:pt x="1473386" y="16481"/>
-                  <a:pt x="1693223" y="26161"/>
-                  <a:pt x="1975104" y="0"/>
-                </a:cubicBezTo>
-                <a:cubicBezTo>
-                  <a:pt x="2256985" y="-26161"/>
-                  <a:pt x="2435781" y="23061"/>
-                  <a:pt x="2770632" y="0"/>
-                </a:cubicBezTo>
-                <a:cubicBezTo>
-                  <a:pt x="3105483" y="-23061"/>
-                  <a:pt x="3247479" y="-44011"/>
-                  <a:pt x="3675888" y="0"/>
-                </a:cubicBezTo>
-                <a:cubicBezTo>
-                  <a:pt x="4104297" y="44011"/>
-                  <a:pt x="4280918" y="4017"/>
-                  <a:pt x="4581144" y="0"/>
-                </a:cubicBezTo>
-                <a:cubicBezTo>
-                  <a:pt x="4881370" y="-4017"/>
-                  <a:pt x="5021699" y="-11889"/>
-                  <a:pt x="5157216" y="0"/>
-                </a:cubicBezTo>
-                <a:cubicBezTo>
-                  <a:pt x="5292733" y="11889"/>
-                  <a:pt x="5603398" y="-17698"/>
-                  <a:pt x="5952744" y="0"/>
-                </a:cubicBezTo>
-                <a:cubicBezTo>
-                  <a:pt x="6302090" y="17698"/>
-                  <a:pt x="6353093" y="-11909"/>
-                  <a:pt x="6638544" y="0"/>
-                </a:cubicBezTo>
-                <a:cubicBezTo>
-                  <a:pt x="6923995" y="11909"/>
-                  <a:pt x="7053404" y="21630"/>
-                  <a:pt x="7214616" y="0"/>
-                </a:cubicBezTo>
-                <a:cubicBezTo>
-                  <a:pt x="7375828" y="-21630"/>
-                  <a:pt x="7837963" y="3886"/>
-                  <a:pt x="8010144" y="0"/>
-                </a:cubicBezTo>
-                <a:cubicBezTo>
-                  <a:pt x="8182325" y="-3886"/>
-                  <a:pt x="8224183" y="16009"/>
-                  <a:pt x="8366760" y="0"/>
-                </a:cubicBezTo>
-                <a:cubicBezTo>
-                  <a:pt x="8509337" y="-16009"/>
-                  <a:pt x="8687920" y="-5720"/>
-                  <a:pt x="8942832" y="0"/>
-                </a:cubicBezTo>
-                <a:cubicBezTo>
-                  <a:pt x="9197744" y="5720"/>
-                  <a:pt x="9368437" y="20479"/>
-                  <a:pt x="9628632" y="0"/>
-                </a:cubicBezTo>
-                <a:cubicBezTo>
-                  <a:pt x="9888827" y="-20479"/>
-                  <a:pt x="10560858" y="-20746"/>
-                  <a:pt x="10972800" y="0"/>
-                </a:cubicBezTo>
-                <a:cubicBezTo>
-                  <a:pt x="10972186" y="5722"/>
-                  <a:pt x="10972980" y="12495"/>
-                  <a:pt x="10972800" y="18288"/>
-                </a:cubicBezTo>
-                <a:cubicBezTo>
-                  <a:pt x="10786146" y="12536"/>
-                  <a:pt x="10623717" y="14033"/>
-                  <a:pt x="10506456" y="18288"/>
-                </a:cubicBezTo>
-                <a:cubicBezTo>
-                  <a:pt x="10389195" y="22543"/>
-                  <a:pt x="10296178" y="20107"/>
-                  <a:pt x="10149840" y="18288"/>
-                </a:cubicBezTo>
-                <a:cubicBezTo>
-                  <a:pt x="10003502" y="16469"/>
-                  <a:pt x="9767530" y="28891"/>
-                  <a:pt x="9464040" y="18288"/>
-                </a:cubicBezTo>
-                <a:cubicBezTo>
-                  <a:pt x="9160550" y="7685"/>
-                  <a:pt x="9229050" y="2659"/>
-                  <a:pt x="8997696" y="18288"/>
-                </a:cubicBezTo>
-                <a:cubicBezTo>
-                  <a:pt x="8766342" y="33917"/>
-                  <a:pt x="8340136" y="34864"/>
-                  <a:pt x="8092440" y="18288"/>
-                </a:cubicBezTo>
-                <a:cubicBezTo>
-                  <a:pt x="7844744" y="1712"/>
-                  <a:pt x="7863720" y="27405"/>
-                  <a:pt x="7735824" y="18288"/>
-                </a:cubicBezTo>
-                <a:cubicBezTo>
-                  <a:pt x="7607928" y="9171"/>
-                  <a:pt x="7323619" y="461"/>
-                  <a:pt x="7050024" y="18288"/>
-                </a:cubicBezTo>
-                <a:cubicBezTo>
-                  <a:pt x="6776429" y="36115"/>
-                  <a:pt x="6787899" y="28206"/>
-                  <a:pt x="6693408" y="18288"/>
-                </a:cubicBezTo>
-                <a:cubicBezTo>
-                  <a:pt x="6598917" y="8370"/>
-                  <a:pt x="6395231" y="19114"/>
-                  <a:pt x="6227064" y="18288"/>
-                </a:cubicBezTo>
-                <a:cubicBezTo>
-                  <a:pt x="6058897" y="17462"/>
-                  <a:pt x="5618582" y="1091"/>
-                  <a:pt x="5431536" y="18288"/>
-                </a:cubicBezTo>
-                <a:cubicBezTo>
-                  <a:pt x="5244490" y="35485"/>
-                  <a:pt x="4729797" y="-9650"/>
-                  <a:pt x="4526280" y="18288"/>
-                </a:cubicBezTo>
-                <a:cubicBezTo>
-                  <a:pt x="4322763" y="46226"/>
-                  <a:pt x="4216797" y="756"/>
-                  <a:pt x="4059936" y="18288"/>
-                </a:cubicBezTo>
-                <a:cubicBezTo>
-                  <a:pt x="3903075" y="35820"/>
-                  <a:pt x="3537912" y="42098"/>
-                  <a:pt x="3374136" y="18288"/>
-                </a:cubicBezTo>
-                <a:cubicBezTo>
-                  <a:pt x="3210360" y="-5522"/>
-                  <a:pt x="3126842" y="39135"/>
-                  <a:pt x="2907792" y="18288"/>
-                </a:cubicBezTo>
-                <a:cubicBezTo>
-                  <a:pt x="2688742" y="-2559"/>
-                  <a:pt x="2490436" y="34100"/>
-                  <a:pt x="2112264" y="18288"/>
-                </a:cubicBezTo>
-                <a:cubicBezTo>
-                  <a:pt x="1734092" y="2476"/>
-                  <a:pt x="1744622" y="-7274"/>
-                  <a:pt x="1536192" y="18288"/>
-                </a:cubicBezTo>
-                <a:cubicBezTo>
-                  <a:pt x="1327762" y="43850"/>
-                  <a:pt x="1189025" y="6435"/>
-                  <a:pt x="1069848" y="18288"/>
-                </a:cubicBezTo>
-                <a:cubicBezTo>
-                  <a:pt x="950671" y="30141"/>
-                  <a:pt x="858345" y="33684"/>
-                  <a:pt x="713232" y="18288"/>
-                </a:cubicBezTo>
-                <a:cubicBezTo>
-                  <a:pt x="568119" y="2892"/>
-                  <a:pt x="250292" y="5410"/>
-                  <a:pt x="0" y="18288"/>
-                </a:cubicBezTo>
-                <a:cubicBezTo>
-                  <a:pt x="465" y="13062"/>
-                  <a:pt x="-894" y="9029"/>
-                  <a:pt x="0" y="0"/>
-                </a:cubicBezTo>
-                <a:close/>
-              </a:path>
-            </a:pathLst>
-          </a:custGeom>
-          <a:solidFill>
-            <a:schemeClr val="accent2">
-              <a:alpha val="75000"/>
-            </a:schemeClr>
-          </a:solidFill>
-          <a:ln w="44450" cap="rnd">
-            <a:solidFill>
-              <a:schemeClr val="accent2">
-                <a:alpha val="75000"/>
-              </a:schemeClr>
-            </a:solidFill>
-            <a:round/>
-            <a:extLst>
-              <a:ext uri="{C807C97D-BFC1-408E-A445-0C87EB9F89A2}">
-                <ask:lineSketchStyleProps xmlns:ask="http://schemas.microsoft.com/office/drawing/2018/sketchyshapes" sd="2727557108">
-                  <a:prstGeom prst="rect">
-                    <a:avLst/>
-                  </a:prstGeom>
-                  <ask:type>
-                    <ask:lineSketchFreehand/>
-                  </ask:type>
-                </ask:lineSketchStyleProps>
-              </a:ext>
-            </a:extLst>
-          </a:ln>
-        </p:spPr>
-        <p:style>
-          <a:lnRef idx="2">
-            <a:schemeClr val="accent1">
-              <a:shade val="50000"/>
-            </a:schemeClr>
-          </a:lnRef>
-          <a:fillRef idx="1">
-            <a:schemeClr val="accent1"/>
-          </a:fillRef>
-          <a:effectRef idx="0">
-            <a:schemeClr val="accent1"/>
-          </a:effectRef>
-          <a:fontRef idx="minor">
-            <a:schemeClr val="lt1"/>
-          </a:fontRef>
-        </p:style>
-        <p:txBody>
-          <a:bodyPr rtlCol="0" anchor="ctr"/>
-          <a:lstStyle/>
-          <a:p>
-            <a:pPr algn="ctr"/>
-            <a:endParaRPr lang="en-US"/>
-          </a:p>
-        </p:txBody>
-      </p:sp>
-      <p:sp>
-        <p:nvSpPr>
-          <p:cNvPr id="3" name="Content Placeholder 2">
-            <a:extLst>
-              <a:ext uri="{FF2B5EF4-FFF2-40B4-BE49-F238E27FC236}">
-                <a16:creationId xmlns:a16="http://schemas.microsoft.com/office/drawing/2014/main" id="{98F68FD7-59F0-F2AD-9F4E-8CCEE48246DD}"/>
-              </a:ext>
-            </a:extLst>
-          </p:cNvPr>
-          <p:cNvSpPr>
-            <a:spLocks noGrp="1"/>
-          </p:cNvSpPr>
-          <p:nvPr>
-            <p:ph idx="1"/>
-          </p:nvPr>
-        </p:nvSpPr>
-        <p:spPr>
-          <a:xfrm>
-            <a:off x="572493" y="2071316"/>
-            <a:ext cx="6713552" cy="4119172"/>
-          </a:xfrm>
-        </p:spPr>
-        <p:txBody>
-          <a:bodyPr anchor="t">
-            <a:normAutofit fontScale="92500" lnSpcReduction="10000"/>
-          </a:bodyPr>
-          <a:lstStyle/>
-          <a:p>
-            <a:r>
-              <a:rPr lang="en-US" sz="1900" dirty="0"/>
-              <a:t>On April 20, 2010, one of the worst environmental disasters took place in the Gulf of Mexico when the Deepwater Horizon offshore oil rig exploded. </a:t>
-            </a:r>
-          </a:p>
-          <a:p>
-            <a:r>
-              <a:rPr lang="en-US" sz="1900" dirty="0"/>
-              <a:t>In response to the spill, many activists called for an end to offshore drilling for oil. </a:t>
-            </a:r>
-          </a:p>
-          <a:p>
-            <a:r>
-              <a:rPr lang="en-US" sz="1900" dirty="0"/>
-              <a:t>Almost nine months later, turbulence in the middle east caused the price of oil to surge to an all-time high. </a:t>
-            </a:r>
-          </a:p>
-          <a:p>
-            <a:r>
-              <a:rPr lang="en-US" sz="1900" dirty="0"/>
-              <a:t>In March 2011, Gallup conducted a survey and found that 60% of Americans favored offshore drilling as means to reduce U.S dependence on foreign oil.</a:t>
-            </a:r>
-          </a:p>
-          <a:p>
-            <a:r>
-              <a:rPr lang="en-US" sz="1900" dirty="0"/>
-              <a:t>The poll was based on interviews with 1,021 adults aged 18 and older, living in the continental U.S, and selected using random digit dialing. </a:t>
-            </a:r>
-          </a:p>
-          <a:p>
-            <a:r>
-              <a:rPr lang="en-US" sz="1900" b="1" dirty="0"/>
-              <a:t>What is the population under study, and what is the population parameter being estimated? What is the sample statistic ?</a:t>
-            </a:r>
-          </a:p>
-        </p:txBody>
-      </p:sp>
-      <p:pic>
-        <p:nvPicPr>
-          <p:cNvPr id="5" name="Picture 4" descr="A fire on the water&#10;&#10;Description automatically generated">
-            <a:extLst>
-              <a:ext uri="{FF2B5EF4-FFF2-40B4-BE49-F238E27FC236}">
-                <a16:creationId xmlns:a16="http://schemas.microsoft.com/office/drawing/2014/main" id="{5ECC1A06-0FDF-AF1C-F302-54F0D101450F}"/>
-              </a:ext>
-            </a:extLst>
-          </p:cNvPr>
-          <p:cNvPicPr>
-            <a:picLocks noChangeAspect="1"/>
-          </p:cNvPicPr>
-          <p:nvPr/>
-        </p:nvPicPr>
-        <p:blipFill rotWithShape="1">
-          <a:blip r:embed="rId2">
-            <a:extLst>
-              <a:ext uri="{28A0092B-C50C-407E-A947-70E740481C1C}">
-                <a14:useLocalDpi xmlns:a14="http://schemas.microsoft.com/office/drawing/2010/main" val="0"/>
-              </a:ext>
-              <a:ext uri="{837473B0-CC2E-450A-ABE3-18F120FF3D39}">
-                <a1611:picAttrSrcUrl xmlns:a1611="http://schemas.microsoft.com/office/drawing/2016/11/main" r:id="rId3"/>
-              </a:ext>
-            </a:extLst>
-          </a:blip>
-          <a:srcRect l="16004" r="29882" b="2"/>
-          <a:stretch/>
-        </p:blipFill>
-        <p:spPr>
-          <a:xfrm>
-            <a:off x="7675658" y="2093976"/>
-            <a:ext cx="3941064" cy="4096512"/>
-          </a:xfrm>
-          <a:prstGeom prst="rect">
-            <a:avLst/>
-          </a:prstGeom>
-        </p:spPr>
-      </p:pic>
-    </p:spTree>
-    <p:extLst>
-      <p:ext uri="{BB962C8B-B14F-4D97-AF65-F5344CB8AC3E}">
-        <p14:creationId xmlns:p14="http://schemas.microsoft.com/office/powerpoint/2010/main" val="766630491"/>
-      </p:ext>
-    </p:extLst>
-  </p:cSld>
-  <p:clrMapOvr>
-    <a:masterClrMapping/>
-  </p:clrMapOvr>
-</p:sld>
-</file>
-
-<file path=ppt/slides/slide22.xml><?xml version="1.0" encoding="utf-8"?>
-<p:sld xmlns:a="http://schemas.openxmlformats.org/drawingml/2006/main" xmlns:r="http://schemas.openxmlformats.org/officeDocument/2006/relationships" xmlns:p="http://schemas.openxmlformats.org/presentationml/2006/main">
-  <p:cSld>
-    <p:spTree>
-      <p:nvGrpSpPr>
-        <p:cNvPr id="1" name=""/>
-        <p:cNvGrpSpPr/>
-        <p:nvPr/>
-      </p:nvGrpSpPr>
-      <p:grpSpPr>
-        <a:xfrm>
-          <a:off x="0" y="0"/>
-          <a:ext cx="0" cy="0"/>
-          <a:chOff x="0" y="0"/>
-          <a:chExt cx="0" cy="0"/>
-        </a:xfrm>
-      </p:grpSpPr>
-      <p:sp>
-        <p:nvSpPr>
-          <p:cNvPr id="2" name="Title 1">
-            <a:extLst>
-              <a:ext uri="{FF2B5EF4-FFF2-40B4-BE49-F238E27FC236}">
-                <a16:creationId xmlns:a16="http://schemas.microsoft.com/office/drawing/2014/main" id="{A7686237-4243-8211-7D8B-060A4905D97A}"/>
-              </a:ext>
-            </a:extLst>
-          </p:cNvPr>
-          <p:cNvSpPr>
-            <a:spLocks noGrp="1"/>
-          </p:cNvSpPr>
-          <p:nvPr>
-            <p:ph type="title"/>
-          </p:nvPr>
-        </p:nvSpPr>
-        <p:spPr/>
-        <p:txBody>
-          <a:bodyPr/>
-          <a:lstStyle/>
-          <a:p>
-            <a:r>
-              <a:rPr lang="en-US" dirty="0"/>
-              <a:t>Descriptive Vs. Inferential Statistics</a:t>
-            </a:r>
-          </a:p>
-        </p:txBody>
-      </p:sp>
-      <p:sp>
-        <p:nvSpPr>
-          <p:cNvPr id="3" name="Content Placeholder 2">
-            <a:extLst>
-              <a:ext uri="{FF2B5EF4-FFF2-40B4-BE49-F238E27FC236}">
-                <a16:creationId xmlns:a16="http://schemas.microsoft.com/office/drawing/2014/main" id="{FCF9A727-72B2-F2D5-7FAD-7C45ED71A2D8}"/>
-              </a:ext>
-            </a:extLst>
-          </p:cNvPr>
-          <p:cNvSpPr>
-            <a:spLocks noGrp="1"/>
-          </p:cNvSpPr>
-          <p:nvPr>
-            <p:ph idx="1"/>
-          </p:nvPr>
-        </p:nvSpPr>
-        <p:spPr>
-          <a:xfrm>
-            <a:off x="838200" y="1825625"/>
-            <a:ext cx="10448636" cy="4351338"/>
-          </a:xfrm>
-        </p:spPr>
-        <p:txBody>
-          <a:bodyPr>
-            <a:normAutofit/>
-          </a:bodyPr>
-          <a:lstStyle/>
-          <a:p>
-            <a:pPr marL="457200" indent="-457200">
-              <a:buFont typeface="+mj-lt"/>
-              <a:buAutoNum type="arabicPeriod"/>
-            </a:pPr>
-            <a:r>
-              <a:rPr lang="en-US" sz="2400" b="1" dirty="0"/>
-              <a:t>Design </a:t>
-            </a:r>
-            <a:r>
-              <a:rPr lang="en-US" sz="2400" dirty="0"/>
-              <a:t>– The process/method in which we plan to collect data to answer our statistical question</a:t>
-            </a:r>
-            <a:endParaRPr lang="en-US" sz="2400" b="1" dirty="0"/>
-          </a:p>
-          <a:p>
-            <a:pPr marL="457200" indent="-457200">
-              <a:buFont typeface="+mj-lt"/>
-              <a:buAutoNum type="arabicPeriod"/>
-            </a:pPr>
-            <a:endParaRPr lang="en-US" sz="2400" b="1" dirty="0"/>
-          </a:p>
-          <a:p>
-            <a:pPr marL="457200" indent="-457200">
-              <a:buFont typeface="+mj-lt"/>
-              <a:buAutoNum type="arabicPeriod"/>
-            </a:pPr>
-            <a:r>
-              <a:rPr lang="en-US" sz="2400" b="1" dirty="0"/>
-              <a:t>Descriptive Statistics – </a:t>
-            </a:r>
-            <a:r>
-              <a:rPr lang="en-US" sz="2400" dirty="0"/>
-              <a:t>refers to describing the observations in a sample using statistics or a population using parameters</a:t>
-            </a:r>
-          </a:p>
-          <a:p>
-            <a:pPr marL="914400" lvl="1" indent="-457200">
-              <a:buFont typeface="+mj-lt"/>
-              <a:buAutoNum type="arabicPeriod"/>
-            </a:pPr>
-            <a:r>
-              <a:rPr lang="en-US" sz="2000" dirty="0"/>
-              <a:t>- collection, organization, summarization and visualization of data</a:t>
-            </a:r>
-          </a:p>
-          <a:p>
-            <a:pPr marL="914400" lvl="1" indent="-457200">
-              <a:buFont typeface="+mj-lt"/>
-              <a:buAutoNum type="arabicPeriod"/>
-            </a:pPr>
-            <a:endParaRPr lang="en-US" sz="2000" b="1" dirty="0"/>
-          </a:p>
-          <a:p>
-            <a:pPr marL="457200" indent="-457200">
-              <a:buFont typeface="+mj-lt"/>
-              <a:buAutoNum type="arabicPeriod"/>
-            </a:pPr>
-            <a:r>
-              <a:rPr lang="en-US" sz="2400" b="1" dirty="0"/>
-              <a:t>Inferential Statistics </a:t>
-            </a:r>
-            <a:r>
-              <a:rPr lang="en-US" sz="2400" dirty="0"/>
-              <a:t>(or statistical inference) – refers to using a sample (usually a statistic) to answer a question about a population (such as estimating the value of a parameter)</a:t>
-            </a:r>
-          </a:p>
-          <a:p>
-            <a:pPr marL="457200" lvl="1" indent="0">
-              <a:buNone/>
-            </a:pPr>
-            <a:r>
-              <a:rPr lang="en-US" sz="2000" dirty="0"/>
-              <a:t>- estimation, hypothesis testing, determining relationships among variables, prediction</a:t>
-            </a:r>
-            <a:endParaRPr lang="en-US" sz="2000" b="1" dirty="0"/>
-          </a:p>
-        </p:txBody>
-      </p:sp>
-    </p:spTree>
-    <p:extLst>
-      <p:ext uri="{BB962C8B-B14F-4D97-AF65-F5344CB8AC3E}">
-        <p14:creationId xmlns:p14="http://schemas.microsoft.com/office/powerpoint/2010/main" val="3965458693"/>
-      </p:ext>
-    </p:extLst>
-  </p:cSld>
-  <p:clrMapOvr>
-    <a:masterClrMapping/>
-  </p:clrMapOvr>
-</p:sld>
-</file>
-
-<file path=ppt/slides/slide23.xml><?xml version="1.0" encoding="utf-8"?>
-<p:sld xmlns:a="http://schemas.openxmlformats.org/drawingml/2006/main" xmlns:r="http://schemas.openxmlformats.org/officeDocument/2006/relationships" xmlns:p="http://schemas.openxmlformats.org/presentationml/2006/main">
-  <p:cSld>
-    <p:bg>
-      <p:bgPr>
-        <a:solidFill>
-          <a:schemeClr val="bg1"/>
-        </a:solidFill>
-        <a:effectLst/>
-      </p:bgPr>
-    </p:bg>
-    <p:spTree>
-      <p:nvGrpSpPr>
-        <p:cNvPr id="1" name=""/>
-        <p:cNvGrpSpPr/>
-        <p:nvPr/>
-      </p:nvGrpSpPr>
-      <p:grpSpPr>
-        <a:xfrm>
-          <a:off x="0" y="0"/>
-          <a:ext cx="0" cy="0"/>
-          <a:chOff x="0" y="0"/>
-          <a:chExt cx="0" cy="0"/>
-        </a:xfrm>
-      </p:grpSpPr>
-      <p:sp>
-        <p:nvSpPr>
-          <p:cNvPr id="12" name="Down Arrow 7">
-            <a:extLst>
-              <a:ext uri="{FF2B5EF4-FFF2-40B4-BE49-F238E27FC236}">
-                <a16:creationId xmlns:a16="http://schemas.microsoft.com/office/drawing/2014/main" id="{D4771268-CB57-404A-9271-370EB28F6090}"/>
-              </a:ext>
-              <a:ext uri="{C183D7F6-B498-43B3-948B-1728B52AA6E4}">
-                <adec:decorative xmlns:adec="http://schemas.microsoft.com/office/drawing/2017/decorative" val="1"/>
-              </a:ext>
-            </a:extLst>
-          </p:cNvPr>
-          <p:cNvSpPr>
-            <a:spLocks noGrp="1" noRot="1" noChangeAspect="1" noMove="1" noResize="1" noEditPoints="1" noAdjustHandles="1" noChangeArrowheads="1" noChangeShapeType="1" noTextEdit="1"/>
-          </p:cNvSpPr>
-          <p:nvPr>
-            <p:extLst>
-              <p:ext uri="{386F3935-93C4-4BCD-93E2-E3B085C9AB24}">
-                <p16:designElem xmlns:p16="http://schemas.microsoft.com/office/powerpoint/2015/main" val="1"/>
-              </p:ext>
-            </p:extLst>
-          </p:nvPr>
-        </p:nvSpPr>
-        <p:spPr>
-          <a:xfrm rot="16200000">
-            <a:off x="800100" y="1491343"/>
-            <a:ext cx="3333749" cy="3499103"/>
-          </a:xfrm>
-          <a:prstGeom prst="downArrow">
-            <a:avLst>
-              <a:gd name="adj1" fmla="val 100000"/>
-              <a:gd name="adj2" fmla="val 15788"/>
-            </a:avLst>
-          </a:prstGeom>
-          <a:solidFill>
-            <a:srgbClr val="404040"/>
-          </a:solidFill>
-          <a:ln w="53975">
-            <a:noFill/>
-          </a:ln>
-        </p:spPr>
-        <p:style>
-          <a:lnRef idx="2">
-            <a:schemeClr val="accent1">
-              <a:shade val="50000"/>
-            </a:schemeClr>
-          </a:lnRef>
-          <a:fillRef idx="1">
-            <a:schemeClr val="accent1"/>
-          </a:fillRef>
-          <a:effectRef idx="0">
-            <a:schemeClr val="accent1"/>
-          </a:effectRef>
-          <a:fontRef idx="minor">
-            <a:schemeClr val="lt1"/>
-          </a:fontRef>
-        </p:style>
-        <p:txBody>
-          <a:bodyPr rtlCol="0" anchor="ctr"/>
-          <a:lstStyle/>
-          <a:p>
-            <a:pPr algn="ctr"/>
-            <a:endParaRPr lang="en-US"/>
-          </a:p>
-        </p:txBody>
-      </p:sp>
-      <p:sp>
-        <p:nvSpPr>
-          <p:cNvPr id="2" name="Title 1">
-            <a:extLst>
-              <a:ext uri="{FF2B5EF4-FFF2-40B4-BE49-F238E27FC236}">
-                <a16:creationId xmlns:a16="http://schemas.microsoft.com/office/drawing/2014/main" id="{5AA8EA67-A8E4-C324-904F-73383B5DAA1E}"/>
-              </a:ext>
-            </a:extLst>
-          </p:cNvPr>
-          <p:cNvSpPr>
-            <a:spLocks noGrp="1"/>
-          </p:cNvSpPr>
-          <p:nvPr>
-            <p:ph type="title"/>
-          </p:nvPr>
-        </p:nvSpPr>
-        <p:spPr>
-          <a:xfrm>
-            <a:off x="1028700" y="1967266"/>
-            <a:ext cx="2628900" cy="2547257"/>
-          </a:xfrm>
-          <a:noFill/>
-        </p:spPr>
-        <p:txBody>
-          <a:bodyPr vert="horz" lIns="91440" tIns="45720" rIns="91440" bIns="45720" rtlCol="0" anchor="ctr">
-            <a:normAutofit/>
-          </a:bodyPr>
-          <a:lstStyle/>
-          <a:p>
-            <a:pPr algn="ctr"/>
-            <a:r>
-              <a:rPr lang="en-US" sz="3600" kern="1200" dirty="0">
-                <a:solidFill>
-                  <a:srgbClr val="FFFFFF"/>
-                </a:solidFill>
-                <a:latin typeface="+mj-lt"/>
-                <a:ea typeface="+mj-ea"/>
-                <a:cs typeface="+mj-cs"/>
-              </a:rPr>
-              <a:t>The Big Picture</a:t>
-            </a:r>
-          </a:p>
-        </p:txBody>
-      </p:sp>
-      <p:pic>
-        <p:nvPicPr>
-          <p:cNvPr id="7" name="Picture 6">
-            <a:extLst>
-              <a:ext uri="{FF2B5EF4-FFF2-40B4-BE49-F238E27FC236}">
-                <a16:creationId xmlns:a16="http://schemas.microsoft.com/office/drawing/2014/main" id="{391ACF48-62FF-638F-4559-954D25EA1C34}"/>
-              </a:ext>
-            </a:extLst>
-          </p:cNvPr>
-          <p:cNvPicPr>
-            <a:picLocks noChangeAspect="1"/>
-          </p:cNvPicPr>
-          <p:nvPr/>
-        </p:nvPicPr>
-        <p:blipFill>
-          <a:blip r:embed="rId2"/>
-          <a:stretch>
-            <a:fillRect/>
-          </a:stretch>
-        </p:blipFill>
-        <p:spPr>
-          <a:xfrm>
-            <a:off x="4216526" y="784578"/>
-            <a:ext cx="7900416" cy="5826555"/>
-          </a:xfrm>
-          <a:prstGeom prst="rect">
-            <a:avLst/>
-          </a:prstGeom>
-        </p:spPr>
-      </p:pic>
-    </p:spTree>
-    <p:extLst>
-      <p:ext uri="{BB962C8B-B14F-4D97-AF65-F5344CB8AC3E}">
-        <p14:creationId xmlns:p14="http://schemas.microsoft.com/office/powerpoint/2010/main" val="3834395567"/>
       </p:ext>
     </p:extLst>
   </p:cSld>

--- a/docs/lecture_slides/Week 1/Week1_Lecture1_Slides_1_10_2024.pptx
+++ b/docs/lecture_slides/Week 1/Week1_Lecture1_Slides_1_10_2024.pptx
@@ -6,6 +6,7 @@
   </p:sldMasterIdLst>
   <p:sldIdLst>
     <p:sldId id="258" r:id="rId2"/>
+    <p:sldId id="286" r:id="rId19"/>
     <p:sldId id="285" r:id="rId3"/>
     <p:sldId id="257" r:id="rId4"/>
     <p:sldId id="261" r:id="rId5"/>
@@ -6683,28 +6684,22 @@
       </p:sp>
       <p:pic>
         <p:nvPicPr>
-          <p:cNvPr id="6" name="Picture 5">
-            <a:extLst>
-              <a:ext uri="{FF2B5EF4-FFF2-40B4-BE49-F238E27FC236}">
-                <a16:creationId xmlns:a16="http://schemas.microsoft.com/office/drawing/2014/main" id="{73D86D3A-48E0-89C8-3640-B33F0F02AF96}"/>
-              </a:ext>
-            </a:extLst>
-          </p:cNvPr>
+          <p:cNvPr id="10" name="Picture 9" descr="job_pie.png"/>
           <p:cNvPicPr>
             <a:picLocks noChangeAspect="1"/>
           </p:cNvPicPr>
           <p:nvPr/>
         </p:nvPicPr>
         <p:blipFill>
-          <a:blip r:embed="rId5"/>
+          <a:blip r:embed="rId6"/>
           <a:stretch>
             <a:fillRect/>
           </a:stretch>
         </p:blipFill>
         <p:spPr>
           <a:xfrm>
-            <a:off x="7467600" y="1323704"/>
-            <a:ext cx="4200525" cy="3102324"/>
+            <a:off x="7470648" y="1325880"/>
+            <a:ext cx="4197096" cy="3099791"/>
           </a:xfrm>
           <a:prstGeom prst="rect">
             <a:avLst/>
@@ -6826,63 +6821,14 @@
                 </a:solidFill>
                 <a:latin typeface="Calibri" panose="020F0502020204030204"/>
               </a:rPr>
-              <a:t>In the stormtrooper example data</a:t>
-            </a:r>
-            <a:r>
-              <a:rPr kumimoji="0" lang="it-IT" sz="2000" b="0" i="0" u="none" strike="noStrike" kern="1200" cap="none" spc="0" normalizeH="0" baseline="0" noProof="0" dirty="0">
-                <a:ln>
-                  <a:noFill/>
-                </a:ln>
-                <a:solidFill>
-                  <a:prstClr val="black"/>
-                </a:solidFill>
-                <a:effectLst/>
-                <a:uLnTx/>
-                <a:uFillTx/>
-                <a:latin typeface="Calibri" panose="020F0502020204030204"/>
-                <a:ea typeface="+mn-ea"/>
-                <a:cs typeface="+mn-cs"/>
-              </a:rPr>
-              <a:t>, which variable(s) are </a:t>
-            </a:r>
-            <a:r>
-              <a:rPr lang="it-IT" sz="2000" dirty="0">
-                <a:solidFill>
-                  <a:prstClr val="black"/>
-                </a:solidFill>
-                <a:latin typeface="Calibri" panose="020F0502020204030204"/>
-              </a:rPr>
-              <a:t>qualitative nominal and which are qualitative ordinal</a:t>
-            </a:r>
-            <a:r>
-              <a:rPr kumimoji="0" lang="it-IT" sz="2000" b="0" i="0" u="none" strike="noStrike" kern="1200" cap="none" spc="0" normalizeH="0" baseline="0" noProof="0" dirty="0">
-                <a:ln>
-                  <a:noFill/>
-                </a:ln>
-                <a:solidFill>
-                  <a:prstClr val="black"/>
-                </a:solidFill>
-                <a:effectLst/>
-                <a:uLnTx/>
-                <a:uFillTx/>
-                <a:latin typeface="Calibri" panose="020F0502020204030204"/>
-                <a:ea typeface="+mn-ea"/>
-                <a:cs typeface="+mn-cs"/>
-              </a:rPr>
-              <a:t>?</a:t>
+              <a:t>In the bank marketing example data, which variable(s) are qualitative nominal and which are qualitative ordinal?</a:t>
             </a:r>
           </a:p>
         </p:txBody>
       </p:sp>
       <p:pic>
         <p:nvPicPr>
-          <p:cNvPr id="7" name="Picture 6">
-            <a:extLst>
-              <a:ext uri="{FF2B5EF4-FFF2-40B4-BE49-F238E27FC236}">
-                <a16:creationId xmlns:a16="http://schemas.microsoft.com/office/drawing/2014/main" id="{601CAD31-57A4-CBBF-9639-97A3E77506B5}"/>
-              </a:ext>
-            </a:extLst>
-          </p:cNvPr>
+          <p:cNvPr id="11" name="Picture 10" descr="image.png"/>
           <p:cNvPicPr>
             <a:picLocks noChangeAspect="1"/>
           </p:cNvPicPr>
@@ -6896,8 +6842,8 @@
         </p:blipFill>
         <p:spPr>
           <a:xfrm>
-            <a:off x="4793382" y="1609724"/>
-            <a:ext cx="7175376" cy="5000625"/>
+            <a:off x="4846320" y="1554480"/>
+            <a:ext cx="7040880" cy="4437221"/>
           </a:xfrm>
           <a:prstGeom prst="rect">
             <a:avLst/>
@@ -6938,7 +6884,7 @@
                   <a:srgbClr val="FF0000"/>
                 </a:solidFill>
               </a:rPr>
-              <a:t>Qualitative nominal: ID Number, Duty Posting</a:t>
+              <a:t>Qualitative nominal: Client ID, Job, Subscribed</a:t>
             </a:r>
           </a:p>
         </p:txBody>
@@ -6977,7 +6923,46 @@
                   <a:srgbClr val="FF0000"/>
                 </a:solidFill>
               </a:rPr>
-              <a:t>Qualitative ordinal: Rank</a:t>
+              <a:t>Qualitative ordinal: Education</a:t>
+            </a:r>
+          </a:p>
+        </p:txBody>
+      </p:sp>
+      <p:sp>
+        <p:nvSpPr>
+          <p:cNvPr id="12" name="TextBox 11"/>
+          <p:cNvSpPr txBox="1"/>
+          <p:nvPr/>
+        </p:nvSpPr>
+        <p:spPr>
+          <a:xfrm>
+            <a:off x="429768" y="6309360"/>
+            <a:ext cx="11338560" cy="274320"/>
+          </a:xfrm>
+          <a:prstGeom prst="rect">
+            <a:avLst/>
+          </a:prstGeom>
+          <a:noFill/>
+        </p:spPr>
+        <p:txBody>
+          <a:bodyPr wrap="square" lIns="0" rIns="0" tIns="0" bIns="0" anchor="t">
+            <a:spAutoFit/>
+          </a:bodyPr>
+          <a:lstStyle/>
+          <a:p>
+            <a:pPr algn="l">
+              <a:spcAft>
+                <a:spcPts val="0"/>
+              </a:spcAft>
+            </a:pPr>
+            <a:r>
+              <a:rPr sz="1000" b="0">
+                <a:solidFill>
+                  <a:srgbClr val="595959"/>
+                </a:solidFill>
+                <a:latin typeface="Calibri"/>
+              </a:rPr>
+              <a:t>Data structure adapted from Moro, Rita, and Cortez (2014), Bank Marketing, UCI Machine Learning Repository; the 20 records shown are simulated.</a:t>
             </a:r>
           </a:p>
         </p:txBody>
@@ -8157,63 +8142,14 @@
                 </a:solidFill>
                 <a:latin typeface="Calibri" panose="020F0502020204030204"/>
               </a:rPr>
-              <a:t>In the stormtrooper example data</a:t>
-            </a:r>
-            <a:r>
-              <a:rPr kumimoji="0" lang="it-IT" sz="2000" b="0" i="0" u="none" strike="noStrike" kern="1200" cap="none" spc="0" normalizeH="0" baseline="0" noProof="0" dirty="0">
-                <a:ln>
-                  <a:noFill/>
-                </a:ln>
-                <a:solidFill>
-                  <a:prstClr val="black"/>
-                </a:solidFill>
-                <a:effectLst/>
-                <a:uLnTx/>
-                <a:uFillTx/>
-                <a:latin typeface="Calibri" panose="020F0502020204030204"/>
-                <a:ea typeface="+mn-ea"/>
-                <a:cs typeface="+mn-cs"/>
-              </a:rPr>
-              <a:t>, which variable(s) are </a:t>
-            </a:r>
-            <a:r>
-              <a:rPr lang="it-IT" sz="2000" dirty="0">
-                <a:solidFill>
-                  <a:prstClr val="black"/>
-                </a:solidFill>
-                <a:latin typeface="Calibri" panose="020F0502020204030204"/>
-              </a:rPr>
-              <a:t>quantitative discrete and which are quantitative continous</a:t>
-            </a:r>
-            <a:r>
-              <a:rPr kumimoji="0" lang="it-IT" sz="2000" b="0" i="0" u="none" strike="noStrike" kern="1200" cap="none" spc="0" normalizeH="0" baseline="0" noProof="0" dirty="0">
-                <a:ln>
-                  <a:noFill/>
-                </a:ln>
-                <a:solidFill>
-                  <a:prstClr val="black"/>
-                </a:solidFill>
-                <a:effectLst/>
-                <a:uLnTx/>
-                <a:uFillTx/>
-                <a:latin typeface="Calibri" panose="020F0502020204030204"/>
-                <a:ea typeface="+mn-ea"/>
-                <a:cs typeface="+mn-cs"/>
-              </a:rPr>
-              <a:t>?</a:t>
+              <a:t>In the bank marketing example data, which variable(s) are quantitative discrete and which are quantitative continuous?</a:t>
             </a:r>
           </a:p>
         </p:txBody>
       </p:sp>
       <p:pic>
         <p:nvPicPr>
-          <p:cNvPr id="7" name="Picture 6">
-            <a:extLst>
-              <a:ext uri="{FF2B5EF4-FFF2-40B4-BE49-F238E27FC236}">
-                <a16:creationId xmlns:a16="http://schemas.microsoft.com/office/drawing/2014/main" id="{0177E576-A1D3-4747-DFD9-398F78F382BC}"/>
-              </a:ext>
-            </a:extLst>
-          </p:cNvPr>
+          <p:cNvPr id="11" name="Picture 10" descr="image.png"/>
           <p:cNvPicPr>
             <a:picLocks noChangeAspect="1"/>
           </p:cNvPicPr>
@@ -8227,8 +8163,8 @@
         </p:blipFill>
         <p:spPr>
           <a:xfrm>
-            <a:off x="4535809" y="1381126"/>
-            <a:ext cx="7514527" cy="5236984"/>
+            <a:off x="4846320" y="1554480"/>
+            <a:ext cx="7040880" cy="4437221"/>
           </a:xfrm>
           <a:prstGeom prst="rect">
             <a:avLst/>
@@ -8308,7 +8244,46 @@
                   <a:srgbClr val="FF0000"/>
                 </a:solidFill>
               </a:rPr>
-              <a:t>Quantitative continuous: Height, Blaster Accuracy</a:t>
+              <a:t>Quantitative continuous: Balance, Call Length</a:t>
+            </a:r>
+          </a:p>
+        </p:txBody>
+      </p:sp>
+      <p:sp>
+        <p:nvSpPr>
+          <p:cNvPr id="12" name="TextBox 11"/>
+          <p:cNvSpPr txBox="1"/>
+          <p:nvPr/>
+        </p:nvSpPr>
+        <p:spPr>
+          <a:xfrm>
+            <a:off x="429768" y="6309360"/>
+            <a:ext cx="11338560" cy="274320"/>
+          </a:xfrm>
+          <a:prstGeom prst="rect">
+            <a:avLst/>
+          </a:prstGeom>
+          <a:noFill/>
+        </p:spPr>
+        <p:txBody>
+          <a:bodyPr wrap="square" lIns="0" rIns="0" tIns="0" bIns="0" anchor="t">
+            <a:spAutoFit/>
+          </a:bodyPr>
+          <a:lstStyle/>
+          <a:p>
+            <a:pPr algn="l">
+              <a:spcAft>
+                <a:spcPts val="0"/>
+              </a:spcAft>
+            </a:pPr>
+            <a:r>
+              <a:rPr sz="1000" b="0">
+                <a:solidFill>
+                  <a:srgbClr val="595959"/>
+                </a:solidFill>
+                <a:latin typeface="Calibri"/>
+              </a:rPr>
+              <a:t>Data structure adapted from Moro, Rita, and Cortez (2014), Bank Marketing, UCI Machine Learning Repository; the 20 records shown are simulated.</a:t>
             </a:r>
           </a:p>
         </p:txBody>
@@ -8447,6 +8422,1450 @@
       <p:bldP spid="5" grpId="0"/>
     </p:bldLst>
   </p:timing>
+</p:sld>
+</file>
+
+<file path=ppt/slides/slide14.xml><?xml version="1.0" encoding="utf-8"?>
+<p:sld xmlns:a="http://schemas.openxmlformats.org/drawingml/2006/main" xmlns:p="http://schemas.openxmlformats.org/presentationml/2006/main" xmlns:r="http://schemas.openxmlformats.org/officeDocument/2006/relationships">
+  <p:cSld>
+    <p:spTree>
+      <p:nvGrpSpPr>
+        <p:cNvPr id="1" name=""/>
+        <p:cNvGrpSpPr/>
+        <p:nvPr/>
+      </p:nvGrpSpPr>
+      <p:grpSpPr/>
+      <p:sp>
+        <p:nvSpPr>
+          <p:cNvPr id="2" name="Title 1"/>
+          <p:cNvSpPr>
+            <a:spLocks noGrp="1"/>
+          </p:cNvSpPr>
+          <p:nvPr>
+            <p:ph type="title"/>
+          </p:nvPr>
+        </p:nvSpPr>
+        <p:spPr>
+          <a:xfrm>
+            <a:off x="457200" y="182880"/>
+            <a:ext cx="11338560" cy="914400"/>
+          </a:xfrm>
+        </p:spPr>
+        <p:txBody>
+          <a:bodyPr/>
+          <a:lstStyle/>
+          <a:p>
+            <a:r>
+              <a:rPr sz="4000">
+                <a:solidFill>
+                  <a:srgbClr val="000000"/>
+                </a:solidFill>
+                <a:latin typeface="Calibri Light"/>
+              </a:rPr>
+              <a:t>Where does statistics come from?</a:t>
+            </a:r>
+          </a:p>
+        </p:txBody>
+      </p:sp>
+      <p:sp>
+        <p:nvSpPr>
+          <p:cNvPr id="3" name="TextBox 2"/>
+          <p:cNvSpPr txBox="1"/>
+          <p:nvPr/>
+        </p:nvSpPr>
+        <p:spPr>
+          <a:xfrm>
+            <a:off x="457200" y="1170432"/>
+            <a:ext cx="11292840" cy="411480"/>
+          </a:xfrm>
+          <a:prstGeom prst="rect">
+            <a:avLst/>
+          </a:prstGeom>
+          <a:noFill/>
+        </p:spPr>
+        <p:txBody>
+          <a:bodyPr wrap="square" lIns="0" rIns="0" tIns="0" bIns="0" anchor="t">
+            <a:spAutoFit/>
+          </a:bodyPr>
+          <a:lstStyle/>
+          <a:p>
+            <a:pPr algn="l">
+              <a:spcAft>
+                <a:spcPts val="0"/>
+              </a:spcAft>
+            </a:pPr>
+            <a:r>
+              <a:rPr sz="1600" b="0">
+                <a:solidFill>
+                  <a:srgbClr val="333333"/>
+                </a:solidFill>
+                <a:latin typeface="Calibri"/>
+              </a:rPr>
+              <a:t>Statistics began as bookkeeping about people — counting births, deaths, and taxpayers so that a state could describe itself.</a:t>
+            </a:r>
+          </a:p>
+        </p:txBody>
+      </p:sp>
+      <p:sp>
+        <p:nvSpPr>
+          <p:cNvPr id="4" name="Rectangle 3"/>
+          <p:cNvSpPr/>
+          <p:nvPr/>
+        </p:nvSpPr>
+        <p:spPr>
+          <a:xfrm>
+            <a:off x="457200" y="3893515"/>
+            <a:ext cx="11277295" cy="40233"/>
+          </a:xfrm>
+          <a:prstGeom prst="rect">
+            <a:avLst/>
+          </a:prstGeom>
+          <a:solidFill>
+            <a:srgbClr val="4472C4"/>
+          </a:solidFill>
+          <a:ln>
+            <a:noFill/>
+          </a:ln>
+          <a:effectLst/>
+        </p:spPr>
+        <p:style>
+          <a:lnRef idx="1">
+            <a:schemeClr val="accent1"/>
+          </a:lnRef>
+          <a:fillRef idx="3">
+            <a:schemeClr val="accent1"/>
+          </a:fillRef>
+          <a:effectRef idx="2">
+            <a:schemeClr val="accent1"/>
+          </a:effectRef>
+          <a:fontRef idx="minor">
+            <a:schemeClr val="lt1"/>
+          </a:fontRef>
+        </p:style>
+        <p:txBody>
+          <a:bodyPr rtlCol="0" anchor="ctr" wrap="square"/>
+          <a:lstStyle/>
+          <a:p>
+            <a:pPr algn="ctr"/>
+          </a:p>
+        </p:txBody>
+      </p:sp>
+      <p:sp>
+        <p:nvSpPr>
+          <p:cNvPr id="5" name="Rectangle 4"/>
+          <p:cNvSpPr/>
+          <p:nvPr/>
+        </p:nvSpPr>
+        <p:spPr>
+          <a:xfrm>
+            <a:off x="1590141" y="3529584"/>
+            <a:ext cx="20116" cy="384048"/>
+          </a:xfrm>
+          <a:prstGeom prst="rect">
+            <a:avLst/>
+          </a:prstGeom>
+          <a:solidFill>
+            <a:srgbClr val="4472C4"/>
+          </a:solidFill>
+          <a:ln>
+            <a:noFill/>
+          </a:ln>
+          <a:effectLst/>
+        </p:spPr>
+        <p:style>
+          <a:lnRef idx="1">
+            <a:schemeClr val="accent1"/>
+          </a:lnRef>
+          <a:fillRef idx="3">
+            <a:schemeClr val="accent1"/>
+          </a:fillRef>
+          <a:effectRef idx="2">
+            <a:schemeClr val="accent1"/>
+          </a:effectRef>
+          <a:fontRef idx="minor">
+            <a:schemeClr val="lt1"/>
+          </a:fontRef>
+        </p:style>
+        <p:txBody>
+          <a:bodyPr rtlCol="0" anchor="ctr" wrap="square"/>
+          <a:lstStyle/>
+          <a:p>
+            <a:pPr algn="ctr"/>
+          </a:p>
+        </p:txBody>
+      </p:sp>
+      <p:sp>
+        <p:nvSpPr>
+          <p:cNvPr id="6" name="Oval 5"/>
+          <p:cNvSpPr/>
+          <p:nvPr/>
+        </p:nvSpPr>
+        <p:spPr>
+          <a:xfrm>
+            <a:off x="1522476" y="3835908"/>
+            <a:ext cx="155448" cy="155448"/>
+          </a:xfrm>
+          <a:prstGeom prst="ellipse">
+            <a:avLst/>
+          </a:prstGeom>
+          <a:solidFill>
+            <a:srgbClr val="FFFFFF"/>
+          </a:solidFill>
+          <a:ln w="25400">
+            <a:solidFill>
+              <a:srgbClr val="4472C4"/>
+            </a:solidFill>
+          </a:ln>
+          <a:effectLst/>
+        </p:spPr>
+        <p:style>
+          <a:lnRef idx="1">
+            <a:schemeClr val="accent1"/>
+          </a:lnRef>
+          <a:fillRef idx="3">
+            <a:schemeClr val="accent1"/>
+          </a:fillRef>
+          <a:effectRef idx="2">
+            <a:schemeClr val="accent1"/>
+          </a:effectRef>
+          <a:fontRef idx="minor">
+            <a:schemeClr val="lt1"/>
+          </a:fontRef>
+        </p:style>
+        <p:txBody>
+          <a:bodyPr rtlCol="0" anchor="ctr" wrap="square"/>
+          <a:lstStyle/>
+          <a:p>
+            <a:pPr algn="ctr"/>
+          </a:p>
+        </p:txBody>
+      </p:sp>
+      <p:sp>
+        <p:nvSpPr>
+          <p:cNvPr id="7" name="Rectangle 6"/>
+          <p:cNvSpPr/>
+          <p:nvPr/>
+        </p:nvSpPr>
+        <p:spPr>
+          <a:xfrm>
+            <a:off x="457200" y="2231136"/>
+            <a:ext cx="2286000" cy="1298448"/>
+          </a:xfrm>
+          <a:prstGeom prst="rect">
+            <a:avLst/>
+          </a:prstGeom>
+          <a:solidFill>
+            <a:srgbClr val="EDF2FA"/>
+          </a:solidFill>
+          <a:ln>
+            <a:noFill/>
+          </a:ln>
+          <a:effectLst/>
+        </p:spPr>
+        <p:style>
+          <a:lnRef idx="1">
+            <a:schemeClr val="accent1"/>
+          </a:lnRef>
+          <a:fillRef idx="3">
+            <a:schemeClr val="accent1"/>
+          </a:fillRef>
+          <a:effectRef idx="2">
+            <a:schemeClr val="accent1"/>
+          </a:effectRef>
+          <a:fontRef idx="minor">
+            <a:schemeClr val="lt1"/>
+          </a:fontRef>
+        </p:style>
+        <p:txBody>
+          <a:bodyPr rtlCol="0" anchor="t" wrap="square" lIns="100584" rIns="100584" tIns="73152" bIns="73152"/>
+          <a:lstStyle/>
+          <a:p>
+            <a:pPr algn="l">
+              <a:spcAft>
+                <a:spcPts val="300"/>
+              </a:spcAft>
+            </a:pPr>
+            <a:r>
+              <a:rPr sz="1700" b="1">
+                <a:solidFill>
+                  <a:srgbClr val="4472C4"/>
+                </a:solidFill>
+                <a:latin typeface="Calibri"/>
+              </a:rPr>
+              <a:t>1662</a:t>
+            </a:r>
+          </a:p>
+          <a:p>
+            <a:pPr algn="l"/>
+            <a:r>
+              <a:rPr sz="1050">
+                <a:solidFill>
+                  <a:srgbClr val="262626"/>
+                </a:solidFill>
+                <a:latin typeface="Calibri"/>
+              </a:rPr>
+              <a:t>John Graunt studies London's Bills of Mortality — the first life table built from real data.</a:t>
+            </a:r>
+          </a:p>
+        </p:txBody>
+      </p:sp>
+      <p:sp>
+        <p:nvSpPr>
+          <p:cNvPr id="8" name="Rectangle 7"/>
+          <p:cNvSpPr/>
+          <p:nvPr/>
+        </p:nvSpPr>
+        <p:spPr>
+          <a:xfrm>
+            <a:off x="2874612" y="3913632"/>
+            <a:ext cx="20116" cy="384048"/>
+          </a:xfrm>
+          <a:prstGeom prst="rect">
+            <a:avLst/>
+          </a:prstGeom>
+          <a:solidFill>
+            <a:srgbClr val="4472C4"/>
+          </a:solidFill>
+          <a:ln>
+            <a:noFill/>
+          </a:ln>
+          <a:effectLst/>
+        </p:spPr>
+        <p:style>
+          <a:lnRef idx="1">
+            <a:schemeClr val="accent1"/>
+          </a:lnRef>
+          <a:fillRef idx="3">
+            <a:schemeClr val="accent1"/>
+          </a:fillRef>
+          <a:effectRef idx="2">
+            <a:schemeClr val="accent1"/>
+          </a:effectRef>
+          <a:fontRef idx="minor">
+            <a:schemeClr val="lt1"/>
+          </a:fontRef>
+        </p:style>
+        <p:txBody>
+          <a:bodyPr rtlCol="0" anchor="ctr" wrap="square"/>
+          <a:lstStyle/>
+          <a:p>
+            <a:pPr algn="ctr"/>
+          </a:p>
+        </p:txBody>
+      </p:sp>
+      <p:sp>
+        <p:nvSpPr>
+          <p:cNvPr id="9" name="Oval 8"/>
+          <p:cNvSpPr/>
+          <p:nvPr/>
+        </p:nvSpPr>
+        <p:spPr>
+          <a:xfrm>
+            <a:off x="2806946" y="3835908"/>
+            <a:ext cx="155448" cy="155448"/>
+          </a:xfrm>
+          <a:prstGeom prst="ellipse">
+            <a:avLst/>
+          </a:prstGeom>
+          <a:solidFill>
+            <a:srgbClr val="FFFFFF"/>
+          </a:solidFill>
+          <a:ln w="25400">
+            <a:solidFill>
+              <a:srgbClr val="4472C4"/>
+            </a:solidFill>
+          </a:ln>
+          <a:effectLst/>
+        </p:spPr>
+        <p:style>
+          <a:lnRef idx="1">
+            <a:schemeClr val="accent1"/>
+          </a:lnRef>
+          <a:fillRef idx="3">
+            <a:schemeClr val="accent1"/>
+          </a:fillRef>
+          <a:effectRef idx="2">
+            <a:schemeClr val="accent1"/>
+          </a:effectRef>
+          <a:fontRef idx="minor">
+            <a:schemeClr val="lt1"/>
+          </a:fontRef>
+        </p:style>
+        <p:txBody>
+          <a:bodyPr rtlCol="0" anchor="ctr" wrap="square"/>
+          <a:lstStyle/>
+          <a:p>
+            <a:pPr algn="ctr"/>
+          </a:p>
+        </p:txBody>
+      </p:sp>
+      <p:sp>
+        <p:nvSpPr>
+          <p:cNvPr id="10" name="Rectangle 9"/>
+          <p:cNvSpPr/>
+          <p:nvPr/>
+        </p:nvSpPr>
+        <p:spPr>
+          <a:xfrm>
+            <a:off x="1741670" y="4297680"/>
+            <a:ext cx="2286000" cy="1298448"/>
+          </a:xfrm>
+          <a:prstGeom prst="rect">
+            <a:avLst/>
+          </a:prstGeom>
+          <a:solidFill>
+            <a:srgbClr val="EDF2FA"/>
+          </a:solidFill>
+          <a:ln>
+            <a:noFill/>
+          </a:ln>
+          <a:effectLst/>
+        </p:spPr>
+        <p:style>
+          <a:lnRef idx="1">
+            <a:schemeClr val="accent1"/>
+          </a:lnRef>
+          <a:fillRef idx="3">
+            <a:schemeClr val="accent1"/>
+          </a:fillRef>
+          <a:effectRef idx="2">
+            <a:schemeClr val="accent1"/>
+          </a:effectRef>
+          <a:fontRef idx="minor">
+            <a:schemeClr val="lt1"/>
+          </a:fontRef>
+        </p:style>
+        <p:txBody>
+          <a:bodyPr rtlCol="0" anchor="t" wrap="square" lIns="100584" rIns="100584" tIns="73152" bIns="73152"/>
+          <a:lstStyle/>
+          <a:p>
+            <a:pPr algn="l">
+              <a:spcAft>
+                <a:spcPts val="300"/>
+              </a:spcAft>
+            </a:pPr>
+            <a:r>
+              <a:rPr sz="1700" b="1">
+                <a:solidFill>
+                  <a:srgbClr val="4472C4"/>
+                </a:solidFill>
+                <a:latin typeface="Calibri"/>
+              </a:rPr>
+              <a:t>1693</a:t>
+            </a:r>
+          </a:p>
+          <a:p>
+            <a:pPr algn="l"/>
+            <a:r>
+              <a:rPr sz="1050">
+                <a:solidFill>
+                  <a:srgbClr val="262626"/>
+                </a:solidFill>
+                <a:latin typeface="Calibri"/>
+              </a:rPr>
+              <a:t>Edmond Halley's Breslau life table makes it possible to price life annuities.</a:t>
+            </a:r>
+          </a:p>
+        </p:txBody>
+      </p:sp>
+      <p:sp>
+        <p:nvSpPr>
+          <p:cNvPr id="11" name="Rectangle 10"/>
+          <p:cNvSpPr/>
+          <p:nvPr/>
+        </p:nvSpPr>
+        <p:spPr>
+          <a:xfrm>
+            <a:off x="4159083" y="3529584"/>
+            <a:ext cx="20116" cy="384048"/>
+          </a:xfrm>
+          <a:prstGeom prst="rect">
+            <a:avLst/>
+          </a:prstGeom>
+          <a:solidFill>
+            <a:srgbClr val="4472C4"/>
+          </a:solidFill>
+          <a:ln>
+            <a:noFill/>
+          </a:ln>
+          <a:effectLst/>
+        </p:spPr>
+        <p:style>
+          <a:lnRef idx="1">
+            <a:schemeClr val="accent1"/>
+          </a:lnRef>
+          <a:fillRef idx="3">
+            <a:schemeClr val="accent1"/>
+          </a:fillRef>
+          <a:effectRef idx="2">
+            <a:schemeClr val="accent1"/>
+          </a:effectRef>
+          <a:fontRef idx="minor">
+            <a:schemeClr val="lt1"/>
+          </a:fontRef>
+        </p:style>
+        <p:txBody>
+          <a:bodyPr rtlCol="0" anchor="ctr" wrap="square"/>
+          <a:lstStyle/>
+          <a:p>
+            <a:pPr algn="ctr"/>
+          </a:p>
+        </p:txBody>
+      </p:sp>
+      <p:sp>
+        <p:nvSpPr>
+          <p:cNvPr id="12" name="Oval 11"/>
+          <p:cNvSpPr/>
+          <p:nvPr/>
+        </p:nvSpPr>
+        <p:spPr>
+          <a:xfrm>
+            <a:off x="4091417" y="3835908"/>
+            <a:ext cx="155448" cy="155448"/>
+          </a:xfrm>
+          <a:prstGeom prst="ellipse">
+            <a:avLst/>
+          </a:prstGeom>
+          <a:solidFill>
+            <a:srgbClr val="FFFFFF"/>
+          </a:solidFill>
+          <a:ln w="25400">
+            <a:solidFill>
+              <a:srgbClr val="4472C4"/>
+            </a:solidFill>
+          </a:ln>
+          <a:effectLst/>
+        </p:spPr>
+        <p:style>
+          <a:lnRef idx="1">
+            <a:schemeClr val="accent1"/>
+          </a:lnRef>
+          <a:fillRef idx="3">
+            <a:schemeClr val="accent1"/>
+          </a:fillRef>
+          <a:effectRef idx="2">
+            <a:schemeClr val="accent1"/>
+          </a:effectRef>
+          <a:fontRef idx="minor">
+            <a:schemeClr val="lt1"/>
+          </a:fontRef>
+        </p:style>
+        <p:txBody>
+          <a:bodyPr rtlCol="0" anchor="ctr" wrap="square"/>
+          <a:lstStyle/>
+          <a:p>
+            <a:pPr algn="ctr"/>
+          </a:p>
+        </p:txBody>
+      </p:sp>
+      <p:sp>
+        <p:nvSpPr>
+          <p:cNvPr id="13" name="Rectangle 12"/>
+          <p:cNvSpPr/>
+          <p:nvPr/>
+        </p:nvSpPr>
+        <p:spPr>
+          <a:xfrm>
+            <a:off x="3026141" y="2231136"/>
+            <a:ext cx="2286000" cy="1298448"/>
+          </a:xfrm>
+          <a:prstGeom prst="rect">
+            <a:avLst/>
+          </a:prstGeom>
+          <a:solidFill>
+            <a:srgbClr val="EDF2FA"/>
+          </a:solidFill>
+          <a:ln>
+            <a:noFill/>
+          </a:ln>
+          <a:effectLst/>
+        </p:spPr>
+        <p:style>
+          <a:lnRef idx="1">
+            <a:schemeClr val="accent1"/>
+          </a:lnRef>
+          <a:fillRef idx="3">
+            <a:schemeClr val="accent1"/>
+          </a:fillRef>
+          <a:effectRef idx="2">
+            <a:schemeClr val="accent1"/>
+          </a:effectRef>
+          <a:fontRef idx="minor">
+            <a:schemeClr val="lt1"/>
+          </a:fontRef>
+        </p:style>
+        <p:txBody>
+          <a:bodyPr rtlCol="0" anchor="t" wrap="square" lIns="100584" rIns="100584" tIns="73152" bIns="73152"/>
+          <a:lstStyle/>
+          <a:p>
+            <a:pPr algn="l">
+              <a:spcAft>
+                <a:spcPts val="300"/>
+              </a:spcAft>
+            </a:pPr>
+            <a:r>
+              <a:rPr sz="1700" b="1">
+                <a:solidFill>
+                  <a:srgbClr val="4472C4"/>
+                </a:solidFill>
+                <a:latin typeface="Calibri"/>
+              </a:rPr>
+              <a:t>1749</a:t>
+            </a:r>
+          </a:p>
+          <a:p>
+            <a:pPr algn="l"/>
+            <a:r>
+              <a:rPr sz="1050">
+                <a:solidFill>
+                  <a:srgbClr val="262626"/>
+                </a:solidFill>
+                <a:latin typeface="Calibri"/>
+              </a:rPr>
+              <a:t>Gottfried Achenwall coins “Statistik” — literally the science of the state.</a:t>
+            </a:r>
+          </a:p>
+        </p:txBody>
+      </p:sp>
+      <p:sp>
+        <p:nvSpPr>
+          <p:cNvPr id="14" name="Rectangle 13"/>
+          <p:cNvSpPr/>
+          <p:nvPr/>
+        </p:nvSpPr>
+        <p:spPr>
+          <a:xfrm>
+            <a:off x="5443553" y="3913632"/>
+            <a:ext cx="20116" cy="384048"/>
+          </a:xfrm>
+          <a:prstGeom prst="rect">
+            <a:avLst/>
+          </a:prstGeom>
+          <a:solidFill>
+            <a:srgbClr val="4472C4"/>
+          </a:solidFill>
+          <a:ln>
+            <a:noFill/>
+          </a:ln>
+          <a:effectLst/>
+        </p:spPr>
+        <p:style>
+          <a:lnRef idx="1">
+            <a:schemeClr val="accent1"/>
+          </a:lnRef>
+          <a:fillRef idx="3">
+            <a:schemeClr val="accent1"/>
+          </a:fillRef>
+          <a:effectRef idx="2">
+            <a:schemeClr val="accent1"/>
+          </a:effectRef>
+          <a:fontRef idx="minor">
+            <a:schemeClr val="lt1"/>
+          </a:fontRef>
+        </p:style>
+        <p:txBody>
+          <a:bodyPr rtlCol="0" anchor="ctr" wrap="square"/>
+          <a:lstStyle/>
+          <a:p>
+            <a:pPr algn="ctr"/>
+          </a:p>
+        </p:txBody>
+      </p:sp>
+      <p:sp>
+        <p:nvSpPr>
+          <p:cNvPr id="15" name="Oval 14"/>
+          <p:cNvSpPr/>
+          <p:nvPr/>
+        </p:nvSpPr>
+        <p:spPr>
+          <a:xfrm>
+            <a:off x="5375888" y="3835908"/>
+            <a:ext cx="155448" cy="155448"/>
+          </a:xfrm>
+          <a:prstGeom prst="ellipse">
+            <a:avLst/>
+          </a:prstGeom>
+          <a:solidFill>
+            <a:srgbClr val="FFFFFF"/>
+          </a:solidFill>
+          <a:ln w="25400">
+            <a:solidFill>
+              <a:srgbClr val="4472C4"/>
+            </a:solidFill>
+          </a:ln>
+          <a:effectLst/>
+        </p:spPr>
+        <p:style>
+          <a:lnRef idx="1">
+            <a:schemeClr val="accent1"/>
+          </a:lnRef>
+          <a:fillRef idx="3">
+            <a:schemeClr val="accent1"/>
+          </a:fillRef>
+          <a:effectRef idx="2">
+            <a:schemeClr val="accent1"/>
+          </a:effectRef>
+          <a:fontRef idx="minor">
+            <a:schemeClr val="lt1"/>
+          </a:fontRef>
+        </p:style>
+        <p:txBody>
+          <a:bodyPr rtlCol="0" anchor="ctr" wrap="square"/>
+          <a:lstStyle/>
+          <a:p>
+            <a:pPr algn="ctr"/>
+          </a:p>
+        </p:txBody>
+      </p:sp>
+      <p:sp>
+        <p:nvSpPr>
+          <p:cNvPr id="16" name="Rectangle 15"/>
+          <p:cNvSpPr/>
+          <p:nvPr/>
+        </p:nvSpPr>
+        <p:spPr>
+          <a:xfrm>
+            <a:off x="4310612" y="4297680"/>
+            <a:ext cx="2286000" cy="1298448"/>
+          </a:xfrm>
+          <a:prstGeom prst="rect">
+            <a:avLst/>
+          </a:prstGeom>
+          <a:solidFill>
+            <a:srgbClr val="EDF2FA"/>
+          </a:solidFill>
+          <a:ln>
+            <a:noFill/>
+          </a:ln>
+          <a:effectLst/>
+        </p:spPr>
+        <p:style>
+          <a:lnRef idx="1">
+            <a:schemeClr val="accent1"/>
+          </a:lnRef>
+          <a:fillRef idx="3">
+            <a:schemeClr val="accent1"/>
+          </a:fillRef>
+          <a:effectRef idx="2">
+            <a:schemeClr val="accent1"/>
+          </a:effectRef>
+          <a:fontRef idx="minor">
+            <a:schemeClr val="lt1"/>
+          </a:fontRef>
+        </p:style>
+        <p:txBody>
+          <a:bodyPr rtlCol="0" anchor="t" wrap="square" lIns="100584" rIns="100584" tIns="73152" bIns="73152"/>
+          <a:lstStyle/>
+          <a:p>
+            <a:pPr algn="l">
+              <a:spcAft>
+                <a:spcPts val="300"/>
+              </a:spcAft>
+            </a:pPr>
+            <a:r>
+              <a:rPr sz="1700" b="1">
+                <a:solidFill>
+                  <a:srgbClr val="4472C4"/>
+                </a:solidFill>
+                <a:latin typeface="Calibri"/>
+              </a:rPr>
+              <a:t>1790</a:t>
+            </a:r>
+          </a:p>
+          <a:p>
+            <a:pPr algn="l"/>
+            <a:r>
+              <a:rPr sz="1050">
+                <a:solidFill>
+                  <a:srgbClr val="262626"/>
+                </a:solidFill>
+                <a:latin typeface="Calibri"/>
+              </a:rPr>
+              <a:t>The first U.S. census counts the population. Great Britain follows in 1801.</a:t>
+            </a:r>
+          </a:p>
+        </p:txBody>
+      </p:sp>
+      <p:sp>
+        <p:nvSpPr>
+          <p:cNvPr id="17" name="Rectangle 16"/>
+          <p:cNvSpPr/>
+          <p:nvPr/>
+        </p:nvSpPr>
+        <p:spPr>
+          <a:xfrm>
+            <a:off x="6728024" y="3529584"/>
+            <a:ext cx="20116" cy="384048"/>
+          </a:xfrm>
+          <a:prstGeom prst="rect">
+            <a:avLst/>
+          </a:prstGeom>
+          <a:solidFill>
+            <a:srgbClr val="4472C4"/>
+          </a:solidFill>
+          <a:ln>
+            <a:noFill/>
+          </a:ln>
+          <a:effectLst/>
+        </p:spPr>
+        <p:style>
+          <a:lnRef idx="1">
+            <a:schemeClr val="accent1"/>
+          </a:lnRef>
+          <a:fillRef idx="3">
+            <a:schemeClr val="accent1"/>
+          </a:fillRef>
+          <a:effectRef idx="2">
+            <a:schemeClr val="accent1"/>
+          </a:effectRef>
+          <a:fontRef idx="minor">
+            <a:schemeClr val="lt1"/>
+          </a:fontRef>
+        </p:style>
+        <p:txBody>
+          <a:bodyPr rtlCol="0" anchor="ctr" wrap="square"/>
+          <a:lstStyle/>
+          <a:p>
+            <a:pPr algn="ctr"/>
+          </a:p>
+        </p:txBody>
+      </p:sp>
+      <p:sp>
+        <p:nvSpPr>
+          <p:cNvPr id="18" name="Oval 17"/>
+          <p:cNvSpPr/>
+          <p:nvPr/>
+        </p:nvSpPr>
+        <p:spPr>
+          <a:xfrm>
+            <a:off x="6660358" y="3835908"/>
+            <a:ext cx="155448" cy="155448"/>
+          </a:xfrm>
+          <a:prstGeom prst="ellipse">
+            <a:avLst/>
+          </a:prstGeom>
+          <a:solidFill>
+            <a:srgbClr val="FFFFFF"/>
+          </a:solidFill>
+          <a:ln w="25400">
+            <a:solidFill>
+              <a:srgbClr val="4472C4"/>
+            </a:solidFill>
+          </a:ln>
+          <a:effectLst/>
+        </p:spPr>
+        <p:style>
+          <a:lnRef idx="1">
+            <a:schemeClr val="accent1"/>
+          </a:lnRef>
+          <a:fillRef idx="3">
+            <a:schemeClr val="accent1"/>
+          </a:fillRef>
+          <a:effectRef idx="2">
+            <a:schemeClr val="accent1"/>
+          </a:effectRef>
+          <a:fontRef idx="minor">
+            <a:schemeClr val="lt1"/>
+          </a:fontRef>
+        </p:style>
+        <p:txBody>
+          <a:bodyPr rtlCol="0" anchor="ctr" wrap="square"/>
+          <a:lstStyle/>
+          <a:p>
+            <a:pPr algn="ctr"/>
+          </a:p>
+        </p:txBody>
+      </p:sp>
+      <p:sp>
+        <p:nvSpPr>
+          <p:cNvPr id="19" name="Rectangle 18"/>
+          <p:cNvSpPr/>
+          <p:nvPr/>
+        </p:nvSpPr>
+        <p:spPr>
+          <a:xfrm>
+            <a:off x="5595082" y="2231136"/>
+            <a:ext cx="2286000" cy="1298448"/>
+          </a:xfrm>
+          <a:prstGeom prst="rect">
+            <a:avLst/>
+          </a:prstGeom>
+          <a:solidFill>
+            <a:srgbClr val="EDF2FA"/>
+          </a:solidFill>
+          <a:ln>
+            <a:noFill/>
+          </a:ln>
+          <a:effectLst/>
+        </p:spPr>
+        <p:style>
+          <a:lnRef idx="1">
+            <a:schemeClr val="accent1"/>
+          </a:lnRef>
+          <a:fillRef idx="3">
+            <a:schemeClr val="accent1"/>
+          </a:fillRef>
+          <a:effectRef idx="2">
+            <a:schemeClr val="accent1"/>
+          </a:effectRef>
+          <a:fontRef idx="minor">
+            <a:schemeClr val="lt1"/>
+          </a:fontRef>
+        </p:style>
+        <p:txBody>
+          <a:bodyPr rtlCol="0" anchor="t" wrap="square" lIns="100584" rIns="100584" tIns="73152" bIns="73152"/>
+          <a:lstStyle/>
+          <a:p>
+            <a:pPr algn="l">
+              <a:spcAft>
+                <a:spcPts val="300"/>
+              </a:spcAft>
+            </a:pPr>
+            <a:r>
+              <a:rPr sz="1700" b="1">
+                <a:solidFill>
+                  <a:srgbClr val="4472C4"/>
+                </a:solidFill>
+                <a:latin typeface="Calibri"/>
+              </a:rPr>
+              <a:t>1830s</a:t>
+            </a:r>
+          </a:p>
+          <a:p>
+            <a:pPr algn="l"/>
+            <a:r>
+              <a:rPr sz="1050">
+                <a:solidFill>
+                  <a:srgbClr val="262626"/>
+                </a:solidFill>
+                <a:latin typeface="Calibri"/>
+              </a:rPr>
+              <a:t>Adolphe Quetelet applies the normal curve to human traits and invents “the average man.”</a:t>
+            </a:r>
+          </a:p>
+        </p:txBody>
+      </p:sp>
+      <p:sp>
+        <p:nvSpPr>
+          <p:cNvPr id="20" name="Rectangle 19"/>
+          <p:cNvSpPr/>
+          <p:nvPr/>
+        </p:nvSpPr>
+        <p:spPr>
+          <a:xfrm>
+            <a:off x="8012495" y="3913632"/>
+            <a:ext cx="20116" cy="384048"/>
+          </a:xfrm>
+          <a:prstGeom prst="rect">
+            <a:avLst/>
+          </a:prstGeom>
+          <a:solidFill>
+            <a:srgbClr val="4472C4"/>
+          </a:solidFill>
+          <a:ln>
+            <a:noFill/>
+          </a:ln>
+          <a:effectLst/>
+        </p:spPr>
+        <p:style>
+          <a:lnRef idx="1">
+            <a:schemeClr val="accent1"/>
+          </a:lnRef>
+          <a:fillRef idx="3">
+            <a:schemeClr val="accent1"/>
+          </a:fillRef>
+          <a:effectRef idx="2">
+            <a:schemeClr val="accent1"/>
+          </a:effectRef>
+          <a:fontRef idx="minor">
+            <a:schemeClr val="lt1"/>
+          </a:fontRef>
+        </p:style>
+        <p:txBody>
+          <a:bodyPr rtlCol="0" anchor="ctr" wrap="square"/>
+          <a:lstStyle/>
+          <a:p>
+            <a:pPr algn="ctr"/>
+          </a:p>
+        </p:txBody>
+      </p:sp>
+      <p:sp>
+        <p:nvSpPr>
+          <p:cNvPr id="21" name="Oval 20"/>
+          <p:cNvSpPr/>
+          <p:nvPr/>
+        </p:nvSpPr>
+        <p:spPr>
+          <a:xfrm>
+            <a:off x="7944829" y="3835908"/>
+            <a:ext cx="155448" cy="155448"/>
+          </a:xfrm>
+          <a:prstGeom prst="ellipse">
+            <a:avLst/>
+          </a:prstGeom>
+          <a:solidFill>
+            <a:srgbClr val="FFFFFF"/>
+          </a:solidFill>
+          <a:ln w="25400">
+            <a:solidFill>
+              <a:srgbClr val="4472C4"/>
+            </a:solidFill>
+          </a:ln>
+          <a:effectLst/>
+        </p:spPr>
+        <p:style>
+          <a:lnRef idx="1">
+            <a:schemeClr val="accent1"/>
+          </a:lnRef>
+          <a:fillRef idx="3">
+            <a:schemeClr val="accent1"/>
+          </a:fillRef>
+          <a:effectRef idx="2">
+            <a:schemeClr val="accent1"/>
+          </a:effectRef>
+          <a:fontRef idx="minor">
+            <a:schemeClr val="lt1"/>
+          </a:fontRef>
+        </p:style>
+        <p:txBody>
+          <a:bodyPr rtlCol="0" anchor="ctr" wrap="square"/>
+          <a:lstStyle/>
+          <a:p>
+            <a:pPr algn="ctr"/>
+          </a:p>
+        </p:txBody>
+      </p:sp>
+      <p:sp>
+        <p:nvSpPr>
+          <p:cNvPr id="22" name="Rectangle 21"/>
+          <p:cNvSpPr/>
+          <p:nvPr/>
+        </p:nvSpPr>
+        <p:spPr>
+          <a:xfrm>
+            <a:off x="6879553" y="4297680"/>
+            <a:ext cx="2286000" cy="1298448"/>
+          </a:xfrm>
+          <a:prstGeom prst="rect">
+            <a:avLst/>
+          </a:prstGeom>
+          <a:solidFill>
+            <a:srgbClr val="EDF2FA"/>
+          </a:solidFill>
+          <a:ln>
+            <a:noFill/>
+          </a:ln>
+          <a:effectLst/>
+        </p:spPr>
+        <p:style>
+          <a:lnRef idx="1">
+            <a:schemeClr val="accent1"/>
+          </a:lnRef>
+          <a:fillRef idx="3">
+            <a:schemeClr val="accent1"/>
+          </a:fillRef>
+          <a:effectRef idx="2">
+            <a:schemeClr val="accent1"/>
+          </a:effectRef>
+          <a:fontRef idx="minor">
+            <a:schemeClr val="lt1"/>
+          </a:fontRef>
+        </p:style>
+        <p:txBody>
+          <a:bodyPr rtlCol="0" anchor="t" wrap="square" lIns="100584" rIns="100584" tIns="73152" bIns="73152"/>
+          <a:lstStyle/>
+          <a:p>
+            <a:pPr algn="l">
+              <a:spcAft>
+                <a:spcPts val="300"/>
+              </a:spcAft>
+            </a:pPr>
+            <a:r>
+              <a:rPr sz="1700" b="1">
+                <a:solidFill>
+                  <a:srgbClr val="4472C4"/>
+                </a:solidFill>
+                <a:latin typeface="Calibri"/>
+              </a:rPr>
+              <a:t>1900</a:t>
+            </a:r>
+          </a:p>
+          <a:p>
+            <a:pPr algn="l"/>
+            <a:r>
+              <a:rPr sz="1050">
+                <a:solidFill>
+                  <a:srgbClr val="262626"/>
+                </a:solidFill>
+                <a:latin typeface="Calibri"/>
+              </a:rPr>
+              <a:t>Galton and Pearson develop correlation, regression, and the chi-square test.</a:t>
+            </a:r>
+          </a:p>
+        </p:txBody>
+      </p:sp>
+      <p:sp>
+        <p:nvSpPr>
+          <p:cNvPr id="23" name="Rectangle 22"/>
+          <p:cNvSpPr/>
+          <p:nvPr/>
+        </p:nvSpPr>
+        <p:spPr>
+          <a:xfrm>
+            <a:off x="9296966" y="3529584"/>
+            <a:ext cx="20116" cy="384048"/>
+          </a:xfrm>
+          <a:prstGeom prst="rect">
+            <a:avLst/>
+          </a:prstGeom>
+          <a:solidFill>
+            <a:srgbClr val="4472C4"/>
+          </a:solidFill>
+          <a:ln>
+            <a:noFill/>
+          </a:ln>
+          <a:effectLst/>
+        </p:spPr>
+        <p:style>
+          <a:lnRef idx="1">
+            <a:schemeClr val="accent1"/>
+          </a:lnRef>
+          <a:fillRef idx="3">
+            <a:schemeClr val="accent1"/>
+          </a:fillRef>
+          <a:effectRef idx="2">
+            <a:schemeClr val="accent1"/>
+          </a:effectRef>
+          <a:fontRef idx="minor">
+            <a:schemeClr val="lt1"/>
+          </a:fontRef>
+        </p:style>
+        <p:txBody>
+          <a:bodyPr rtlCol="0" anchor="ctr" wrap="square"/>
+          <a:lstStyle/>
+          <a:p>
+            <a:pPr algn="ctr"/>
+          </a:p>
+        </p:txBody>
+      </p:sp>
+      <p:sp>
+        <p:nvSpPr>
+          <p:cNvPr id="24" name="Oval 23"/>
+          <p:cNvSpPr/>
+          <p:nvPr/>
+        </p:nvSpPr>
+        <p:spPr>
+          <a:xfrm>
+            <a:off x="9229300" y="3835908"/>
+            <a:ext cx="155448" cy="155448"/>
+          </a:xfrm>
+          <a:prstGeom prst="ellipse">
+            <a:avLst/>
+          </a:prstGeom>
+          <a:solidFill>
+            <a:srgbClr val="FFFFFF"/>
+          </a:solidFill>
+          <a:ln w="25400">
+            <a:solidFill>
+              <a:srgbClr val="4472C4"/>
+            </a:solidFill>
+          </a:ln>
+          <a:effectLst/>
+        </p:spPr>
+        <p:style>
+          <a:lnRef idx="1">
+            <a:schemeClr val="accent1"/>
+          </a:lnRef>
+          <a:fillRef idx="3">
+            <a:schemeClr val="accent1"/>
+          </a:fillRef>
+          <a:effectRef idx="2">
+            <a:schemeClr val="accent1"/>
+          </a:effectRef>
+          <a:fontRef idx="minor">
+            <a:schemeClr val="lt1"/>
+          </a:fontRef>
+        </p:style>
+        <p:txBody>
+          <a:bodyPr rtlCol="0" anchor="ctr" wrap="square"/>
+          <a:lstStyle/>
+          <a:p>
+            <a:pPr algn="ctr"/>
+          </a:p>
+        </p:txBody>
+      </p:sp>
+      <p:sp>
+        <p:nvSpPr>
+          <p:cNvPr id="25" name="Rectangle 24"/>
+          <p:cNvSpPr/>
+          <p:nvPr/>
+        </p:nvSpPr>
+        <p:spPr>
+          <a:xfrm>
+            <a:off x="8164024" y="2231136"/>
+            <a:ext cx="2286000" cy="1298448"/>
+          </a:xfrm>
+          <a:prstGeom prst="rect">
+            <a:avLst/>
+          </a:prstGeom>
+          <a:solidFill>
+            <a:srgbClr val="EDF2FA"/>
+          </a:solidFill>
+          <a:ln>
+            <a:noFill/>
+          </a:ln>
+          <a:effectLst/>
+        </p:spPr>
+        <p:style>
+          <a:lnRef idx="1">
+            <a:schemeClr val="accent1"/>
+          </a:lnRef>
+          <a:fillRef idx="3">
+            <a:schemeClr val="accent1"/>
+          </a:fillRef>
+          <a:effectRef idx="2">
+            <a:schemeClr val="accent1"/>
+          </a:effectRef>
+          <a:fontRef idx="minor">
+            <a:schemeClr val="lt1"/>
+          </a:fontRef>
+        </p:style>
+        <p:txBody>
+          <a:bodyPr rtlCol="0" anchor="t" wrap="square" lIns="100584" rIns="100584" tIns="73152" bIns="73152"/>
+          <a:lstStyle/>
+          <a:p>
+            <a:pPr algn="l">
+              <a:spcAft>
+                <a:spcPts val="300"/>
+              </a:spcAft>
+            </a:pPr>
+            <a:r>
+              <a:rPr sz="1700" b="1">
+                <a:solidFill>
+                  <a:srgbClr val="4472C4"/>
+                </a:solidFill>
+                <a:latin typeface="Calibri"/>
+              </a:rPr>
+              <a:t>1925</a:t>
+            </a:r>
+          </a:p>
+          <a:p>
+            <a:pPr algn="l"/>
+            <a:r>
+              <a:rPr sz="1050">
+                <a:solidFill>
+                  <a:srgbClr val="262626"/>
+                </a:solidFill>
+                <a:latin typeface="Calibri"/>
+              </a:rPr>
+              <a:t>R. A. Fisher formalizes experimental design, ANOVA, and significance testing.</a:t>
+            </a:r>
+          </a:p>
+        </p:txBody>
+      </p:sp>
+      <p:sp>
+        <p:nvSpPr>
+          <p:cNvPr id="26" name="Rectangle 25"/>
+          <p:cNvSpPr/>
+          <p:nvPr/>
+        </p:nvSpPr>
+        <p:spPr>
+          <a:xfrm>
+            <a:off x="10581436" y="3913632"/>
+            <a:ext cx="20116" cy="384048"/>
+          </a:xfrm>
+          <a:prstGeom prst="rect">
+            <a:avLst/>
+          </a:prstGeom>
+          <a:solidFill>
+            <a:srgbClr val="C5540F"/>
+          </a:solidFill>
+          <a:ln>
+            <a:noFill/>
+          </a:ln>
+          <a:effectLst/>
+        </p:spPr>
+        <p:style>
+          <a:lnRef idx="1">
+            <a:schemeClr val="accent1"/>
+          </a:lnRef>
+          <a:fillRef idx="3">
+            <a:schemeClr val="accent1"/>
+          </a:fillRef>
+          <a:effectRef idx="2">
+            <a:schemeClr val="accent1"/>
+          </a:effectRef>
+          <a:fontRef idx="minor">
+            <a:schemeClr val="lt1"/>
+          </a:fontRef>
+        </p:style>
+        <p:txBody>
+          <a:bodyPr rtlCol="0" anchor="ctr" wrap="square"/>
+          <a:lstStyle/>
+          <a:p>
+            <a:pPr algn="ctr"/>
+          </a:p>
+        </p:txBody>
+      </p:sp>
+      <p:sp>
+        <p:nvSpPr>
+          <p:cNvPr id="27" name="Oval 26"/>
+          <p:cNvSpPr/>
+          <p:nvPr/>
+        </p:nvSpPr>
+        <p:spPr>
+          <a:xfrm>
+            <a:off x="10513771" y="3835908"/>
+            <a:ext cx="155448" cy="155448"/>
+          </a:xfrm>
+          <a:prstGeom prst="ellipse">
+            <a:avLst/>
+          </a:prstGeom>
+          <a:solidFill>
+            <a:srgbClr val="FFFFFF"/>
+          </a:solidFill>
+          <a:ln w="25400">
+            <a:solidFill>
+              <a:srgbClr val="C5540F"/>
+            </a:solidFill>
+          </a:ln>
+          <a:effectLst/>
+        </p:spPr>
+        <p:style>
+          <a:lnRef idx="1">
+            <a:schemeClr val="accent1"/>
+          </a:lnRef>
+          <a:fillRef idx="3">
+            <a:schemeClr val="accent1"/>
+          </a:fillRef>
+          <a:effectRef idx="2">
+            <a:schemeClr val="accent1"/>
+          </a:effectRef>
+          <a:fontRef idx="minor">
+            <a:schemeClr val="lt1"/>
+          </a:fontRef>
+        </p:style>
+        <p:txBody>
+          <a:bodyPr rtlCol="0" anchor="ctr" wrap="square"/>
+          <a:lstStyle/>
+          <a:p>
+            <a:pPr algn="ctr"/>
+          </a:p>
+        </p:txBody>
+      </p:sp>
+      <p:sp>
+        <p:nvSpPr>
+          <p:cNvPr id="28" name="Rectangle 27"/>
+          <p:cNvSpPr/>
+          <p:nvPr/>
+        </p:nvSpPr>
+        <p:spPr>
+          <a:xfrm>
+            <a:off x="9448495" y="4297680"/>
+            <a:ext cx="2286000" cy="1298448"/>
+          </a:xfrm>
+          <a:prstGeom prst="rect">
+            <a:avLst/>
+          </a:prstGeom>
+          <a:solidFill>
+            <a:srgbClr val="FCE6D5"/>
+          </a:solidFill>
+          <a:ln>
+            <a:noFill/>
+          </a:ln>
+          <a:effectLst/>
+        </p:spPr>
+        <p:style>
+          <a:lnRef idx="1">
+            <a:schemeClr val="accent1"/>
+          </a:lnRef>
+          <a:fillRef idx="3">
+            <a:schemeClr val="accent1"/>
+          </a:fillRef>
+          <a:effectRef idx="2">
+            <a:schemeClr val="accent1"/>
+          </a:effectRef>
+          <a:fontRef idx="minor">
+            <a:schemeClr val="lt1"/>
+          </a:fontRef>
+        </p:style>
+        <p:txBody>
+          <a:bodyPr rtlCol="0" anchor="t" wrap="square" lIns="100584" rIns="100584" tIns="73152" bIns="73152"/>
+          <a:lstStyle/>
+          <a:p>
+            <a:pPr algn="l">
+              <a:spcAft>
+                <a:spcPts val="300"/>
+              </a:spcAft>
+            </a:pPr>
+            <a:r>
+              <a:rPr sz="1700" b="1">
+                <a:solidFill>
+                  <a:srgbClr val="C5540F"/>
+                </a:solidFill>
+                <a:latin typeface="Calibri"/>
+              </a:rPr>
+              <a:t>Today</a:t>
+            </a:r>
+          </a:p>
+          <a:p>
+            <a:pPr algn="l"/>
+            <a:r>
+              <a:rPr sz="1050">
+                <a:solidFill>
+                  <a:srgbClr val="262626"/>
+                </a:solidFill>
+                <a:latin typeface="Calibri"/>
+              </a:rPr>
+              <a:t>The same ideas, now run by computers on data far larger than Graunt could count.</a:t>
+            </a:r>
+          </a:p>
+        </p:txBody>
+      </p:sp>
+      <p:sp>
+        <p:nvSpPr>
+          <p:cNvPr id="29" name="TextBox 28"/>
+          <p:cNvSpPr txBox="1"/>
+          <p:nvPr/>
+        </p:nvSpPr>
+        <p:spPr>
+          <a:xfrm>
+            <a:off x="457200" y="6144768"/>
+            <a:ext cx="11292840" cy="566928"/>
+          </a:xfrm>
+          <a:prstGeom prst="rect">
+            <a:avLst/>
+          </a:prstGeom>
+          <a:noFill/>
+        </p:spPr>
+        <p:txBody>
+          <a:bodyPr wrap="square" lIns="0" rIns="0" tIns="0" bIns="0" anchor="t">
+            <a:spAutoFit/>
+          </a:bodyPr>
+          <a:lstStyle/>
+          <a:p>
+            <a:pPr algn="l">
+              <a:spcAft>
+                <a:spcPts val="0"/>
+              </a:spcAft>
+            </a:pPr>
+            <a:r>
+              <a:rPr sz="900" b="0">
+                <a:solidFill>
+                  <a:srgbClr val="595959"/>
+                </a:solidFill>
+                <a:latin typeface="Calibri"/>
+              </a:rPr>
+              <a:t>Sources: J. Graunt (1662), Natural and Political Observations Made upon the Bills of Mortality. E. Halley (1693), Phil. Trans. R. Soc. 17:596–610. G. Achenwall (1749), Abriss der neuesten Staatswissenschaft. A. Quetelet (1835), Sur l’homme et le développement de ses facultés. R. A. Fisher (1925), Statistical Methods for Research Workers.</a:t>
+            </a:r>
+          </a:p>
+        </p:txBody>
+      </p:sp>
+    </p:spTree>
+  </p:cSld>
+  <p:clrMapOvr>
+    <a:masterClrMapping/>
+  </p:clrMapOvr>
 </p:sld>
 </file>
 
@@ -9831,93 +11250,6 @@
           </a:p>
         </p:txBody>
       </p:sp>
-      <p:pic>
-        <p:nvPicPr>
-          <p:cNvPr id="7" name="Picture 6" descr="A group of people in white clothing holding signs&#10;&#10;Description automatically generated">
-            <a:extLst>
-              <a:ext uri="{FF2B5EF4-FFF2-40B4-BE49-F238E27FC236}">
-                <a16:creationId xmlns:a16="http://schemas.microsoft.com/office/drawing/2014/main" id="{A2EC9BD1-8260-5020-E44F-2D2BBFA27357}"/>
-              </a:ext>
-            </a:extLst>
-          </p:cNvPr>
-          <p:cNvPicPr>
-            <a:picLocks noChangeAspect="1"/>
-          </p:cNvPicPr>
-          <p:nvPr/>
-        </p:nvPicPr>
-        <p:blipFill>
-          <a:blip r:embed="rId2">
-            <a:extLst>
-              <a:ext uri="{28A0092B-C50C-407E-A947-70E740481C1C}">
-                <a14:useLocalDpi xmlns:a14="http://schemas.microsoft.com/office/drawing/2010/main" val="0"/>
-              </a:ext>
-              <a:ext uri="{837473B0-CC2E-450A-ABE3-18F120FF3D39}">
-                <a1611:picAttrSrcUrl xmlns:a1611="http://schemas.microsoft.com/office/drawing/2016/11/main" r:id="rId3"/>
-              </a:ext>
-            </a:extLst>
-          </a:blip>
-          <a:stretch>
-            <a:fillRect/>
-          </a:stretch>
-        </p:blipFill>
-        <p:spPr>
-          <a:xfrm>
-            <a:off x="251475" y="3255482"/>
-            <a:ext cx="4801104" cy="3158621"/>
-          </a:xfrm>
-          <a:prstGeom prst="rect">
-            <a:avLst/>
-          </a:prstGeom>
-        </p:spPr>
-      </p:pic>
-      <p:sp>
-        <p:nvSpPr>
-          <p:cNvPr id="8" name="TextBox 7">
-            <a:extLst>
-              <a:ext uri="{FF2B5EF4-FFF2-40B4-BE49-F238E27FC236}">
-                <a16:creationId xmlns:a16="http://schemas.microsoft.com/office/drawing/2014/main" id="{A7096998-98C8-857E-95FB-A8387761F0D2}"/>
-              </a:ext>
-            </a:extLst>
-          </p:cNvPr>
-          <p:cNvSpPr txBox="1"/>
-          <p:nvPr/>
-        </p:nvSpPr>
-        <p:spPr>
-          <a:xfrm>
-            <a:off x="490631" y="6627168"/>
-            <a:ext cx="4561948" cy="230832"/>
-          </a:xfrm>
-          <a:prstGeom prst="rect">
-            <a:avLst/>
-          </a:prstGeom>
-          <a:noFill/>
-        </p:spPr>
-        <p:txBody>
-          <a:bodyPr wrap="square" rtlCol="0">
-            <a:spAutoFit/>
-          </a:bodyPr>
-          <a:lstStyle/>
-          <a:p>
-            <a:r>
-              <a:rPr lang="en-US" sz="900">
-                <a:hlinkClick r:id="rId3" tooltip="https://fiftyfourandahalf.com/2017/09/27/i-tried-to-ignore-it/"/>
-              </a:rPr>
-              <a:t>This Photo</a:t>
-            </a:r>
-            <a:r>
-              <a:rPr lang="en-US" sz="900"/>
-              <a:t> by Unknown Author is licensed under </a:t>
-            </a:r>
-            <a:r>
-              <a:rPr lang="en-US" sz="900">
-                <a:hlinkClick r:id="rId4" tooltip="https://creativecommons.org/licenses/by-nc-nd/3.0/"/>
-              </a:rPr>
-              <a:t>CC BY-NC-ND</a:t>
-            </a:r>
-            <a:endParaRPr lang="en-US" sz="900"/>
-          </a:p>
-        </p:txBody>
-      </p:sp>
       <p:sp>
         <p:nvSpPr>
           <p:cNvPr id="9" name="Content Placeholder 2">
@@ -9936,8 +11268,8 @@
         </p:nvSpPr>
         <p:spPr>
           <a:xfrm>
-            <a:off x="251475" y="1668463"/>
-            <a:ext cx="4874707" cy="1444192"/>
+            <a:off x="274320" y="1481328"/>
+            <a:ext cx="4709160" cy="1600200"/>
           </a:xfrm>
         </p:spPr>
         <p:txBody>
@@ -9951,32 +11283,14 @@
             </a:pPr>
             <a:r>
               <a:rPr lang="en-US" sz="2000" dirty="0"/>
-              <a:t>The following table contains fictional data consisting of 20 observations of storm troopers who have just graduated from the Empire’s Imperial Academy. The height, age, blaster accuracy, and future duty posting are recorded for each storm trooper</a:t>
-            </a:r>
-          </a:p>
-          <a:p>
-            <a:pPr marL="0" indent="0">
-              <a:buNone/>
-            </a:pPr>
-            <a:endParaRPr lang="en-US" sz="1700" dirty="0"/>
-          </a:p>
-          <a:p>
-            <a:pPr marL="0" indent="0">
-              <a:buNone/>
-            </a:pPr>
-            <a:endParaRPr lang="en-US" sz="1700" dirty="0"/>
+              <a:t>The following table contains data on 20 clients contacted during a bank’s direct marketing campaign for a term deposit account. For each client, the job, education level, age, account balance, length of the marketing call, and whether they subscribed are recorded</a:t>
+            </a:r>
           </a:p>
         </p:txBody>
       </p:sp>
       <p:pic>
         <p:nvPicPr>
-          <p:cNvPr id="6" name="Picture 5">
-            <a:extLst>
-              <a:ext uri="{FF2B5EF4-FFF2-40B4-BE49-F238E27FC236}">
-                <a16:creationId xmlns:a16="http://schemas.microsoft.com/office/drawing/2014/main" id="{1ECB865F-D03E-CA2D-A9BA-F83432805318}"/>
-              </a:ext>
-            </a:extLst>
-          </p:cNvPr>
+          <p:cNvPr id="10" name="Picture 9" descr="image.png"/>
           <p:cNvPicPr>
             <a:picLocks noChangeAspect="1"/>
           </p:cNvPicPr>
@@ -9990,14 +11304,1545 @@
         </p:blipFill>
         <p:spPr>
           <a:xfrm>
-            <a:off x="5248970" y="1569639"/>
-            <a:ext cx="6943030" cy="4838700"/>
+            <a:off x="5138928" y="1389888"/>
+            <a:ext cx="6812280" cy="4293155"/>
           </a:xfrm>
           <a:prstGeom prst="rect">
             <a:avLst/>
           </a:prstGeom>
         </p:spPr>
       </p:pic>
+      <p:sp>
+        <p:nvSpPr>
+          <p:cNvPr id="11" name="TextBox 10"/>
+          <p:cNvSpPr txBox="1"/>
+          <p:nvPr/>
+        </p:nvSpPr>
+        <p:spPr>
+          <a:xfrm>
+            <a:off x="365760" y="3218688"/>
+            <a:ext cx="4663440" cy="274320"/>
+          </a:xfrm>
+          <a:prstGeom prst="rect">
+            <a:avLst/>
+          </a:prstGeom>
+          <a:noFill/>
+        </p:spPr>
+        <p:txBody>
+          <a:bodyPr wrap="square" lIns="0" rIns="0" tIns="0" bIns="0" anchor="t">
+            <a:spAutoFit/>
+          </a:bodyPr>
+          <a:lstStyle/>
+          <a:p>
+            <a:pPr algn="l">
+              <a:spcAft>
+                <a:spcPts val="0"/>
+              </a:spcAft>
+            </a:pPr>
+            <a:r>
+              <a:rPr sz="1500" b="1">
+                <a:solidFill>
+                  <a:srgbClr val="000000"/>
+                </a:solidFill>
+                <a:latin typeface="Calibri"/>
+              </a:rPr>
+              <a:t>Reading a data table</a:t>
+            </a:r>
+          </a:p>
+        </p:txBody>
+      </p:sp>
+      <p:sp>
+        <p:nvSpPr>
+          <p:cNvPr id="12" name="TextBox 11"/>
+          <p:cNvSpPr txBox="1"/>
+          <p:nvPr/>
+        </p:nvSpPr>
+        <p:spPr>
+          <a:xfrm>
+            <a:off x="365760" y="3584448"/>
+            <a:ext cx="4663440" cy="237744"/>
+          </a:xfrm>
+          <a:prstGeom prst="rect">
+            <a:avLst/>
+          </a:prstGeom>
+          <a:noFill/>
+        </p:spPr>
+        <p:txBody>
+          <a:bodyPr wrap="square" lIns="0" rIns="0" tIns="0" bIns="0" anchor="t">
+            <a:spAutoFit/>
+          </a:bodyPr>
+          <a:lstStyle/>
+          <a:p>
+            <a:pPr algn="l">
+              <a:spcAft>
+                <a:spcPts val="0"/>
+              </a:spcAft>
+            </a:pPr>
+            <a:r>
+              <a:rPr sz="1150" b="1">
+                <a:solidFill>
+                  <a:srgbClr val="C5540F"/>
+                </a:solidFill>
+                <a:latin typeface="Calibri"/>
+              </a:rPr>
+              <a:t>Each column is a variable</a:t>
+            </a:r>
+          </a:p>
+        </p:txBody>
+      </p:sp>
+      <p:sp>
+        <p:nvSpPr>
+          <p:cNvPr id="13" name="Rectangle 12"/>
+          <p:cNvSpPr/>
+          <p:nvPr/>
+        </p:nvSpPr>
+        <p:spPr>
+          <a:xfrm>
+            <a:off x="365760" y="3950208"/>
+            <a:ext cx="896112" cy="256032"/>
+          </a:xfrm>
+          <a:prstGeom prst="rect">
+            <a:avLst/>
+          </a:prstGeom>
+          <a:solidFill>
+            <a:srgbClr val="EFEFEF"/>
+          </a:solidFill>
+          <a:ln w="9525">
+            <a:solidFill>
+              <a:srgbClr val="BFBFBF"/>
+            </a:solidFill>
+          </a:ln>
+          <a:effectLst/>
+        </p:spPr>
+        <p:style>
+          <a:lnRef idx="1">
+            <a:schemeClr val="accent1"/>
+          </a:lnRef>
+          <a:fillRef idx="3">
+            <a:schemeClr val="accent1"/>
+          </a:fillRef>
+          <a:effectRef idx="2">
+            <a:schemeClr val="accent1"/>
+          </a:effectRef>
+          <a:fontRef idx="minor">
+            <a:schemeClr val="lt1"/>
+          </a:fontRef>
+        </p:style>
+        <p:txBody>
+          <a:bodyPr rtlCol="0" anchor="ctr" wrap="square" lIns="27432" rIns="27432" tIns="0" bIns="0"/>
+          <a:lstStyle/>
+          <a:p>
+            <a:pPr algn="ctr"/>
+            <a:r>
+              <a:rPr sz="850" b="1">
+                <a:solidFill>
+                  <a:srgbClr val="404040"/>
+                </a:solidFill>
+                <a:latin typeface="Calibri"/>
+              </a:rPr>
+              <a:t>Client ID</a:t>
+            </a:r>
+          </a:p>
+        </p:txBody>
+      </p:sp>
+      <p:sp>
+        <p:nvSpPr>
+          <p:cNvPr id="14" name="Rectangle 13"/>
+          <p:cNvSpPr/>
+          <p:nvPr/>
+        </p:nvSpPr>
+        <p:spPr>
+          <a:xfrm>
+            <a:off x="1261872" y="3950208"/>
+            <a:ext cx="896112" cy="256032"/>
+          </a:xfrm>
+          <a:prstGeom prst="rect">
+            <a:avLst/>
+          </a:prstGeom>
+          <a:solidFill>
+            <a:srgbClr val="EFEFEF"/>
+          </a:solidFill>
+          <a:ln w="9525">
+            <a:solidFill>
+              <a:srgbClr val="BFBFBF"/>
+            </a:solidFill>
+          </a:ln>
+          <a:effectLst/>
+        </p:spPr>
+        <p:style>
+          <a:lnRef idx="1">
+            <a:schemeClr val="accent1"/>
+          </a:lnRef>
+          <a:fillRef idx="3">
+            <a:schemeClr val="accent1"/>
+          </a:fillRef>
+          <a:effectRef idx="2">
+            <a:schemeClr val="accent1"/>
+          </a:effectRef>
+          <a:fontRef idx="minor">
+            <a:schemeClr val="lt1"/>
+          </a:fontRef>
+        </p:style>
+        <p:txBody>
+          <a:bodyPr rtlCol="0" anchor="ctr" wrap="square" lIns="27432" rIns="27432" tIns="0" bIns="0"/>
+          <a:lstStyle/>
+          <a:p>
+            <a:pPr algn="ctr"/>
+            <a:r>
+              <a:rPr sz="850" b="1">
+                <a:solidFill>
+                  <a:srgbClr val="404040"/>
+                </a:solidFill>
+                <a:latin typeface="Calibri"/>
+              </a:rPr>
+              <a:t>Job</a:t>
+            </a:r>
+          </a:p>
+        </p:txBody>
+      </p:sp>
+      <p:sp>
+        <p:nvSpPr>
+          <p:cNvPr id="15" name="Rectangle 14"/>
+          <p:cNvSpPr/>
+          <p:nvPr/>
+        </p:nvSpPr>
+        <p:spPr>
+          <a:xfrm>
+            <a:off x="2157984" y="3950208"/>
+            <a:ext cx="896112" cy="256032"/>
+          </a:xfrm>
+          <a:prstGeom prst="rect">
+            <a:avLst/>
+          </a:prstGeom>
+          <a:solidFill>
+            <a:srgbClr val="FCE6D5"/>
+          </a:solidFill>
+          <a:ln w="9525">
+            <a:solidFill>
+              <a:srgbClr val="BFBFBF"/>
+            </a:solidFill>
+          </a:ln>
+          <a:effectLst/>
+        </p:spPr>
+        <p:style>
+          <a:lnRef idx="1">
+            <a:schemeClr val="accent1"/>
+          </a:lnRef>
+          <a:fillRef idx="3">
+            <a:schemeClr val="accent1"/>
+          </a:fillRef>
+          <a:effectRef idx="2">
+            <a:schemeClr val="accent1"/>
+          </a:effectRef>
+          <a:fontRef idx="minor">
+            <a:schemeClr val="lt1"/>
+          </a:fontRef>
+        </p:style>
+        <p:txBody>
+          <a:bodyPr rtlCol="0" anchor="ctr" wrap="square" lIns="27432" rIns="27432" tIns="0" bIns="0"/>
+          <a:lstStyle/>
+          <a:p>
+            <a:pPr algn="ctr"/>
+            <a:r>
+              <a:rPr sz="850" b="1">
+                <a:solidFill>
+                  <a:srgbClr val="C5540F"/>
+                </a:solidFill>
+                <a:latin typeface="Calibri"/>
+              </a:rPr>
+              <a:t>Age</a:t>
+            </a:r>
+          </a:p>
+        </p:txBody>
+      </p:sp>
+      <p:sp>
+        <p:nvSpPr>
+          <p:cNvPr id="16" name="Rectangle 15"/>
+          <p:cNvSpPr/>
+          <p:nvPr/>
+        </p:nvSpPr>
+        <p:spPr>
+          <a:xfrm>
+            <a:off x="3054096" y="3950208"/>
+            <a:ext cx="896112" cy="256032"/>
+          </a:xfrm>
+          <a:prstGeom prst="rect">
+            <a:avLst/>
+          </a:prstGeom>
+          <a:solidFill>
+            <a:srgbClr val="EFEFEF"/>
+          </a:solidFill>
+          <a:ln w="9525">
+            <a:solidFill>
+              <a:srgbClr val="BFBFBF"/>
+            </a:solidFill>
+          </a:ln>
+          <a:effectLst/>
+        </p:spPr>
+        <p:style>
+          <a:lnRef idx="1">
+            <a:schemeClr val="accent1"/>
+          </a:lnRef>
+          <a:fillRef idx="3">
+            <a:schemeClr val="accent1"/>
+          </a:fillRef>
+          <a:effectRef idx="2">
+            <a:schemeClr val="accent1"/>
+          </a:effectRef>
+          <a:fontRef idx="minor">
+            <a:schemeClr val="lt1"/>
+          </a:fontRef>
+        </p:style>
+        <p:txBody>
+          <a:bodyPr rtlCol="0" anchor="ctr" wrap="square" lIns="27432" rIns="27432" tIns="0" bIns="0"/>
+          <a:lstStyle/>
+          <a:p>
+            <a:pPr algn="ctr"/>
+            <a:r>
+              <a:rPr sz="850" b="1">
+                <a:solidFill>
+                  <a:srgbClr val="404040"/>
+                </a:solidFill>
+                <a:latin typeface="Calibri"/>
+              </a:rPr>
+              <a:t>Balance</a:t>
+            </a:r>
+          </a:p>
+        </p:txBody>
+      </p:sp>
+      <p:sp>
+        <p:nvSpPr>
+          <p:cNvPr id="17" name="Rectangle 16"/>
+          <p:cNvSpPr/>
+          <p:nvPr/>
+        </p:nvSpPr>
+        <p:spPr>
+          <a:xfrm>
+            <a:off x="3950208" y="3950208"/>
+            <a:ext cx="896112" cy="256032"/>
+          </a:xfrm>
+          <a:prstGeom prst="rect">
+            <a:avLst/>
+          </a:prstGeom>
+          <a:solidFill>
+            <a:srgbClr val="EFEFEF"/>
+          </a:solidFill>
+          <a:ln w="9525">
+            <a:solidFill>
+              <a:srgbClr val="BFBFBF"/>
+            </a:solidFill>
+          </a:ln>
+          <a:effectLst/>
+        </p:spPr>
+        <p:style>
+          <a:lnRef idx="1">
+            <a:schemeClr val="accent1"/>
+          </a:lnRef>
+          <a:fillRef idx="3">
+            <a:schemeClr val="accent1"/>
+          </a:fillRef>
+          <a:effectRef idx="2">
+            <a:schemeClr val="accent1"/>
+          </a:effectRef>
+          <a:fontRef idx="minor">
+            <a:schemeClr val="lt1"/>
+          </a:fontRef>
+        </p:style>
+        <p:txBody>
+          <a:bodyPr rtlCol="0" anchor="ctr" wrap="square" lIns="27432" rIns="27432" tIns="0" bIns="0"/>
+          <a:lstStyle/>
+          <a:p>
+            <a:pPr algn="ctr"/>
+            <a:r>
+              <a:rPr sz="850" b="1">
+                <a:solidFill>
+                  <a:srgbClr val="404040"/>
+                </a:solidFill>
+                <a:latin typeface="Calibri"/>
+              </a:rPr>
+              <a:t>Subscribed</a:t>
+            </a:r>
+          </a:p>
+        </p:txBody>
+      </p:sp>
+      <p:sp>
+        <p:nvSpPr>
+          <p:cNvPr id="18" name="Rectangle 17"/>
+          <p:cNvSpPr/>
+          <p:nvPr/>
+        </p:nvSpPr>
+        <p:spPr>
+          <a:xfrm>
+            <a:off x="365760" y="4206240"/>
+            <a:ext cx="896112" cy="256032"/>
+          </a:xfrm>
+          <a:prstGeom prst="rect">
+            <a:avLst/>
+          </a:prstGeom>
+          <a:solidFill>
+            <a:srgbClr val="FFFFFF"/>
+          </a:solidFill>
+          <a:ln w="9525">
+            <a:solidFill>
+              <a:srgbClr val="BFBFBF"/>
+            </a:solidFill>
+          </a:ln>
+          <a:effectLst/>
+        </p:spPr>
+        <p:style>
+          <a:lnRef idx="1">
+            <a:schemeClr val="accent1"/>
+          </a:lnRef>
+          <a:fillRef idx="3">
+            <a:schemeClr val="accent1"/>
+          </a:fillRef>
+          <a:effectRef idx="2">
+            <a:schemeClr val="accent1"/>
+          </a:effectRef>
+          <a:fontRef idx="minor">
+            <a:schemeClr val="lt1"/>
+          </a:fontRef>
+        </p:style>
+        <p:txBody>
+          <a:bodyPr rtlCol="0" anchor="ctr" wrap="square" lIns="27432" rIns="27432" tIns="0" bIns="0"/>
+          <a:lstStyle/>
+          <a:p>
+            <a:pPr algn="ctr"/>
+            <a:r>
+              <a:rPr sz="850" b="0">
+                <a:solidFill>
+                  <a:srgbClr val="262626"/>
+                </a:solidFill>
+                <a:latin typeface="Calibri"/>
+              </a:rPr>
+              <a:t>C-1047</a:t>
+            </a:r>
+          </a:p>
+        </p:txBody>
+      </p:sp>
+      <p:sp>
+        <p:nvSpPr>
+          <p:cNvPr id="19" name="Rectangle 18"/>
+          <p:cNvSpPr/>
+          <p:nvPr/>
+        </p:nvSpPr>
+        <p:spPr>
+          <a:xfrm>
+            <a:off x="1261872" y="4206240"/>
+            <a:ext cx="896112" cy="256032"/>
+          </a:xfrm>
+          <a:prstGeom prst="rect">
+            <a:avLst/>
+          </a:prstGeom>
+          <a:solidFill>
+            <a:srgbClr val="FFFFFF"/>
+          </a:solidFill>
+          <a:ln w="9525">
+            <a:solidFill>
+              <a:srgbClr val="BFBFBF"/>
+            </a:solidFill>
+          </a:ln>
+          <a:effectLst/>
+        </p:spPr>
+        <p:style>
+          <a:lnRef idx="1">
+            <a:schemeClr val="accent1"/>
+          </a:lnRef>
+          <a:fillRef idx="3">
+            <a:schemeClr val="accent1"/>
+          </a:fillRef>
+          <a:effectRef idx="2">
+            <a:schemeClr val="accent1"/>
+          </a:effectRef>
+          <a:fontRef idx="minor">
+            <a:schemeClr val="lt1"/>
+          </a:fontRef>
+        </p:style>
+        <p:txBody>
+          <a:bodyPr rtlCol="0" anchor="ctr" wrap="square" lIns="27432" rIns="27432" tIns="0" bIns="0"/>
+          <a:lstStyle/>
+          <a:p>
+            <a:pPr algn="ctr"/>
+            <a:r>
+              <a:rPr sz="850" b="0">
+                <a:solidFill>
+                  <a:srgbClr val="262626"/>
+                </a:solidFill>
+                <a:latin typeface="Calibri"/>
+              </a:rPr>
+              <a:t>mgmt</a:t>
+            </a:r>
+          </a:p>
+        </p:txBody>
+      </p:sp>
+      <p:sp>
+        <p:nvSpPr>
+          <p:cNvPr id="20" name="Rectangle 19"/>
+          <p:cNvSpPr/>
+          <p:nvPr/>
+        </p:nvSpPr>
+        <p:spPr>
+          <a:xfrm>
+            <a:off x="2157984" y="4206240"/>
+            <a:ext cx="896112" cy="256032"/>
+          </a:xfrm>
+          <a:prstGeom prst="rect">
+            <a:avLst/>
+          </a:prstGeom>
+          <a:solidFill>
+            <a:srgbClr val="FCE6D5"/>
+          </a:solidFill>
+          <a:ln w="9525">
+            <a:solidFill>
+              <a:srgbClr val="BFBFBF"/>
+            </a:solidFill>
+          </a:ln>
+          <a:effectLst/>
+        </p:spPr>
+        <p:style>
+          <a:lnRef idx="1">
+            <a:schemeClr val="accent1"/>
+          </a:lnRef>
+          <a:fillRef idx="3">
+            <a:schemeClr val="accent1"/>
+          </a:fillRef>
+          <a:effectRef idx="2">
+            <a:schemeClr val="accent1"/>
+          </a:effectRef>
+          <a:fontRef idx="minor">
+            <a:schemeClr val="lt1"/>
+          </a:fontRef>
+        </p:style>
+        <p:txBody>
+          <a:bodyPr rtlCol="0" anchor="ctr" wrap="square" lIns="27432" rIns="27432" tIns="0" bIns="0"/>
+          <a:lstStyle/>
+          <a:p>
+            <a:pPr algn="ctr"/>
+            <a:r>
+              <a:rPr sz="850" b="0">
+                <a:solidFill>
+                  <a:srgbClr val="262626"/>
+                </a:solidFill>
+                <a:latin typeface="Calibri"/>
+              </a:rPr>
+              <a:t>42</a:t>
+            </a:r>
+          </a:p>
+        </p:txBody>
+      </p:sp>
+      <p:sp>
+        <p:nvSpPr>
+          <p:cNvPr id="21" name="Rectangle 20"/>
+          <p:cNvSpPr/>
+          <p:nvPr/>
+        </p:nvSpPr>
+        <p:spPr>
+          <a:xfrm>
+            <a:off x="3054096" y="4206240"/>
+            <a:ext cx="896112" cy="256032"/>
+          </a:xfrm>
+          <a:prstGeom prst="rect">
+            <a:avLst/>
+          </a:prstGeom>
+          <a:solidFill>
+            <a:srgbClr val="FFFFFF"/>
+          </a:solidFill>
+          <a:ln w="9525">
+            <a:solidFill>
+              <a:srgbClr val="BFBFBF"/>
+            </a:solidFill>
+          </a:ln>
+          <a:effectLst/>
+        </p:spPr>
+        <p:style>
+          <a:lnRef idx="1">
+            <a:schemeClr val="accent1"/>
+          </a:lnRef>
+          <a:fillRef idx="3">
+            <a:schemeClr val="accent1"/>
+          </a:fillRef>
+          <a:effectRef idx="2">
+            <a:schemeClr val="accent1"/>
+          </a:effectRef>
+          <a:fontRef idx="minor">
+            <a:schemeClr val="lt1"/>
+          </a:fontRef>
+        </p:style>
+        <p:txBody>
+          <a:bodyPr rtlCol="0" anchor="ctr" wrap="square" lIns="27432" rIns="27432" tIns="0" bIns="0"/>
+          <a:lstStyle/>
+          <a:p>
+            <a:pPr algn="ctr"/>
+            <a:r>
+              <a:rPr sz="850" b="0">
+                <a:solidFill>
+                  <a:srgbClr val="262626"/>
+                </a:solidFill>
+                <a:latin typeface="Calibri"/>
+              </a:rPr>
+              <a:t>2,143</a:t>
+            </a:r>
+          </a:p>
+        </p:txBody>
+      </p:sp>
+      <p:sp>
+        <p:nvSpPr>
+          <p:cNvPr id="22" name="Rectangle 21"/>
+          <p:cNvSpPr/>
+          <p:nvPr/>
+        </p:nvSpPr>
+        <p:spPr>
+          <a:xfrm>
+            <a:off x="3950208" y="4206240"/>
+            <a:ext cx="896112" cy="256032"/>
+          </a:xfrm>
+          <a:prstGeom prst="rect">
+            <a:avLst/>
+          </a:prstGeom>
+          <a:solidFill>
+            <a:srgbClr val="FFFFFF"/>
+          </a:solidFill>
+          <a:ln w="9525">
+            <a:solidFill>
+              <a:srgbClr val="BFBFBF"/>
+            </a:solidFill>
+          </a:ln>
+          <a:effectLst/>
+        </p:spPr>
+        <p:style>
+          <a:lnRef idx="1">
+            <a:schemeClr val="accent1"/>
+          </a:lnRef>
+          <a:fillRef idx="3">
+            <a:schemeClr val="accent1"/>
+          </a:fillRef>
+          <a:effectRef idx="2">
+            <a:schemeClr val="accent1"/>
+          </a:effectRef>
+          <a:fontRef idx="minor">
+            <a:schemeClr val="lt1"/>
+          </a:fontRef>
+        </p:style>
+        <p:txBody>
+          <a:bodyPr rtlCol="0" anchor="ctr" wrap="square" lIns="27432" rIns="27432" tIns="0" bIns="0"/>
+          <a:lstStyle/>
+          <a:p>
+            <a:pPr algn="ctr"/>
+            <a:r>
+              <a:rPr sz="850" b="0">
+                <a:solidFill>
+                  <a:srgbClr val="262626"/>
+                </a:solidFill>
+                <a:latin typeface="Calibri"/>
+              </a:rPr>
+              <a:t>no</a:t>
+            </a:r>
+          </a:p>
+        </p:txBody>
+      </p:sp>
+      <p:sp>
+        <p:nvSpPr>
+          <p:cNvPr id="23" name="Rectangle 22"/>
+          <p:cNvSpPr/>
+          <p:nvPr/>
+        </p:nvSpPr>
+        <p:spPr>
+          <a:xfrm>
+            <a:off x="365760" y="4462272"/>
+            <a:ext cx="896112" cy="256032"/>
+          </a:xfrm>
+          <a:prstGeom prst="rect">
+            <a:avLst/>
+          </a:prstGeom>
+          <a:solidFill>
+            <a:srgbClr val="FFFFFF"/>
+          </a:solidFill>
+          <a:ln w="9525">
+            <a:solidFill>
+              <a:srgbClr val="BFBFBF"/>
+            </a:solidFill>
+          </a:ln>
+          <a:effectLst/>
+        </p:spPr>
+        <p:style>
+          <a:lnRef idx="1">
+            <a:schemeClr val="accent1"/>
+          </a:lnRef>
+          <a:fillRef idx="3">
+            <a:schemeClr val="accent1"/>
+          </a:fillRef>
+          <a:effectRef idx="2">
+            <a:schemeClr val="accent1"/>
+          </a:effectRef>
+          <a:fontRef idx="minor">
+            <a:schemeClr val="lt1"/>
+          </a:fontRef>
+        </p:style>
+        <p:txBody>
+          <a:bodyPr rtlCol="0" anchor="ctr" wrap="square" lIns="27432" rIns="27432" tIns="0" bIns="0"/>
+          <a:lstStyle/>
+          <a:p>
+            <a:pPr algn="ctr"/>
+            <a:r>
+              <a:rPr sz="850" b="0">
+                <a:solidFill>
+                  <a:srgbClr val="262626"/>
+                </a:solidFill>
+                <a:latin typeface="Calibri"/>
+              </a:rPr>
+              <a:t>C-1052</a:t>
+            </a:r>
+          </a:p>
+        </p:txBody>
+      </p:sp>
+      <p:sp>
+        <p:nvSpPr>
+          <p:cNvPr id="24" name="Rectangle 23"/>
+          <p:cNvSpPr/>
+          <p:nvPr/>
+        </p:nvSpPr>
+        <p:spPr>
+          <a:xfrm>
+            <a:off x="1261872" y="4462272"/>
+            <a:ext cx="896112" cy="256032"/>
+          </a:xfrm>
+          <a:prstGeom prst="rect">
+            <a:avLst/>
+          </a:prstGeom>
+          <a:solidFill>
+            <a:srgbClr val="FFFFFF"/>
+          </a:solidFill>
+          <a:ln w="9525">
+            <a:solidFill>
+              <a:srgbClr val="BFBFBF"/>
+            </a:solidFill>
+          </a:ln>
+          <a:effectLst/>
+        </p:spPr>
+        <p:style>
+          <a:lnRef idx="1">
+            <a:schemeClr val="accent1"/>
+          </a:lnRef>
+          <a:fillRef idx="3">
+            <a:schemeClr val="accent1"/>
+          </a:fillRef>
+          <a:effectRef idx="2">
+            <a:schemeClr val="accent1"/>
+          </a:effectRef>
+          <a:fontRef idx="minor">
+            <a:schemeClr val="lt1"/>
+          </a:fontRef>
+        </p:style>
+        <p:txBody>
+          <a:bodyPr rtlCol="0" anchor="ctr" wrap="square" lIns="27432" rIns="27432" tIns="0" bIns="0"/>
+          <a:lstStyle/>
+          <a:p>
+            <a:pPr algn="ctr"/>
+            <a:r>
+              <a:rPr sz="850" b="0">
+                <a:solidFill>
+                  <a:srgbClr val="262626"/>
+                </a:solidFill>
+                <a:latin typeface="Calibri"/>
+              </a:rPr>
+              <a:t>blue</a:t>
+            </a:r>
+          </a:p>
+        </p:txBody>
+      </p:sp>
+      <p:sp>
+        <p:nvSpPr>
+          <p:cNvPr id="25" name="Rectangle 24"/>
+          <p:cNvSpPr/>
+          <p:nvPr/>
+        </p:nvSpPr>
+        <p:spPr>
+          <a:xfrm>
+            <a:off x="2157984" y="4462272"/>
+            <a:ext cx="896112" cy="256032"/>
+          </a:xfrm>
+          <a:prstGeom prst="rect">
+            <a:avLst/>
+          </a:prstGeom>
+          <a:solidFill>
+            <a:srgbClr val="FCE6D5"/>
+          </a:solidFill>
+          <a:ln w="9525">
+            <a:solidFill>
+              <a:srgbClr val="BFBFBF"/>
+            </a:solidFill>
+          </a:ln>
+          <a:effectLst/>
+        </p:spPr>
+        <p:style>
+          <a:lnRef idx="1">
+            <a:schemeClr val="accent1"/>
+          </a:lnRef>
+          <a:fillRef idx="3">
+            <a:schemeClr val="accent1"/>
+          </a:fillRef>
+          <a:effectRef idx="2">
+            <a:schemeClr val="accent1"/>
+          </a:effectRef>
+          <a:fontRef idx="minor">
+            <a:schemeClr val="lt1"/>
+          </a:fontRef>
+        </p:style>
+        <p:txBody>
+          <a:bodyPr rtlCol="0" anchor="ctr" wrap="square" lIns="27432" rIns="27432" tIns="0" bIns="0"/>
+          <a:lstStyle/>
+          <a:p>
+            <a:pPr algn="ctr"/>
+            <a:r>
+              <a:rPr sz="850" b="0">
+                <a:solidFill>
+                  <a:srgbClr val="262626"/>
+                </a:solidFill>
+                <a:latin typeface="Calibri"/>
+              </a:rPr>
+              <a:t>35</a:t>
+            </a:r>
+          </a:p>
+        </p:txBody>
+      </p:sp>
+      <p:sp>
+        <p:nvSpPr>
+          <p:cNvPr id="26" name="Rectangle 25"/>
+          <p:cNvSpPr/>
+          <p:nvPr/>
+        </p:nvSpPr>
+        <p:spPr>
+          <a:xfrm>
+            <a:off x="3054096" y="4462272"/>
+            <a:ext cx="896112" cy="256032"/>
+          </a:xfrm>
+          <a:prstGeom prst="rect">
+            <a:avLst/>
+          </a:prstGeom>
+          <a:solidFill>
+            <a:srgbClr val="FFFFFF"/>
+          </a:solidFill>
+          <a:ln w="9525">
+            <a:solidFill>
+              <a:srgbClr val="BFBFBF"/>
+            </a:solidFill>
+          </a:ln>
+          <a:effectLst/>
+        </p:spPr>
+        <p:style>
+          <a:lnRef idx="1">
+            <a:schemeClr val="accent1"/>
+          </a:lnRef>
+          <a:fillRef idx="3">
+            <a:schemeClr val="accent1"/>
+          </a:fillRef>
+          <a:effectRef idx="2">
+            <a:schemeClr val="accent1"/>
+          </a:effectRef>
+          <a:fontRef idx="minor">
+            <a:schemeClr val="lt1"/>
+          </a:fontRef>
+        </p:style>
+        <p:txBody>
+          <a:bodyPr rtlCol="0" anchor="ctr" wrap="square" lIns="27432" rIns="27432" tIns="0" bIns="0"/>
+          <a:lstStyle/>
+          <a:p>
+            <a:pPr algn="ctr"/>
+            <a:r>
+              <a:rPr sz="850" b="0">
+                <a:solidFill>
+                  <a:srgbClr val="262626"/>
+                </a:solidFill>
+                <a:latin typeface="Calibri"/>
+              </a:rPr>
+              <a:t>413</a:t>
+            </a:r>
+          </a:p>
+        </p:txBody>
+      </p:sp>
+      <p:sp>
+        <p:nvSpPr>
+          <p:cNvPr id="27" name="Rectangle 26"/>
+          <p:cNvSpPr/>
+          <p:nvPr/>
+        </p:nvSpPr>
+        <p:spPr>
+          <a:xfrm>
+            <a:off x="3950208" y="4462272"/>
+            <a:ext cx="896112" cy="256032"/>
+          </a:xfrm>
+          <a:prstGeom prst="rect">
+            <a:avLst/>
+          </a:prstGeom>
+          <a:solidFill>
+            <a:srgbClr val="FFFFFF"/>
+          </a:solidFill>
+          <a:ln w="9525">
+            <a:solidFill>
+              <a:srgbClr val="BFBFBF"/>
+            </a:solidFill>
+          </a:ln>
+          <a:effectLst/>
+        </p:spPr>
+        <p:style>
+          <a:lnRef idx="1">
+            <a:schemeClr val="accent1"/>
+          </a:lnRef>
+          <a:fillRef idx="3">
+            <a:schemeClr val="accent1"/>
+          </a:fillRef>
+          <a:effectRef idx="2">
+            <a:schemeClr val="accent1"/>
+          </a:effectRef>
+          <a:fontRef idx="minor">
+            <a:schemeClr val="lt1"/>
+          </a:fontRef>
+        </p:style>
+        <p:txBody>
+          <a:bodyPr rtlCol="0" anchor="ctr" wrap="square" lIns="27432" rIns="27432" tIns="0" bIns="0"/>
+          <a:lstStyle/>
+          <a:p>
+            <a:pPr algn="ctr"/>
+            <a:r>
+              <a:rPr sz="850" b="0">
+                <a:solidFill>
+                  <a:srgbClr val="262626"/>
+                </a:solidFill>
+                <a:latin typeface="Calibri"/>
+              </a:rPr>
+              <a:t>no</a:t>
+            </a:r>
+          </a:p>
+        </p:txBody>
+      </p:sp>
+      <p:sp>
+        <p:nvSpPr>
+          <p:cNvPr id="28" name="Rectangle 27"/>
+          <p:cNvSpPr/>
+          <p:nvPr/>
+        </p:nvSpPr>
+        <p:spPr>
+          <a:xfrm>
+            <a:off x="365760" y="4718304"/>
+            <a:ext cx="896112" cy="256032"/>
+          </a:xfrm>
+          <a:prstGeom prst="rect">
+            <a:avLst/>
+          </a:prstGeom>
+          <a:solidFill>
+            <a:srgbClr val="DCE6F5"/>
+          </a:solidFill>
+          <a:ln w="9525">
+            <a:solidFill>
+              <a:srgbClr val="BFBFBF"/>
+            </a:solidFill>
+          </a:ln>
+          <a:effectLst/>
+        </p:spPr>
+        <p:style>
+          <a:lnRef idx="1">
+            <a:schemeClr val="accent1"/>
+          </a:lnRef>
+          <a:fillRef idx="3">
+            <a:schemeClr val="accent1"/>
+          </a:fillRef>
+          <a:effectRef idx="2">
+            <a:schemeClr val="accent1"/>
+          </a:effectRef>
+          <a:fontRef idx="minor">
+            <a:schemeClr val="lt1"/>
+          </a:fontRef>
+        </p:style>
+        <p:txBody>
+          <a:bodyPr rtlCol="0" anchor="ctr" wrap="square" lIns="27432" rIns="27432" tIns="0" bIns="0"/>
+          <a:lstStyle/>
+          <a:p>
+            <a:pPr algn="ctr"/>
+            <a:r>
+              <a:rPr sz="850" b="0">
+                <a:solidFill>
+                  <a:srgbClr val="262626"/>
+                </a:solidFill>
+                <a:latin typeface="Calibri"/>
+              </a:rPr>
+              <a:t>C-1068</a:t>
+            </a:r>
+          </a:p>
+        </p:txBody>
+      </p:sp>
+      <p:sp>
+        <p:nvSpPr>
+          <p:cNvPr id="29" name="Rectangle 28"/>
+          <p:cNvSpPr/>
+          <p:nvPr/>
+        </p:nvSpPr>
+        <p:spPr>
+          <a:xfrm>
+            <a:off x="1261872" y="4718304"/>
+            <a:ext cx="896112" cy="256032"/>
+          </a:xfrm>
+          <a:prstGeom prst="rect">
+            <a:avLst/>
+          </a:prstGeom>
+          <a:solidFill>
+            <a:srgbClr val="DCE6F5"/>
+          </a:solidFill>
+          <a:ln w="9525">
+            <a:solidFill>
+              <a:srgbClr val="BFBFBF"/>
+            </a:solidFill>
+          </a:ln>
+          <a:effectLst/>
+        </p:spPr>
+        <p:style>
+          <a:lnRef idx="1">
+            <a:schemeClr val="accent1"/>
+          </a:lnRef>
+          <a:fillRef idx="3">
+            <a:schemeClr val="accent1"/>
+          </a:fillRef>
+          <a:effectRef idx="2">
+            <a:schemeClr val="accent1"/>
+          </a:effectRef>
+          <a:fontRef idx="minor">
+            <a:schemeClr val="lt1"/>
+          </a:fontRef>
+        </p:style>
+        <p:txBody>
+          <a:bodyPr rtlCol="0" anchor="ctr" wrap="square" lIns="27432" rIns="27432" tIns="0" bIns="0"/>
+          <a:lstStyle/>
+          <a:p>
+            <a:pPr algn="ctr"/>
+            <a:r>
+              <a:rPr sz="850" b="0">
+                <a:solidFill>
+                  <a:srgbClr val="262626"/>
+                </a:solidFill>
+                <a:latin typeface="Calibri"/>
+              </a:rPr>
+              <a:t>tech</a:t>
+            </a:r>
+          </a:p>
+        </p:txBody>
+      </p:sp>
+      <p:sp>
+        <p:nvSpPr>
+          <p:cNvPr id="30" name="Rectangle 29"/>
+          <p:cNvSpPr/>
+          <p:nvPr/>
+        </p:nvSpPr>
+        <p:spPr>
+          <a:xfrm>
+            <a:off x="2157984" y="4718304"/>
+            <a:ext cx="896112" cy="256032"/>
+          </a:xfrm>
+          <a:prstGeom prst="rect">
+            <a:avLst/>
+          </a:prstGeom>
+          <a:solidFill>
+            <a:srgbClr val="DCE6F5"/>
+          </a:solidFill>
+          <a:ln w="9525">
+            <a:solidFill>
+              <a:srgbClr val="BFBFBF"/>
+            </a:solidFill>
+          </a:ln>
+          <a:effectLst/>
+        </p:spPr>
+        <p:style>
+          <a:lnRef idx="1">
+            <a:schemeClr val="accent1"/>
+          </a:lnRef>
+          <a:fillRef idx="3">
+            <a:schemeClr val="accent1"/>
+          </a:fillRef>
+          <a:effectRef idx="2">
+            <a:schemeClr val="accent1"/>
+          </a:effectRef>
+          <a:fontRef idx="minor">
+            <a:schemeClr val="lt1"/>
+          </a:fontRef>
+        </p:style>
+        <p:txBody>
+          <a:bodyPr rtlCol="0" anchor="ctr" wrap="square" lIns="27432" rIns="27432" tIns="0" bIns="0"/>
+          <a:lstStyle/>
+          <a:p>
+            <a:pPr algn="ctr"/>
+            <a:r>
+              <a:rPr sz="850" b="0">
+                <a:solidFill>
+                  <a:srgbClr val="262626"/>
+                </a:solidFill>
+                <a:latin typeface="Calibri"/>
+              </a:rPr>
+              <a:t>29</a:t>
+            </a:r>
+          </a:p>
+        </p:txBody>
+      </p:sp>
+      <p:sp>
+        <p:nvSpPr>
+          <p:cNvPr id="31" name="Rectangle 30"/>
+          <p:cNvSpPr/>
+          <p:nvPr/>
+        </p:nvSpPr>
+        <p:spPr>
+          <a:xfrm>
+            <a:off x="3054096" y="4718304"/>
+            <a:ext cx="896112" cy="256032"/>
+          </a:xfrm>
+          <a:prstGeom prst="rect">
+            <a:avLst/>
+          </a:prstGeom>
+          <a:solidFill>
+            <a:srgbClr val="DCE6F5"/>
+          </a:solidFill>
+          <a:ln w="9525">
+            <a:solidFill>
+              <a:srgbClr val="BFBFBF"/>
+            </a:solidFill>
+          </a:ln>
+          <a:effectLst/>
+        </p:spPr>
+        <p:style>
+          <a:lnRef idx="1">
+            <a:schemeClr val="accent1"/>
+          </a:lnRef>
+          <a:fillRef idx="3">
+            <a:schemeClr val="accent1"/>
+          </a:fillRef>
+          <a:effectRef idx="2">
+            <a:schemeClr val="accent1"/>
+          </a:effectRef>
+          <a:fontRef idx="minor">
+            <a:schemeClr val="lt1"/>
+          </a:fontRef>
+        </p:style>
+        <p:txBody>
+          <a:bodyPr rtlCol="0" anchor="ctr" wrap="square" lIns="27432" rIns="27432" tIns="0" bIns="0"/>
+          <a:lstStyle/>
+          <a:p>
+            <a:pPr algn="ctr"/>
+            <a:r>
+              <a:rPr sz="850" b="0">
+                <a:solidFill>
+                  <a:srgbClr val="262626"/>
+                </a:solidFill>
+                <a:latin typeface="Calibri"/>
+              </a:rPr>
+              <a:t>876</a:t>
+            </a:r>
+          </a:p>
+        </p:txBody>
+      </p:sp>
+      <p:sp>
+        <p:nvSpPr>
+          <p:cNvPr id="32" name="Rectangle 31"/>
+          <p:cNvSpPr/>
+          <p:nvPr/>
+        </p:nvSpPr>
+        <p:spPr>
+          <a:xfrm>
+            <a:off x="3950208" y="4718304"/>
+            <a:ext cx="896112" cy="256032"/>
+          </a:xfrm>
+          <a:prstGeom prst="rect">
+            <a:avLst/>
+          </a:prstGeom>
+          <a:solidFill>
+            <a:srgbClr val="DCE6F5"/>
+          </a:solidFill>
+          <a:ln w="9525">
+            <a:solidFill>
+              <a:srgbClr val="BFBFBF"/>
+            </a:solidFill>
+          </a:ln>
+          <a:effectLst/>
+        </p:spPr>
+        <p:style>
+          <a:lnRef idx="1">
+            <a:schemeClr val="accent1"/>
+          </a:lnRef>
+          <a:fillRef idx="3">
+            <a:schemeClr val="accent1"/>
+          </a:fillRef>
+          <a:effectRef idx="2">
+            <a:schemeClr val="accent1"/>
+          </a:effectRef>
+          <a:fontRef idx="minor">
+            <a:schemeClr val="lt1"/>
+          </a:fontRef>
+        </p:style>
+        <p:txBody>
+          <a:bodyPr rtlCol="0" anchor="ctr" wrap="square" lIns="27432" rIns="27432" tIns="0" bIns="0"/>
+          <a:lstStyle/>
+          <a:p>
+            <a:pPr algn="ctr"/>
+            <a:r>
+              <a:rPr sz="850" b="0">
+                <a:solidFill>
+                  <a:srgbClr val="262626"/>
+                </a:solidFill>
+                <a:latin typeface="Calibri"/>
+              </a:rPr>
+              <a:t>no</a:t>
+            </a:r>
+          </a:p>
+        </p:txBody>
+      </p:sp>
+      <p:sp>
+        <p:nvSpPr>
+          <p:cNvPr id="33" name="Rectangle 32"/>
+          <p:cNvSpPr/>
+          <p:nvPr/>
+        </p:nvSpPr>
+        <p:spPr>
+          <a:xfrm>
+            <a:off x="365760" y="4974336"/>
+            <a:ext cx="896112" cy="256032"/>
+          </a:xfrm>
+          <a:prstGeom prst="rect">
+            <a:avLst/>
+          </a:prstGeom>
+          <a:solidFill>
+            <a:srgbClr val="FFFFFF"/>
+          </a:solidFill>
+          <a:ln w="9525">
+            <a:solidFill>
+              <a:srgbClr val="BFBFBF"/>
+            </a:solidFill>
+          </a:ln>
+          <a:effectLst/>
+        </p:spPr>
+        <p:style>
+          <a:lnRef idx="1">
+            <a:schemeClr val="accent1"/>
+          </a:lnRef>
+          <a:fillRef idx="3">
+            <a:schemeClr val="accent1"/>
+          </a:fillRef>
+          <a:effectRef idx="2">
+            <a:schemeClr val="accent1"/>
+          </a:effectRef>
+          <a:fontRef idx="minor">
+            <a:schemeClr val="lt1"/>
+          </a:fontRef>
+        </p:style>
+        <p:txBody>
+          <a:bodyPr rtlCol="0" anchor="ctr" wrap="square" lIns="27432" rIns="27432" tIns="0" bIns="0"/>
+          <a:lstStyle/>
+          <a:p>
+            <a:pPr algn="ctr"/>
+            <a:r>
+              <a:rPr sz="850" b="0">
+                <a:solidFill>
+                  <a:srgbClr val="262626"/>
+                </a:solidFill>
+                <a:latin typeface="Calibri"/>
+              </a:rPr>
+              <a:t>C-1073</a:t>
+            </a:r>
+          </a:p>
+        </p:txBody>
+      </p:sp>
+      <p:sp>
+        <p:nvSpPr>
+          <p:cNvPr id="34" name="Rectangle 33"/>
+          <p:cNvSpPr/>
+          <p:nvPr/>
+        </p:nvSpPr>
+        <p:spPr>
+          <a:xfrm>
+            <a:off x="1261872" y="4974336"/>
+            <a:ext cx="896112" cy="256032"/>
+          </a:xfrm>
+          <a:prstGeom prst="rect">
+            <a:avLst/>
+          </a:prstGeom>
+          <a:solidFill>
+            <a:srgbClr val="FFFFFF"/>
+          </a:solidFill>
+          <a:ln w="9525">
+            <a:solidFill>
+              <a:srgbClr val="BFBFBF"/>
+            </a:solidFill>
+          </a:ln>
+          <a:effectLst/>
+        </p:spPr>
+        <p:style>
+          <a:lnRef idx="1">
+            <a:schemeClr val="accent1"/>
+          </a:lnRef>
+          <a:fillRef idx="3">
+            <a:schemeClr val="accent1"/>
+          </a:fillRef>
+          <a:effectRef idx="2">
+            <a:schemeClr val="accent1"/>
+          </a:effectRef>
+          <a:fontRef idx="minor">
+            <a:schemeClr val="lt1"/>
+          </a:fontRef>
+        </p:style>
+        <p:txBody>
+          <a:bodyPr rtlCol="0" anchor="ctr" wrap="square" lIns="27432" rIns="27432" tIns="0" bIns="0"/>
+          <a:lstStyle/>
+          <a:p>
+            <a:pPr algn="ctr"/>
+            <a:r>
+              <a:rPr sz="850" b="0">
+                <a:solidFill>
+                  <a:srgbClr val="262626"/>
+                </a:solidFill>
+                <a:latin typeface="Calibri"/>
+              </a:rPr>
+              <a:t>admin</a:t>
+            </a:r>
+          </a:p>
+        </p:txBody>
+      </p:sp>
+      <p:sp>
+        <p:nvSpPr>
+          <p:cNvPr id="35" name="Rectangle 34"/>
+          <p:cNvSpPr/>
+          <p:nvPr/>
+        </p:nvSpPr>
+        <p:spPr>
+          <a:xfrm>
+            <a:off x="2157984" y="4974336"/>
+            <a:ext cx="896112" cy="256032"/>
+          </a:xfrm>
+          <a:prstGeom prst="rect">
+            <a:avLst/>
+          </a:prstGeom>
+          <a:solidFill>
+            <a:srgbClr val="FCE6D5"/>
+          </a:solidFill>
+          <a:ln w="9525">
+            <a:solidFill>
+              <a:srgbClr val="BFBFBF"/>
+            </a:solidFill>
+          </a:ln>
+          <a:effectLst/>
+        </p:spPr>
+        <p:style>
+          <a:lnRef idx="1">
+            <a:schemeClr val="accent1"/>
+          </a:lnRef>
+          <a:fillRef idx="3">
+            <a:schemeClr val="accent1"/>
+          </a:fillRef>
+          <a:effectRef idx="2">
+            <a:schemeClr val="accent1"/>
+          </a:effectRef>
+          <a:fontRef idx="minor">
+            <a:schemeClr val="lt1"/>
+          </a:fontRef>
+        </p:style>
+        <p:txBody>
+          <a:bodyPr rtlCol="0" anchor="ctr" wrap="square" lIns="27432" rIns="27432" tIns="0" bIns="0"/>
+          <a:lstStyle/>
+          <a:p>
+            <a:pPr algn="ctr"/>
+            <a:r>
+              <a:rPr sz="850" b="0">
+                <a:solidFill>
+                  <a:srgbClr val="262626"/>
+                </a:solidFill>
+                <a:latin typeface="Calibri"/>
+              </a:rPr>
+              <a:t>47</a:t>
+            </a:r>
+          </a:p>
+        </p:txBody>
+      </p:sp>
+      <p:sp>
+        <p:nvSpPr>
+          <p:cNvPr id="36" name="Rectangle 35"/>
+          <p:cNvSpPr/>
+          <p:nvPr/>
+        </p:nvSpPr>
+        <p:spPr>
+          <a:xfrm>
+            <a:off x="3054096" y="4974336"/>
+            <a:ext cx="896112" cy="256032"/>
+          </a:xfrm>
+          <a:prstGeom prst="rect">
+            <a:avLst/>
+          </a:prstGeom>
+          <a:solidFill>
+            <a:srgbClr val="FFFFFF"/>
+          </a:solidFill>
+          <a:ln w="9525">
+            <a:solidFill>
+              <a:srgbClr val="BFBFBF"/>
+            </a:solidFill>
+          </a:ln>
+          <a:effectLst/>
+        </p:spPr>
+        <p:style>
+          <a:lnRef idx="1">
+            <a:schemeClr val="accent1"/>
+          </a:lnRef>
+          <a:fillRef idx="3">
+            <a:schemeClr val="accent1"/>
+          </a:fillRef>
+          <a:effectRef idx="2">
+            <a:schemeClr val="accent1"/>
+          </a:effectRef>
+          <a:fontRef idx="minor">
+            <a:schemeClr val="lt1"/>
+          </a:fontRef>
+        </p:style>
+        <p:txBody>
+          <a:bodyPr rtlCol="0" anchor="ctr" wrap="square" lIns="27432" rIns="27432" tIns="0" bIns="0"/>
+          <a:lstStyle/>
+          <a:p>
+            <a:pPr algn="ctr"/>
+            <a:r>
+              <a:rPr sz="850" b="0">
+                <a:solidFill>
+                  <a:srgbClr val="262626"/>
+                </a:solidFill>
+                <a:latin typeface="Calibri"/>
+              </a:rPr>
+              <a:t>1,584</a:t>
+            </a:r>
+          </a:p>
+        </p:txBody>
+      </p:sp>
+      <p:sp>
+        <p:nvSpPr>
+          <p:cNvPr id="37" name="Rectangle 36"/>
+          <p:cNvSpPr/>
+          <p:nvPr/>
+        </p:nvSpPr>
+        <p:spPr>
+          <a:xfrm>
+            <a:off x="3950208" y="4974336"/>
+            <a:ext cx="896112" cy="256032"/>
+          </a:xfrm>
+          <a:prstGeom prst="rect">
+            <a:avLst/>
+          </a:prstGeom>
+          <a:solidFill>
+            <a:srgbClr val="FFFFFF"/>
+          </a:solidFill>
+          <a:ln w="9525">
+            <a:solidFill>
+              <a:srgbClr val="BFBFBF"/>
+            </a:solidFill>
+          </a:ln>
+          <a:effectLst/>
+        </p:spPr>
+        <p:style>
+          <a:lnRef idx="1">
+            <a:schemeClr val="accent1"/>
+          </a:lnRef>
+          <a:fillRef idx="3">
+            <a:schemeClr val="accent1"/>
+          </a:fillRef>
+          <a:effectRef idx="2">
+            <a:schemeClr val="accent1"/>
+          </a:effectRef>
+          <a:fontRef idx="minor">
+            <a:schemeClr val="lt1"/>
+          </a:fontRef>
+        </p:style>
+        <p:txBody>
+          <a:bodyPr rtlCol="0" anchor="ctr" wrap="square" lIns="27432" rIns="27432" tIns="0" bIns="0"/>
+          <a:lstStyle/>
+          <a:p>
+            <a:pPr algn="ctr"/>
+            <a:r>
+              <a:rPr sz="850" b="0">
+                <a:solidFill>
+                  <a:srgbClr val="262626"/>
+                </a:solidFill>
+                <a:latin typeface="Calibri"/>
+              </a:rPr>
+              <a:t>no</a:t>
+            </a:r>
+          </a:p>
+        </p:txBody>
+      </p:sp>
+      <p:sp>
+        <p:nvSpPr>
+          <p:cNvPr id="38" name="TextBox 37"/>
+          <p:cNvSpPr txBox="1"/>
+          <p:nvPr/>
+        </p:nvSpPr>
+        <p:spPr>
+          <a:xfrm>
+            <a:off x="365760" y="5321808"/>
+            <a:ext cx="4663440" cy="237744"/>
+          </a:xfrm>
+          <a:prstGeom prst="rect">
+            <a:avLst/>
+          </a:prstGeom>
+          <a:noFill/>
+        </p:spPr>
+        <p:txBody>
+          <a:bodyPr wrap="square" lIns="0" rIns="0" tIns="0" bIns="0" anchor="t">
+            <a:spAutoFit/>
+          </a:bodyPr>
+          <a:lstStyle/>
+          <a:p>
+            <a:pPr algn="l">
+              <a:spcAft>
+                <a:spcPts val="0"/>
+              </a:spcAft>
+            </a:pPr>
+            <a:r>
+              <a:rPr sz="1150" b="1">
+                <a:solidFill>
+                  <a:srgbClr val="1F3864"/>
+                </a:solidFill>
+                <a:latin typeface="Calibri"/>
+              </a:rPr>
+              <a:t>Each row is one observation — one client</a:t>
+            </a:r>
+          </a:p>
+        </p:txBody>
+      </p:sp>
+      <p:sp>
+        <p:nvSpPr>
+          <p:cNvPr id="39" name="TextBox 38"/>
+          <p:cNvSpPr txBox="1"/>
+          <p:nvPr/>
+        </p:nvSpPr>
+        <p:spPr>
+          <a:xfrm>
+            <a:off x="365760" y="5989320"/>
+            <a:ext cx="11475720" cy="640080"/>
+          </a:xfrm>
+          <a:prstGeom prst="rect">
+            <a:avLst/>
+          </a:prstGeom>
+          <a:noFill/>
+        </p:spPr>
+        <p:txBody>
+          <a:bodyPr wrap="square" lIns="0" rIns="0" tIns="0" bIns="0" anchor="t">
+            <a:spAutoFit/>
+          </a:bodyPr>
+          <a:lstStyle/>
+          <a:p>
+            <a:pPr algn="l">
+              <a:spcAft>
+                <a:spcPts val="0"/>
+              </a:spcAft>
+            </a:pPr>
+            <a:r>
+              <a:rPr sz="1100" b="0">
+                <a:solidFill>
+                  <a:srgbClr val="595959"/>
+                </a:solidFill>
+                <a:latin typeface="Calibri"/>
+              </a:rPr>
+              <a:t>Source: Variable structure adapted from Moro, S., Rita, P., and Cortez, P. (2014). Bank Marketing [Dataset]. UCI Machine Learning Repository. https://doi.org/10.24432/C5K306. The 20 client records shown here are simulated for illustration; the real data set contains 45,211 clients.</a:t>
+            </a:r>
+          </a:p>
+        </p:txBody>
+      </p:sp>
     </p:spTree>
     <p:extLst>
       <p:ext uri="{BB962C8B-B14F-4D97-AF65-F5344CB8AC3E}">

--- a/docs/lecture_slides/Week 1/Week1_Lecture1_Slides_1_10_2024.pptx
+++ b/docs/lecture_slides/Week 1/Week1_Lecture1_Slides_1_10_2024.pptx
@@ -6,19 +6,20 @@
   </p:sldMasterIdLst>
   <p:sldIdLst>
     <p:sldId id="258" r:id="rId2"/>
-    <p:sldId id="286" r:id="rId19"/>
-    <p:sldId id="285" r:id="rId3"/>
-    <p:sldId id="257" r:id="rId4"/>
-    <p:sldId id="261" r:id="rId5"/>
-    <p:sldId id="259" r:id="rId6"/>
-    <p:sldId id="262" r:id="rId7"/>
-    <p:sldId id="265" r:id="rId8"/>
-    <p:sldId id="270" r:id="rId9"/>
-    <p:sldId id="268" r:id="rId10"/>
-    <p:sldId id="280" r:id="rId11"/>
-    <p:sldId id="283" r:id="rId12"/>
-    <p:sldId id="267" r:id="rId13"/>
-    <p:sldId id="269" r:id="rId14"/>
+    <p:sldId id="286" r:id="rId3"/>
+    <p:sldId id="285" r:id="rId4"/>
+    <p:sldId id="257" r:id="rId5"/>
+    <p:sldId id="293" r:id="rId6"/>
+    <p:sldId id="259" r:id="rId7"/>
+    <p:sldId id="261" r:id="rId8"/>
+    <p:sldId id="262" r:id="rId9"/>
+    <p:sldId id="265" r:id="rId10"/>
+    <p:sldId id="270" r:id="rId11"/>
+    <p:sldId id="268" r:id="rId12"/>
+    <p:sldId id="280" r:id="rId13"/>
+    <p:sldId id="283" r:id="rId14"/>
+    <p:sldId id="267" r:id="rId15"/>
+    <p:sldId id="269" r:id="rId16"/>
   </p:sldIdLst>
   <p:sldSz cx="12192000" cy="6858000"/>
   <p:notesSz cx="6858000" cy="9144000"/>
@@ -1042,13 +1043,13 @@
       <dgm:prSet presAssocID="{899FDC2B-D125-4B51-8A0B-6775C08BC1E3}" presName="iconRect" presStyleLbl="node1" presStyleIdx="0" presStyleCnt="3"/>
       <dgm:spPr>
         <a:blipFill>
-          <a:blip xmlns:r="http://schemas.openxmlformats.org/officeDocument/2006/relationships" r:embed="rId1">
+          <a:blip xmlns:r="http://schemas.openxmlformats.org/officeDocument/2006/relationships">
             <a:extLst>
               <a:ext uri="{28A0092B-C50C-407E-A947-70E740481C1C}">
                 <a14:useLocalDpi xmlns:a14="http://schemas.microsoft.com/office/drawing/2010/main" val="0"/>
               </a:ext>
               <a:ext uri="{96DAC541-7B7A-43D3-8B79-37D633B846F1}">
-                <asvg:svgBlip xmlns:asvg="http://schemas.microsoft.com/office/drawing/2016/SVG/main" r:embed="rId2"/>
+                <asvg:svgBlip xmlns:asvg="http://schemas.microsoft.com/office/drawing/2016/SVG/main" r:embed="rId1"/>
               </a:ext>
             </a:extLst>
           </a:blip>
@@ -1092,13 +1093,13 @@
       <dgm:prSet presAssocID="{5B6C2204-A1BD-495C-8582-0BA85FFC7E10}" presName="iconRect" presStyleLbl="node1" presStyleIdx="1" presStyleCnt="3"/>
       <dgm:spPr>
         <a:blipFill>
-          <a:blip xmlns:r="http://schemas.openxmlformats.org/officeDocument/2006/relationships" r:embed="rId3">
+          <a:blip xmlns:r="http://schemas.openxmlformats.org/officeDocument/2006/relationships">
             <a:extLst>
               <a:ext uri="{28A0092B-C50C-407E-A947-70E740481C1C}">
                 <a14:useLocalDpi xmlns:a14="http://schemas.microsoft.com/office/drawing/2010/main" val="0"/>
               </a:ext>
               <a:ext uri="{96DAC541-7B7A-43D3-8B79-37D633B846F1}">
-                <asvg:svgBlip xmlns:asvg="http://schemas.microsoft.com/office/drawing/2016/SVG/main" r:embed="rId4"/>
+                <asvg:svgBlip xmlns:asvg="http://schemas.microsoft.com/office/drawing/2016/SVG/main" r:embed="rId2"/>
               </a:ext>
             </a:extLst>
           </a:blip>
@@ -1142,13 +1143,13 @@
       <dgm:prSet presAssocID="{38F06077-7F5D-497A-94A5-BA46444552D6}" presName="iconRect" presStyleLbl="node1" presStyleIdx="2" presStyleCnt="3"/>
       <dgm:spPr>
         <a:blipFill>
-          <a:blip xmlns:r="http://schemas.openxmlformats.org/officeDocument/2006/relationships" r:embed="rId5">
+          <a:blip xmlns:r="http://schemas.openxmlformats.org/officeDocument/2006/relationships">
             <a:extLst>
               <a:ext uri="{28A0092B-C50C-407E-A947-70E740481C1C}">
                 <a14:useLocalDpi xmlns:a14="http://schemas.microsoft.com/office/drawing/2010/main" val="0"/>
               </a:ext>
               <a:ext uri="{96DAC541-7B7A-43D3-8B79-37D633B846F1}">
-                <asvg:svgBlip xmlns:asvg="http://schemas.microsoft.com/office/drawing/2016/SVG/main" r:embed="rId6"/>
+                <asvg:svgBlip xmlns:asvg="http://schemas.microsoft.com/office/drawing/2016/SVG/main" r:embed="rId3"/>
               </a:ext>
             </a:extLst>
           </a:blip>
@@ -1277,13 +1278,13 @@
           <a:avLst/>
         </a:prstGeom>
         <a:blipFill>
-          <a:blip xmlns:r="http://schemas.openxmlformats.org/officeDocument/2006/relationships" r:embed="rId1">
+          <a:blip xmlns:r="http://schemas.openxmlformats.org/officeDocument/2006/relationships">
             <a:extLst>
               <a:ext uri="{28A0092B-C50C-407E-A947-70E740481C1C}">
                 <a14:useLocalDpi xmlns:a14="http://schemas.microsoft.com/office/drawing/2010/main" val="0"/>
               </a:ext>
               <a:ext uri="{96DAC541-7B7A-43D3-8B79-37D633B846F1}">
-                <asvg:svgBlip xmlns:asvg="http://schemas.microsoft.com/office/drawing/2016/SVG/main" r:embed="rId2"/>
+                <asvg:svgBlip xmlns:asvg="http://schemas.microsoft.com/office/drawing/2016/SVG/main" r:embed="rId1"/>
               </a:ext>
             </a:extLst>
           </a:blip>
@@ -1440,13 +1441,13 @@
           <a:avLst/>
         </a:prstGeom>
         <a:blipFill>
-          <a:blip xmlns:r="http://schemas.openxmlformats.org/officeDocument/2006/relationships" r:embed="rId3">
+          <a:blip xmlns:r="http://schemas.openxmlformats.org/officeDocument/2006/relationships">
             <a:extLst>
               <a:ext uri="{28A0092B-C50C-407E-A947-70E740481C1C}">
                 <a14:useLocalDpi xmlns:a14="http://schemas.microsoft.com/office/drawing/2010/main" val="0"/>
               </a:ext>
               <a:ext uri="{96DAC541-7B7A-43D3-8B79-37D633B846F1}">
-                <asvg:svgBlip xmlns:asvg="http://schemas.microsoft.com/office/drawing/2016/SVG/main" r:embed="rId4"/>
+                <asvg:svgBlip xmlns:asvg="http://schemas.microsoft.com/office/drawing/2016/SVG/main" r:embed="rId2"/>
               </a:ext>
             </a:extLst>
           </a:blip>
@@ -1603,13 +1604,13 @@
           <a:avLst/>
         </a:prstGeom>
         <a:blipFill>
-          <a:blip xmlns:r="http://schemas.openxmlformats.org/officeDocument/2006/relationships" r:embed="rId5">
+          <a:blip xmlns:r="http://schemas.openxmlformats.org/officeDocument/2006/relationships">
             <a:extLst>
               <a:ext uri="{28A0092B-C50C-407E-A947-70E740481C1C}">
                 <a14:useLocalDpi xmlns:a14="http://schemas.microsoft.com/office/drawing/2010/main" val="0"/>
               </a:ext>
               <a:ext uri="{96DAC541-7B7A-43D3-8B79-37D633B846F1}">
-                <asvg:svgBlip xmlns:asvg="http://schemas.microsoft.com/office/drawing/2016/SVG/main" r:embed="rId6"/>
+                <asvg:svgBlip xmlns:asvg="http://schemas.microsoft.com/office/drawing/2016/SVG/main" r:embed="rId3"/>
               </a:ext>
             </a:extLst>
           </a:blip>
@@ -3189,7 +3190,7 @@
           <a:p>
             <a:fld id="{D808A37A-4640-4712-9D8F-F69B6FC23B38}" type="datetimeFigureOut">
               <a:rPr lang="en-US" smtClean="0"/>
-              <a:t>1/18/2024</a:t>
+              <a:t>8/18/2026</a:t>
             </a:fld>
             <a:endParaRPr lang="en-US"/>
           </a:p>
@@ -3387,7 +3388,7 @@
           <a:p>
             <a:fld id="{D808A37A-4640-4712-9D8F-F69B6FC23B38}" type="datetimeFigureOut">
               <a:rPr lang="en-US" smtClean="0"/>
-              <a:t>1/18/2024</a:t>
+              <a:t>8/18/2026</a:t>
             </a:fld>
             <a:endParaRPr lang="en-US"/>
           </a:p>
@@ -3595,7 +3596,7 @@
           <a:p>
             <a:fld id="{D808A37A-4640-4712-9D8F-F69B6FC23B38}" type="datetimeFigureOut">
               <a:rPr lang="en-US" smtClean="0"/>
-              <a:t>1/18/2024</a:t>
+              <a:t>8/18/2026</a:t>
             </a:fld>
             <a:endParaRPr lang="en-US"/>
           </a:p>
@@ -3793,7 +3794,7 @@
           <a:p>
             <a:fld id="{D808A37A-4640-4712-9D8F-F69B6FC23B38}" type="datetimeFigureOut">
               <a:rPr lang="en-US" smtClean="0"/>
-              <a:t>1/18/2024</a:t>
+              <a:t>8/18/2026</a:t>
             </a:fld>
             <a:endParaRPr lang="en-US"/>
           </a:p>
@@ -4068,7 +4069,7 @@
           <a:p>
             <a:fld id="{D808A37A-4640-4712-9D8F-F69B6FC23B38}" type="datetimeFigureOut">
               <a:rPr lang="en-US" smtClean="0"/>
-              <a:t>1/18/2024</a:t>
+              <a:t>8/18/2026</a:t>
             </a:fld>
             <a:endParaRPr lang="en-US"/>
           </a:p>
@@ -4333,7 +4334,7 @@
           <a:p>
             <a:fld id="{D808A37A-4640-4712-9D8F-F69B6FC23B38}" type="datetimeFigureOut">
               <a:rPr lang="en-US" smtClean="0"/>
-              <a:t>1/18/2024</a:t>
+              <a:t>8/18/2026</a:t>
             </a:fld>
             <a:endParaRPr lang="en-US"/>
           </a:p>
@@ -4745,7 +4746,7 @@
           <a:p>
             <a:fld id="{D808A37A-4640-4712-9D8F-F69B6FC23B38}" type="datetimeFigureOut">
               <a:rPr lang="en-US" smtClean="0"/>
-              <a:t>1/18/2024</a:t>
+              <a:t>8/18/2026</a:t>
             </a:fld>
             <a:endParaRPr lang="en-US"/>
           </a:p>
@@ -4886,7 +4887,7 @@
           <a:p>
             <a:fld id="{D808A37A-4640-4712-9D8F-F69B6FC23B38}" type="datetimeFigureOut">
               <a:rPr lang="en-US" smtClean="0"/>
-              <a:t>1/18/2024</a:t>
+              <a:t>8/18/2026</a:t>
             </a:fld>
             <a:endParaRPr lang="en-US"/>
           </a:p>
@@ -4999,7 +5000,7 @@
           <a:p>
             <a:fld id="{D808A37A-4640-4712-9D8F-F69B6FC23B38}" type="datetimeFigureOut">
               <a:rPr lang="en-US" smtClean="0"/>
-              <a:t>1/18/2024</a:t>
+              <a:t>8/18/2026</a:t>
             </a:fld>
             <a:endParaRPr lang="en-US"/>
           </a:p>
@@ -5310,7 +5311,7 @@
           <a:p>
             <a:fld id="{D808A37A-4640-4712-9D8F-F69B6FC23B38}" type="datetimeFigureOut">
               <a:rPr lang="en-US" smtClean="0"/>
-              <a:t>1/18/2024</a:t>
+              <a:t>8/18/2026</a:t>
             </a:fld>
             <a:endParaRPr lang="en-US"/>
           </a:p>
@@ -5598,7 +5599,7 @@
           <a:p>
             <a:fld id="{D808A37A-4640-4712-9D8F-F69B6FC23B38}" type="datetimeFigureOut">
               <a:rPr lang="en-US" smtClean="0"/>
-              <a:t>1/18/2024</a:t>
+              <a:t>8/18/2026</a:t>
             </a:fld>
             <a:endParaRPr lang="en-US"/>
           </a:p>
@@ -5839,7 +5840,7 @@
           <a:p>
             <a:fld id="{D808A37A-4640-4712-9D8F-F69B6FC23B38}" type="datetimeFigureOut">
               <a:rPr lang="en-US" smtClean="0"/>
-              <a:t>1/18/2024</a:t>
+              <a:t>8/18/2026</a:t>
             </a:fld>
             <a:endParaRPr lang="en-US"/>
           </a:p>
@@ -6368,6 +6369,897 @@
         </p:nvSpPr>
         <p:spPr>
           <a:xfrm>
+            <a:off x="434109" y="1502921"/>
+            <a:ext cx="8146474" cy="4847481"/>
+          </a:xfrm>
+          <a:prstGeom prst="rect">
+            <a:avLst/>
+          </a:prstGeom>
+          <a:noFill/>
+        </p:spPr>
+        <p:txBody>
+          <a:bodyPr wrap="square">
+            <a:spAutoFit/>
+          </a:bodyPr>
+          <a:lstStyle/>
+          <a:p>
+            <a:pPr marL="0" marR="0" lvl="0" indent="0" algn="l" defTabSz="914400" rtl="0" eaLnBrk="1" fontAlgn="auto" latinLnBrk="0" hangingPunct="1">
+              <a:lnSpc>
+                <a:spcPct val="90000"/>
+              </a:lnSpc>
+              <a:spcBef>
+                <a:spcPts val="1000"/>
+              </a:spcBef>
+              <a:spcAft>
+                <a:spcPts val="0"/>
+              </a:spcAft>
+              <a:buClrTx/>
+              <a:buSzTx/>
+              <a:buFont typeface="Arial" panose="020B0604020202020204" pitchFamily="34" charset="0"/>
+              <a:buNone/>
+              <a:tabLst/>
+              <a:defRPr/>
+            </a:pPr>
+            <a:r>
+              <a:rPr kumimoji="0" lang="it-IT" sz="2400" b="1" i="0" u="none" strike="noStrike" kern="1200" cap="none" spc="0" normalizeH="0" baseline="0" noProof="0" dirty="0">
+                <a:ln>
+                  <a:noFill/>
+                </a:ln>
+                <a:solidFill>
+                  <a:prstClr val="black"/>
+                </a:solidFill>
+                <a:effectLst/>
+                <a:uLnTx/>
+                <a:uFillTx/>
+                <a:latin typeface="Calibri" panose="020F0502020204030204"/>
+                <a:ea typeface="+mn-ea"/>
+                <a:cs typeface="+mn-cs"/>
+              </a:rPr>
+              <a:t>Qualitative (Categorical) variable </a:t>
+            </a:r>
+            <a:r>
+              <a:rPr kumimoji="0" lang="it-IT" sz="2400" b="0" i="0" u="none" strike="noStrike" kern="1200" cap="none" spc="0" normalizeH="0" baseline="0" noProof="0" dirty="0">
+                <a:ln>
+                  <a:noFill/>
+                </a:ln>
+                <a:solidFill>
+                  <a:prstClr val="black"/>
+                </a:solidFill>
+                <a:effectLst/>
+                <a:uLnTx/>
+                <a:uFillTx/>
+                <a:latin typeface="Calibri" panose="020F0502020204030204"/>
+                <a:ea typeface="+mn-ea"/>
+                <a:cs typeface="+mn-cs"/>
+              </a:rPr>
+              <a:t>– non-numeric qualities or characteristics that can be placed in distinct categories </a:t>
+            </a:r>
+          </a:p>
+          <a:p>
+            <a:pPr lvl="1">
+              <a:lnSpc>
+                <a:spcPct val="90000"/>
+              </a:lnSpc>
+              <a:spcBef>
+                <a:spcPts val="1000"/>
+              </a:spcBef>
+              <a:defRPr/>
+            </a:pPr>
+            <a:r>
+              <a:rPr lang="it-IT" sz="2000" dirty="0">
+                <a:solidFill>
+                  <a:prstClr val="black"/>
+                </a:solidFill>
+                <a:latin typeface="Calibri" panose="020F0502020204030204"/>
+              </a:rPr>
+              <a:t>State/city (ID, WA, MT, ...)</a:t>
+            </a:r>
+          </a:p>
+          <a:p>
+            <a:pPr lvl="1">
+              <a:lnSpc>
+                <a:spcPct val="90000"/>
+              </a:lnSpc>
+              <a:spcBef>
+                <a:spcPts val="1000"/>
+              </a:spcBef>
+              <a:defRPr/>
+            </a:pPr>
+            <a:r>
+              <a:rPr lang="it-IT" sz="2000" dirty="0">
+                <a:solidFill>
+                  <a:prstClr val="black"/>
+                </a:solidFill>
+                <a:latin typeface="Calibri" panose="020F0502020204030204"/>
+              </a:rPr>
+              <a:t>Treatment (Drug/Placebo)</a:t>
+            </a:r>
+          </a:p>
+          <a:p>
+            <a:pPr lvl="1">
+              <a:lnSpc>
+                <a:spcPct val="90000"/>
+              </a:lnSpc>
+              <a:spcBef>
+                <a:spcPts val="1000"/>
+              </a:spcBef>
+              <a:defRPr/>
+            </a:pPr>
+            <a:r>
+              <a:rPr lang="it-IT" sz="2000" dirty="0">
+                <a:solidFill>
+                  <a:prstClr val="black"/>
+                </a:solidFill>
+                <a:latin typeface="Calibri" panose="020F0502020204030204"/>
+              </a:rPr>
+              <a:t>Genotype (AA, AT, TT)</a:t>
+            </a:r>
+          </a:p>
+          <a:p>
+            <a:pPr lvl="1">
+              <a:lnSpc>
+                <a:spcPct val="90000"/>
+              </a:lnSpc>
+              <a:spcBef>
+                <a:spcPts val="1000"/>
+              </a:spcBef>
+              <a:defRPr/>
+            </a:pPr>
+            <a:r>
+              <a:rPr lang="it-IT" sz="2000" dirty="0">
+                <a:solidFill>
+                  <a:prstClr val="black"/>
+                </a:solidFill>
+                <a:latin typeface="Calibri" panose="020F0502020204030204"/>
+              </a:rPr>
+              <a:t>Survival (live or die) </a:t>
+            </a:r>
+          </a:p>
+          <a:p>
+            <a:pPr>
+              <a:lnSpc>
+                <a:spcPct val="90000"/>
+              </a:lnSpc>
+              <a:spcBef>
+                <a:spcPts val="1000"/>
+              </a:spcBef>
+              <a:defRPr/>
+            </a:pPr>
+            <a:r>
+              <a:rPr kumimoji="0" lang="it-IT" sz="2400" b="1" i="0" u="none" strike="noStrike" kern="1200" cap="none" spc="0" normalizeH="0" baseline="0" noProof="0" dirty="0">
+                <a:ln>
+                  <a:noFill/>
+                </a:ln>
+                <a:solidFill>
+                  <a:prstClr val="black"/>
+                </a:solidFill>
+                <a:effectLst/>
+                <a:uLnTx/>
+                <a:uFillTx/>
+                <a:latin typeface="Calibri" panose="020F0502020204030204"/>
+                <a:ea typeface="+mn-ea"/>
+                <a:cs typeface="+mn-cs"/>
+              </a:rPr>
+              <a:t>Quantitative (numeric) variable </a:t>
+            </a:r>
+            <a:r>
+              <a:rPr kumimoji="0" lang="it-IT" sz="2400" b="0" i="0" u="none" strike="noStrike" kern="1200" cap="none" spc="0" normalizeH="0" baseline="0" noProof="0" dirty="0">
+                <a:ln>
+                  <a:noFill/>
+                </a:ln>
+                <a:solidFill>
+                  <a:prstClr val="black"/>
+                </a:solidFill>
+                <a:effectLst/>
+                <a:uLnTx/>
+                <a:uFillTx/>
+                <a:latin typeface="Calibri" panose="020F0502020204030204"/>
+                <a:ea typeface="+mn-ea"/>
+                <a:cs typeface="+mn-cs"/>
+              </a:rPr>
+              <a:t>– numerical characteristics - can be ordered or ranked</a:t>
+            </a:r>
+            <a:r>
+              <a:rPr kumimoji="0" lang="en-US" sz="2400" b="0" i="0" u="none" strike="noStrike" kern="1200" cap="none" spc="0" normalizeH="0" baseline="0" noProof="0" dirty="0">
+                <a:ln>
+                  <a:noFill/>
+                </a:ln>
+                <a:solidFill>
+                  <a:prstClr val="black"/>
+                </a:solidFill>
+                <a:effectLst/>
+                <a:uLnTx/>
+                <a:uFillTx/>
+                <a:latin typeface="Calibri" panose="020F0502020204030204"/>
+                <a:ea typeface="+mn-ea"/>
+                <a:cs typeface="+mn-cs"/>
+              </a:rPr>
+              <a:t> </a:t>
+            </a:r>
+          </a:p>
+          <a:p>
+            <a:pPr lvl="1">
+              <a:lnSpc>
+                <a:spcPct val="90000"/>
+              </a:lnSpc>
+              <a:spcBef>
+                <a:spcPts val="1000"/>
+              </a:spcBef>
+              <a:defRPr/>
+            </a:pPr>
+            <a:r>
+              <a:rPr lang="en-US" sz="2000" dirty="0">
+                <a:solidFill>
+                  <a:prstClr val="black"/>
+                </a:solidFill>
+                <a:latin typeface="Calibri" panose="020F0502020204030204"/>
+              </a:rPr>
+              <a:t>Height (inches/cm)</a:t>
+            </a:r>
+          </a:p>
+          <a:p>
+            <a:pPr lvl="1">
+              <a:lnSpc>
+                <a:spcPct val="90000"/>
+              </a:lnSpc>
+              <a:spcBef>
+                <a:spcPts val="1000"/>
+              </a:spcBef>
+              <a:defRPr/>
+            </a:pPr>
+            <a:r>
+              <a:rPr kumimoji="0" lang="en-US" sz="2000" b="0" i="0" u="none" strike="noStrike" kern="1200" cap="none" spc="0" normalizeH="0" baseline="0" noProof="0" dirty="0">
+                <a:ln>
+                  <a:noFill/>
+                </a:ln>
+                <a:solidFill>
+                  <a:prstClr val="black"/>
+                </a:solidFill>
+                <a:effectLst/>
+                <a:uLnTx/>
+                <a:uFillTx/>
+                <a:latin typeface="Calibri" panose="020F0502020204030204"/>
+                <a:ea typeface="+mn-ea"/>
+                <a:cs typeface="+mn-cs"/>
+              </a:rPr>
+              <a:t>Weight (</a:t>
+            </a:r>
+            <a:r>
+              <a:rPr kumimoji="0" lang="en-US" sz="2000" b="0" i="0" u="none" strike="noStrike" kern="1200" cap="none" spc="0" normalizeH="0" baseline="0" noProof="0" dirty="0" err="1">
+                <a:ln>
+                  <a:noFill/>
+                </a:ln>
+                <a:solidFill>
+                  <a:prstClr val="black"/>
+                </a:solidFill>
+                <a:effectLst/>
+                <a:uLnTx/>
+                <a:uFillTx/>
+                <a:latin typeface="Calibri" panose="020F0502020204030204"/>
+                <a:ea typeface="+mn-ea"/>
+                <a:cs typeface="+mn-cs"/>
+              </a:rPr>
+              <a:t>lbs</a:t>
+            </a:r>
+            <a:r>
+              <a:rPr lang="en-US" sz="2000" dirty="0">
+                <a:solidFill>
+                  <a:prstClr val="black"/>
+                </a:solidFill>
+                <a:latin typeface="Calibri" panose="020F0502020204030204"/>
+              </a:rPr>
+              <a:t>/kg)</a:t>
+            </a:r>
+          </a:p>
+          <a:p>
+            <a:pPr lvl="1">
+              <a:lnSpc>
+                <a:spcPct val="90000"/>
+              </a:lnSpc>
+              <a:spcBef>
+                <a:spcPts val="1000"/>
+              </a:spcBef>
+              <a:defRPr/>
+            </a:pPr>
+            <a:r>
+              <a:rPr kumimoji="0" lang="en-US" sz="2000" b="0" i="0" u="none" strike="noStrike" kern="1200" cap="none" spc="0" normalizeH="0" baseline="0" noProof="0" dirty="0">
+                <a:ln>
+                  <a:noFill/>
+                </a:ln>
+                <a:solidFill>
+                  <a:prstClr val="black"/>
+                </a:solidFill>
+                <a:effectLst/>
+                <a:uLnTx/>
+                <a:uFillTx/>
+                <a:latin typeface="Calibri" panose="020F0502020204030204"/>
+                <a:ea typeface="+mn-ea"/>
+                <a:cs typeface="+mn-cs"/>
+              </a:rPr>
+              <a:t>Longevity/Age (number of years)</a:t>
+            </a:r>
+            <a:endParaRPr lang="en-US" sz="2000" dirty="0">
+              <a:solidFill>
+                <a:prstClr val="black"/>
+              </a:solidFill>
+              <a:latin typeface="Calibri" panose="020F0502020204030204"/>
+            </a:endParaRPr>
+          </a:p>
+          <a:p>
+            <a:pPr lvl="1">
+              <a:lnSpc>
+                <a:spcPct val="90000"/>
+              </a:lnSpc>
+              <a:spcBef>
+                <a:spcPts val="1000"/>
+              </a:spcBef>
+              <a:defRPr/>
+            </a:pPr>
+            <a:r>
+              <a:rPr lang="en-US" sz="2000" dirty="0">
+                <a:solidFill>
+                  <a:prstClr val="black"/>
+                </a:solidFill>
+                <a:latin typeface="Calibri" panose="020F0502020204030204"/>
+              </a:rPr>
+              <a:t>Dose (micrograms per gram)</a:t>
+            </a:r>
+            <a:endParaRPr kumimoji="0" lang="en-US" sz="2000" b="0" i="0" u="none" strike="noStrike" kern="1200" cap="none" spc="0" normalizeH="0" baseline="0" noProof="0" dirty="0">
+              <a:ln>
+                <a:noFill/>
+              </a:ln>
+              <a:solidFill>
+                <a:prstClr val="black"/>
+              </a:solidFill>
+              <a:effectLst/>
+              <a:uLnTx/>
+              <a:uFillTx/>
+              <a:latin typeface="Calibri" panose="020F0502020204030204"/>
+              <a:ea typeface="+mn-ea"/>
+              <a:cs typeface="+mn-cs"/>
+            </a:endParaRPr>
+          </a:p>
+        </p:txBody>
+      </p:sp>
+      <p:pic>
+        <p:nvPicPr>
+          <p:cNvPr id="4" name="Picture 3" descr="A group of eyeballs with different colors&#10;&#10;Description automatically generated">
+            <a:extLst>
+              <a:ext uri="{FF2B5EF4-FFF2-40B4-BE49-F238E27FC236}">
+                <a16:creationId xmlns:a16="http://schemas.microsoft.com/office/drawing/2014/main" id="{C9CB58EF-0020-259B-BBA0-EDD86D22EA6B}"/>
+              </a:ext>
+            </a:extLst>
+          </p:cNvPr>
+          <p:cNvPicPr>
+            <a:picLocks noChangeAspect="1"/>
+          </p:cNvPicPr>
+          <p:nvPr/>
+        </p:nvPicPr>
+        <p:blipFill>
+          <a:blip r:embed="rId2">
+            <a:extLst>
+              <a:ext uri="{28A0092B-C50C-407E-A947-70E740481C1C}">
+                <a14:useLocalDpi xmlns:a14="http://schemas.microsoft.com/office/drawing/2010/main" val="0"/>
+              </a:ext>
+              <a:ext uri="{837473B0-CC2E-450A-ABE3-18F120FF3D39}">
+                <a1611:picAttrSrcUrl xmlns:a1611="http://schemas.microsoft.com/office/drawing/2016/11/main" r:id="rId3"/>
+              </a:ext>
+            </a:extLst>
+          </a:blip>
+          <a:stretch>
+            <a:fillRect/>
+          </a:stretch>
+        </p:blipFill>
+        <p:spPr>
+          <a:xfrm>
+            <a:off x="8843241" y="1290485"/>
+            <a:ext cx="2914650" cy="2914650"/>
+          </a:xfrm>
+          <a:prstGeom prst="rect">
+            <a:avLst/>
+          </a:prstGeom>
+        </p:spPr>
+      </p:pic>
+      <p:pic>
+        <p:nvPicPr>
+          <p:cNvPr id="8" name="Picture 7" descr="A person standing in front of a height chart&#10;&#10;Description automatically generated">
+            <a:extLst>
+              <a:ext uri="{FF2B5EF4-FFF2-40B4-BE49-F238E27FC236}">
+                <a16:creationId xmlns:a16="http://schemas.microsoft.com/office/drawing/2014/main" id="{89B104AB-C4AB-B363-BF96-947E6616FA75}"/>
+              </a:ext>
+            </a:extLst>
+          </p:cNvPr>
+          <p:cNvPicPr>
+            <a:picLocks noChangeAspect="1"/>
+          </p:cNvPicPr>
+          <p:nvPr/>
+        </p:nvPicPr>
+        <p:blipFill>
+          <a:blip r:embed="rId4">
+            <a:extLst>
+              <a:ext uri="{28A0092B-C50C-407E-A947-70E740481C1C}">
+                <a14:useLocalDpi xmlns:a14="http://schemas.microsoft.com/office/drawing/2010/main" val="0"/>
+              </a:ext>
+              <a:ext uri="{837473B0-CC2E-450A-ABE3-18F120FF3D39}">
+                <a1611:picAttrSrcUrl xmlns:a1611="http://schemas.microsoft.com/office/drawing/2016/11/main" r:id="rId5"/>
+              </a:ext>
+            </a:extLst>
+          </a:blip>
+          <a:stretch>
+            <a:fillRect/>
+          </a:stretch>
+        </p:blipFill>
+        <p:spPr>
+          <a:xfrm>
+            <a:off x="9568873" y="3994439"/>
+            <a:ext cx="2451676" cy="2725447"/>
+          </a:xfrm>
+          <a:prstGeom prst="rect">
+            <a:avLst/>
+          </a:prstGeom>
+        </p:spPr>
+      </p:pic>
+    </p:spTree>
+    <p:extLst>
+      <p:ext uri="{BB962C8B-B14F-4D97-AF65-F5344CB8AC3E}">
+        <p14:creationId xmlns:p14="http://schemas.microsoft.com/office/powerpoint/2010/main" val="3065098557"/>
+      </p:ext>
+    </p:extLst>
+  </p:cSld>
+  <p:clrMapOvr>
+    <a:masterClrMapping/>
+  </p:clrMapOvr>
+</p:sld>
+</file>
+
+<file path=ppt/slides/slide11.xml><?xml version="1.0" encoding="utf-8"?>
+<p:sld xmlns:a="http://schemas.openxmlformats.org/drawingml/2006/main" xmlns:r="http://schemas.openxmlformats.org/officeDocument/2006/relationships" xmlns:p="http://schemas.openxmlformats.org/presentationml/2006/main">
+  <p:cSld>
+    <p:spTree>
+      <p:nvGrpSpPr>
+        <p:cNvPr id="1" name=""/>
+        <p:cNvGrpSpPr/>
+        <p:nvPr/>
+      </p:nvGrpSpPr>
+      <p:grpSpPr>
+        <a:xfrm>
+          <a:off x="0" y="0"/>
+          <a:ext cx="0" cy="0"/>
+          <a:chOff x="0" y="0"/>
+          <a:chExt cx="0" cy="0"/>
+        </a:xfrm>
+      </p:grpSpPr>
+      <p:sp>
+        <p:nvSpPr>
+          <p:cNvPr id="2" name="Title 1">
+            <a:extLst>
+              <a:ext uri="{FF2B5EF4-FFF2-40B4-BE49-F238E27FC236}">
+                <a16:creationId xmlns:a16="http://schemas.microsoft.com/office/drawing/2014/main" id="{96380C86-D709-6FB8-5A19-C2314095D583}"/>
+              </a:ext>
+            </a:extLst>
+          </p:cNvPr>
+          <p:cNvSpPr>
+            <a:spLocks noGrp="1"/>
+          </p:cNvSpPr>
+          <p:nvPr>
+            <p:ph type="title"/>
+          </p:nvPr>
+        </p:nvSpPr>
+        <p:spPr>
+          <a:xfrm>
+            <a:off x="104775" y="69850"/>
+            <a:ext cx="10515600" cy="1325563"/>
+          </a:xfrm>
+        </p:spPr>
+        <p:txBody>
+          <a:bodyPr/>
+          <a:lstStyle/>
+          <a:p>
+            <a:r>
+              <a:rPr lang="en-US" dirty="0"/>
+              <a:t>Practice: Qualitative vs Quantitative</a:t>
+            </a:r>
+          </a:p>
+        </p:txBody>
+      </p:sp>
+      <p:sp>
+        <p:nvSpPr>
+          <p:cNvPr id="3" name="TextBox 2">
+            <a:extLst>
+              <a:ext uri="{FF2B5EF4-FFF2-40B4-BE49-F238E27FC236}">
+                <a16:creationId xmlns:a16="http://schemas.microsoft.com/office/drawing/2014/main" id="{8E831E4D-A6B4-F06F-3427-B337D4295CFB}"/>
+              </a:ext>
+            </a:extLst>
+          </p:cNvPr>
+          <p:cNvSpPr txBox="1"/>
+          <p:nvPr/>
+        </p:nvSpPr>
+        <p:spPr>
+          <a:xfrm>
+            <a:off x="434109" y="2159442"/>
+            <a:ext cx="5661891" cy="646331"/>
+          </a:xfrm>
+          <a:prstGeom prst="rect">
+            <a:avLst/>
+          </a:prstGeom>
+          <a:noFill/>
+        </p:spPr>
+        <p:txBody>
+          <a:bodyPr wrap="square">
+            <a:spAutoFit/>
+          </a:bodyPr>
+          <a:lstStyle/>
+          <a:p>
+            <a:pPr marL="0" marR="0" lvl="0" indent="0" algn="l" defTabSz="914400" rtl="0" eaLnBrk="1" fontAlgn="auto" latinLnBrk="0" hangingPunct="1">
+              <a:lnSpc>
+                <a:spcPct val="90000"/>
+              </a:lnSpc>
+              <a:spcBef>
+                <a:spcPts val="1000"/>
+              </a:spcBef>
+              <a:spcAft>
+                <a:spcPts val="0"/>
+              </a:spcAft>
+              <a:buClrTx/>
+              <a:buSzTx/>
+              <a:buFont typeface="Arial" panose="020B0604020202020204" pitchFamily="34" charset="0"/>
+              <a:buNone/>
+              <a:tabLst/>
+              <a:defRPr/>
+            </a:pPr>
+            <a:r>
+              <a:rPr kumimoji="0" lang="it-IT" sz="2000" b="0" i="0" u="none" strike="noStrike" kern="1200" cap="none" spc="0" normalizeH="0" baseline="0" noProof="0" dirty="0">
+                <a:ln>
+                  <a:noFill/>
+                </a:ln>
+                <a:solidFill>
+                  <a:prstClr val="black"/>
+                </a:solidFill>
+                <a:effectLst/>
+                <a:uLnTx/>
+                <a:uFillTx/>
+                <a:latin typeface="Calibri" panose="020F0502020204030204"/>
+                <a:ea typeface="+mn-ea"/>
+                <a:cs typeface="+mn-cs"/>
+              </a:rPr>
+              <a:t>From our example data of egyptian skulls, which variables are qualitative and which are quantitative?</a:t>
+            </a:r>
+          </a:p>
+        </p:txBody>
+      </p:sp>
+      <p:pic>
+        <p:nvPicPr>
+          <p:cNvPr id="4" name="Picture 3">
+            <a:extLst>
+              <a:ext uri="{FF2B5EF4-FFF2-40B4-BE49-F238E27FC236}">
+                <a16:creationId xmlns:a16="http://schemas.microsoft.com/office/drawing/2014/main" id="{3F312E28-59BC-B226-775F-D5CF9922FAB9}"/>
+              </a:ext>
+            </a:extLst>
+          </p:cNvPr>
+          <p:cNvPicPr>
+            <a:picLocks noChangeAspect="1"/>
+          </p:cNvPicPr>
+          <p:nvPr/>
+        </p:nvPicPr>
+        <p:blipFill>
+          <a:blip r:embed="rId2"/>
+          <a:stretch>
+            <a:fillRect/>
+          </a:stretch>
+        </p:blipFill>
+        <p:spPr>
+          <a:xfrm>
+            <a:off x="7304836" y="1072395"/>
+            <a:ext cx="4694327" cy="5785605"/>
+          </a:xfrm>
+          <a:prstGeom prst="rect">
+            <a:avLst/>
+          </a:prstGeom>
+        </p:spPr>
+      </p:pic>
+      <p:sp>
+        <p:nvSpPr>
+          <p:cNvPr id="5" name="TextBox 4">
+            <a:extLst>
+              <a:ext uri="{FF2B5EF4-FFF2-40B4-BE49-F238E27FC236}">
+                <a16:creationId xmlns:a16="http://schemas.microsoft.com/office/drawing/2014/main" id="{B9E6328E-BC34-D96A-EE97-4C6144D12878}"/>
+              </a:ext>
+            </a:extLst>
+          </p:cNvPr>
+          <p:cNvSpPr txBox="1"/>
+          <p:nvPr/>
+        </p:nvSpPr>
+        <p:spPr>
+          <a:xfrm>
+            <a:off x="591127" y="3805382"/>
+            <a:ext cx="3269673" cy="369332"/>
+          </a:xfrm>
+          <a:prstGeom prst="rect">
+            <a:avLst/>
+          </a:prstGeom>
+          <a:noFill/>
+        </p:spPr>
+        <p:txBody>
+          <a:bodyPr wrap="square" rtlCol="0">
+            <a:spAutoFit/>
+          </a:bodyPr>
+          <a:lstStyle/>
+          <a:p>
+            <a:r>
+              <a:rPr lang="en-US" dirty="0">
+                <a:solidFill>
+                  <a:srgbClr val="FF0000"/>
+                </a:solidFill>
+              </a:rPr>
+              <a:t>Qualitative: Epoch</a:t>
+            </a:r>
+          </a:p>
+        </p:txBody>
+      </p:sp>
+      <p:sp>
+        <p:nvSpPr>
+          <p:cNvPr id="6" name="TextBox 5">
+            <a:extLst>
+              <a:ext uri="{FF2B5EF4-FFF2-40B4-BE49-F238E27FC236}">
+                <a16:creationId xmlns:a16="http://schemas.microsoft.com/office/drawing/2014/main" id="{C34BFAB7-0B15-EF69-1025-9748F115FE7D}"/>
+              </a:ext>
+            </a:extLst>
+          </p:cNvPr>
+          <p:cNvSpPr txBox="1"/>
+          <p:nvPr/>
+        </p:nvSpPr>
+        <p:spPr>
+          <a:xfrm>
+            <a:off x="591126" y="5103091"/>
+            <a:ext cx="3269673" cy="369332"/>
+          </a:xfrm>
+          <a:prstGeom prst="rect">
+            <a:avLst/>
+          </a:prstGeom>
+          <a:noFill/>
+        </p:spPr>
+        <p:txBody>
+          <a:bodyPr wrap="square" rtlCol="0">
+            <a:spAutoFit/>
+          </a:bodyPr>
+          <a:lstStyle/>
+          <a:p>
+            <a:r>
+              <a:rPr lang="en-US" dirty="0">
+                <a:solidFill>
+                  <a:srgbClr val="FF0000"/>
+                </a:solidFill>
+              </a:rPr>
+              <a:t>Quantitative: mb, </a:t>
+            </a:r>
+            <a:r>
+              <a:rPr lang="en-US" dirty="0" err="1">
+                <a:solidFill>
+                  <a:srgbClr val="FF0000"/>
+                </a:solidFill>
+              </a:rPr>
+              <a:t>bh</a:t>
+            </a:r>
+            <a:r>
+              <a:rPr lang="en-US" dirty="0">
+                <a:solidFill>
+                  <a:srgbClr val="FF0000"/>
+                </a:solidFill>
+              </a:rPr>
+              <a:t>, bl, </a:t>
+            </a:r>
+            <a:r>
+              <a:rPr lang="en-US" dirty="0" err="1">
+                <a:solidFill>
+                  <a:srgbClr val="FF0000"/>
+                </a:solidFill>
+              </a:rPr>
+              <a:t>nh</a:t>
+            </a:r>
+            <a:endParaRPr lang="en-US" dirty="0">
+              <a:solidFill>
+                <a:srgbClr val="FF0000"/>
+              </a:solidFill>
+            </a:endParaRPr>
+          </a:p>
+        </p:txBody>
+      </p:sp>
+    </p:spTree>
+    <p:extLst>
+      <p:ext uri="{BB962C8B-B14F-4D97-AF65-F5344CB8AC3E}">
+        <p14:creationId xmlns:p14="http://schemas.microsoft.com/office/powerpoint/2010/main" val="2934979343"/>
+      </p:ext>
+    </p:extLst>
+  </p:cSld>
+  <p:clrMapOvr>
+    <a:masterClrMapping/>
+  </p:clrMapOvr>
+  <p:timing>
+    <p:tnLst>
+      <p:par>
+        <p:cTn id="1" dur="indefinite" restart="never" nodeType="tmRoot">
+          <p:childTnLst>
+            <p:seq concurrent="1" nextAc="seek">
+              <p:cTn id="2" dur="indefinite" nodeType="mainSeq">
+                <p:childTnLst>
+                  <p:par>
+                    <p:cTn id="3" fill="hold">
+                      <p:stCondLst>
+                        <p:cond delay="indefinite"/>
+                      </p:stCondLst>
+                      <p:childTnLst>
+                        <p:par>
+                          <p:cTn id="4" fill="hold">
+                            <p:stCondLst>
+                              <p:cond delay="0"/>
+                            </p:stCondLst>
+                            <p:childTnLst>
+                              <p:par>
+                                <p:cTn id="5" presetID="1" presetClass="entr" presetSubtype="0" fill="hold" grpId="0" nodeType="clickEffect">
+                                  <p:stCondLst>
+                                    <p:cond delay="0"/>
+                                  </p:stCondLst>
+                                  <p:childTnLst>
+                                    <p:set>
+                                      <p:cBhvr>
+                                        <p:cTn id="6" dur="1" fill="hold">
+                                          <p:stCondLst>
+                                            <p:cond delay="0"/>
+                                          </p:stCondLst>
+                                        </p:cTn>
+                                        <p:tgtEl>
+                                          <p:spTgt spid="5"/>
+                                        </p:tgtEl>
+                                        <p:attrNameLst>
+                                          <p:attrName>style.visibility</p:attrName>
+                                        </p:attrNameLst>
+                                      </p:cBhvr>
+                                      <p:to>
+                                        <p:strVal val="visible"/>
+                                      </p:to>
+                                    </p:set>
+                                  </p:childTnLst>
+                                </p:cTn>
+                              </p:par>
+                            </p:childTnLst>
+                          </p:cTn>
+                        </p:par>
+                      </p:childTnLst>
+                    </p:cTn>
+                  </p:par>
+                  <p:par>
+                    <p:cTn id="7" fill="hold">
+                      <p:stCondLst>
+                        <p:cond delay="indefinite"/>
+                      </p:stCondLst>
+                      <p:childTnLst>
+                        <p:par>
+                          <p:cTn id="8" fill="hold">
+                            <p:stCondLst>
+                              <p:cond delay="0"/>
+                            </p:stCondLst>
+                            <p:childTnLst>
+                              <p:par>
+                                <p:cTn id="9" presetID="1" presetClass="entr" presetSubtype="0" fill="hold" grpId="0" nodeType="clickEffect">
+                                  <p:stCondLst>
+                                    <p:cond delay="0"/>
+                                  </p:stCondLst>
+                                  <p:childTnLst>
+                                    <p:set>
+                                      <p:cBhvr>
+                                        <p:cTn id="10" dur="1" fill="hold">
+                                          <p:stCondLst>
+                                            <p:cond delay="0"/>
+                                          </p:stCondLst>
+                                        </p:cTn>
+                                        <p:tgtEl>
+                                          <p:spTgt spid="6"/>
+                                        </p:tgtEl>
+                                        <p:attrNameLst>
+                                          <p:attrName>style.visibility</p:attrName>
+                                        </p:attrNameLst>
+                                      </p:cBhvr>
+                                      <p:to>
+                                        <p:strVal val="visible"/>
+                                      </p:to>
+                                    </p:set>
+                                  </p:childTnLst>
+                                </p:cTn>
+                              </p:par>
+                            </p:childTnLst>
+                          </p:cTn>
+                        </p:par>
+                      </p:childTnLst>
+                    </p:cTn>
+                  </p:par>
+                </p:childTnLst>
+              </p:cTn>
+              <p:prevCondLst>
+                <p:cond evt="onPrev" delay="0">
+                  <p:tgtEl>
+                    <p:sldTgt/>
+                  </p:tgtEl>
+                </p:cond>
+              </p:prevCondLst>
+              <p:nextCondLst>
+                <p:cond evt="onNext" delay="0">
+                  <p:tgtEl>
+                    <p:sldTgt/>
+                  </p:tgtEl>
+                </p:cond>
+              </p:nextCondLst>
+            </p:seq>
+          </p:childTnLst>
+        </p:cTn>
+      </p:par>
+    </p:tnLst>
+    <p:bldLst>
+      <p:bldP spid="5" grpId="0"/>
+      <p:bldP spid="6" grpId="0"/>
+    </p:bldLst>
+  </p:timing>
+</p:sld>
+</file>
+
+<file path=ppt/slides/slide12.xml><?xml version="1.0" encoding="utf-8"?>
+<p:sld xmlns:a="http://schemas.openxmlformats.org/drawingml/2006/main" xmlns:r="http://schemas.openxmlformats.org/officeDocument/2006/relationships" xmlns:p="http://schemas.openxmlformats.org/presentationml/2006/main">
+  <p:cSld>
+    <p:spTree>
+      <p:nvGrpSpPr>
+        <p:cNvPr id="1" name=""/>
+        <p:cNvGrpSpPr/>
+        <p:nvPr/>
+      </p:nvGrpSpPr>
+      <p:grpSpPr>
+        <a:xfrm>
+          <a:off x="0" y="0"/>
+          <a:ext cx="0" cy="0"/>
+          <a:chOff x="0" y="0"/>
+          <a:chExt cx="0" cy="0"/>
+        </a:xfrm>
+      </p:grpSpPr>
+      <p:sp>
+        <p:nvSpPr>
+          <p:cNvPr id="2" name="Title 1">
+            <a:extLst>
+              <a:ext uri="{FF2B5EF4-FFF2-40B4-BE49-F238E27FC236}">
+                <a16:creationId xmlns:a16="http://schemas.microsoft.com/office/drawing/2014/main" id="{96380C86-D709-6FB8-5A19-C2314095D583}"/>
+              </a:ext>
+            </a:extLst>
+          </p:cNvPr>
+          <p:cNvSpPr>
+            <a:spLocks noGrp="1"/>
+          </p:cNvSpPr>
+          <p:nvPr>
+            <p:ph type="title"/>
+          </p:nvPr>
+        </p:nvSpPr>
+        <p:spPr/>
+        <p:txBody>
+          <a:bodyPr/>
+          <a:lstStyle/>
+          <a:p>
+            <a:r>
+              <a:rPr lang="en-US" dirty="0"/>
+              <a:t>Types of Variables: Qualitative vs Quantitative</a:t>
+            </a:r>
+          </a:p>
+        </p:txBody>
+      </p:sp>
+      <p:sp>
+        <p:nvSpPr>
+          <p:cNvPr id="9" name="TextBox 8">
+            <a:extLst>
+              <a:ext uri="{FF2B5EF4-FFF2-40B4-BE49-F238E27FC236}">
+                <a16:creationId xmlns:a16="http://schemas.microsoft.com/office/drawing/2014/main" id="{D2B5399D-0B33-473E-D0B4-000D18CF4028}"/>
+              </a:ext>
+            </a:extLst>
+          </p:cNvPr>
+          <p:cNvSpPr txBox="1"/>
+          <p:nvPr/>
+        </p:nvSpPr>
+        <p:spPr>
+          <a:xfrm>
             <a:off x="434109" y="2159442"/>
             <a:ext cx="5661891" cy="4760278"/>
           </a:xfrm>
@@ -6684,14 +7576,14 @@
       </p:sp>
       <p:pic>
         <p:nvPicPr>
-          <p:cNvPr id="10" name="Picture 9" descr="job_pie.png"/>
+          <p:cNvPr id="10" name="Picture 9" descr="urban_pie.png"/>
           <p:cNvPicPr>
             <a:picLocks noChangeAspect="1"/>
           </p:cNvPicPr>
           <p:nvPr/>
         </p:nvPicPr>
         <p:blipFill>
-          <a:blip r:embed="rId6"/>
+          <a:blip r:embed="rId5"/>
           <a:stretch>
             <a:fillRect/>
           </a:stretch>
@@ -6719,7 +7611,7 @@
 </p:sld>
 </file>
 
-<file path=ppt/slides/slide11.xml><?xml version="1.0" encoding="utf-8"?>
+<file path=ppt/slides/slide13.xml><?xml version="1.0" encoding="utf-8"?>
 <p:sld xmlns:a="http://schemas.openxmlformats.org/drawingml/2006/main" xmlns:r="http://schemas.openxmlformats.org/officeDocument/2006/relationships" xmlns:p="http://schemas.openxmlformats.org/presentationml/2006/main">
   <p:cSld>
     <p:spTree>
@@ -6821,14 +7713,14 @@
                 </a:solidFill>
                 <a:latin typeface="Calibri" panose="020F0502020204030204"/>
               </a:rPr>
-              <a:t>In the bank marketing example data, which variable(s) are qualitative nominal and which are qualitative ordinal?</a:t>
+              <a:t>In the Carseats example data, which variable(s) are qualitative nominal and which are qualitative ordinal?</a:t>
             </a:r>
           </a:p>
         </p:txBody>
       </p:sp>
       <p:pic>
         <p:nvPicPr>
-          <p:cNvPr id="11" name="Picture 10" descr="image.png"/>
+          <p:cNvPr id="11" name="Picture 10" descr="carseats_table.png"/>
           <p:cNvPicPr>
             <a:picLocks noChangeAspect="1"/>
           </p:cNvPicPr>
@@ -6884,7 +7776,7 @@
                   <a:srgbClr val="FF0000"/>
                 </a:solidFill>
               </a:rPr>
-              <a:t>Qualitative nominal: Client ID, Job, Subscribed</a:t>
+              <a:t>Qualitative nominal: Urban, US</a:t>
             </a:r>
           </a:p>
         </p:txBody>
@@ -6923,7 +7815,7 @@
                   <a:srgbClr val="FF0000"/>
                 </a:solidFill>
               </a:rPr>
-              <a:t>Qualitative ordinal: Education</a:t>
+              <a:t>Qualitative ordinal: ShelveLoc (Bad &lt; Medium &lt; Good)</a:t>
             </a:r>
           </a:p>
         </p:txBody>
@@ -6945,7 +7837,7 @@
           <a:noFill/>
         </p:spPr>
         <p:txBody>
-          <a:bodyPr wrap="square" lIns="0" rIns="0" tIns="0" bIns="0" anchor="t">
+          <a:bodyPr wrap="square" lIns="0" tIns="0" rIns="0" bIns="0" anchor="t">
             <a:spAutoFit/>
           </a:bodyPr>
           <a:lstStyle/>
@@ -6962,7 +7854,7 @@
                 </a:solidFill>
                 <a:latin typeface="Calibri"/>
               </a:rPr>
-              <a:t>Data structure adapted from Moro, Rita, and Cortez (2014), Bank Marketing, UCI Machine Learning Repository; the 20 records shown are simulated.</a:t>
+              <a:t>Carseats data set, R package ISLR2 (James, Witten, Hastie and Tibshirani, 2021); 20 of the 400 simulated stores shown.</a:t>
             </a:r>
           </a:p>
         </p:txBody>
@@ -7104,7 +7996,7 @@
 </p:sld>
 </file>
 
-<file path=ppt/slides/slide12.xml><?xml version="1.0" encoding="utf-8"?>
+<file path=ppt/slides/slide14.xml><?xml version="1.0" encoding="utf-8"?>
 <p:sld xmlns:a="http://schemas.openxmlformats.org/drawingml/2006/main" xmlns:r="http://schemas.openxmlformats.org/officeDocument/2006/relationships" xmlns:p="http://schemas.openxmlformats.org/presentationml/2006/main">
   <p:cSld>
     <p:spTree>
@@ -7609,10 +8501,7 @@
                   <a:pPr/>
                   <a14:m>
                     <m:oMathPara xmlns:m="http://schemas.openxmlformats.org/officeDocument/2006/math">
-                      <m:oMathParaPr>
-                        <m:jc m:val="centerGroup"/>
-                      </m:oMathParaPr>
-                      <m:oMath xmlns:m="http://schemas.openxmlformats.org/officeDocument/2006/math">
+                      <m:oMath>
                         <m:r>
                           <a:rPr lang="en-US" b="0" i="1" smtClean="0">
                             <a:latin typeface="Cambria Math" panose="02040503050406030204" pitchFamily="18" charset="0"/>
@@ -7620,6 +8509,9 @@
                           <m:t>40</m:t>
                         </m:r>
                         <m:r>
+                          <m:rPr>
+                            <m:sty m:val="p"/>
+                          </m:rPr>
                           <a:rPr lang="en-US" b="0" i="1" smtClean="0">
                             <a:latin typeface="Cambria Math" panose="02040503050406030204" pitchFamily="18" charset="0"/>
                             <a:ea typeface="Cambria Math" panose="02040503050406030204" pitchFamily="18" charset="0"/>
@@ -7712,10 +8604,7 @@
                   <a:pPr/>
                   <a14:m>
                     <m:oMathPara xmlns:m="http://schemas.openxmlformats.org/officeDocument/2006/math">
-                      <m:oMathParaPr>
-                        <m:jc m:val="centerGroup"/>
-                      </m:oMathParaPr>
-                      <m:oMath xmlns:m="http://schemas.openxmlformats.org/officeDocument/2006/math">
+                      <m:oMath>
                         <m:r>
                           <a:rPr lang="en-US" i="1" smtClean="0">
                             <a:latin typeface="Cambria Math" panose="02040503050406030204" pitchFamily="18" charset="0"/>
@@ -7729,6 +8618,9 @@
                           <m:t>7</m:t>
                         </m:r>
                         <m:r>
+                          <m:rPr>
+                            <m:sty m:val="p"/>
+                          </m:rPr>
                           <a:rPr lang="en-US" b="0" i="1" smtClean="0">
                             <a:latin typeface="Cambria Math" panose="02040503050406030204" pitchFamily="18" charset="0"/>
                             <a:ea typeface="Cambria Math" panose="02040503050406030204" pitchFamily="18" charset="0"/>
@@ -8040,7 +8932,7 @@
 </p:sld>
 </file>
 
-<file path=ppt/slides/slide13.xml><?xml version="1.0" encoding="utf-8"?>
+<file path=ppt/slides/slide15.xml><?xml version="1.0" encoding="utf-8"?>
 <p:sld xmlns:a="http://schemas.openxmlformats.org/drawingml/2006/main" xmlns:r="http://schemas.openxmlformats.org/officeDocument/2006/relationships" xmlns:p="http://schemas.openxmlformats.org/presentationml/2006/main">
   <p:cSld>
     <p:spTree>
@@ -8142,14 +9034,14 @@
                 </a:solidFill>
                 <a:latin typeface="Calibri" panose="020F0502020204030204"/>
               </a:rPr>
-              <a:t>In the bank marketing example data, which variable(s) are quantitative discrete and which are quantitative continuous?</a:t>
+              <a:t>In the Carseats example data, which variable(s) are quantitative discrete and which are quantitative continuous?</a:t>
             </a:r>
           </a:p>
         </p:txBody>
       </p:sp>
       <p:pic>
         <p:nvPicPr>
-          <p:cNvPr id="11" name="Picture 10" descr="image.png"/>
+          <p:cNvPr id="11" name="Picture 10" descr="carseats_table.png"/>
           <p:cNvPicPr>
             <a:picLocks noChangeAspect="1"/>
           </p:cNvPicPr>
@@ -8205,7 +9097,7 @@
                   <a:srgbClr val="FF0000"/>
                 </a:solidFill>
               </a:rPr>
-              <a:t>Quantitative discrete: Age (a count of the number of years)</a:t>
+              <a:t>Quantitative discrete: Population, Education (both counts)</a:t>
             </a:r>
           </a:p>
         </p:txBody>
@@ -8244,7 +9136,7 @@
                   <a:srgbClr val="FF0000"/>
                 </a:solidFill>
               </a:rPr>
-              <a:t>Quantitative continuous: Balance, Call Length</a:t>
+              <a:t>Quantitative continuous: Sales, Price, Income</a:t>
             </a:r>
           </a:p>
         </p:txBody>
@@ -8266,7 +9158,7 @@
           <a:noFill/>
         </p:spPr>
         <p:txBody>
-          <a:bodyPr wrap="square" lIns="0" rIns="0" tIns="0" bIns="0" anchor="t">
+          <a:bodyPr wrap="square" lIns="0" tIns="0" rIns="0" bIns="0" anchor="t">
             <a:spAutoFit/>
           </a:bodyPr>
           <a:lstStyle/>
@@ -8283,7 +9175,7 @@
                 </a:solidFill>
                 <a:latin typeface="Calibri"/>
               </a:rPr>
-              <a:t>Data structure adapted from Moro, Rita, and Cortez (2014), Bank Marketing, UCI Machine Learning Repository; the 20 records shown are simulated.</a:t>
+              <a:t>Carseats data set, R package ISLR2 (James, Witten, Hastie and Tibshirani, 2021); 20 of the 400 simulated stores shown.</a:t>
             </a:r>
           </a:p>
         </p:txBody>
@@ -8425,8 +9317,8 @@
 </p:sld>
 </file>
 
-<file path=ppt/slides/slide14.xml><?xml version="1.0" encoding="utf-8"?>
-<p:sld xmlns:a="http://schemas.openxmlformats.org/drawingml/2006/main" xmlns:p="http://schemas.openxmlformats.org/presentationml/2006/main" xmlns:r="http://schemas.openxmlformats.org/officeDocument/2006/relationships">
+<file path=ppt/slides/slide2.xml><?xml version="1.0" encoding="utf-8"?>
+<p:sld xmlns:a="http://schemas.openxmlformats.org/drawingml/2006/main" xmlns:r="http://schemas.openxmlformats.org/officeDocument/2006/relationships" xmlns:p="http://schemas.openxmlformats.org/presentationml/2006/main">
   <p:cSld>
     <p:spTree>
       <p:nvGrpSpPr>
@@ -8434,7 +9326,14 @@
         <p:cNvGrpSpPr/>
         <p:nvPr/>
       </p:nvGrpSpPr>
-      <p:grpSpPr/>
+      <p:grpSpPr>
+        <a:xfrm>
+          <a:off x="0" y="0"/>
+          <a:ext cx="0" cy="0"/>
+          <a:chOff x="0" y="0"/>
+          <a:chExt cx="0" cy="0"/>
+        </a:xfrm>
+      </p:grpSpPr>
       <p:sp>
         <p:nvSpPr>
           <p:cNvPr id="2" name="Title 1"/>
@@ -8484,7 +9383,7 @@
           <a:noFill/>
         </p:spPr>
         <p:txBody>
-          <a:bodyPr wrap="square" lIns="0" rIns="0" tIns="0" bIns="0" anchor="t">
+          <a:bodyPr wrap="square" lIns="0" tIns="0" rIns="0" bIns="0" anchor="t">
             <a:spAutoFit/>
           </a:bodyPr>
           <a:lstStyle/>
@@ -8543,10 +9442,11 @@
           </a:fontRef>
         </p:style>
         <p:txBody>
-          <a:bodyPr rtlCol="0" anchor="ctr" wrap="square"/>
+          <a:bodyPr wrap="square" rtlCol="0" anchor="ctr"/>
           <a:lstStyle/>
           <a:p>
             <a:pPr algn="ctr"/>
+            <a:endParaRPr/>
           </a:p>
         </p:txBody>
       </p:sp>
@@ -8587,10 +9487,11 @@
           </a:fontRef>
         </p:style>
         <p:txBody>
-          <a:bodyPr rtlCol="0" anchor="ctr" wrap="square"/>
+          <a:bodyPr wrap="square" rtlCol="0" anchor="ctr"/>
           <a:lstStyle/>
           <a:p>
             <a:pPr algn="ctr"/>
+            <a:endParaRPr/>
           </a:p>
         </p:txBody>
       </p:sp>
@@ -8633,10 +9534,11 @@
           </a:fontRef>
         </p:style>
         <p:txBody>
-          <a:bodyPr rtlCol="0" anchor="ctr" wrap="square"/>
+          <a:bodyPr wrap="square" rtlCol="0" anchor="ctr"/>
           <a:lstStyle/>
           <a:p>
             <a:pPr algn="ctr"/>
+            <a:endParaRPr/>
           </a:p>
         </p:txBody>
       </p:sp>
@@ -8677,7 +9579,7 @@
           </a:fontRef>
         </p:style>
         <p:txBody>
-          <a:bodyPr rtlCol="0" anchor="t" wrap="square" lIns="100584" rIns="100584" tIns="73152" bIns="73152"/>
+          <a:bodyPr wrap="square" lIns="100584" tIns="73152" rIns="100584" bIns="73152" rtlCol="0" anchor="t"/>
           <a:lstStyle/>
           <a:p>
             <a:pPr algn="l">
@@ -8746,10 +9648,11 @@
           </a:fontRef>
         </p:style>
         <p:txBody>
-          <a:bodyPr rtlCol="0" anchor="ctr" wrap="square"/>
+          <a:bodyPr wrap="square" rtlCol="0" anchor="ctr"/>
           <a:lstStyle/>
           <a:p>
             <a:pPr algn="ctr"/>
+            <a:endParaRPr/>
           </a:p>
         </p:txBody>
       </p:sp>
@@ -8792,10 +9695,11 @@
           </a:fontRef>
         </p:style>
         <p:txBody>
-          <a:bodyPr rtlCol="0" anchor="ctr" wrap="square"/>
+          <a:bodyPr wrap="square" rtlCol="0" anchor="ctr"/>
           <a:lstStyle/>
           <a:p>
             <a:pPr algn="ctr"/>
+            <a:endParaRPr/>
           </a:p>
         </p:txBody>
       </p:sp>
@@ -8836,7 +9740,7 @@
           </a:fontRef>
         </p:style>
         <p:txBody>
-          <a:bodyPr rtlCol="0" anchor="t" wrap="square" lIns="100584" rIns="100584" tIns="73152" bIns="73152"/>
+          <a:bodyPr wrap="square" lIns="100584" tIns="73152" rIns="100584" bIns="73152" rtlCol="0" anchor="t"/>
           <a:lstStyle/>
           <a:p>
             <a:pPr algn="l">
@@ -8905,10 +9809,11 @@
           </a:fontRef>
         </p:style>
         <p:txBody>
-          <a:bodyPr rtlCol="0" anchor="ctr" wrap="square"/>
+          <a:bodyPr wrap="square" rtlCol="0" anchor="ctr"/>
           <a:lstStyle/>
           <a:p>
             <a:pPr algn="ctr"/>
+            <a:endParaRPr/>
           </a:p>
         </p:txBody>
       </p:sp>
@@ -8951,10 +9856,11 @@
           </a:fontRef>
         </p:style>
         <p:txBody>
-          <a:bodyPr rtlCol="0" anchor="ctr" wrap="square"/>
+          <a:bodyPr wrap="square" rtlCol="0" anchor="ctr"/>
           <a:lstStyle/>
           <a:p>
             <a:pPr algn="ctr"/>
+            <a:endParaRPr/>
           </a:p>
         </p:txBody>
       </p:sp>
@@ -8995,7 +9901,7 @@
           </a:fontRef>
         </p:style>
         <p:txBody>
-          <a:bodyPr rtlCol="0" anchor="t" wrap="square" lIns="100584" rIns="100584" tIns="73152" bIns="73152"/>
+          <a:bodyPr wrap="square" lIns="100584" tIns="73152" rIns="100584" bIns="73152" rtlCol="0" anchor="t"/>
           <a:lstStyle/>
           <a:p>
             <a:pPr algn="l">
@@ -9064,10 +9970,11 @@
           </a:fontRef>
         </p:style>
         <p:txBody>
-          <a:bodyPr rtlCol="0" anchor="ctr" wrap="square"/>
+          <a:bodyPr wrap="square" rtlCol="0" anchor="ctr"/>
           <a:lstStyle/>
           <a:p>
             <a:pPr algn="ctr"/>
+            <a:endParaRPr/>
           </a:p>
         </p:txBody>
       </p:sp>
@@ -9110,10 +10017,11 @@
           </a:fontRef>
         </p:style>
         <p:txBody>
-          <a:bodyPr rtlCol="0" anchor="ctr" wrap="square"/>
+          <a:bodyPr wrap="square" rtlCol="0" anchor="ctr"/>
           <a:lstStyle/>
           <a:p>
             <a:pPr algn="ctr"/>
+            <a:endParaRPr/>
           </a:p>
         </p:txBody>
       </p:sp>
@@ -9154,7 +10062,7 @@
           </a:fontRef>
         </p:style>
         <p:txBody>
-          <a:bodyPr rtlCol="0" anchor="t" wrap="square" lIns="100584" rIns="100584" tIns="73152" bIns="73152"/>
+          <a:bodyPr wrap="square" lIns="100584" tIns="73152" rIns="100584" bIns="73152" rtlCol="0" anchor="t"/>
           <a:lstStyle/>
           <a:p>
             <a:pPr algn="l">
@@ -9223,10 +10131,11 @@
           </a:fontRef>
         </p:style>
         <p:txBody>
-          <a:bodyPr rtlCol="0" anchor="ctr" wrap="square"/>
+          <a:bodyPr wrap="square" rtlCol="0" anchor="ctr"/>
           <a:lstStyle/>
           <a:p>
             <a:pPr algn="ctr"/>
+            <a:endParaRPr/>
           </a:p>
         </p:txBody>
       </p:sp>
@@ -9269,10 +10178,11 @@
           </a:fontRef>
         </p:style>
         <p:txBody>
-          <a:bodyPr rtlCol="0" anchor="ctr" wrap="square"/>
+          <a:bodyPr wrap="square" rtlCol="0" anchor="ctr"/>
           <a:lstStyle/>
           <a:p>
             <a:pPr algn="ctr"/>
+            <a:endParaRPr/>
           </a:p>
         </p:txBody>
       </p:sp>
@@ -9313,7 +10223,7 @@
           </a:fontRef>
         </p:style>
         <p:txBody>
-          <a:bodyPr rtlCol="0" anchor="t" wrap="square" lIns="100584" rIns="100584" tIns="73152" bIns="73152"/>
+          <a:bodyPr wrap="square" lIns="100584" tIns="73152" rIns="100584" bIns="73152" rtlCol="0" anchor="t"/>
           <a:lstStyle/>
           <a:p>
             <a:pPr algn="l">
@@ -9382,10 +10292,11 @@
           </a:fontRef>
         </p:style>
         <p:txBody>
-          <a:bodyPr rtlCol="0" anchor="ctr" wrap="square"/>
+          <a:bodyPr wrap="square" rtlCol="0" anchor="ctr"/>
           <a:lstStyle/>
           <a:p>
             <a:pPr algn="ctr"/>
+            <a:endParaRPr/>
           </a:p>
         </p:txBody>
       </p:sp>
@@ -9428,10 +10339,11 @@
           </a:fontRef>
         </p:style>
         <p:txBody>
-          <a:bodyPr rtlCol="0" anchor="ctr" wrap="square"/>
+          <a:bodyPr wrap="square" rtlCol="0" anchor="ctr"/>
           <a:lstStyle/>
           <a:p>
             <a:pPr algn="ctr"/>
+            <a:endParaRPr/>
           </a:p>
         </p:txBody>
       </p:sp>
@@ -9472,7 +10384,7 @@
           </a:fontRef>
         </p:style>
         <p:txBody>
-          <a:bodyPr rtlCol="0" anchor="t" wrap="square" lIns="100584" rIns="100584" tIns="73152" bIns="73152"/>
+          <a:bodyPr wrap="square" lIns="100584" tIns="73152" rIns="100584" bIns="73152" rtlCol="0" anchor="t"/>
           <a:lstStyle/>
           <a:p>
             <a:pPr algn="l">
@@ -9541,10 +10453,11 @@
           </a:fontRef>
         </p:style>
         <p:txBody>
-          <a:bodyPr rtlCol="0" anchor="ctr" wrap="square"/>
+          <a:bodyPr wrap="square" rtlCol="0" anchor="ctr"/>
           <a:lstStyle/>
           <a:p>
             <a:pPr algn="ctr"/>
+            <a:endParaRPr/>
           </a:p>
         </p:txBody>
       </p:sp>
@@ -9587,10 +10500,11 @@
           </a:fontRef>
         </p:style>
         <p:txBody>
-          <a:bodyPr rtlCol="0" anchor="ctr" wrap="square"/>
+          <a:bodyPr wrap="square" rtlCol="0" anchor="ctr"/>
           <a:lstStyle/>
           <a:p>
             <a:pPr algn="ctr"/>
+            <a:endParaRPr/>
           </a:p>
         </p:txBody>
       </p:sp>
@@ -9631,7 +10545,7 @@
           </a:fontRef>
         </p:style>
         <p:txBody>
-          <a:bodyPr rtlCol="0" anchor="t" wrap="square" lIns="100584" rIns="100584" tIns="73152" bIns="73152"/>
+          <a:bodyPr wrap="square" lIns="100584" tIns="73152" rIns="100584" bIns="73152" rtlCol="0" anchor="t"/>
           <a:lstStyle/>
           <a:p>
             <a:pPr algn="l">
@@ -9700,10 +10614,11 @@
           </a:fontRef>
         </p:style>
         <p:txBody>
-          <a:bodyPr rtlCol="0" anchor="ctr" wrap="square"/>
+          <a:bodyPr wrap="square" rtlCol="0" anchor="ctr"/>
           <a:lstStyle/>
           <a:p>
             <a:pPr algn="ctr"/>
+            <a:endParaRPr/>
           </a:p>
         </p:txBody>
       </p:sp>
@@ -9746,10 +10661,11 @@
           </a:fontRef>
         </p:style>
         <p:txBody>
-          <a:bodyPr rtlCol="0" anchor="ctr" wrap="square"/>
+          <a:bodyPr wrap="square" rtlCol="0" anchor="ctr"/>
           <a:lstStyle/>
           <a:p>
             <a:pPr algn="ctr"/>
+            <a:endParaRPr/>
           </a:p>
         </p:txBody>
       </p:sp>
@@ -9790,7 +10706,7 @@
           </a:fontRef>
         </p:style>
         <p:txBody>
-          <a:bodyPr rtlCol="0" anchor="t" wrap="square" lIns="100584" rIns="100584" tIns="73152" bIns="73152"/>
+          <a:bodyPr wrap="square" lIns="100584" tIns="73152" rIns="100584" bIns="73152" rtlCol="0" anchor="t"/>
           <a:lstStyle/>
           <a:p>
             <a:pPr algn="l">
@@ -9839,7 +10755,7 @@
           <a:noFill/>
         </p:spPr>
         <p:txBody>
-          <a:bodyPr wrap="square" lIns="0" rIns="0" tIns="0" bIns="0" anchor="t">
+          <a:bodyPr wrap="square" lIns="0" tIns="0" rIns="0" bIns="0" anchor="t">
             <a:spAutoFit/>
           </a:bodyPr>
           <a:lstStyle/>
@@ -9869,7 +10785,7 @@
 </p:sld>
 </file>
 
-<file path=ppt/slides/slide2.xml><?xml version="1.0" encoding="utf-8"?>
+<file path=ppt/slides/slide3.xml><?xml version="1.0" encoding="utf-8"?>
 <p:sld xmlns:a="http://schemas.openxmlformats.org/drawingml/2006/main" xmlns:r="http://schemas.openxmlformats.org/officeDocument/2006/relationships" xmlns:p="http://schemas.openxmlformats.org/presentationml/2006/main">
   <p:cSld>
     <p:spTree>
@@ -10033,7 +10949,7 @@
 </p:sld>
 </file>
 
-<file path=ppt/slides/slide3.xml><?xml version="1.0" encoding="utf-8"?>
+<file path=ppt/slides/slide4.xml><?xml version="1.0" encoding="utf-8"?>
 <p:sld xmlns:a="http://schemas.openxmlformats.org/drawingml/2006/main" xmlns:r="http://schemas.openxmlformats.org/officeDocument/2006/relationships" xmlns:p="http://schemas.openxmlformats.org/presentationml/2006/main">
   <p:cSld>
     <p:bg>
@@ -10325,93 +11241,93 @@
           <a:custGeom>
             <a:avLst/>
             <a:gdLst>
-              <a:gd name="connsiteX0" fmla="*/ 0 w 4243589"/>
-              <a:gd name="connsiteY0" fmla="*/ 0 h 18288"/>
-              <a:gd name="connsiteX1" fmla="*/ 478919 w 4243589"/>
-              <a:gd name="connsiteY1" fmla="*/ 0 h 18288"/>
-              <a:gd name="connsiteX2" fmla="*/ 957839 w 4243589"/>
-              <a:gd name="connsiteY2" fmla="*/ 0 h 18288"/>
-              <a:gd name="connsiteX3" fmla="*/ 1521630 w 4243589"/>
-              <a:gd name="connsiteY3" fmla="*/ 0 h 18288"/>
-              <a:gd name="connsiteX4" fmla="*/ 2212729 w 4243589"/>
-              <a:gd name="connsiteY4" fmla="*/ 0 h 18288"/>
-              <a:gd name="connsiteX5" fmla="*/ 2734084 w 4243589"/>
-              <a:gd name="connsiteY5" fmla="*/ 0 h 18288"/>
-              <a:gd name="connsiteX6" fmla="*/ 3255439 w 4243589"/>
-              <a:gd name="connsiteY6" fmla="*/ 0 h 18288"/>
-              <a:gd name="connsiteX7" fmla="*/ 4243589 w 4243589"/>
-              <a:gd name="connsiteY7" fmla="*/ 0 h 18288"/>
-              <a:gd name="connsiteX8" fmla="*/ 4243589 w 4243589"/>
-              <a:gd name="connsiteY8" fmla="*/ 18288 h 18288"/>
-              <a:gd name="connsiteX9" fmla="*/ 3594926 w 4243589"/>
-              <a:gd name="connsiteY9" fmla="*/ 18288 h 18288"/>
-              <a:gd name="connsiteX10" fmla="*/ 3073571 w 4243589"/>
-              <a:gd name="connsiteY10" fmla="*/ 18288 h 18288"/>
-              <a:gd name="connsiteX11" fmla="*/ 2552216 w 4243589"/>
-              <a:gd name="connsiteY11" fmla="*/ 18288 h 18288"/>
-              <a:gd name="connsiteX12" fmla="*/ 1903553 w 4243589"/>
-              <a:gd name="connsiteY12" fmla="*/ 18288 h 18288"/>
-              <a:gd name="connsiteX13" fmla="*/ 1212454 w 4243589"/>
-              <a:gd name="connsiteY13" fmla="*/ 18288 h 18288"/>
-              <a:gd name="connsiteX14" fmla="*/ 733535 w 4243589"/>
-              <a:gd name="connsiteY14" fmla="*/ 18288 h 18288"/>
-              <a:gd name="connsiteX15" fmla="*/ 0 w 4243589"/>
-              <a:gd name="connsiteY15" fmla="*/ 18288 h 18288"/>
-              <a:gd name="connsiteX16" fmla="*/ 0 w 4243589"/>
-              <a:gd name="connsiteY16" fmla="*/ 0 h 18288"/>
+              <a:gd name="csX0" fmla="*/ 0 w 4243589"/>
+              <a:gd name="csY0" fmla="*/ 0 h 18288"/>
+              <a:gd name="csX1" fmla="*/ 478919 w 4243589"/>
+              <a:gd name="csY1" fmla="*/ 0 h 18288"/>
+              <a:gd name="csX2" fmla="*/ 957839 w 4243589"/>
+              <a:gd name="csY2" fmla="*/ 0 h 18288"/>
+              <a:gd name="csX3" fmla="*/ 1521630 w 4243589"/>
+              <a:gd name="csY3" fmla="*/ 0 h 18288"/>
+              <a:gd name="csX4" fmla="*/ 2212729 w 4243589"/>
+              <a:gd name="csY4" fmla="*/ 0 h 18288"/>
+              <a:gd name="csX5" fmla="*/ 2734084 w 4243589"/>
+              <a:gd name="csY5" fmla="*/ 0 h 18288"/>
+              <a:gd name="csX6" fmla="*/ 3255439 w 4243589"/>
+              <a:gd name="csY6" fmla="*/ 0 h 18288"/>
+              <a:gd name="csX7" fmla="*/ 4243589 w 4243589"/>
+              <a:gd name="csY7" fmla="*/ 0 h 18288"/>
+              <a:gd name="csX8" fmla="*/ 4243589 w 4243589"/>
+              <a:gd name="csY8" fmla="*/ 18288 h 18288"/>
+              <a:gd name="csX9" fmla="*/ 3594926 w 4243589"/>
+              <a:gd name="csY9" fmla="*/ 18288 h 18288"/>
+              <a:gd name="csX10" fmla="*/ 3073571 w 4243589"/>
+              <a:gd name="csY10" fmla="*/ 18288 h 18288"/>
+              <a:gd name="csX11" fmla="*/ 2552216 w 4243589"/>
+              <a:gd name="csY11" fmla="*/ 18288 h 18288"/>
+              <a:gd name="csX12" fmla="*/ 1903553 w 4243589"/>
+              <a:gd name="csY12" fmla="*/ 18288 h 18288"/>
+              <a:gd name="csX13" fmla="*/ 1212454 w 4243589"/>
+              <a:gd name="csY13" fmla="*/ 18288 h 18288"/>
+              <a:gd name="csX14" fmla="*/ 733535 w 4243589"/>
+              <a:gd name="csY14" fmla="*/ 18288 h 18288"/>
+              <a:gd name="csX15" fmla="*/ 0 w 4243589"/>
+              <a:gd name="csY15" fmla="*/ 18288 h 18288"/>
+              <a:gd name="csX16" fmla="*/ 0 w 4243589"/>
+              <a:gd name="csY16" fmla="*/ 0 h 18288"/>
             </a:gdLst>
             <a:ahLst/>
             <a:cxnLst>
               <a:cxn ang="0">
-                <a:pos x="connsiteX0" y="connsiteY0"/>
+                <a:pos x="csX0" y="csY0"/>
               </a:cxn>
               <a:cxn ang="0">
-                <a:pos x="connsiteX1" y="connsiteY1"/>
+                <a:pos x="csX1" y="csY1"/>
               </a:cxn>
               <a:cxn ang="0">
-                <a:pos x="connsiteX2" y="connsiteY2"/>
+                <a:pos x="csX2" y="csY2"/>
               </a:cxn>
               <a:cxn ang="0">
-                <a:pos x="connsiteX3" y="connsiteY3"/>
+                <a:pos x="csX3" y="csY3"/>
               </a:cxn>
               <a:cxn ang="0">
-                <a:pos x="connsiteX4" y="connsiteY4"/>
+                <a:pos x="csX4" y="csY4"/>
               </a:cxn>
               <a:cxn ang="0">
-                <a:pos x="connsiteX5" y="connsiteY5"/>
+                <a:pos x="csX5" y="csY5"/>
               </a:cxn>
               <a:cxn ang="0">
-                <a:pos x="connsiteX6" y="connsiteY6"/>
+                <a:pos x="csX6" y="csY6"/>
               </a:cxn>
               <a:cxn ang="0">
-                <a:pos x="connsiteX7" y="connsiteY7"/>
+                <a:pos x="csX7" y="csY7"/>
               </a:cxn>
               <a:cxn ang="0">
-                <a:pos x="connsiteX8" y="connsiteY8"/>
+                <a:pos x="csX8" y="csY8"/>
               </a:cxn>
               <a:cxn ang="0">
-                <a:pos x="connsiteX9" y="connsiteY9"/>
+                <a:pos x="csX9" y="csY9"/>
               </a:cxn>
               <a:cxn ang="0">
-                <a:pos x="connsiteX10" y="connsiteY10"/>
+                <a:pos x="csX10" y="csY10"/>
               </a:cxn>
               <a:cxn ang="0">
-                <a:pos x="connsiteX11" y="connsiteY11"/>
+                <a:pos x="csX11" y="csY11"/>
               </a:cxn>
               <a:cxn ang="0">
-                <a:pos x="connsiteX12" y="connsiteY12"/>
+                <a:pos x="csX12" y="csY12"/>
               </a:cxn>
               <a:cxn ang="0">
-                <a:pos x="connsiteX13" y="connsiteY13"/>
+                <a:pos x="csX13" y="csY13"/>
               </a:cxn>
               <a:cxn ang="0">
-                <a:pos x="connsiteX14" y="connsiteY14"/>
+                <a:pos x="csX14" y="csY14"/>
               </a:cxn>
               <a:cxn ang="0">
-                <a:pos x="connsiteX15" y="connsiteY15"/>
+                <a:pos x="csX15" y="csY15"/>
               </a:cxn>
               <a:cxn ang="0">
-                <a:pos x="connsiteX16" y="connsiteY16"/>
+                <a:pos x="csX16" y="csY16"/>
               </a:cxn>
             </a:cxnLst>
             <a:rect l="l" t="t" r="r" b="b"/>
@@ -10661,7 +11577,7 @@
         </p:spPr>
         <p:txBody>
           <a:bodyPr>
-            <a:normAutofit fontScale="85000" lnSpcReduction="20000"/>
+            <a:normAutofit lnSpcReduction="10000"/>
           </a:bodyPr>
           <a:lstStyle/>
           <a:p>
@@ -10734,37 +11650,6 @@
           </a:p>
           <a:p>
             <a:endParaRPr lang="en-US" sz="2400" dirty="0"/>
-          </a:p>
-          <a:p>
-            <a:pPr marL="0" indent="0">
-              <a:buNone/>
-            </a:pPr>
-            <a:r>
-              <a:rPr lang="en-US" sz="2400" dirty="0"/>
-              <a:t>The </a:t>
-            </a:r>
-            <a:r>
-              <a:rPr lang="en-US" sz="2400" b="1" dirty="0"/>
-              <a:t>science of statistics </a:t>
-            </a:r>
-            <a:r>
-              <a:rPr lang="en-US" sz="2400" dirty="0"/>
-              <a:t>deals with the collection, analysis, interpretation, and presentation of data</a:t>
-            </a:r>
-          </a:p>
-          <a:p>
-            <a:pPr marL="0" indent="0">
-              <a:buNone/>
-            </a:pPr>
-            <a:r>
-              <a:rPr lang="en-US" sz="2400" b="1" dirty="0"/>
-              <a:t>Data</a:t>
-            </a:r>
-            <a:r>
-              <a:rPr lang="en-US" sz="2400" dirty="0"/>
-              <a:t> is a collection of observations/measurements</a:t>
-            </a:r>
-            <a:endParaRPr lang="en-US" sz="1400" dirty="0"/>
           </a:p>
           <a:p>
             <a:endParaRPr lang="en-US" sz="2400" dirty="0"/>
@@ -10784,7 +11669,7 @@
 </p:sld>
 </file>
 
-<file path=ppt/slides/slide4.xml><?xml version="1.0" encoding="utf-8"?>
+<file path=ppt/slides/slide5.xml><?xml version="1.0" encoding="utf-8"?>
 <p:sld xmlns:a="http://schemas.openxmlformats.org/drawingml/2006/main" xmlns:r="http://schemas.openxmlformats.org/officeDocument/2006/relationships" xmlns:p="http://schemas.openxmlformats.org/presentationml/2006/main">
   <p:cSld>
     <p:spTree>
@@ -10806,6 +11691,2159 @@
           <p:cNvPr id="2" name="Title 1">
             <a:extLst>
               <a:ext uri="{FF2B5EF4-FFF2-40B4-BE49-F238E27FC236}">
+                <a16:creationId xmlns:a16="http://schemas.microsoft.com/office/drawing/2014/main" id="{F41411E5-5072-535E-73ED-CD8B689624BC}"/>
+              </a:ext>
+            </a:extLst>
+          </p:cNvPr>
+          <p:cNvSpPr>
+            <a:spLocks noGrp="1"/>
+          </p:cNvSpPr>
+          <p:nvPr>
+            <p:ph type="title"/>
+          </p:nvPr>
+        </p:nvSpPr>
+        <p:spPr/>
+        <p:txBody>
+          <a:bodyPr/>
+          <a:lstStyle/>
+          <a:p>
+            <a:r>
+              <a:rPr lang="en-US" dirty="0"/>
+              <a:t>The Science of Data</a:t>
+            </a:r>
+          </a:p>
+        </p:txBody>
+      </p:sp>
+      <p:sp>
+        <p:nvSpPr>
+          <p:cNvPr id="3" name="Content Placeholder 2">
+            <a:extLst>
+              <a:ext uri="{FF2B5EF4-FFF2-40B4-BE49-F238E27FC236}">
+                <a16:creationId xmlns:a16="http://schemas.microsoft.com/office/drawing/2014/main" id="{1B2B3378-73EA-CA40-9586-969EA3222400}"/>
+              </a:ext>
+            </a:extLst>
+          </p:cNvPr>
+          <p:cNvSpPr>
+            <a:spLocks noGrp="1"/>
+          </p:cNvSpPr>
+          <p:nvPr>
+            <p:ph idx="1"/>
+          </p:nvPr>
+        </p:nvSpPr>
+        <p:spPr>
+          <a:xfrm>
+            <a:off x="838200" y="1879600"/>
+            <a:ext cx="10515600" cy="1270000"/>
+          </a:xfrm>
+        </p:spPr>
+        <p:txBody>
+          <a:bodyPr>
+            <a:normAutofit/>
+          </a:bodyPr>
+          <a:lstStyle/>
+          <a:p>
+            <a:pPr marL="0" indent="0">
+              <a:buNone/>
+            </a:pPr>
+            <a:r>
+              <a:rPr lang="en-US" sz="2000" b="1" dirty="0"/>
+              <a:t>Statistical science</a:t>
+            </a:r>
+            <a:r>
+              <a:rPr lang="en-US" sz="2000" dirty="0"/>
+              <a:t> deals with the collection, analysis, interpretation, and presentation of data</a:t>
+            </a:r>
+          </a:p>
+          <a:p>
+            <a:pPr marL="0" indent="0">
+              <a:buNone/>
+            </a:pPr>
+            <a:r>
+              <a:rPr lang="en-US" sz="2000" b="1" dirty="0"/>
+              <a:t>Data</a:t>
+            </a:r>
+            <a:r>
+              <a:rPr lang="en-US" sz="2000" dirty="0"/>
+              <a:t> is a collection of observations/measurements, and can be </a:t>
+            </a:r>
+            <a:r>
+              <a:rPr lang="en-US" sz="2000" b="1" dirty="0"/>
+              <a:t>structured</a:t>
+            </a:r>
+            <a:r>
+              <a:rPr lang="en-US" sz="2000" dirty="0"/>
+              <a:t> or </a:t>
+            </a:r>
+            <a:r>
+              <a:rPr lang="en-US" sz="2000" b="1" dirty="0"/>
+              <a:t>unstructured</a:t>
+            </a:r>
+            <a:r>
+              <a:rPr lang="en-US" sz="2000" dirty="0"/>
+              <a:t>.</a:t>
+            </a:r>
+          </a:p>
+        </p:txBody>
+      </p:sp>
+      <p:sp>
+        <p:nvSpPr>
+          <p:cNvPr id="4" name="accent rule">
+            <a:extLst>
+              <a:ext uri="{FF2B5EF4-FFF2-40B4-BE49-F238E27FC236}">
+                <a16:creationId xmlns:a16="http://schemas.microsoft.com/office/drawing/2014/main" id="{B148CBA5-9A48-43AD-B298-220F28585C94}"/>
+              </a:ext>
+            </a:extLst>
+          </p:cNvPr>
+          <p:cNvSpPr/>
+          <p:nvPr/>
+        </p:nvSpPr>
+        <p:spPr>
+          <a:xfrm>
+            <a:off x="838200" y="1701800"/>
+            <a:ext cx="3810000" cy="19050"/>
+          </a:xfrm>
+          <a:prstGeom prst="rect">
+            <a:avLst/>
+          </a:prstGeom>
+          <a:solidFill>
+            <a:srgbClr val="ED7D31"/>
+          </a:solidFill>
+          <a:ln w="12700" cap="flat" cmpd="sng" algn="ctr">
+            <a:noFill/>
+            <a:prstDash val="solid"/>
+            <a:miter lim="800000"/>
+          </a:ln>
+        </p:spPr>
+        <p:style>
+          <a:lnRef idx="2">
+            <a:schemeClr val="accent1">
+              <a:shade val="15000"/>
+            </a:schemeClr>
+          </a:lnRef>
+          <a:fillRef idx="1">
+            <a:schemeClr val="accent1"/>
+          </a:fillRef>
+          <a:effectRef idx="0">
+            <a:schemeClr val="accent1"/>
+          </a:effectRef>
+          <a:fontRef idx="minor">
+            <a:schemeClr val="lt1"/>
+          </a:fontRef>
+        </p:style>
+        <p:txBody>
+          <a:bodyPr vertOverflow="clip" horzOverflow="clip" rtlCol="0" anchor="t"/>
+          <a:lstStyle/>
+          <a:p>
+            <a:pPr algn="l"/>
+            <a:endParaRPr lang="en-US"/>
+          </a:p>
+        </p:txBody>
+      </p:sp>
+      <p:sp>
+        <p:nvSpPr>
+          <p:cNvPr id="5" name="card structured">
+            <a:extLst>
+              <a:ext uri="{FF2B5EF4-FFF2-40B4-BE49-F238E27FC236}">
+                <a16:creationId xmlns:a16="http://schemas.microsoft.com/office/drawing/2014/main" id="{2302DE62-F1D2-4337-BEF8-8094094677B5}"/>
+              </a:ext>
+            </a:extLst>
+          </p:cNvPr>
+          <p:cNvSpPr/>
+          <p:nvPr/>
+        </p:nvSpPr>
+        <p:spPr>
+          <a:xfrm>
+            <a:off x="838200" y="2870200"/>
+            <a:ext cx="5105400" cy="3403600"/>
+          </a:xfrm>
+          <a:prstGeom prst="roundRect">
+            <a:avLst/>
+          </a:prstGeom>
+          <a:solidFill>
+            <a:srgbClr val="FCE6D5"/>
+          </a:solidFill>
+          <a:ln w="12700" cap="flat" cmpd="sng" algn="ctr">
+            <a:noFill/>
+            <a:prstDash val="solid"/>
+            <a:miter lim="800000"/>
+          </a:ln>
+        </p:spPr>
+        <p:style>
+          <a:lnRef idx="2">
+            <a:schemeClr val="accent1">
+              <a:shade val="15000"/>
+            </a:schemeClr>
+          </a:lnRef>
+          <a:fillRef idx="1">
+            <a:schemeClr val="accent1"/>
+          </a:fillRef>
+          <a:effectRef idx="0">
+            <a:schemeClr val="accent1"/>
+          </a:effectRef>
+          <a:fontRef idx="minor">
+            <a:schemeClr val="lt1"/>
+          </a:fontRef>
+        </p:style>
+        <p:txBody>
+          <a:bodyPr wrap="square" lIns="279400" tIns="203200" rIns="254000" bIns="203200" anchor="ctr">
+            <a:noAutofit/>
+          </a:bodyPr>
+          <a:lstStyle/>
+          <a:p>
+            <a:pPr marL="0" indent="0" algn="l">
+              <a:buNone/>
+            </a:pPr>
+            <a:r>
+              <a:rPr lang="en-US" sz="2200" b="1" dirty="0">
+                <a:solidFill>
+                  <a:srgbClr val="C5540F"/>
+                </a:solidFill>
+                <a:latin typeface="Calibri"/>
+              </a:rPr>
+              <a:t>Structured data</a:t>
+            </a:r>
+          </a:p>
+          <a:p>
+            <a:pPr marL="0" indent="0" algn="l">
+              <a:buNone/>
+            </a:pPr>
+            <a:r>
+              <a:rPr lang="en-US" sz="1800" dirty="0">
+                <a:solidFill>
+                  <a:srgbClr val="262626"/>
+                </a:solidFill>
+                <a:latin typeface="Calibri"/>
+              </a:rPr>
+              <a:t>Predefined format: fixed rows, columns and fields, easily stored in databases.</a:t>
+            </a:r>
+          </a:p>
+          <a:p>
+            <a:pPr marL="0" indent="0" algn="l">
+              <a:buNone/>
+            </a:pPr>
+            <a:r>
+              <a:rPr lang="en-US" sz="1800" b="1" dirty="0">
+                <a:solidFill>
+                  <a:srgbClr val="404040"/>
+                </a:solidFill>
+                <a:latin typeface="Calibri"/>
+              </a:rPr>
+              <a:t>Examples:</a:t>
+            </a:r>
+          </a:p>
+          <a:p>
+            <a:pPr marL="190500" indent="-190500" algn="l">
+              <a:lnSpc>
+                <a:spcPct val="100000"/>
+              </a:lnSpc>
+              <a:spcBef>
+                <a:spcPts val="500"/>
+              </a:spcBef>
+              <a:buFont typeface="Arial"/>
+              <a:buChar char="•"/>
+            </a:pPr>
+            <a:r>
+              <a:rPr lang="en-US" sz="1800" dirty="0">
+                <a:solidFill>
+                  <a:srgbClr val="262626"/>
+                </a:solidFill>
+                <a:latin typeface="Calibri"/>
+              </a:rPr>
+              <a:t>Spreadsheets and CSV files</a:t>
+            </a:r>
+          </a:p>
+          <a:p>
+            <a:pPr marL="190500" indent="-190500" algn="l">
+              <a:lnSpc>
+                <a:spcPct val="100000"/>
+              </a:lnSpc>
+              <a:spcBef>
+                <a:spcPts val="500"/>
+              </a:spcBef>
+              <a:buFont typeface="Arial"/>
+              <a:buChar char="•"/>
+            </a:pPr>
+            <a:r>
+              <a:rPr lang="en-US" sz="1800" dirty="0">
+                <a:solidFill>
+                  <a:srgbClr val="262626"/>
+                </a:solidFill>
+                <a:latin typeface="Calibri"/>
+              </a:rPr>
+              <a:t>Survey responses, sensor readings</a:t>
+            </a:r>
+          </a:p>
+          <a:p>
+            <a:pPr marL="190500" indent="-190500" algn="l">
+              <a:lnSpc>
+                <a:spcPct val="100000"/>
+              </a:lnSpc>
+              <a:spcBef>
+                <a:spcPts val="500"/>
+              </a:spcBef>
+              <a:buFont typeface="Arial"/>
+              <a:buChar char="•"/>
+            </a:pPr>
+            <a:r>
+              <a:rPr lang="en-US" sz="1800" dirty="0">
+                <a:solidFill>
+                  <a:srgbClr val="262626"/>
+                </a:solidFill>
+                <a:latin typeface="Calibri"/>
+              </a:rPr>
+              <a:t>Transaction records</a:t>
+            </a:r>
+          </a:p>
+        </p:txBody>
+      </p:sp>
+      <p:sp>
+        <p:nvSpPr>
+          <p:cNvPr id="6" name="card unstructured">
+            <a:extLst>
+              <a:ext uri="{FF2B5EF4-FFF2-40B4-BE49-F238E27FC236}">
+                <a16:creationId xmlns:a16="http://schemas.microsoft.com/office/drawing/2014/main" id="{85C18E51-3723-4863-AE6A-02981E3B781C}"/>
+              </a:ext>
+            </a:extLst>
+          </p:cNvPr>
+          <p:cNvSpPr/>
+          <p:nvPr/>
+        </p:nvSpPr>
+        <p:spPr>
+          <a:xfrm>
+            <a:off x="6248400" y="2870200"/>
+            <a:ext cx="5105400" cy="3403600"/>
+          </a:xfrm>
+          <a:prstGeom prst="roundRect">
+            <a:avLst/>
+          </a:prstGeom>
+          <a:solidFill>
+            <a:srgbClr val="DCE6F5"/>
+          </a:solidFill>
+          <a:ln w="12700" cap="flat" cmpd="sng" algn="ctr">
+            <a:noFill/>
+            <a:prstDash val="solid"/>
+            <a:miter lim="800000"/>
+          </a:ln>
+        </p:spPr>
+        <p:style>
+          <a:lnRef idx="2">
+            <a:schemeClr val="accent1">
+              <a:shade val="15000"/>
+            </a:schemeClr>
+          </a:lnRef>
+          <a:fillRef idx="1">
+            <a:schemeClr val="accent1"/>
+          </a:fillRef>
+          <a:effectRef idx="0">
+            <a:schemeClr val="accent1"/>
+          </a:effectRef>
+          <a:fontRef idx="minor">
+            <a:schemeClr val="lt1"/>
+          </a:fontRef>
+        </p:style>
+        <p:txBody>
+          <a:bodyPr wrap="square" lIns="279400" tIns="203200" rIns="254000" bIns="203200" anchor="ctr">
+            <a:noAutofit/>
+          </a:bodyPr>
+          <a:lstStyle/>
+          <a:p>
+            <a:pPr marL="0" indent="0" algn="l">
+              <a:buNone/>
+            </a:pPr>
+            <a:r>
+              <a:rPr lang="en-US" sz="2200" b="1" dirty="0">
+                <a:solidFill>
+                  <a:srgbClr val="1F3864"/>
+                </a:solidFill>
+                <a:latin typeface="Calibri"/>
+              </a:rPr>
+              <a:t>Unstructured data</a:t>
+            </a:r>
+          </a:p>
+          <a:p>
+            <a:pPr marL="0" indent="0" algn="l">
+              <a:buNone/>
+            </a:pPr>
+            <a:r>
+              <a:rPr lang="en-US" sz="1800" dirty="0">
+                <a:solidFill>
+                  <a:srgbClr val="262626"/>
+                </a:solidFill>
+                <a:latin typeface="Calibri"/>
+              </a:rPr>
+              <a:t>No predefined format or fixed fields; requires processing before it can be analyzed.</a:t>
+            </a:r>
+          </a:p>
+          <a:p>
+            <a:pPr marL="0" indent="0" algn="l">
+              <a:buNone/>
+            </a:pPr>
+            <a:r>
+              <a:rPr lang="en-US" sz="1800" b="1" dirty="0">
+                <a:solidFill>
+                  <a:srgbClr val="404040"/>
+                </a:solidFill>
+                <a:latin typeface="Calibri"/>
+              </a:rPr>
+              <a:t>Examples:</a:t>
+            </a:r>
+          </a:p>
+          <a:p>
+            <a:pPr marL="190500" indent="-190500" algn="l">
+              <a:lnSpc>
+                <a:spcPct val="100000"/>
+              </a:lnSpc>
+              <a:spcBef>
+                <a:spcPts val="500"/>
+              </a:spcBef>
+              <a:buFont typeface="Arial"/>
+              <a:buChar char="•"/>
+            </a:pPr>
+            <a:r>
+              <a:rPr lang="en-US" sz="1800" dirty="0">
+                <a:solidFill>
+                  <a:srgbClr val="262626"/>
+                </a:solidFill>
+                <a:latin typeface="Calibri"/>
+              </a:rPr>
+              <a:t>Free-text notes, emails, social posts</a:t>
+            </a:r>
+          </a:p>
+          <a:p>
+            <a:pPr marL="190500" indent="-190500" algn="l">
+              <a:lnSpc>
+                <a:spcPct val="100000"/>
+              </a:lnSpc>
+              <a:spcBef>
+                <a:spcPts val="500"/>
+              </a:spcBef>
+              <a:buFont typeface="Arial"/>
+              <a:buChar char="•"/>
+            </a:pPr>
+            <a:r>
+              <a:rPr lang="en-US" sz="1800" dirty="0">
+                <a:solidFill>
+                  <a:srgbClr val="262626"/>
+                </a:solidFill>
+                <a:latin typeface="Calibri"/>
+              </a:rPr>
+              <a:t>Images, audio and video</a:t>
+            </a:r>
+          </a:p>
+          <a:p>
+            <a:pPr marL="190500" indent="-190500" algn="l">
+              <a:lnSpc>
+                <a:spcPct val="100000"/>
+              </a:lnSpc>
+              <a:spcBef>
+                <a:spcPts val="500"/>
+              </a:spcBef>
+              <a:buFont typeface="Arial"/>
+              <a:buChar char="•"/>
+            </a:pPr>
+            <a:r>
+              <a:rPr lang="en-US" sz="1800" dirty="0">
+                <a:solidFill>
+                  <a:srgbClr val="262626"/>
+                </a:solidFill>
+                <a:latin typeface="Calibri"/>
+              </a:rPr>
+              <a:t>Web pages and PDF documents</a:t>
+            </a:r>
+          </a:p>
+        </p:txBody>
+      </p:sp>
+    </p:spTree>
+    <p:extLst>
+      <p:ext uri="{BB962C8B-B14F-4D97-AF65-F5344CB8AC3E}">
+        <p14:creationId xmlns:p14="http://schemas.microsoft.com/office/powerpoint/2010/main" val="3108338099"/>
+      </p:ext>
+    </p:extLst>
+  </p:cSld>
+  <p:clrMapOvr>
+    <a:masterClrMapping/>
+  </p:clrMapOvr>
+</p:sld>
+</file>
+
+<file path=ppt/slides/slide6.xml><?xml version="1.0" encoding="utf-8"?>
+<p:sld xmlns:a="http://schemas.openxmlformats.org/drawingml/2006/main" xmlns:r="http://schemas.openxmlformats.org/officeDocument/2006/relationships" xmlns:p="http://schemas.openxmlformats.org/presentationml/2006/main">
+  <p:cSld>
+    <p:spTree>
+      <p:nvGrpSpPr>
+        <p:cNvPr id="1" name=""/>
+        <p:cNvGrpSpPr/>
+        <p:nvPr/>
+      </p:nvGrpSpPr>
+      <p:grpSpPr>
+        <a:xfrm>
+          <a:off x="0" y="0"/>
+          <a:ext cx="0" cy="0"/>
+          <a:chOff x="0" y="0"/>
+          <a:chExt cx="0" cy="0"/>
+        </a:xfrm>
+      </p:grpSpPr>
+      <p:sp>
+        <p:nvSpPr>
+          <p:cNvPr id="2" name="Title 1">
+            <a:extLst>
+              <a:ext uri="{FF2B5EF4-FFF2-40B4-BE49-F238E27FC236}">
+                <a16:creationId xmlns:a16="http://schemas.microsoft.com/office/drawing/2014/main" id="{96380C86-D709-6FB8-5A19-C2314095D583}"/>
+              </a:ext>
+            </a:extLst>
+          </p:cNvPr>
+          <p:cNvSpPr>
+            <a:spLocks noGrp="1"/>
+          </p:cNvSpPr>
+          <p:nvPr>
+            <p:ph type="title"/>
+          </p:nvPr>
+        </p:nvSpPr>
+        <p:spPr>
+          <a:xfrm>
+            <a:off x="357793" y="244076"/>
+            <a:ext cx="10515600" cy="1325563"/>
+          </a:xfrm>
+        </p:spPr>
+        <p:txBody>
+          <a:bodyPr/>
+          <a:lstStyle/>
+          <a:p>
+            <a:r>
+              <a:rPr lang="en-US" dirty="0"/>
+              <a:t>What Do Data Look Like? </a:t>
+            </a:r>
+          </a:p>
+        </p:txBody>
+      </p:sp>
+      <p:sp>
+        <p:nvSpPr>
+          <p:cNvPr id="9" name="Content Placeholder 2">
+            <a:extLst>
+              <a:ext uri="{FF2B5EF4-FFF2-40B4-BE49-F238E27FC236}">
+                <a16:creationId xmlns:a16="http://schemas.microsoft.com/office/drawing/2014/main" id="{A8A8168E-B6BB-3016-EE7E-6E0B94393F37}"/>
+              </a:ext>
+            </a:extLst>
+          </p:cNvPr>
+          <p:cNvSpPr>
+            <a:spLocks noGrp="1"/>
+          </p:cNvSpPr>
+          <p:nvPr>
+            <p:ph idx="1"/>
+          </p:nvPr>
+        </p:nvSpPr>
+        <p:spPr>
+          <a:xfrm>
+            <a:off x="274320" y="1481328"/>
+            <a:ext cx="4016326" cy="1600200"/>
+          </a:xfrm>
+        </p:spPr>
+        <p:txBody>
+          <a:bodyPr>
+            <a:normAutofit fontScale="92500" lnSpcReduction="20000"/>
+          </a:bodyPr>
+          <a:lstStyle/>
+          <a:p>
+            <a:pPr marL="0" indent="0">
+              <a:buNone/>
+            </a:pPr>
+            <a:r>
+              <a:rPr lang="en-US" sz="2000" dirty="0"/>
+              <a:t>The following table records sales of child car seats from 20 stores. For each store, the unit sales, price charged, community income, regional population, local education level, shelving quality, and whether the store is urban and in the U.S. are recorded</a:t>
+            </a:r>
+          </a:p>
+        </p:txBody>
+      </p:sp>
+      <p:pic>
+        <p:nvPicPr>
+          <p:cNvPr id="10" name="Picture 9" descr="carseats_table.png"/>
+          <p:cNvPicPr>
+            <a:picLocks noChangeAspect="1"/>
+          </p:cNvPicPr>
+          <p:nvPr/>
+        </p:nvPicPr>
+        <p:blipFill>
+          <a:blip r:embed="rId2"/>
+          <a:stretch>
+            <a:fillRect/>
+          </a:stretch>
+        </p:blipFill>
+        <p:spPr>
+          <a:xfrm>
+            <a:off x="5138928" y="1389888"/>
+            <a:ext cx="7026420" cy="4428108"/>
+          </a:xfrm>
+          <a:prstGeom prst="rect">
+            <a:avLst/>
+          </a:prstGeom>
+        </p:spPr>
+      </p:pic>
+      <p:sp>
+        <p:nvSpPr>
+          <p:cNvPr id="11" name="TextBox 10"/>
+          <p:cNvSpPr txBox="1"/>
+          <p:nvPr/>
+        </p:nvSpPr>
+        <p:spPr>
+          <a:xfrm>
+            <a:off x="365760" y="3218688"/>
+            <a:ext cx="4663440" cy="274320"/>
+          </a:xfrm>
+          <a:prstGeom prst="rect">
+            <a:avLst/>
+          </a:prstGeom>
+          <a:noFill/>
+        </p:spPr>
+        <p:txBody>
+          <a:bodyPr wrap="square" lIns="0" tIns="0" rIns="0" bIns="0" anchor="t">
+            <a:spAutoFit/>
+          </a:bodyPr>
+          <a:lstStyle/>
+          <a:p>
+            <a:pPr algn="l">
+              <a:spcAft>
+                <a:spcPts val="0"/>
+              </a:spcAft>
+            </a:pPr>
+            <a:r>
+              <a:rPr sz="1500" b="1">
+                <a:solidFill>
+                  <a:srgbClr val="000000"/>
+                </a:solidFill>
+                <a:latin typeface="Calibri"/>
+              </a:rPr>
+              <a:t>Reading a data table</a:t>
+            </a:r>
+          </a:p>
+        </p:txBody>
+      </p:sp>
+      <p:sp>
+        <p:nvSpPr>
+          <p:cNvPr id="12" name="TextBox 11"/>
+          <p:cNvSpPr txBox="1"/>
+          <p:nvPr/>
+        </p:nvSpPr>
+        <p:spPr>
+          <a:xfrm>
+            <a:off x="365760" y="3584448"/>
+            <a:ext cx="4663440" cy="237744"/>
+          </a:xfrm>
+          <a:prstGeom prst="rect">
+            <a:avLst/>
+          </a:prstGeom>
+          <a:noFill/>
+        </p:spPr>
+        <p:txBody>
+          <a:bodyPr wrap="square" lIns="0" tIns="0" rIns="0" bIns="0" anchor="t">
+            <a:spAutoFit/>
+          </a:bodyPr>
+          <a:lstStyle/>
+          <a:p>
+            <a:pPr algn="l">
+              <a:spcAft>
+                <a:spcPts val="0"/>
+              </a:spcAft>
+            </a:pPr>
+            <a:r>
+              <a:rPr sz="1150" b="1">
+                <a:solidFill>
+                  <a:srgbClr val="C5540F"/>
+                </a:solidFill>
+                <a:latin typeface="Calibri"/>
+              </a:rPr>
+              <a:t>Each column is a variable</a:t>
+            </a:r>
+          </a:p>
+        </p:txBody>
+      </p:sp>
+      <p:sp>
+        <p:nvSpPr>
+          <p:cNvPr id="13" name="Rectangle 12"/>
+          <p:cNvSpPr/>
+          <p:nvPr/>
+        </p:nvSpPr>
+        <p:spPr>
+          <a:xfrm>
+            <a:off x="365760" y="3950208"/>
+            <a:ext cx="896112" cy="256032"/>
+          </a:xfrm>
+          <a:prstGeom prst="rect">
+            <a:avLst/>
+          </a:prstGeom>
+          <a:solidFill>
+            <a:srgbClr val="EFEFEF"/>
+          </a:solidFill>
+          <a:ln w="9525">
+            <a:solidFill>
+              <a:srgbClr val="BFBFBF"/>
+            </a:solidFill>
+          </a:ln>
+          <a:effectLst/>
+        </p:spPr>
+        <p:style>
+          <a:lnRef idx="1">
+            <a:schemeClr val="accent1"/>
+          </a:lnRef>
+          <a:fillRef idx="3">
+            <a:schemeClr val="accent1"/>
+          </a:fillRef>
+          <a:effectRef idx="2">
+            <a:schemeClr val="accent1"/>
+          </a:effectRef>
+          <a:fontRef idx="minor">
+            <a:schemeClr val="lt1"/>
+          </a:fontRef>
+        </p:style>
+        <p:txBody>
+          <a:bodyPr wrap="square" lIns="27432" tIns="0" rIns="27432" bIns="0" rtlCol="0" anchor="ctr"/>
+          <a:lstStyle/>
+          <a:p>
+            <a:pPr algn="ctr"/>
+            <a:r>
+              <a:rPr sz="850" b="1">
+                <a:solidFill>
+                  <a:srgbClr val="404040"/>
+                </a:solidFill>
+                <a:latin typeface="Calibri"/>
+              </a:rPr>
+              <a:t>Sales</a:t>
+            </a:r>
+          </a:p>
+        </p:txBody>
+      </p:sp>
+      <p:sp>
+        <p:nvSpPr>
+          <p:cNvPr id="14" name="Rectangle 13"/>
+          <p:cNvSpPr/>
+          <p:nvPr/>
+        </p:nvSpPr>
+        <p:spPr>
+          <a:xfrm>
+            <a:off x="1261872" y="3950208"/>
+            <a:ext cx="896112" cy="256032"/>
+          </a:xfrm>
+          <a:prstGeom prst="rect">
+            <a:avLst/>
+          </a:prstGeom>
+          <a:solidFill>
+            <a:srgbClr val="FCE6D5"/>
+          </a:solidFill>
+          <a:ln w="9525">
+            <a:solidFill>
+              <a:srgbClr val="BFBFBF"/>
+            </a:solidFill>
+          </a:ln>
+          <a:effectLst/>
+        </p:spPr>
+        <p:style>
+          <a:lnRef idx="1">
+            <a:schemeClr val="accent1"/>
+          </a:lnRef>
+          <a:fillRef idx="3">
+            <a:schemeClr val="accent1"/>
+          </a:fillRef>
+          <a:effectRef idx="2">
+            <a:schemeClr val="accent1"/>
+          </a:effectRef>
+          <a:fontRef idx="minor">
+            <a:schemeClr val="lt1"/>
+          </a:fontRef>
+        </p:style>
+        <p:txBody>
+          <a:bodyPr wrap="square" lIns="27432" tIns="0" rIns="27432" bIns="0" rtlCol="0" anchor="ctr"/>
+          <a:lstStyle/>
+          <a:p>
+            <a:pPr algn="ctr"/>
+            <a:r>
+              <a:rPr sz="850" b="1">
+                <a:solidFill>
+                  <a:srgbClr val="C5540F"/>
+                </a:solidFill>
+                <a:latin typeface="Calibri"/>
+              </a:rPr>
+              <a:t>Price</a:t>
+            </a:r>
+          </a:p>
+        </p:txBody>
+      </p:sp>
+      <p:sp>
+        <p:nvSpPr>
+          <p:cNvPr id="15" name="Rectangle 14"/>
+          <p:cNvSpPr/>
+          <p:nvPr/>
+        </p:nvSpPr>
+        <p:spPr>
+          <a:xfrm>
+            <a:off x="2157984" y="3950208"/>
+            <a:ext cx="896112" cy="256032"/>
+          </a:xfrm>
+          <a:prstGeom prst="rect">
+            <a:avLst/>
+          </a:prstGeom>
+          <a:solidFill>
+            <a:srgbClr val="EFEFEF"/>
+          </a:solidFill>
+          <a:ln w="9525">
+            <a:solidFill>
+              <a:srgbClr val="BFBFBF"/>
+            </a:solidFill>
+          </a:ln>
+          <a:effectLst/>
+        </p:spPr>
+        <p:style>
+          <a:lnRef idx="1">
+            <a:schemeClr val="accent1"/>
+          </a:lnRef>
+          <a:fillRef idx="3">
+            <a:schemeClr val="accent1"/>
+          </a:fillRef>
+          <a:effectRef idx="2">
+            <a:schemeClr val="accent1"/>
+          </a:effectRef>
+          <a:fontRef idx="minor">
+            <a:schemeClr val="lt1"/>
+          </a:fontRef>
+        </p:style>
+        <p:txBody>
+          <a:bodyPr wrap="square" lIns="27432" tIns="0" rIns="27432" bIns="0" rtlCol="0" anchor="ctr"/>
+          <a:lstStyle/>
+          <a:p>
+            <a:pPr algn="ctr"/>
+            <a:r>
+              <a:rPr sz="850" b="1">
+                <a:solidFill>
+                  <a:srgbClr val="404040"/>
+                </a:solidFill>
+                <a:latin typeface="Calibri"/>
+              </a:rPr>
+              <a:t>Income</a:t>
+            </a:r>
+          </a:p>
+        </p:txBody>
+      </p:sp>
+      <p:sp>
+        <p:nvSpPr>
+          <p:cNvPr id="16" name="Rectangle 15"/>
+          <p:cNvSpPr/>
+          <p:nvPr/>
+        </p:nvSpPr>
+        <p:spPr>
+          <a:xfrm>
+            <a:off x="3054096" y="3950208"/>
+            <a:ext cx="896112" cy="256032"/>
+          </a:xfrm>
+          <a:prstGeom prst="rect">
+            <a:avLst/>
+          </a:prstGeom>
+          <a:solidFill>
+            <a:srgbClr val="EFEFEF"/>
+          </a:solidFill>
+          <a:ln w="9525">
+            <a:solidFill>
+              <a:srgbClr val="BFBFBF"/>
+            </a:solidFill>
+          </a:ln>
+          <a:effectLst/>
+        </p:spPr>
+        <p:style>
+          <a:lnRef idx="1">
+            <a:schemeClr val="accent1"/>
+          </a:lnRef>
+          <a:fillRef idx="3">
+            <a:schemeClr val="accent1"/>
+          </a:fillRef>
+          <a:effectRef idx="2">
+            <a:schemeClr val="accent1"/>
+          </a:effectRef>
+          <a:fontRef idx="minor">
+            <a:schemeClr val="lt1"/>
+          </a:fontRef>
+        </p:style>
+        <p:txBody>
+          <a:bodyPr wrap="square" lIns="27432" tIns="0" rIns="27432" bIns="0" rtlCol="0" anchor="ctr"/>
+          <a:lstStyle/>
+          <a:p>
+            <a:pPr algn="ctr"/>
+            <a:r>
+              <a:rPr sz="850" b="1">
+                <a:solidFill>
+                  <a:srgbClr val="404040"/>
+                </a:solidFill>
+                <a:latin typeface="Calibri"/>
+              </a:rPr>
+              <a:t>ShelveLoc</a:t>
+            </a:r>
+          </a:p>
+        </p:txBody>
+      </p:sp>
+      <p:sp>
+        <p:nvSpPr>
+          <p:cNvPr id="17" name="Rectangle 16"/>
+          <p:cNvSpPr/>
+          <p:nvPr/>
+        </p:nvSpPr>
+        <p:spPr>
+          <a:xfrm>
+            <a:off x="3950208" y="3950208"/>
+            <a:ext cx="896112" cy="256032"/>
+          </a:xfrm>
+          <a:prstGeom prst="rect">
+            <a:avLst/>
+          </a:prstGeom>
+          <a:solidFill>
+            <a:srgbClr val="EFEFEF"/>
+          </a:solidFill>
+          <a:ln w="9525">
+            <a:solidFill>
+              <a:srgbClr val="BFBFBF"/>
+            </a:solidFill>
+          </a:ln>
+          <a:effectLst/>
+        </p:spPr>
+        <p:style>
+          <a:lnRef idx="1">
+            <a:schemeClr val="accent1"/>
+          </a:lnRef>
+          <a:fillRef idx="3">
+            <a:schemeClr val="accent1"/>
+          </a:fillRef>
+          <a:effectRef idx="2">
+            <a:schemeClr val="accent1"/>
+          </a:effectRef>
+          <a:fontRef idx="minor">
+            <a:schemeClr val="lt1"/>
+          </a:fontRef>
+        </p:style>
+        <p:txBody>
+          <a:bodyPr wrap="square" lIns="27432" tIns="0" rIns="27432" bIns="0" rtlCol="0" anchor="ctr"/>
+          <a:lstStyle/>
+          <a:p>
+            <a:pPr algn="ctr"/>
+            <a:r>
+              <a:rPr sz="850" b="1">
+                <a:solidFill>
+                  <a:srgbClr val="404040"/>
+                </a:solidFill>
+                <a:latin typeface="Calibri"/>
+              </a:rPr>
+              <a:t>Urban</a:t>
+            </a:r>
+          </a:p>
+        </p:txBody>
+      </p:sp>
+      <p:sp>
+        <p:nvSpPr>
+          <p:cNvPr id="18" name="Rectangle 17"/>
+          <p:cNvSpPr/>
+          <p:nvPr/>
+        </p:nvSpPr>
+        <p:spPr>
+          <a:xfrm>
+            <a:off x="365760" y="4206240"/>
+            <a:ext cx="896112" cy="256032"/>
+          </a:xfrm>
+          <a:prstGeom prst="rect">
+            <a:avLst/>
+          </a:prstGeom>
+          <a:solidFill>
+            <a:srgbClr val="FFFFFF"/>
+          </a:solidFill>
+          <a:ln w="9525">
+            <a:solidFill>
+              <a:srgbClr val="BFBFBF"/>
+            </a:solidFill>
+          </a:ln>
+          <a:effectLst/>
+        </p:spPr>
+        <p:style>
+          <a:lnRef idx="1">
+            <a:schemeClr val="accent1"/>
+          </a:lnRef>
+          <a:fillRef idx="3">
+            <a:schemeClr val="accent1"/>
+          </a:fillRef>
+          <a:effectRef idx="2">
+            <a:schemeClr val="accent1"/>
+          </a:effectRef>
+          <a:fontRef idx="minor">
+            <a:schemeClr val="lt1"/>
+          </a:fontRef>
+        </p:style>
+        <p:txBody>
+          <a:bodyPr wrap="square" lIns="27432" tIns="0" rIns="27432" bIns="0" rtlCol="0" anchor="ctr"/>
+          <a:lstStyle/>
+          <a:p>
+            <a:pPr algn="ctr"/>
+            <a:r>
+              <a:rPr sz="850" b="0">
+                <a:solidFill>
+                  <a:srgbClr val="262626"/>
+                </a:solidFill>
+                <a:latin typeface="Calibri"/>
+              </a:rPr>
+              <a:t>4.38</a:t>
+            </a:r>
+          </a:p>
+        </p:txBody>
+      </p:sp>
+      <p:sp>
+        <p:nvSpPr>
+          <p:cNvPr id="19" name="Rectangle 18"/>
+          <p:cNvSpPr/>
+          <p:nvPr/>
+        </p:nvSpPr>
+        <p:spPr>
+          <a:xfrm>
+            <a:off x="1261872" y="4206240"/>
+            <a:ext cx="896112" cy="256032"/>
+          </a:xfrm>
+          <a:prstGeom prst="rect">
+            <a:avLst/>
+          </a:prstGeom>
+          <a:solidFill>
+            <a:srgbClr val="FCE6D5"/>
+          </a:solidFill>
+          <a:ln w="9525">
+            <a:solidFill>
+              <a:srgbClr val="BFBFBF"/>
+            </a:solidFill>
+          </a:ln>
+          <a:effectLst/>
+        </p:spPr>
+        <p:style>
+          <a:lnRef idx="1">
+            <a:schemeClr val="accent1"/>
+          </a:lnRef>
+          <a:fillRef idx="3">
+            <a:schemeClr val="accent1"/>
+          </a:fillRef>
+          <a:effectRef idx="2">
+            <a:schemeClr val="accent1"/>
+          </a:effectRef>
+          <a:fontRef idx="minor">
+            <a:schemeClr val="lt1"/>
+          </a:fontRef>
+        </p:style>
+        <p:txBody>
+          <a:bodyPr wrap="square" lIns="27432" tIns="0" rIns="27432" bIns="0" rtlCol="0" anchor="ctr"/>
+          <a:lstStyle/>
+          <a:p>
+            <a:pPr algn="ctr"/>
+            <a:r>
+              <a:rPr sz="850" b="0">
+                <a:solidFill>
+                  <a:srgbClr val="262626"/>
+                </a:solidFill>
+                <a:latin typeface="Calibri"/>
+              </a:rPr>
+              <a:t>108</a:t>
+            </a:r>
+          </a:p>
+        </p:txBody>
+      </p:sp>
+      <p:sp>
+        <p:nvSpPr>
+          <p:cNvPr id="20" name="Rectangle 19"/>
+          <p:cNvSpPr/>
+          <p:nvPr/>
+        </p:nvSpPr>
+        <p:spPr>
+          <a:xfrm>
+            <a:off x="2157984" y="4206240"/>
+            <a:ext cx="896112" cy="256032"/>
+          </a:xfrm>
+          <a:prstGeom prst="rect">
+            <a:avLst/>
+          </a:prstGeom>
+          <a:solidFill>
+            <a:srgbClr val="FFFFFF"/>
+          </a:solidFill>
+          <a:ln w="9525">
+            <a:solidFill>
+              <a:srgbClr val="BFBFBF"/>
+            </a:solidFill>
+          </a:ln>
+          <a:effectLst/>
+        </p:spPr>
+        <p:style>
+          <a:lnRef idx="1">
+            <a:schemeClr val="accent1"/>
+          </a:lnRef>
+          <a:fillRef idx="3">
+            <a:schemeClr val="accent1"/>
+          </a:fillRef>
+          <a:effectRef idx="2">
+            <a:schemeClr val="accent1"/>
+          </a:effectRef>
+          <a:fontRef idx="minor">
+            <a:schemeClr val="lt1"/>
+          </a:fontRef>
+        </p:style>
+        <p:txBody>
+          <a:bodyPr wrap="square" lIns="27432" tIns="0" rIns="27432" bIns="0" rtlCol="0" anchor="ctr"/>
+          <a:lstStyle/>
+          <a:p>
+            <a:pPr algn="ctr"/>
+            <a:r>
+              <a:rPr sz="850" b="0">
+                <a:solidFill>
+                  <a:srgbClr val="262626"/>
+                </a:solidFill>
+                <a:latin typeface="Calibri"/>
+              </a:rPr>
+              <a:t>98</a:t>
+            </a:r>
+          </a:p>
+        </p:txBody>
+      </p:sp>
+      <p:sp>
+        <p:nvSpPr>
+          <p:cNvPr id="21" name="Rectangle 20"/>
+          <p:cNvSpPr/>
+          <p:nvPr/>
+        </p:nvSpPr>
+        <p:spPr>
+          <a:xfrm>
+            <a:off x="3054096" y="4206240"/>
+            <a:ext cx="896112" cy="256032"/>
+          </a:xfrm>
+          <a:prstGeom prst="rect">
+            <a:avLst/>
+          </a:prstGeom>
+          <a:solidFill>
+            <a:srgbClr val="FFFFFF"/>
+          </a:solidFill>
+          <a:ln w="9525">
+            <a:solidFill>
+              <a:srgbClr val="BFBFBF"/>
+            </a:solidFill>
+          </a:ln>
+          <a:effectLst/>
+        </p:spPr>
+        <p:style>
+          <a:lnRef idx="1">
+            <a:schemeClr val="accent1"/>
+          </a:lnRef>
+          <a:fillRef idx="3">
+            <a:schemeClr val="accent1"/>
+          </a:fillRef>
+          <a:effectRef idx="2">
+            <a:schemeClr val="accent1"/>
+          </a:effectRef>
+          <a:fontRef idx="minor">
+            <a:schemeClr val="lt1"/>
+          </a:fontRef>
+        </p:style>
+        <p:txBody>
+          <a:bodyPr wrap="square" lIns="27432" tIns="0" rIns="27432" bIns="0" rtlCol="0" anchor="ctr"/>
+          <a:lstStyle/>
+          <a:p>
+            <a:pPr algn="ctr"/>
+            <a:r>
+              <a:rPr sz="850" b="0">
+                <a:solidFill>
+                  <a:srgbClr val="262626"/>
+                </a:solidFill>
+                <a:latin typeface="Calibri"/>
+              </a:rPr>
+              <a:t>Bad</a:t>
+            </a:r>
+          </a:p>
+        </p:txBody>
+      </p:sp>
+      <p:sp>
+        <p:nvSpPr>
+          <p:cNvPr id="22" name="Rectangle 21"/>
+          <p:cNvSpPr/>
+          <p:nvPr/>
+        </p:nvSpPr>
+        <p:spPr>
+          <a:xfrm>
+            <a:off x="3950208" y="4206240"/>
+            <a:ext cx="896112" cy="256032"/>
+          </a:xfrm>
+          <a:prstGeom prst="rect">
+            <a:avLst/>
+          </a:prstGeom>
+          <a:solidFill>
+            <a:srgbClr val="FFFFFF"/>
+          </a:solidFill>
+          <a:ln w="9525">
+            <a:solidFill>
+              <a:srgbClr val="BFBFBF"/>
+            </a:solidFill>
+          </a:ln>
+          <a:effectLst/>
+        </p:spPr>
+        <p:style>
+          <a:lnRef idx="1">
+            <a:schemeClr val="accent1"/>
+          </a:lnRef>
+          <a:fillRef idx="3">
+            <a:schemeClr val="accent1"/>
+          </a:fillRef>
+          <a:effectRef idx="2">
+            <a:schemeClr val="accent1"/>
+          </a:effectRef>
+          <a:fontRef idx="minor">
+            <a:schemeClr val="lt1"/>
+          </a:fontRef>
+        </p:style>
+        <p:txBody>
+          <a:bodyPr wrap="square" lIns="27432" tIns="0" rIns="27432" bIns="0" rtlCol="0" anchor="ctr"/>
+          <a:lstStyle/>
+          <a:p>
+            <a:pPr algn="ctr"/>
+            <a:r>
+              <a:rPr sz="850" b="0">
+                <a:solidFill>
+                  <a:srgbClr val="262626"/>
+                </a:solidFill>
+                <a:latin typeface="Calibri"/>
+              </a:rPr>
+              <a:t>Yes</a:t>
+            </a:r>
+          </a:p>
+        </p:txBody>
+      </p:sp>
+      <p:sp>
+        <p:nvSpPr>
+          <p:cNvPr id="23" name="Rectangle 22"/>
+          <p:cNvSpPr/>
+          <p:nvPr/>
+        </p:nvSpPr>
+        <p:spPr>
+          <a:xfrm>
+            <a:off x="365760" y="4462272"/>
+            <a:ext cx="896112" cy="256032"/>
+          </a:xfrm>
+          <a:prstGeom prst="rect">
+            <a:avLst/>
+          </a:prstGeom>
+          <a:solidFill>
+            <a:srgbClr val="FFFFFF"/>
+          </a:solidFill>
+          <a:ln w="9525">
+            <a:solidFill>
+              <a:srgbClr val="BFBFBF"/>
+            </a:solidFill>
+          </a:ln>
+          <a:effectLst/>
+        </p:spPr>
+        <p:style>
+          <a:lnRef idx="1">
+            <a:schemeClr val="accent1"/>
+          </a:lnRef>
+          <a:fillRef idx="3">
+            <a:schemeClr val="accent1"/>
+          </a:fillRef>
+          <a:effectRef idx="2">
+            <a:schemeClr val="accent1"/>
+          </a:effectRef>
+          <a:fontRef idx="minor">
+            <a:schemeClr val="lt1"/>
+          </a:fontRef>
+        </p:style>
+        <p:txBody>
+          <a:bodyPr wrap="square" lIns="27432" tIns="0" rIns="27432" bIns="0" rtlCol="0" anchor="ctr"/>
+          <a:lstStyle/>
+          <a:p>
+            <a:pPr algn="ctr"/>
+            <a:r>
+              <a:rPr sz="850" b="0">
+                <a:solidFill>
+                  <a:srgbClr val="262626"/>
+                </a:solidFill>
+                <a:latin typeface="Calibri"/>
+              </a:rPr>
+              <a:t>11.62</a:t>
+            </a:r>
+          </a:p>
+        </p:txBody>
+      </p:sp>
+      <p:sp>
+        <p:nvSpPr>
+          <p:cNvPr id="24" name="Rectangle 23"/>
+          <p:cNvSpPr/>
+          <p:nvPr/>
+        </p:nvSpPr>
+        <p:spPr>
+          <a:xfrm>
+            <a:off x="1261872" y="4462272"/>
+            <a:ext cx="896112" cy="256032"/>
+          </a:xfrm>
+          <a:prstGeom prst="rect">
+            <a:avLst/>
+          </a:prstGeom>
+          <a:solidFill>
+            <a:srgbClr val="FCE6D5"/>
+          </a:solidFill>
+          <a:ln w="9525">
+            <a:solidFill>
+              <a:srgbClr val="BFBFBF"/>
+            </a:solidFill>
+          </a:ln>
+          <a:effectLst/>
+        </p:spPr>
+        <p:style>
+          <a:lnRef idx="1">
+            <a:schemeClr val="accent1"/>
+          </a:lnRef>
+          <a:fillRef idx="3">
+            <a:schemeClr val="accent1"/>
+          </a:fillRef>
+          <a:effectRef idx="2">
+            <a:schemeClr val="accent1"/>
+          </a:effectRef>
+          <a:fontRef idx="minor">
+            <a:schemeClr val="lt1"/>
+          </a:fontRef>
+        </p:style>
+        <p:txBody>
+          <a:bodyPr wrap="square" lIns="27432" tIns="0" rIns="27432" bIns="0" rtlCol="0" anchor="ctr"/>
+          <a:lstStyle/>
+          <a:p>
+            <a:pPr algn="ctr"/>
+            <a:r>
+              <a:rPr sz="850" b="0">
+                <a:solidFill>
+                  <a:srgbClr val="262626"/>
+                </a:solidFill>
+                <a:latin typeface="Calibri"/>
+              </a:rPr>
+              <a:t>139</a:t>
+            </a:r>
+          </a:p>
+        </p:txBody>
+      </p:sp>
+      <p:sp>
+        <p:nvSpPr>
+          <p:cNvPr id="25" name="Rectangle 24"/>
+          <p:cNvSpPr/>
+          <p:nvPr/>
+        </p:nvSpPr>
+        <p:spPr>
+          <a:xfrm>
+            <a:off x="2157984" y="4462272"/>
+            <a:ext cx="896112" cy="256032"/>
+          </a:xfrm>
+          <a:prstGeom prst="rect">
+            <a:avLst/>
+          </a:prstGeom>
+          <a:solidFill>
+            <a:srgbClr val="FFFFFF"/>
+          </a:solidFill>
+          <a:ln w="9525">
+            <a:solidFill>
+              <a:srgbClr val="BFBFBF"/>
+            </a:solidFill>
+          </a:ln>
+          <a:effectLst/>
+        </p:spPr>
+        <p:style>
+          <a:lnRef idx="1">
+            <a:schemeClr val="accent1"/>
+          </a:lnRef>
+          <a:fillRef idx="3">
+            <a:schemeClr val="accent1"/>
+          </a:fillRef>
+          <a:effectRef idx="2">
+            <a:schemeClr val="accent1"/>
+          </a:effectRef>
+          <a:fontRef idx="minor">
+            <a:schemeClr val="lt1"/>
+          </a:fontRef>
+        </p:style>
+        <p:txBody>
+          <a:bodyPr wrap="square" lIns="27432" tIns="0" rIns="27432" bIns="0" rtlCol="0" anchor="ctr"/>
+          <a:lstStyle/>
+          <a:p>
+            <a:pPr algn="ctr"/>
+            <a:r>
+              <a:rPr sz="850" b="0">
+                <a:solidFill>
+                  <a:srgbClr val="262626"/>
+                </a:solidFill>
+                <a:latin typeface="Calibri"/>
+              </a:rPr>
+              <a:t>83</a:t>
+            </a:r>
+          </a:p>
+        </p:txBody>
+      </p:sp>
+      <p:sp>
+        <p:nvSpPr>
+          <p:cNvPr id="26" name="Rectangle 25"/>
+          <p:cNvSpPr/>
+          <p:nvPr/>
+        </p:nvSpPr>
+        <p:spPr>
+          <a:xfrm>
+            <a:off x="3054096" y="4462272"/>
+            <a:ext cx="896112" cy="256032"/>
+          </a:xfrm>
+          <a:prstGeom prst="rect">
+            <a:avLst/>
+          </a:prstGeom>
+          <a:solidFill>
+            <a:srgbClr val="FFFFFF"/>
+          </a:solidFill>
+          <a:ln w="9525">
+            <a:solidFill>
+              <a:srgbClr val="BFBFBF"/>
+            </a:solidFill>
+          </a:ln>
+          <a:effectLst/>
+        </p:spPr>
+        <p:style>
+          <a:lnRef idx="1">
+            <a:schemeClr val="accent1"/>
+          </a:lnRef>
+          <a:fillRef idx="3">
+            <a:schemeClr val="accent1"/>
+          </a:fillRef>
+          <a:effectRef idx="2">
+            <a:schemeClr val="accent1"/>
+          </a:effectRef>
+          <a:fontRef idx="minor">
+            <a:schemeClr val="lt1"/>
+          </a:fontRef>
+        </p:style>
+        <p:txBody>
+          <a:bodyPr wrap="square" lIns="27432" tIns="0" rIns="27432" bIns="0" rtlCol="0" anchor="ctr"/>
+          <a:lstStyle/>
+          <a:p>
+            <a:pPr algn="ctr"/>
+            <a:r>
+              <a:rPr sz="850" b="0">
+                <a:solidFill>
+                  <a:srgbClr val="262626"/>
+                </a:solidFill>
+                <a:latin typeface="Calibri"/>
+              </a:rPr>
+              <a:t>Good</a:t>
+            </a:r>
+          </a:p>
+        </p:txBody>
+      </p:sp>
+      <p:sp>
+        <p:nvSpPr>
+          <p:cNvPr id="27" name="Rectangle 26"/>
+          <p:cNvSpPr/>
+          <p:nvPr/>
+        </p:nvSpPr>
+        <p:spPr>
+          <a:xfrm>
+            <a:off x="3950208" y="4462272"/>
+            <a:ext cx="896112" cy="256032"/>
+          </a:xfrm>
+          <a:prstGeom prst="rect">
+            <a:avLst/>
+          </a:prstGeom>
+          <a:solidFill>
+            <a:srgbClr val="FFFFFF"/>
+          </a:solidFill>
+          <a:ln w="9525">
+            <a:solidFill>
+              <a:srgbClr val="BFBFBF"/>
+            </a:solidFill>
+          </a:ln>
+          <a:effectLst/>
+        </p:spPr>
+        <p:style>
+          <a:lnRef idx="1">
+            <a:schemeClr val="accent1"/>
+          </a:lnRef>
+          <a:fillRef idx="3">
+            <a:schemeClr val="accent1"/>
+          </a:fillRef>
+          <a:effectRef idx="2">
+            <a:schemeClr val="accent1"/>
+          </a:effectRef>
+          <a:fontRef idx="minor">
+            <a:schemeClr val="lt1"/>
+          </a:fontRef>
+        </p:style>
+        <p:txBody>
+          <a:bodyPr wrap="square" lIns="27432" tIns="0" rIns="27432" bIns="0" rtlCol="0" anchor="ctr"/>
+          <a:lstStyle/>
+          <a:p>
+            <a:pPr algn="ctr"/>
+            <a:r>
+              <a:rPr sz="850" b="0">
+                <a:solidFill>
+                  <a:srgbClr val="262626"/>
+                </a:solidFill>
+                <a:latin typeface="Calibri"/>
+              </a:rPr>
+              <a:t>Yes</a:t>
+            </a:r>
+          </a:p>
+        </p:txBody>
+      </p:sp>
+      <p:sp>
+        <p:nvSpPr>
+          <p:cNvPr id="28" name="Rectangle 27"/>
+          <p:cNvSpPr/>
+          <p:nvPr/>
+        </p:nvSpPr>
+        <p:spPr>
+          <a:xfrm>
+            <a:off x="365760" y="4718304"/>
+            <a:ext cx="896112" cy="256032"/>
+          </a:xfrm>
+          <a:prstGeom prst="rect">
+            <a:avLst/>
+          </a:prstGeom>
+          <a:solidFill>
+            <a:srgbClr val="DCE6F5"/>
+          </a:solidFill>
+          <a:ln w="9525">
+            <a:solidFill>
+              <a:srgbClr val="BFBFBF"/>
+            </a:solidFill>
+          </a:ln>
+          <a:effectLst/>
+        </p:spPr>
+        <p:style>
+          <a:lnRef idx="1">
+            <a:schemeClr val="accent1"/>
+          </a:lnRef>
+          <a:fillRef idx="3">
+            <a:schemeClr val="accent1"/>
+          </a:fillRef>
+          <a:effectRef idx="2">
+            <a:schemeClr val="accent1"/>
+          </a:effectRef>
+          <a:fontRef idx="minor">
+            <a:schemeClr val="lt1"/>
+          </a:fontRef>
+        </p:style>
+        <p:txBody>
+          <a:bodyPr wrap="square" lIns="27432" tIns="0" rIns="27432" bIns="0" rtlCol="0" anchor="ctr"/>
+          <a:lstStyle/>
+          <a:p>
+            <a:pPr algn="ctr"/>
+            <a:r>
+              <a:rPr sz="850" b="0">
+                <a:solidFill>
+                  <a:srgbClr val="262626"/>
+                </a:solidFill>
+                <a:latin typeface="Calibri"/>
+              </a:rPr>
+              <a:t>5.07</a:t>
+            </a:r>
+          </a:p>
+        </p:txBody>
+      </p:sp>
+      <p:sp>
+        <p:nvSpPr>
+          <p:cNvPr id="29" name="Rectangle 28"/>
+          <p:cNvSpPr/>
+          <p:nvPr/>
+        </p:nvSpPr>
+        <p:spPr>
+          <a:xfrm>
+            <a:off x="1261872" y="4718304"/>
+            <a:ext cx="896112" cy="256032"/>
+          </a:xfrm>
+          <a:prstGeom prst="rect">
+            <a:avLst/>
+          </a:prstGeom>
+          <a:solidFill>
+            <a:srgbClr val="DCE6F5"/>
+          </a:solidFill>
+          <a:ln w="9525">
+            <a:solidFill>
+              <a:srgbClr val="BFBFBF"/>
+            </a:solidFill>
+          </a:ln>
+          <a:effectLst/>
+        </p:spPr>
+        <p:style>
+          <a:lnRef idx="1">
+            <a:schemeClr val="accent1"/>
+          </a:lnRef>
+          <a:fillRef idx="3">
+            <a:schemeClr val="accent1"/>
+          </a:fillRef>
+          <a:effectRef idx="2">
+            <a:schemeClr val="accent1"/>
+          </a:effectRef>
+          <a:fontRef idx="minor">
+            <a:schemeClr val="lt1"/>
+          </a:fontRef>
+        </p:style>
+        <p:txBody>
+          <a:bodyPr wrap="square" lIns="27432" tIns="0" rIns="27432" bIns="0" rtlCol="0" anchor="ctr"/>
+          <a:lstStyle/>
+          <a:p>
+            <a:pPr algn="ctr"/>
+            <a:r>
+              <a:rPr sz="850" b="0">
+                <a:solidFill>
+                  <a:srgbClr val="262626"/>
+                </a:solidFill>
+                <a:latin typeface="Calibri"/>
+              </a:rPr>
+              <a:t>96</a:t>
+            </a:r>
+          </a:p>
+        </p:txBody>
+      </p:sp>
+      <p:sp>
+        <p:nvSpPr>
+          <p:cNvPr id="30" name="Rectangle 29"/>
+          <p:cNvSpPr/>
+          <p:nvPr/>
+        </p:nvSpPr>
+        <p:spPr>
+          <a:xfrm>
+            <a:off x="2157984" y="4718304"/>
+            <a:ext cx="896112" cy="256032"/>
+          </a:xfrm>
+          <a:prstGeom prst="rect">
+            <a:avLst/>
+          </a:prstGeom>
+          <a:solidFill>
+            <a:srgbClr val="DCE6F5"/>
+          </a:solidFill>
+          <a:ln w="9525">
+            <a:solidFill>
+              <a:srgbClr val="BFBFBF"/>
+            </a:solidFill>
+          </a:ln>
+          <a:effectLst/>
+        </p:spPr>
+        <p:style>
+          <a:lnRef idx="1">
+            <a:schemeClr val="accent1"/>
+          </a:lnRef>
+          <a:fillRef idx="3">
+            <a:schemeClr val="accent1"/>
+          </a:fillRef>
+          <a:effectRef idx="2">
+            <a:schemeClr val="accent1"/>
+          </a:effectRef>
+          <a:fontRef idx="minor">
+            <a:schemeClr val="lt1"/>
+          </a:fontRef>
+        </p:style>
+        <p:txBody>
+          <a:bodyPr wrap="square" lIns="27432" tIns="0" rIns="27432" bIns="0" rtlCol="0" anchor="ctr"/>
+          <a:lstStyle/>
+          <a:p>
+            <a:pPr algn="ctr"/>
+            <a:r>
+              <a:rPr sz="850" b="0">
+                <a:solidFill>
+                  <a:srgbClr val="262626"/>
+                </a:solidFill>
+                <a:latin typeface="Calibri"/>
+              </a:rPr>
+              <a:t>91</a:t>
+            </a:r>
+          </a:p>
+        </p:txBody>
+      </p:sp>
+      <p:sp>
+        <p:nvSpPr>
+          <p:cNvPr id="31" name="Rectangle 30"/>
+          <p:cNvSpPr/>
+          <p:nvPr/>
+        </p:nvSpPr>
+        <p:spPr>
+          <a:xfrm>
+            <a:off x="3054096" y="4718304"/>
+            <a:ext cx="896112" cy="256032"/>
+          </a:xfrm>
+          <a:prstGeom prst="rect">
+            <a:avLst/>
+          </a:prstGeom>
+          <a:solidFill>
+            <a:srgbClr val="DCE6F5"/>
+          </a:solidFill>
+          <a:ln w="9525">
+            <a:solidFill>
+              <a:srgbClr val="BFBFBF"/>
+            </a:solidFill>
+          </a:ln>
+          <a:effectLst/>
+        </p:spPr>
+        <p:style>
+          <a:lnRef idx="1">
+            <a:schemeClr val="accent1"/>
+          </a:lnRef>
+          <a:fillRef idx="3">
+            <a:schemeClr val="accent1"/>
+          </a:fillRef>
+          <a:effectRef idx="2">
+            <a:schemeClr val="accent1"/>
+          </a:effectRef>
+          <a:fontRef idx="minor">
+            <a:schemeClr val="lt1"/>
+          </a:fontRef>
+        </p:style>
+        <p:txBody>
+          <a:bodyPr wrap="square" lIns="27432" tIns="0" rIns="27432" bIns="0" rtlCol="0" anchor="ctr"/>
+          <a:lstStyle/>
+          <a:p>
+            <a:pPr algn="ctr"/>
+            <a:r>
+              <a:rPr sz="850" b="0">
+                <a:solidFill>
+                  <a:srgbClr val="262626"/>
+                </a:solidFill>
+                <a:latin typeface="Calibri"/>
+              </a:rPr>
+              <a:t>Bad</a:t>
+            </a:r>
+          </a:p>
+        </p:txBody>
+      </p:sp>
+      <p:sp>
+        <p:nvSpPr>
+          <p:cNvPr id="32" name="Rectangle 31"/>
+          <p:cNvSpPr/>
+          <p:nvPr/>
+        </p:nvSpPr>
+        <p:spPr>
+          <a:xfrm>
+            <a:off x="3950208" y="4718304"/>
+            <a:ext cx="896112" cy="256032"/>
+          </a:xfrm>
+          <a:prstGeom prst="rect">
+            <a:avLst/>
+          </a:prstGeom>
+          <a:solidFill>
+            <a:srgbClr val="DCE6F5"/>
+          </a:solidFill>
+          <a:ln w="9525">
+            <a:solidFill>
+              <a:srgbClr val="BFBFBF"/>
+            </a:solidFill>
+          </a:ln>
+          <a:effectLst/>
+        </p:spPr>
+        <p:style>
+          <a:lnRef idx="1">
+            <a:schemeClr val="accent1"/>
+          </a:lnRef>
+          <a:fillRef idx="3">
+            <a:schemeClr val="accent1"/>
+          </a:fillRef>
+          <a:effectRef idx="2">
+            <a:schemeClr val="accent1"/>
+          </a:effectRef>
+          <a:fontRef idx="minor">
+            <a:schemeClr val="lt1"/>
+          </a:fontRef>
+        </p:style>
+        <p:txBody>
+          <a:bodyPr wrap="square" lIns="27432" tIns="0" rIns="27432" bIns="0" rtlCol="0" anchor="ctr"/>
+          <a:lstStyle/>
+          <a:p>
+            <a:pPr algn="ctr"/>
+            <a:r>
+              <a:rPr sz="850" b="0">
+                <a:solidFill>
+                  <a:srgbClr val="262626"/>
+                </a:solidFill>
+                <a:latin typeface="Calibri"/>
+              </a:rPr>
+              <a:t>Yes</a:t>
+            </a:r>
+          </a:p>
+        </p:txBody>
+      </p:sp>
+      <p:sp>
+        <p:nvSpPr>
+          <p:cNvPr id="33" name="Rectangle 32"/>
+          <p:cNvSpPr/>
+          <p:nvPr/>
+        </p:nvSpPr>
+        <p:spPr>
+          <a:xfrm>
+            <a:off x="365760" y="4974336"/>
+            <a:ext cx="896112" cy="256032"/>
+          </a:xfrm>
+          <a:prstGeom prst="rect">
+            <a:avLst/>
+          </a:prstGeom>
+          <a:solidFill>
+            <a:srgbClr val="FFFFFF"/>
+          </a:solidFill>
+          <a:ln w="9525">
+            <a:solidFill>
+              <a:srgbClr val="BFBFBF"/>
+            </a:solidFill>
+          </a:ln>
+          <a:effectLst/>
+        </p:spPr>
+        <p:style>
+          <a:lnRef idx="1">
+            <a:schemeClr val="accent1"/>
+          </a:lnRef>
+          <a:fillRef idx="3">
+            <a:schemeClr val="accent1"/>
+          </a:fillRef>
+          <a:effectRef idx="2">
+            <a:schemeClr val="accent1"/>
+          </a:effectRef>
+          <a:fontRef idx="minor">
+            <a:schemeClr val="lt1"/>
+          </a:fontRef>
+        </p:style>
+        <p:txBody>
+          <a:bodyPr wrap="square" lIns="27432" tIns="0" rIns="27432" bIns="0" rtlCol="0" anchor="ctr"/>
+          <a:lstStyle/>
+          <a:p>
+            <a:pPr algn="ctr"/>
+            <a:r>
+              <a:rPr sz="850" b="0">
+                <a:solidFill>
+                  <a:srgbClr val="262626"/>
+                </a:solidFill>
+                <a:latin typeface="Calibri"/>
+              </a:rPr>
+              <a:t>6.87</a:t>
+            </a:r>
+          </a:p>
+        </p:txBody>
+      </p:sp>
+      <p:sp>
+        <p:nvSpPr>
+          <p:cNvPr id="34" name="Rectangle 33"/>
+          <p:cNvSpPr/>
+          <p:nvPr/>
+        </p:nvSpPr>
+        <p:spPr>
+          <a:xfrm>
+            <a:off x="1261872" y="4974336"/>
+            <a:ext cx="896112" cy="256032"/>
+          </a:xfrm>
+          <a:prstGeom prst="rect">
+            <a:avLst/>
+          </a:prstGeom>
+          <a:solidFill>
+            <a:srgbClr val="FCE6D5"/>
+          </a:solidFill>
+          <a:ln w="9525">
+            <a:solidFill>
+              <a:srgbClr val="BFBFBF"/>
+            </a:solidFill>
+          </a:ln>
+          <a:effectLst/>
+        </p:spPr>
+        <p:style>
+          <a:lnRef idx="1">
+            <a:schemeClr val="accent1"/>
+          </a:lnRef>
+          <a:fillRef idx="3">
+            <a:schemeClr val="accent1"/>
+          </a:fillRef>
+          <a:effectRef idx="2">
+            <a:schemeClr val="accent1"/>
+          </a:effectRef>
+          <a:fontRef idx="minor">
+            <a:schemeClr val="lt1"/>
+          </a:fontRef>
+        </p:style>
+        <p:txBody>
+          <a:bodyPr wrap="square" lIns="27432" tIns="0" rIns="27432" bIns="0" rtlCol="0" anchor="ctr"/>
+          <a:lstStyle/>
+          <a:p>
+            <a:pPr algn="ctr"/>
+            <a:r>
+              <a:rPr sz="850" b="0">
+                <a:solidFill>
+                  <a:srgbClr val="262626"/>
+                </a:solidFill>
+                <a:latin typeface="Calibri"/>
+              </a:rPr>
+              <a:t>131</a:t>
+            </a:r>
+          </a:p>
+        </p:txBody>
+      </p:sp>
+      <p:sp>
+        <p:nvSpPr>
+          <p:cNvPr id="35" name="Rectangle 34"/>
+          <p:cNvSpPr/>
+          <p:nvPr/>
+        </p:nvSpPr>
+        <p:spPr>
+          <a:xfrm>
+            <a:off x="2157984" y="4974336"/>
+            <a:ext cx="896112" cy="256032"/>
+          </a:xfrm>
+          <a:prstGeom prst="rect">
+            <a:avLst/>
+          </a:prstGeom>
+          <a:solidFill>
+            <a:srgbClr val="FFFFFF"/>
+          </a:solidFill>
+          <a:ln w="9525">
+            <a:solidFill>
+              <a:srgbClr val="BFBFBF"/>
+            </a:solidFill>
+          </a:ln>
+          <a:effectLst/>
+        </p:spPr>
+        <p:style>
+          <a:lnRef idx="1">
+            <a:schemeClr val="accent1"/>
+          </a:lnRef>
+          <a:fillRef idx="3">
+            <a:schemeClr val="accent1"/>
+          </a:fillRef>
+          <a:effectRef idx="2">
+            <a:schemeClr val="accent1"/>
+          </a:effectRef>
+          <a:fontRef idx="minor">
+            <a:schemeClr val="lt1"/>
+          </a:fontRef>
+        </p:style>
+        <p:txBody>
+          <a:bodyPr wrap="square" lIns="27432" tIns="0" rIns="27432" bIns="0" rtlCol="0" anchor="ctr"/>
+          <a:lstStyle/>
+          <a:p>
+            <a:pPr algn="ctr"/>
+            <a:r>
+              <a:rPr sz="850" b="0">
+                <a:solidFill>
+                  <a:srgbClr val="262626"/>
+                </a:solidFill>
+                <a:latin typeface="Calibri"/>
+              </a:rPr>
+              <a:t>105</a:t>
+            </a:r>
+          </a:p>
+        </p:txBody>
+      </p:sp>
+      <p:sp>
+        <p:nvSpPr>
+          <p:cNvPr id="36" name="Rectangle 35"/>
+          <p:cNvSpPr/>
+          <p:nvPr/>
+        </p:nvSpPr>
+        <p:spPr>
+          <a:xfrm>
+            <a:off x="3054096" y="4974336"/>
+            <a:ext cx="896112" cy="256032"/>
+          </a:xfrm>
+          <a:prstGeom prst="rect">
+            <a:avLst/>
+          </a:prstGeom>
+          <a:solidFill>
+            <a:srgbClr val="FFFFFF"/>
+          </a:solidFill>
+          <a:ln w="9525">
+            <a:solidFill>
+              <a:srgbClr val="BFBFBF"/>
+            </a:solidFill>
+          </a:ln>
+          <a:effectLst/>
+        </p:spPr>
+        <p:style>
+          <a:lnRef idx="1">
+            <a:schemeClr val="accent1"/>
+          </a:lnRef>
+          <a:fillRef idx="3">
+            <a:schemeClr val="accent1"/>
+          </a:fillRef>
+          <a:effectRef idx="2">
+            <a:schemeClr val="accent1"/>
+          </a:effectRef>
+          <a:fontRef idx="minor">
+            <a:schemeClr val="lt1"/>
+          </a:fontRef>
+        </p:style>
+        <p:txBody>
+          <a:bodyPr wrap="square" lIns="27432" tIns="0" rIns="27432" bIns="0" rtlCol="0" anchor="ctr"/>
+          <a:lstStyle/>
+          <a:p>
+            <a:pPr algn="ctr"/>
+            <a:r>
+              <a:rPr sz="850" b="0">
+                <a:solidFill>
+                  <a:srgbClr val="262626"/>
+                </a:solidFill>
+                <a:latin typeface="Calibri"/>
+              </a:rPr>
+              <a:t>Medium</a:t>
+            </a:r>
+          </a:p>
+        </p:txBody>
+      </p:sp>
+      <p:sp>
+        <p:nvSpPr>
+          <p:cNvPr id="37" name="Rectangle 36"/>
+          <p:cNvSpPr/>
+          <p:nvPr/>
+        </p:nvSpPr>
+        <p:spPr>
+          <a:xfrm>
+            <a:off x="3950208" y="4974336"/>
+            <a:ext cx="896112" cy="256032"/>
+          </a:xfrm>
+          <a:prstGeom prst="rect">
+            <a:avLst/>
+          </a:prstGeom>
+          <a:solidFill>
+            <a:srgbClr val="FFFFFF"/>
+          </a:solidFill>
+          <a:ln w="9525">
+            <a:solidFill>
+              <a:srgbClr val="BFBFBF"/>
+            </a:solidFill>
+          </a:ln>
+          <a:effectLst/>
+        </p:spPr>
+        <p:style>
+          <a:lnRef idx="1">
+            <a:schemeClr val="accent1"/>
+          </a:lnRef>
+          <a:fillRef idx="3">
+            <a:schemeClr val="accent1"/>
+          </a:fillRef>
+          <a:effectRef idx="2">
+            <a:schemeClr val="accent1"/>
+          </a:effectRef>
+          <a:fontRef idx="minor">
+            <a:schemeClr val="lt1"/>
+          </a:fontRef>
+        </p:style>
+        <p:txBody>
+          <a:bodyPr wrap="square" lIns="27432" tIns="0" rIns="27432" bIns="0" rtlCol="0" anchor="ctr"/>
+          <a:lstStyle/>
+          <a:p>
+            <a:pPr algn="ctr"/>
+            <a:r>
+              <a:rPr sz="850" b="0">
+                <a:solidFill>
+                  <a:srgbClr val="262626"/>
+                </a:solidFill>
+                <a:latin typeface="Calibri"/>
+              </a:rPr>
+              <a:t>Yes</a:t>
+            </a:r>
+          </a:p>
+        </p:txBody>
+      </p:sp>
+      <p:sp>
+        <p:nvSpPr>
+          <p:cNvPr id="38" name="TextBox 37"/>
+          <p:cNvSpPr txBox="1"/>
+          <p:nvPr/>
+        </p:nvSpPr>
+        <p:spPr>
+          <a:xfrm>
+            <a:off x="365760" y="5321808"/>
+            <a:ext cx="4663440" cy="237744"/>
+          </a:xfrm>
+          <a:prstGeom prst="rect">
+            <a:avLst/>
+          </a:prstGeom>
+          <a:noFill/>
+        </p:spPr>
+        <p:txBody>
+          <a:bodyPr wrap="square" lIns="0" tIns="0" rIns="0" bIns="0" anchor="t">
+            <a:spAutoFit/>
+          </a:bodyPr>
+          <a:lstStyle/>
+          <a:p>
+            <a:pPr algn="l">
+              <a:spcAft>
+                <a:spcPts val="0"/>
+              </a:spcAft>
+            </a:pPr>
+            <a:r>
+              <a:rPr sz="1150" b="1">
+                <a:solidFill>
+                  <a:srgbClr val="1F3864"/>
+                </a:solidFill>
+                <a:latin typeface="Calibri"/>
+              </a:rPr>
+              <a:t>Each row is one observation — one store</a:t>
+            </a:r>
+          </a:p>
+        </p:txBody>
+      </p:sp>
+      <p:sp>
+        <p:nvSpPr>
+          <p:cNvPr id="39" name="TextBox 38"/>
+          <p:cNvSpPr txBox="1"/>
+          <p:nvPr/>
+        </p:nvSpPr>
+        <p:spPr>
+          <a:xfrm>
+            <a:off x="365760" y="5989320"/>
+            <a:ext cx="11475720" cy="640080"/>
+          </a:xfrm>
+          <a:prstGeom prst="rect">
+            <a:avLst/>
+          </a:prstGeom>
+          <a:noFill/>
+        </p:spPr>
+        <p:txBody>
+          <a:bodyPr wrap="square" lIns="0" tIns="0" rIns="0" bIns="0" anchor="t">
+            <a:spAutoFit/>
+          </a:bodyPr>
+          <a:lstStyle/>
+          <a:p>
+            <a:pPr algn="l">
+              <a:spcAft>
+                <a:spcPts val="0"/>
+              </a:spcAft>
+            </a:pPr>
+            <a:r>
+              <a:rPr sz="1100" b="0">
+                <a:solidFill>
+                  <a:srgbClr val="595959"/>
+                </a:solidFill>
+                <a:latin typeface="Calibri"/>
+              </a:rPr>
+              <a:t>Source: Carseats data set, R package ISLR2. James, G., Witten, D., Hastie, T., and Tibshirani, R. (2021). An Introduction to Statistical Learning, 2nd ed. Springer. Carseats is a simulated data set of 400 stores distributed with the textbook; 20 stores are shown here.</a:t>
+            </a:r>
+          </a:p>
+        </p:txBody>
+      </p:sp>
+    </p:spTree>
+    <p:extLst>
+      <p:ext uri="{BB962C8B-B14F-4D97-AF65-F5344CB8AC3E}">
+        <p14:creationId xmlns:p14="http://schemas.microsoft.com/office/powerpoint/2010/main" val="2364824393"/>
+      </p:ext>
+    </p:extLst>
+  </p:cSld>
+  <p:clrMapOvr>
+    <a:masterClrMapping/>
+  </p:clrMapOvr>
+</p:sld>
+</file>
+
+<file path=ppt/slides/slide7.xml><?xml version="1.0" encoding="utf-8"?>
+<p:sld xmlns:a="http://schemas.openxmlformats.org/drawingml/2006/main" xmlns:r="http://schemas.openxmlformats.org/officeDocument/2006/relationships" xmlns:p="http://schemas.openxmlformats.org/presentationml/2006/main">
+  <p:cSld>
+    <p:spTree>
+      <p:nvGrpSpPr>
+        <p:cNvPr id="1" name=""/>
+        <p:cNvGrpSpPr/>
+        <p:nvPr/>
+      </p:nvGrpSpPr>
+      <p:grpSpPr>
+        <a:xfrm>
+          <a:off x="0" y="0"/>
+          <a:ext cx="0" cy="0"/>
+          <a:chOff x="0" y="0"/>
+          <a:chExt cx="0" cy="0"/>
+        </a:xfrm>
+      </p:grpSpPr>
+      <p:sp>
+        <p:nvSpPr>
+          <p:cNvPr id="2" name="Title 1">
+            <a:extLst>
+              <a:ext uri="{FF2B5EF4-FFF2-40B4-BE49-F238E27FC236}">
                 <a16:creationId xmlns:a16="http://schemas.microsoft.com/office/drawing/2014/main" id="{B25141DE-B6DC-5855-48A0-EF14DCD5FAEE}"/>
               </a:ext>
             </a:extLst>
@@ -10829,7 +13867,7 @@
           <a:p>
             <a:r>
               <a:rPr lang="en-US" dirty="0"/>
-              <a:t>What Do Data Look Like? </a:t>
+              <a:t>Example data 2</a:t>
             </a:r>
           </a:p>
         </p:txBody>
@@ -11200,1663 +14238,7 @@
 </p:sld>
 </file>
 
-<file path=ppt/slides/slide5.xml><?xml version="1.0" encoding="utf-8"?>
-<p:sld xmlns:a="http://schemas.openxmlformats.org/drawingml/2006/main" xmlns:r="http://schemas.openxmlformats.org/officeDocument/2006/relationships" xmlns:p="http://schemas.openxmlformats.org/presentationml/2006/main">
-  <p:cSld>
-    <p:spTree>
-      <p:nvGrpSpPr>
-        <p:cNvPr id="1" name=""/>
-        <p:cNvGrpSpPr/>
-        <p:nvPr/>
-      </p:nvGrpSpPr>
-      <p:grpSpPr>
-        <a:xfrm>
-          <a:off x="0" y="0"/>
-          <a:ext cx="0" cy="0"/>
-          <a:chOff x="0" y="0"/>
-          <a:chExt cx="0" cy="0"/>
-        </a:xfrm>
-      </p:grpSpPr>
-      <p:sp>
-        <p:nvSpPr>
-          <p:cNvPr id="2" name="Title 1">
-            <a:extLst>
-              <a:ext uri="{FF2B5EF4-FFF2-40B4-BE49-F238E27FC236}">
-                <a16:creationId xmlns:a16="http://schemas.microsoft.com/office/drawing/2014/main" id="{96380C86-D709-6FB8-5A19-C2314095D583}"/>
-              </a:ext>
-            </a:extLst>
-          </p:cNvPr>
-          <p:cNvSpPr>
-            <a:spLocks noGrp="1"/>
-          </p:cNvSpPr>
-          <p:nvPr>
-            <p:ph type="title"/>
-          </p:nvPr>
-        </p:nvSpPr>
-        <p:spPr>
-          <a:xfrm>
-            <a:off x="357793" y="244076"/>
-            <a:ext cx="10515600" cy="1325563"/>
-          </a:xfrm>
-        </p:spPr>
-        <p:txBody>
-          <a:bodyPr/>
-          <a:lstStyle/>
-          <a:p>
-            <a:r>
-              <a:rPr lang="en-US" dirty="0"/>
-              <a:t>Example Data 2 </a:t>
-            </a:r>
-          </a:p>
-        </p:txBody>
-      </p:sp>
-      <p:sp>
-        <p:nvSpPr>
-          <p:cNvPr id="9" name="Content Placeholder 2">
-            <a:extLst>
-              <a:ext uri="{FF2B5EF4-FFF2-40B4-BE49-F238E27FC236}">
-                <a16:creationId xmlns:a16="http://schemas.microsoft.com/office/drawing/2014/main" id="{A8A8168E-B6BB-3016-EE7E-6E0B94393F37}"/>
-              </a:ext>
-            </a:extLst>
-          </p:cNvPr>
-          <p:cNvSpPr>
-            <a:spLocks noGrp="1"/>
-          </p:cNvSpPr>
-          <p:nvPr>
-            <p:ph idx="1"/>
-          </p:nvPr>
-        </p:nvSpPr>
-        <p:spPr>
-          <a:xfrm>
-            <a:off x="274320" y="1481328"/>
-            <a:ext cx="4709160" cy="1600200"/>
-          </a:xfrm>
-        </p:spPr>
-        <p:txBody>
-          <a:bodyPr>
-            <a:normAutofit fontScale="92500" lnSpcReduction="20000"/>
-          </a:bodyPr>
-          <a:lstStyle/>
-          <a:p>
-            <a:pPr marL="0" indent="0">
-              <a:buNone/>
-            </a:pPr>
-            <a:r>
-              <a:rPr lang="en-US" sz="2000" dirty="0"/>
-              <a:t>The following table contains data on 20 clients contacted during a bank’s direct marketing campaign for a term deposit account. For each client, the job, education level, age, account balance, length of the marketing call, and whether they subscribed are recorded</a:t>
-            </a:r>
-          </a:p>
-        </p:txBody>
-      </p:sp>
-      <p:pic>
-        <p:nvPicPr>
-          <p:cNvPr id="10" name="Picture 9" descr="image.png"/>
-          <p:cNvPicPr>
-            <a:picLocks noChangeAspect="1"/>
-          </p:cNvPicPr>
-          <p:nvPr/>
-        </p:nvPicPr>
-        <p:blipFill>
-          <a:blip r:embed="rId5"/>
-          <a:stretch>
-            <a:fillRect/>
-          </a:stretch>
-        </p:blipFill>
-        <p:spPr>
-          <a:xfrm>
-            <a:off x="5138928" y="1389888"/>
-            <a:ext cx="6812280" cy="4293155"/>
-          </a:xfrm>
-          <a:prstGeom prst="rect">
-            <a:avLst/>
-          </a:prstGeom>
-        </p:spPr>
-      </p:pic>
-      <p:sp>
-        <p:nvSpPr>
-          <p:cNvPr id="11" name="TextBox 10"/>
-          <p:cNvSpPr txBox="1"/>
-          <p:nvPr/>
-        </p:nvSpPr>
-        <p:spPr>
-          <a:xfrm>
-            <a:off x="365760" y="3218688"/>
-            <a:ext cx="4663440" cy="274320"/>
-          </a:xfrm>
-          <a:prstGeom prst="rect">
-            <a:avLst/>
-          </a:prstGeom>
-          <a:noFill/>
-        </p:spPr>
-        <p:txBody>
-          <a:bodyPr wrap="square" lIns="0" rIns="0" tIns="0" bIns="0" anchor="t">
-            <a:spAutoFit/>
-          </a:bodyPr>
-          <a:lstStyle/>
-          <a:p>
-            <a:pPr algn="l">
-              <a:spcAft>
-                <a:spcPts val="0"/>
-              </a:spcAft>
-            </a:pPr>
-            <a:r>
-              <a:rPr sz="1500" b="1">
-                <a:solidFill>
-                  <a:srgbClr val="000000"/>
-                </a:solidFill>
-                <a:latin typeface="Calibri"/>
-              </a:rPr>
-              <a:t>Reading a data table</a:t>
-            </a:r>
-          </a:p>
-        </p:txBody>
-      </p:sp>
-      <p:sp>
-        <p:nvSpPr>
-          <p:cNvPr id="12" name="TextBox 11"/>
-          <p:cNvSpPr txBox="1"/>
-          <p:nvPr/>
-        </p:nvSpPr>
-        <p:spPr>
-          <a:xfrm>
-            <a:off x="365760" y="3584448"/>
-            <a:ext cx="4663440" cy="237744"/>
-          </a:xfrm>
-          <a:prstGeom prst="rect">
-            <a:avLst/>
-          </a:prstGeom>
-          <a:noFill/>
-        </p:spPr>
-        <p:txBody>
-          <a:bodyPr wrap="square" lIns="0" rIns="0" tIns="0" bIns="0" anchor="t">
-            <a:spAutoFit/>
-          </a:bodyPr>
-          <a:lstStyle/>
-          <a:p>
-            <a:pPr algn="l">
-              <a:spcAft>
-                <a:spcPts val="0"/>
-              </a:spcAft>
-            </a:pPr>
-            <a:r>
-              <a:rPr sz="1150" b="1">
-                <a:solidFill>
-                  <a:srgbClr val="C5540F"/>
-                </a:solidFill>
-                <a:latin typeface="Calibri"/>
-              </a:rPr>
-              <a:t>Each column is a variable</a:t>
-            </a:r>
-          </a:p>
-        </p:txBody>
-      </p:sp>
-      <p:sp>
-        <p:nvSpPr>
-          <p:cNvPr id="13" name="Rectangle 12"/>
-          <p:cNvSpPr/>
-          <p:nvPr/>
-        </p:nvSpPr>
-        <p:spPr>
-          <a:xfrm>
-            <a:off x="365760" y="3950208"/>
-            <a:ext cx="896112" cy="256032"/>
-          </a:xfrm>
-          <a:prstGeom prst="rect">
-            <a:avLst/>
-          </a:prstGeom>
-          <a:solidFill>
-            <a:srgbClr val="EFEFEF"/>
-          </a:solidFill>
-          <a:ln w="9525">
-            <a:solidFill>
-              <a:srgbClr val="BFBFBF"/>
-            </a:solidFill>
-          </a:ln>
-          <a:effectLst/>
-        </p:spPr>
-        <p:style>
-          <a:lnRef idx="1">
-            <a:schemeClr val="accent1"/>
-          </a:lnRef>
-          <a:fillRef idx="3">
-            <a:schemeClr val="accent1"/>
-          </a:fillRef>
-          <a:effectRef idx="2">
-            <a:schemeClr val="accent1"/>
-          </a:effectRef>
-          <a:fontRef idx="minor">
-            <a:schemeClr val="lt1"/>
-          </a:fontRef>
-        </p:style>
-        <p:txBody>
-          <a:bodyPr rtlCol="0" anchor="ctr" wrap="square" lIns="27432" rIns="27432" tIns="0" bIns="0"/>
-          <a:lstStyle/>
-          <a:p>
-            <a:pPr algn="ctr"/>
-            <a:r>
-              <a:rPr sz="850" b="1">
-                <a:solidFill>
-                  <a:srgbClr val="404040"/>
-                </a:solidFill>
-                <a:latin typeface="Calibri"/>
-              </a:rPr>
-              <a:t>Client ID</a:t>
-            </a:r>
-          </a:p>
-        </p:txBody>
-      </p:sp>
-      <p:sp>
-        <p:nvSpPr>
-          <p:cNvPr id="14" name="Rectangle 13"/>
-          <p:cNvSpPr/>
-          <p:nvPr/>
-        </p:nvSpPr>
-        <p:spPr>
-          <a:xfrm>
-            <a:off x="1261872" y="3950208"/>
-            <a:ext cx="896112" cy="256032"/>
-          </a:xfrm>
-          <a:prstGeom prst="rect">
-            <a:avLst/>
-          </a:prstGeom>
-          <a:solidFill>
-            <a:srgbClr val="EFEFEF"/>
-          </a:solidFill>
-          <a:ln w="9525">
-            <a:solidFill>
-              <a:srgbClr val="BFBFBF"/>
-            </a:solidFill>
-          </a:ln>
-          <a:effectLst/>
-        </p:spPr>
-        <p:style>
-          <a:lnRef idx="1">
-            <a:schemeClr val="accent1"/>
-          </a:lnRef>
-          <a:fillRef idx="3">
-            <a:schemeClr val="accent1"/>
-          </a:fillRef>
-          <a:effectRef idx="2">
-            <a:schemeClr val="accent1"/>
-          </a:effectRef>
-          <a:fontRef idx="minor">
-            <a:schemeClr val="lt1"/>
-          </a:fontRef>
-        </p:style>
-        <p:txBody>
-          <a:bodyPr rtlCol="0" anchor="ctr" wrap="square" lIns="27432" rIns="27432" tIns="0" bIns="0"/>
-          <a:lstStyle/>
-          <a:p>
-            <a:pPr algn="ctr"/>
-            <a:r>
-              <a:rPr sz="850" b="1">
-                <a:solidFill>
-                  <a:srgbClr val="404040"/>
-                </a:solidFill>
-                <a:latin typeface="Calibri"/>
-              </a:rPr>
-              <a:t>Job</a:t>
-            </a:r>
-          </a:p>
-        </p:txBody>
-      </p:sp>
-      <p:sp>
-        <p:nvSpPr>
-          <p:cNvPr id="15" name="Rectangle 14"/>
-          <p:cNvSpPr/>
-          <p:nvPr/>
-        </p:nvSpPr>
-        <p:spPr>
-          <a:xfrm>
-            <a:off x="2157984" y="3950208"/>
-            <a:ext cx="896112" cy="256032"/>
-          </a:xfrm>
-          <a:prstGeom prst="rect">
-            <a:avLst/>
-          </a:prstGeom>
-          <a:solidFill>
-            <a:srgbClr val="FCE6D5"/>
-          </a:solidFill>
-          <a:ln w="9525">
-            <a:solidFill>
-              <a:srgbClr val="BFBFBF"/>
-            </a:solidFill>
-          </a:ln>
-          <a:effectLst/>
-        </p:spPr>
-        <p:style>
-          <a:lnRef idx="1">
-            <a:schemeClr val="accent1"/>
-          </a:lnRef>
-          <a:fillRef idx="3">
-            <a:schemeClr val="accent1"/>
-          </a:fillRef>
-          <a:effectRef idx="2">
-            <a:schemeClr val="accent1"/>
-          </a:effectRef>
-          <a:fontRef idx="minor">
-            <a:schemeClr val="lt1"/>
-          </a:fontRef>
-        </p:style>
-        <p:txBody>
-          <a:bodyPr rtlCol="0" anchor="ctr" wrap="square" lIns="27432" rIns="27432" tIns="0" bIns="0"/>
-          <a:lstStyle/>
-          <a:p>
-            <a:pPr algn="ctr"/>
-            <a:r>
-              <a:rPr sz="850" b="1">
-                <a:solidFill>
-                  <a:srgbClr val="C5540F"/>
-                </a:solidFill>
-                <a:latin typeface="Calibri"/>
-              </a:rPr>
-              <a:t>Age</a:t>
-            </a:r>
-          </a:p>
-        </p:txBody>
-      </p:sp>
-      <p:sp>
-        <p:nvSpPr>
-          <p:cNvPr id="16" name="Rectangle 15"/>
-          <p:cNvSpPr/>
-          <p:nvPr/>
-        </p:nvSpPr>
-        <p:spPr>
-          <a:xfrm>
-            <a:off x="3054096" y="3950208"/>
-            <a:ext cx="896112" cy="256032"/>
-          </a:xfrm>
-          <a:prstGeom prst="rect">
-            <a:avLst/>
-          </a:prstGeom>
-          <a:solidFill>
-            <a:srgbClr val="EFEFEF"/>
-          </a:solidFill>
-          <a:ln w="9525">
-            <a:solidFill>
-              <a:srgbClr val="BFBFBF"/>
-            </a:solidFill>
-          </a:ln>
-          <a:effectLst/>
-        </p:spPr>
-        <p:style>
-          <a:lnRef idx="1">
-            <a:schemeClr val="accent1"/>
-          </a:lnRef>
-          <a:fillRef idx="3">
-            <a:schemeClr val="accent1"/>
-          </a:fillRef>
-          <a:effectRef idx="2">
-            <a:schemeClr val="accent1"/>
-          </a:effectRef>
-          <a:fontRef idx="minor">
-            <a:schemeClr val="lt1"/>
-          </a:fontRef>
-        </p:style>
-        <p:txBody>
-          <a:bodyPr rtlCol="0" anchor="ctr" wrap="square" lIns="27432" rIns="27432" tIns="0" bIns="0"/>
-          <a:lstStyle/>
-          <a:p>
-            <a:pPr algn="ctr"/>
-            <a:r>
-              <a:rPr sz="850" b="1">
-                <a:solidFill>
-                  <a:srgbClr val="404040"/>
-                </a:solidFill>
-                <a:latin typeface="Calibri"/>
-              </a:rPr>
-              <a:t>Balance</a:t>
-            </a:r>
-          </a:p>
-        </p:txBody>
-      </p:sp>
-      <p:sp>
-        <p:nvSpPr>
-          <p:cNvPr id="17" name="Rectangle 16"/>
-          <p:cNvSpPr/>
-          <p:nvPr/>
-        </p:nvSpPr>
-        <p:spPr>
-          <a:xfrm>
-            <a:off x="3950208" y="3950208"/>
-            <a:ext cx="896112" cy="256032"/>
-          </a:xfrm>
-          <a:prstGeom prst="rect">
-            <a:avLst/>
-          </a:prstGeom>
-          <a:solidFill>
-            <a:srgbClr val="EFEFEF"/>
-          </a:solidFill>
-          <a:ln w="9525">
-            <a:solidFill>
-              <a:srgbClr val="BFBFBF"/>
-            </a:solidFill>
-          </a:ln>
-          <a:effectLst/>
-        </p:spPr>
-        <p:style>
-          <a:lnRef idx="1">
-            <a:schemeClr val="accent1"/>
-          </a:lnRef>
-          <a:fillRef idx="3">
-            <a:schemeClr val="accent1"/>
-          </a:fillRef>
-          <a:effectRef idx="2">
-            <a:schemeClr val="accent1"/>
-          </a:effectRef>
-          <a:fontRef idx="minor">
-            <a:schemeClr val="lt1"/>
-          </a:fontRef>
-        </p:style>
-        <p:txBody>
-          <a:bodyPr rtlCol="0" anchor="ctr" wrap="square" lIns="27432" rIns="27432" tIns="0" bIns="0"/>
-          <a:lstStyle/>
-          <a:p>
-            <a:pPr algn="ctr"/>
-            <a:r>
-              <a:rPr sz="850" b="1">
-                <a:solidFill>
-                  <a:srgbClr val="404040"/>
-                </a:solidFill>
-                <a:latin typeface="Calibri"/>
-              </a:rPr>
-              <a:t>Subscribed</a:t>
-            </a:r>
-          </a:p>
-        </p:txBody>
-      </p:sp>
-      <p:sp>
-        <p:nvSpPr>
-          <p:cNvPr id="18" name="Rectangle 17"/>
-          <p:cNvSpPr/>
-          <p:nvPr/>
-        </p:nvSpPr>
-        <p:spPr>
-          <a:xfrm>
-            <a:off x="365760" y="4206240"/>
-            <a:ext cx="896112" cy="256032"/>
-          </a:xfrm>
-          <a:prstGeom prst="rect">
-            <a:avLst/>
-          </a:prstGeom>
-          <a:solidFill>
-            <a:srgbClr val="FFFFFF"/>
-          </a:solidFill>
-          <a:ln w="9525">
-            <a:solidFill>
-              <a:srgbClr val="BFBFBF"/>
-            </a:solidFill>
-          </a:ln>
-          <a:effectLst/>
-        </p:spPr>
-        <p:style>
-          <a:lnRef idx="1">
-            <a:schemeClr val="accent1"/>
-          </a:lnRef>
-          <a:fillRef idx="3">
-            <a:schemeClr val="accent1"/>
-          </a:fillRef>
-          <a:effectRef idx="2">
-            <a:schemeClr val="accent1"/>
-          </a:effectRef>
-          <a:fontRef idx="minor">
-            <a:schemeClr val="lt1"/>
-          </a:fontRef>
-        </p:style>
-        <p:txBody>
-          <a:bodyPr rtlCol="0" anchor="ctr" wrap="square" lIns="27432" rIns="27432" tIns="0" bIns="0"/>
-          <a:lstStyle/>
-          <a:p>
-            <a:pPr algn="ctr"/>
-            <a:r>
-              <a:rPr sz="850" b="0">
-                <a:solidFill>
-                  <a:srgbClr val="262626"/>
-                </a:solidFill>
-                <a:latin typeface="Calibri"/>
-              </a:rPr>
-              <a:t>C-1047</a:t>
-            </a:r>
-          </a:p>
-        </p:txBody>
-      </p:sp>
-      <p:sp>
-        <p:nvSpPr>
-          <p:cNvPr id="19" name="Rectangle 18"/>
-          <p:cNvSpPr/>
-          <p:nvPr/>
-        </p:nvSpPr>
-        <p:spPr>
-          <a:xfrm>
-            <a:off x="1261872" y="4206240"/>
-            <a:ext cx="896112" cy="256032"/>
-          </a:xfrm>
-          <a:prstGeom prst="rect">
-            <a:avLst/>
-          </a:prstGeom>
-          <a:solidFill>
-            <a:srgbClr val="FFFFFF"/>
-          </a:solidFill>
-          <a:ln w="9525">
-            <a:solidFill>
-              <a:srgbClr val="BFBFBF"/>
-            </a:solidFill>
-          </a:ln>
-          <a:effectLst/>
-        </p:spPr>
-        <p:style>
-          <a:lnRef idx="1">
-            <a:schemeClr val="accent1"/>
-          </a:lnRef>
-          <a:fillRef idx="3">
-            <a:schemeClr val="accent1"/>
-          </a:fillRef>
-          <a:effectRef idx="2">
-            <a:schemeClr val="accent1"/>
-          </a:effectRef>
-          <a:fontRef idx="minor">
-            <a:schemeClr val="lt1"/>
-          </a:fontRef>
-        </p:style>
-        <p:txBody>
-          <a:bodyPr rtlCol="0" anchor="ctr" wrap="square" lIns="27432" rIns="27432" tIns="0" bIns="0"/>
-          <a:lstStyle/>
-          <a:p>
-            <a:pPr algn="ctr"/>
-            <a:r>
-              <a:rPr sz="850" b="0">
-                <a:solidFill>
-                  <a:srgbClr val="262626"/>
-                </a:solidFill>
-                <a:latin typeface="Calibri"/>
-              </a:rPr>
-              <a:t>mgmt</a:t>
-            </a:r>
-          </a:p>
-        </p:txBody>
-      </p:sp>
-      <p:sp>
-        <p:nvSpPr>
-          <p:cNvPr id="20" name="Rectangle 19"/>
-          <p:cNvSpPr/>
-          <p:nvPr/>
-        </p:nvSpPr>
-        <p:spPr>
-          <a:xfrm>
-            <a:off x="2157984" y="4206240"/>
-            <a:ext cx="896112" cy="256032"/>
-          </a:xfrm>
-          <a:prstGeom prst="rect">
-            <a:avLst/>
-          </a:prstGeom>
-          <a:solidFill>
-            <a:srgbClr val="FCE6D5"/>
-          </a:solidFill>
-          <a:ln w="9525">
-            <a:solidFill>
-              <a:srgbClr val="BFBFBF"/>
-            </a:solidFill>
-          </a:ln>
-          <a:effectLst/>
-        </p:spPr>
-        <p:style>
-          <a:lnRef idx="1">
-            <a:schemeClr val="accent1"/>
-          </a:lnRef>
-          <a:fillRef idx="3">
-            <a:schemeClr val="accent1"/>
-          </a:fillRef>
-          <a:effectRef idx="2">
-            <a:schemeClr val="accent1"/>
-          </a:effectRef>
-          <a:fontRef idx="minor">
-            <a:schemeClr val="lt1"/>
-          </a:fontRef>
-        </p:style>
-        <p:txBody>
-          <a:bodyPr rtlCol="0" anchor="ctr" wrap="square" lIns="27432" rIns="27432" tIns="0" bIns="0"/>
-          <a:lstStyle/>
-          <a:p>
-            <a:pPr algn="ctr"/>
-            <a:r>
-              <a:rPr sz="850" b="0">
-                <a:solidFill>
-                  <a:srgbClr val="262626"/>
-                </a:solidFill>
-                <a:latin typeface="Calibri"/>
-              </a:rPr>
-              <a:t>42</a:t>
-            </a:r>
-          </a:p>
-        </p:txBody>
-      </p:sp>
-      <p:sp>
-        <p:nvSpPr>
-          <p:cNvPr id="21" name="Rectangle 20"/>
-          <p:cNvSpPr/>
-          <p:nvPr/>
-        </p:nvSpPr>
-        <p:spPr>
-          <a:xfrm>
-            <a:off x="3054096" y="4206240"/>
-            <a:ext cx="896112" cy="256032"/>
-          </a:xfrm>
-          <a:prstGeom prst="rect">
-            <a:avLst/>
-          </a:prstGeom>
-          <a:solidFill>
-            <a:srgbClr val="FFFFFF"/>
-          </a:solidFill>
-          <a:ln w="9525">
-            <a:solidFill>
-              <a:srgbClr val="BFBFBF"/>
-            </a:solidFill>
-          </a:ln>
-          <a:effectLst/>
-        </p:spPr>
-        <p:style>
-          <a:lnRef idx="1">
-            <a:schemeClr val="accent1"/>
-          </a:lnRef>
-          <a:fillRef idx="3">
-            <a:schemeClr val="accent1"/>
-          </a:fillRef>
-          <a:effectRef idx="2">
-            <a:schemeClr val="accent1"/>
-          </a:effectRef>
-          <a:fontRef idx="minor">
-            <a:schemeClr val="lt1"/>
-          </a:fontRef>
-        </p:style>
-        <p:txBody>
-          <a:bodyPr rtlCol="0" anchor="ctr" wrap="square" lIns="27432" rIns="27432" tIns="0" bIns="0"/>
-          <a:lstStyle/>
-          <a:p>
-            <a:pPr algn="ctr"/>
-            <a:r>
-              <a:rPr sz="850" b="0">
-                <a:solidFill>
-                  <a:srgbClr val="262626"/>
-                </a:solidFill>
-                <a:latin typeface="Calibri"/>
-              </a:rPr>
-              <a:t>2,143</a:t>
-            </a:r>
-          </a:p>
-        </p:txBody>
-      </p:sp>
-      <p:sp>
-        <p:nvSpPr>
-          <p:cNvPr id="22" name="Rectangle 21"/>
-          <p:cNvSpPr/>
-          <p:nvPr/>
-        </p:nvSpPr>
-        <p:spPr>
-          <a:xfrm>
-            <a:off x="3950208" y="4206240"/>
-            <a:ext cx="896112" cy="256032"/>
-          </a:xfrm>
-          <a:prstGeom prst="rect">
-            <a:avLst/>
-          </a:prstGeom>
-          <a:solidFill>
-            <a:srgbClr val="FFFFFF"/>
-          </a:solidFill>
-          <a:ln w="9525">
-            <a:solidFill>
-              <a:srgbClr val="BFBFBF"/>
-            </a:solidFill>
-          </a:ln>
-          <a:effectLst/>
-        </p:spPr>
-        <p:style>
-          <a:lnRef idx="1">
-            <a:schemeClr val="accent1"/>
-          </a:lnRef>
-          <a:fillRef idx="3">
-            <a:schemeClr val="accent1"/>
-          </a:fillRef>
-          <a:effectRef idx="2">
-            <a:schemeClr val="accent1"/>
-          </a:effectRef>
-          <a:fontRef idx="minor">
-            <a:schemeClr val="lt1"/>
-          </a:fontRef>
-        </p:style>
-        <p:txBody>
-          <a:bodyPr rtlCol="0" anchor="ctr" wrap="square" lIns="27432" rIns="27432" tIns="0" bIns="0"/>
-          <a:lstStyle/>
-          <a:p>
-            <a:pPr algn="ctr"/>
-            <a:r>
-              <a:rPr sz="850" b="0">
-                <a:solidFill>
-                  <a:srgbClr val="262626"/>
-                </a:solidFill>
-                <a:latin typeface="Calibri"/>
-              </a:rPr>
-              <a:t>no</a:t>
-            </a:r>
-          </a:p>
-        </p:txBody>
-      </p:sp>
-      <p:sp>
-        <p:nvSpPr>
-          <p:cNvPr id="23" name="Rectangle 22"/>
-          <p:cNvSpPr/>
-          <p:nvPr/>
-        </p:nvSpPr>
-        <p:spPr>
-          <a:xfrm>
-            <a:off x="365760" y="4462272"/>
-            <a:ext cx="896112" cy="256032"/>
-          </a:xfrm>
-          <a:prstGeom prst="rect">
-            <a:avLst/>
-          </a:prstGeom>
-          <a:solidFill>
-            <a:srgbClr val="FFFFFF"/>
-          </a:solidFill>
-          <a:ln w="9525">
-            <a:solidFill>
-              <a:srgbClr val="BFBFBF"/>
-            </a:solidFill>
-          </a:ln>
-          <a:effectLst/>
-        </p:spPr>
-        <p:style>
-          <a:lnRef idx="1">
-            <a:schemeClr val="accent1"/>
-          </a:lnRef>
-          <a:fillRef idx="3">
-            <a:schemeClr val="accent1"/>
-          </a:fillRef>
-          <a:effectRef idx="2">
-            <a:schemeClr val="accent1"/>
-          </a:effectRef>
-          <a:fontRef idx="minor">
-            <a:schemeClr val="lt1"/>
-          </a:fontRef>
-        </p:style>
-        <p:txBody>
-          <a:bodyPr rtlCol="0" anchor="ctr" wrap="square" lIns="27432" rIns="27432" tIns="0" bIns="0"/>
-          <a:lstStyle/>
-          <a:p>
-            <a:pPr algn="ctr"/>
-            <a:r>
-              <a:rPr sz="850" b="0">
-                <a:solidFill>
-                  <a:srgbClr val="262626"/>
-                </a:solidFill>
-                <a:latin typeface="Calibri"/>
-              </a:rPr>
-              <a:t>C-1052</a:t>
-            </a:r>
-          </a:p>
-        </p:txBody>
-      </p:sp>
-      <p:sp>
-        <p:nvSpPr>
-          <p:cNvPr id="24" name="Rectangle 23"/>
-          <p:cNvSpPr/>
-          <p:nvPr/>
-        </p:nvSpPr>
-        <p:spPr>
-          <a:xfrm>
-            <a:off x="1261872" y="4462272"/>
-            <a:ext cx="896112" cy="256032"/>
-          </a:xfrm>
-          <a:prstGeom prst="rect">
-            <a:avLst/>
-          </a:prstGeom>
-          <a:solidFill>
-            <a:srgbClr val="FFFFFF"/>
-          </a:solidFill>
-          <a:ln w="9525">
-            <a:solidFill>
-              <a:srgbClr val="BFBFBF"/>
-            </a:solidFill>
-          </a:ln>
-          <a:effectLst/>
-        </p:spPr>
-        <p:style>
-          <a:lnRef idx="1">
-            <a:schemeClr val="accent1"/>
-          </a:lnRef>
-          <a:fillRef idx="3">
-            <a:schemeClr val="accent1"/>
-          </a:fillRef>
-          <a:effectRef idx="2">
-            <a:schemeClr val="accent1"/>
-          </a:effectRef>
-          <a:fontRef idx="minor">
-            <a:schemeClr val="lt1"/>
-          </a:fontRef>
-        </p:style>
-        <p:txBody>
-          <a:bodyPr rtlCol="0" anchor="ctr" wrap="square" lIns="27432" rIns="27432" tIns="0" bIns="0"/>
-          <a:lstStyle/>
-          <a:p>
-            <a:pPr algn="ctr"/>
-            <a:r>
-              <a:rPr sz="850" b="0">
-                <a:solidFill>
-                  <a:srgbClr val="262626"/>
-                </a:solidFill>
-                <a:latin typeface="Calibri"/>
-              </a:rPr>
-              <a:t>blue</a:t>
-            </a:r>
-          </a:p>
-        </p:txBody>
-      </p:sp>
-      <p:sp>
-        <p:nvSpPr>
-          <p:cNvPr id="25" name="Rectangle 24"/>
-          <p:cNvSpPr/>
-          <p:nvPr/>
-        </p:nvSpPr>
-        <p:spPr>
-          <a:xfrm>
-            <a:off x="2157984" y="4462272"/>
-            <a:ext cx="896112" cy="256032"/>
-          </a:xfrm>
-          <a:prstGeom prst="rect">
-            <a:avLst/>
-          </a:prstGeom>
-          <a:solidFill>
-            <a:srgbClr val="FCE6D5"/>
-          </a:solidFill>
-          <a:ln w="9525">
-            <a:solidFill>
-              <a:srgbClr val="BFBFBF"/>
-            </a:solidFill>
-          </a:ln>
-          <a:effectLst/>
-        </p:spPr>
-        <p:style>
-          <a:lnRef idx="1">
-            <a:schemeClr val="accent1"/>
-          </a:lnRef>
-          <a:fillRef idx="3">
-            <a:schemeClr val="accent1"/>
-          </a:fillRef>
-          <a:effectRef idx="2">
-            <a:schemeClr val="accent1"/>
-          </a:effectRef>
-          <a:fontRef idx="minor">
-            <a:schemeClr val="lt1"/>
-          </a:fontRef>
-        </p:style>
-        <p:txBody>
-          <a:bodyPr rtlCol="0" anchor="ctr" wrap="square" lIns="27432" rIns="27432" tIns="0" bIns="0"/>
-          <a:lstStyle/>
-          <a:p>
-            <a:pPr algn="ctr"/>
-            <a:r>
-              <a:rPr sz="850" b="0">
-                <a:solidFill>
-                  <a:srgbClr val="262626"/>
-                </a:solidFill>
-                <a:latin typeface="Calibri"/>
-              </a:rPr>
-              <a:t>35</a:t>
-            </a:r>
-          </a:p>
-        </p:txBody>
-      </p:sp>
-      <p:sp>
-        <p:nvSpPr>
-          <p:cNvPr id="26" name="Rectangle 25"/>
-          <p:cNvSpPr/>
-          <p:nvPr/>
-        </p:nvSpPr>
-        <p:spPr>
-          <a:xfrm>
-            <a:off x="3054096" y="4462272"/>
-            <a:ext cx="896112" cy="256032"/>
-          </a:xfrm>
-          <a:prstGeom prst="rect">
-            <a:avLst/>
-          </a:prstGeom>
-          <a:solidFill>
-            <a:srgbClr val="FFFFFF"/>
-          </a:solidFill>
-          <a:ln w="9525">
-            <a:solidFill>
-              <a:srgbClr val="BFBFBF"/>
-            </a:solidFill>
-          </a:ln>
-          <a:effectLst/>
-        </p:spPr>
-        <p:style>
-          <a:lnRef idx="1">
-            <a:schemeClr val="accent1"/>
-          </a:lnRef>
-          <a:fillRef idx="3">
-            <a:schemeClr val="accent1"/>
-          </a:fillRef>
-          <a:effectRef idx="2">
-            <a:schemeClr val="accent1"/>
-          </a:effectRef>
-          <a:fontRef idx="minor">
-            <a:schemeClr val="lt1"/>
-          </a:fontRef>
-        </p:style>
-        <p:txBody>
-          <a:bodyPr rtlCol="0" anchor="ctr" wrap="square" lIns="27432" rIns="27432" tIns="0" bIns="0"/>
-          <a:lstStyle/>
-          <a:p>
-            <a:pPr algn="ctr"/>
-            <a:r>
-              <a:rPr sz="850" b="0">
-                <a:solidFill>
-                  <a:srgbClr val="262626"/>
-                </a:solidFill>
-                <a:latin typeface="Calibri"/>
-              </a:rPr>
-              <a:t>413</a:t>
-            </a:r>
-          </a:p>
-        </p:txBody>
-      </p:sp>
-      <p:sp>
-        <p:nvSpPr>
-          <p:cNvPr id="27" name="Rectangle 26"/>
-          <p:cNvSpPr/>
-          <p:nvPr/>
-        </p:nvSpPr>
-        <p:spPr>
-          <a:xfrm>
-            <a:off x="3950208" y="4462272"/>
-            <a:ext cx="896112" cy="256032"/>
-          </a:xfrm>
-          <a:prstGeom prst="rect">
-            <a:avLst/>
-          </a:prstGeom>
-          <a:solidFill>
-            <a:srgbClr val="FFFFFF"/>
-          </a:solidFill>
-          <a:ln w="9525">
-            <a:solidFill>
-              <a:srgbClr val="BFBFBF"/>
-            </a:solidFill>
-          </a:ln>
-          <a:effectLst/>
-        </p:spPr>
-        <p:style>
-          <a:lnRef idx="1">
-            <a:schemeClr val="accent1"/>
-          </a:lnRef>
-          <a:fillRef idx="3">
-            <a:schemeClr val="accent1"/>
-          </a:fillRef>
-          <a:effectRef idx="2">
-            <a:schemeClr val="accent1"/>
-          </a:effectRef>
-          <a:fontRef idx="minor">
-            <a:schemeClr val="lt1"/>
-          </a:fontRef>
-        </p:style>
-        <p:txBody>
-          <a:bodyPr rtlCol="0" anchor="ctr" wrap="square" lIns="27432" rIns="27432" tIns="0" bIns="0"/>
-          <a:lstStyle/>
-          <a:p>
-            <a:pPr algn="ctr"/>
-            <a:r>
-              <a:rPr sz="850" b="0">
-                <a:solidFill>
-                  <a:srgbClr val="262626"/>
-                </a:solidFill>
-                <a:latin typeface="Calibri"/>
-              </a:rPr>
-              <a:t>no</a:t>
-            </a:r>
-          </a:p>
-        </p:txBody>
-      </p:sp>
-      <p:sp>
-        <p:nvSpPr>
-          <p:cNvPr id="28" name="Rectangle 27"/>
-          <p:cNvSpPr/>
-          <p:nvPr/>
-        </p:nvSpPr>
-        <p:spPr>
-          <a:xfrm>
-            <a:off x="365760" y="4718304"/>
-            <a:ext cx="896112" cy="256032"/>
-          </a:xfrm>
-          <a:prstGeom prst="rect">
-            <a:avLst/>
-          </a:prstGeom>
-          <a:solidFill>
-            <a:srgbClr val="DCE6F5"/>
-          </a:solidFill>
-          <a:ln w="9525">
-            <a:solidFill>
-              <a:srgbClr val="BFBFBF"/>
-            </a:solidFill>
-          </a:ln>
-          <a:effectLst/>
-        </p:spPr>
-        <p:style>
-          <a:lnRef idx="1">
-            <a:schemeClr val="accent1"/>
-          </a:lnRef>
-          <a:fillRef idx="3">
-            <a:schemeClr val="accent1"/>
-          </a:fillRef>
-          <a:effectRef idx="2">
-            <a:schemeClr val="accent1"/>
-          </a:effectRef>
-          <a:fontRef idx="minor">
-            <a:schemeClr val="lt1"/>
-          </a:fontRef>
-        </p:style>
-        <p:txBody>
-          <a:bodyPr rtlCol="0" anchor="ctr" wrap="square" lIns="27432" rIns="27432" tIns="0" bIns="0"/>
-          <a:lstStyle/>
-          <a:p>
-            <a:pPr algn="ctr"/>
-            <a:r>
-              <a:rPr sz="850" b="0">
-                <a:solidFill>
-                  <a:srgbClr val="262626"/>
-                </a:solidFill>
-                <a:latin typeface="Calibri"/>
-              </a:rPr>
-              <a:t>C-1068</a:t>
-            </a:r>
-          </a:p>
-        </p:txBody>
-      </p:sp>
-      <p:sp>
-        <p:nvSpPr>
-          <p:cNvPr id="29" name="Rectangle 28"/>
-          <p:cNvSpPr/>
-          <p:nvPr/>
-        </p:nvSpPr>
-        <p:spPr>
-          <a:xfrm>
-            <a:off x="1261872" y="4718304"/>
-            <a:ext cx="896112" cy="256032"/>
-          </a:xfrm>
-          <a:prstGeom prst="rect">
-            <a:avLst/>
-          </a:prstGeom>
-          <a:solidFill>
-            <a:srgbClr val="DCE6F5"/>
-          </a:solidFill>
-          <a:ln w="9525">
-            <a:solidFill>
-              <a:srgbClr val="BFBFBF"/>
-            </a:solidFill>
-          </a:ln>
-          <a:effectLst/>
-        </p:spPr>
-        <p:style>
-          <a:lnRef idx="1">
-            <a:schemeClr val="accent1"/>
-          </a:lnRef>
-          <a:fillRef idx="3">
-            <a:schemeClr val="accent1"/>
-          </a:fillRef>
-          <a:effectRef idx="2">
-            <a:schemeClr val="accent1"/>
-          </a:effectRef>
-          <a:fontRef idx="minor">
-            <a:schemeClr val="lt1"/>
-          </a:fontRef>
-        </p:style>
-        <p:txBody>
-          <a:bodyPr rtlCol="0" anchor="ctr" wrap="square" lIns="27432" rIns="27432" tIns="0" bIns="0"/>
-          <a:lstStyle/>
-          <a:p>
-            <a:pPr algn="ctr"/>
-            <a:r>
-              <a:rPr sz="850" b="0">
-                <a:solidFill>
-                  <a:srgbClr val="262626"/>
-                </a:solidFill>
-                <a:latin typeface="Calibri"/>
-              </a:rPr>
-              <a:t>tech</a:t>
-            </a:r>
-          </a:p>
-        </p:txBody>
-      </p:sp>
-      <p:sp>
-        <p:nvSpPr>
-          <p:cNvPr id="30" name="Rectangle 29"/>
-          <p:cNvSpPr/>
-          <p:nvPr/>
-        </p:nvSpPr>
-        <p:spPr>
-          <a:xfrm>
-            <a:off x="2157984" y="4718304"/>
-            <a:ext cx="896112" cy="256032"/>
-          </a:xfrm>
-          <a:prstGeom prst="rect">
-            <a:avLst/>
-          </a:prstGeom>
-          <a:solidFill>
-            <a:srgbClr val="DCE6F5"/>
-          </a:solidFill>
-          <a:ln w="9525">
-            <a:solidFill>
-              <a:srgbClr val="BFBFBF"/>
-            </a:solidFill>
-          </a:ln>
-          <a:effectLst/>
-        </p:spPr>
-        <p:style>
-          <a:lnRef idx="1">
-            <a:schemeClr val="accent1"/>
-          </a:lnRef>
-          <a:fillRef idx="3">
-            <a:schemeClr val="accent1"/>
-          </a:fillRef>
-          <a:effectRef idx="2">
-            <a:schemeClr val="accent1"/>
-          </a:effectRef>
-          <a:fontRef idx="minor">
-            <a:schemeClr val="lt1"/>
-          </a:fontRef>
-        </p:style>
-        <p:txBody>
-          <a:bodyPr rtlCol="0" anchor="ctr" wrap="square" lIns="27432" rIns="27432" tIns="0" bIns="0"/>
-          <a:lstStyle/>
-          <a:p>
-            <a:pPr algn="ctr"/>
-            <a:r>
-              <a:rPr sz="850" b="0">
-                <a:solidFill>
-                  <a:srgbClr val="262626"/>
-                </a:solidFill>
-                <a:latin typeface="Calibri"/>
-              </a:rPr>
-              <a:t>29</a:t>
-            </a:r>
-          </a:p>
-        </p:txBody>
-      </p:sp>
-      <p:sp>
-        <p:nvSpPr>
-          <p:cNvPr id="31" name="Rectangle 30"/>
-          <p:cNvSpPr/>
-          <p:nvPr/>
-        </p:nvSpPr>
-        <p:spPr>
-          <a:xfrm>
-            <a:off x="3054096" y="4718304"/>
-            <a:ext cx="896112" cy="256032"/>
-          </a:xfrm>
-          <a:prstGeom prst="rect">
-            <a:avLst/>
-          </a:prstGeom>
-          <a:solidFill>
-            <a:srgbClr val="DCE6F5"/>
-          </a:solidFill>
-          <a:ln w="9525">
-            <a:solidFill>
-              <a:srgbClr val="BFBFBF"/>
-            </a:solidFill>
-          </a:ln>
-          <a:effectLst/>
-        </p:spPr>
-        <p:style>
-          <a:lnRef idx="1">
-            <a:schemeClr val="accent1"/>
-          </a:lnRef>
-          <a:fillRef idx="3">
-            <a:schemeClr val="accent1"/>
-          </a:fillRef>
-          <a:effectRef idx="2">
-            <a:schemeClr val="accent1"/>
-          </a:effectRef>
-          <a:fontRef idx="minor">
-            <a:schemeClr val="lt1"/>
-          </a:fontRef>
-        </p:style>
-        <p:txBody>
-          <a:bodyPr rtlCol="0" anchor="ctr" wrap="square" lIns="27432" rIns="27432" tIns="0" bIns="0"/>
-          <a:lstStyle/>
-          <a:p>
-            <a:pPr algn="ctr"/>
-            <a:r>
-              <a:rPr sz="850" b="0">
-                <a:solidFill>
-                  <a:srgbClr val="262626"/>
-                </a:solidFill>
-                <a:latin typeface="Calibri"/>
-              </a:rPr>
-              <a:t>876</a:t>
-            </a:r>
-          </a:p>
-        </p:txBody>
-      </p:sp>
-      <p:sp>
-        <p:nvSpPr>
-          <p:cNvPr id="32" name="Rectangle 31"/>
-          <p:cNvSpPr/>
-          <p:nvPr/>
-        </p:nvSpPr>
-        <p:spPr>
-          <a:xfrm>
-            <a:off x="3950208" y="4718304"/>
-            <a:ext cx="896112" cy="256032"/>
-          </a:xfrm>
-          <a:prstGeom prst="rect">
-            <a:avLst/>
-          </a:prstGeom>
-          <a:solidFill>
-            <a:srgbClr val="DCE6F5"/>
-          </a:solidFill>
-          <a:ln w="9525">
-            <a:solidFill>
-              <a:srgbClr val="BFBFBF"/>
-            </a:solidFill>
-          </a:ln>
-          <a:effectLst/>
-        </p:spPr>
-        <p:style>
-          <a:lnRef idx="1">
-            <a:schemeClr val="accent1"/>
-          </a:lnRef>
-          <a:fillRef idx="3">
-            <a:schemeClr val="accent1"/>
-          </a:fillRef>
-          <a:effectRef idx="2">
-            <a:schemeClr val="accent1"/>
-          </a:effectRef>
-          <a:fontRef idx="minor">
-            <a:schemeClr val="lt1"/>
-          </a:fontRef>
-        </p:style>
-        <p:txBody>
-          <a:bodyPr rtlCol="0" anchor="ctr" wrap="square" lIns="27432" rIns="27432" tIns="0" bIns="0"/>
-          <a:lstStyle/>
-          <a:p>
-            <a:pPr algn="ctr"/>
-            <a:r>
-              <a:rPr sz="850" b="0">
-                <a:solidFill>
-                  <a:srgbClr val="262626"/>
-                </a:solidFill>
-                <a:latin typeface="Calibri"/>
-              </a:rPr>
-              <a:t>no</a:t>
-            </a:r>
-          </a:p>
-        </p:txBody>
-      </p:sp>
-      <p:sp>
-        <p:nvSpPr>
-          <p:cNvPr id="33" name="Rectangle 32"/>
-          <p:cNvSpPr/>
-          <p:nvPr/>
-        </p:nvSpPr>
-        <p:spPr>
-          <a:xfrm>
-            <a:off x="365760" y="4974336"/>
-            <a:ext cx="896112" cy="256032"/>
-          </a:xfrm>
-          <a:prstGeom prst="rect">
-            <a:avLst/>
-          </a:prstGeom>
-          <a:solidFill>
-            <a:srgbClr val="FFFFFF"/>
-          </a:solidFill>
-          <a:ln w="9525">
-            <a:solidFill>
-              <a:srgbClr val="BFBFBF"/>
-            </a:solidFill>
-          </a:ln>
-          <a:effectLst/>
-        </p:spPr>
-        <p:style>
-          <a:lnRef idx="1">
-            <a:schemeClr val="accent1"/>
-          </a:lnRef>
-          <a:fillRef idx="3">
-            <a:schemeClr val="accent1"/>
-          </a:fillRef>
-          <a:effectRef idx="2">
-            <a:schemeClr val="accent1"/>
-          </a:effectRef>
-          <a:fontRef idx="minor">
-            <a:schemeClr val="lt1"/>
-          </a:fontRef>
-        </p:style>
-        <p:txBody>
-          <a:bodyPr rtlCol="0" anchor="ctr" wrap="square" lIns="27432" rIns="27432" tIns="0" bIns="0"/>
-          <a:lstStyle/>
-          <a:p>
-            <a:pPr algn="ctr"/>
-            <a:r>
-              <a:rPr sz="850" b="0">
-                <a:solidFill>
-                  <a:srgbClr val="262626"/>
-                </a:solidFill>
-                <a:latin typeface="Calibri"/>
-              </a:rPr>
-              <a:t>C-1073</a:t>
-            </a:r>
-          </a:p>
-        </p:txBody>
-      </p:sp>
-      <p:sp>
-        <p:nvSpPr>
-          <p:cNvPr id="34" name="Rectangle 33"/>
-          <p:cNvSpPr/>
-          <p:nvPr/>
-        </p:nvSpPr>
-        <p:spPr>
-          <a:xfrm>
-            <a:off x="1261872" y="4974336"/>
-            <a:ext cx="896112" cy="256032"/>
-          </a:xfrm>
-          <a:prstGeom prst="rect">
-            <a:avLst/>
-          </a:prstGeom>
-          <a:solidFill>
-            <a:srgbClr val="FFFFFF"/>
-          </a:solidFill>
-          <a:ln w="9525">
-            <a:solidFill>
-              <a:srgbClr val="BFBFBF"/>
-            </a:solidFill>
-          </a:ln>
-          <a:effectLst/>
-        </p:spPr>
-        <p:style>
-          <a:lnRef idx="1">
-            <a:schemeClr val="accent1"/>
-          </a:lnRef>
-          <a:fillRef idx="3">
-            <a:schemeClr val="accent1"/>
-          </a:fillRef>
-          <a:effectRef idx="2">
-            <a:schemeClr val="accent1"/>
-          </a:effectRef>
-          <a:fontRef idx="minor">
-            <a:schemeClr val="lt1"/>
-          </a:fontRef>
-        </p:style>
-        <p:txBody>
-          <a:bodyPr rtlCol="0" anchor="ctr" wrap="square" lIns="27432" rIns="27432" tIns="0" bIns="0"/>
-          <a:lstStyle/>
-          <a:p>
-            <a:pPr algn="ctr"/>
-            <a:r>
-              <a:rPr sz="850" b="0">
-                <a:solidFill>
-                  <a:srgbClr val="262626"/>
-                </a:solidFill>
-                <a:latin typeface="Calibri"/>
-              </a:rPr>
-              <a:t>admin</a:t>
-            </a:r>
-          </a:p>
-        </p:txBody>
-      </p:sp>
-      <p:sp>
-        <p:nvSpPr>
-          <p:cNvPr id="35" name="Rectangle 34"/>
-          <p:cNvSpPr/>
-          <p:nvPr/>
-        </p:nvSpPr>
-        <p:spPr>
-          <a:xfrm>
-            <a:off x="2157984" y="4974336"/>
-            <a:ext cx="896112" cy="256032"/>
-          </a:xfrm>
-          <a:prstGeom prst="rect">
-            <a:avLst/>
-          </a:prstGeom>
-          <a:solidFill>
-            <a:srgbClr val="FCE6D5"/>
-          </a:solidFill>
-          <a:ln w="9525">
-            <a:solidFill>
-              <a:srgbClr val="BFBFBF"/>
-            </a:solidFill>
-          </a:ln>
-          <a:effectLst/>
-        </p:spPr>
-        <p:style>
-          <a:lnRef idx="1">
-            <a:schemeClr val="accent1"/>
-          </a:lnRef>
-          <a:fillRef idx="3">
-            <a:schemeClr val="accent1"/>
-          </a:fillRef>
-          <a:effectRef idx="2">
-            <a:schemeClr val="accent1"/>
-          </a:effectRef>
-          <a:fontRef idx="minor">
-            <a:schemeClr val="lt1"/>
-          </a:fontRef>
-        </p:style>
-        <p:txBody>
-          <a:bodyPr rtlCol="0" anchor="ctr" wrap="square" lIns="27432" rIns="27432" tIns="0" bIns="0"/>
-          <a:lstStyle/>
-          <a:p>
-            <a:pPr algn="ctr"/>
-            <a:r>
-              <a:rPr sz="850" b="0">
-                <a:solidFill>
-                  <a:srgbClr val="262626"/>
-                </a:solidFill>
-                <a:latin typeface="Calibri"/>
-              </a:rPr>
-              <a:t>47</a:t>
-            </a:r>
-          </a:p>
-        </p:txBody>
-      </p:sp>
-      <p:sp>
-        <p:nvSpPr>
-          <p:cNvPr id="36" name="Rectangle 35"/>
-          <p:cNvSpPr/>
-          <p:nvPr/>
-        </p:nvSpPr>
-        <p:spPr>
-          <a:xfrm>
-            <a:off x="3054096" y="4974336"/>
-            <a:ext cx="896112" cy="256032"/>
-          </a:xfrm>
-          <a:prstGeom prst="rect">
-            <a:avLst/>
-          </a:prstGeom>
-          <a:solidFill>
-            <a:srgbClr val="FFFFFF"/>
-          </a:solidFill>
-          <a:ln w="9525">
-            <a:solidFill>
-              <a:srgbClr val="BFBFBF"/>
-            </a:solidFill>
-          </a:ln>
-          <a:effectLst/>
-        </p:spPr>
-        <p:style>
-          <a:lnRef idx="1">
-            <a:schemeClr val="accent1"/>
-          </a:lnRef>
-          <a:fillRef idx="3">
-            <a:schemeClr val="accent1"/>
-          </a:fillRef>
-          <a:effectRef idx="2">
-            <a:schemeClr val="accent1"/>
-          </a:effectRef>
-          <a:fontRef idx="minor">
-            <a:schemeClr val="lt1"/>
-          </a:fontRef>
-        </p:style>
-        <p:txBody>
-          <a:bodyPr rtlCol="0" anchor="ctr" wrap="square" lIns="27432" rIns="27432" tIns="0" bIns="0"/>
-          <a:lstStyle/>
-          <a:p>
-            <a:pPr algn="ctr"/>
-            <a:r>
-              <a:rPr sz="850" b="0">
-                <a:solidFill>
-                  <a:srgbClr val="262626"/>
-                </a:solidFill>
-                <a:latin typeface="Calibri"/>
-              </a:rPr>
-              <a:t>1,584</a:t>
-            </a:r>
-          </a:p>
-        </p:txBody>
-      </p:sp>
-      <p:sp>
-        <p:nvSpPr>
-          <p:cNvPr id="37" name="Rectangle 36"/>
-          <p:cNvSpPr/>
-          <p:nvPr/>
-        </p:nvSpPr>
-        <p:spPr>
-          <a:xfrm>
-            <a:off x="3950208" y="4974336"/>
-            <a:ext cx="896112" cy="256032"/>
-          </a:xfrm>
-          <a:prstGeom prst="rect">
-            <a:avLst/>
-          </a:prstGeom>
-          <a:solidFill>
-            <a:srgbClr val="FFFFFF"/>
-          </a:solidFill>
-          <a:ln w="9525">
-            <a:solidFill>
-              <a:srgbClr val="BFBFBF"/>
-            </a:solidFill>
-          </a:ln>
-          <a:effectLst/>
-        </p:spPr>
-        <p:style>
-          <a:lnRef idx="1">
-            <a:schemeClr val="accent1"/>
-          </a:lnRef>
-          <a:fillRef idx="3">
-            <a:schemeClr val="accent1"/>
-          </a:fillRef>
-          <a:effectRef idx="2">
-            <a:schemeClr val="accent1"/>
-          </a:effectRef>
-          <a:fontRef idx="minor">
-            <a:schemeClr val="lt1"/>
-          </a:fontRef>
-        </p:style>
-        <p:txBody>
-          <a:bodyPr rtlCol="0" anchor="ctr" wrap="square" lIns="27432" rIns="27432" tIns="0" bIns="0"/>
-          <a:lstStyle/>
-          <a:p>
-            <a:pPr algn="ctr"/>
-            <a:r>
-              <a:rPr sz="850" b="0">
-                <a:solidFill>
-                  <a:srgbClr val="262626"/>
-                </a:solidFill>
-                <a:latin typeface="Calibri"/>
-              </a:rPr>
-              <a:t>no</a:t>
-            </a:r>
-          </a:p>
-        </p:txBody>
-      </p:sp>
-      <p:sp>
-        <p:nvSpPr>
-          <p:cNvPr id="38" name="TextBox 37"/>
-          <p:cNvSpPr txBox="1"/>
-          <p:nvPr/>
-        </p:nvSpPr>
-        <p:spPr>
-          <a:xfrm>
-            <a:off x="365760" y="5321808"/>
-            <a:ext cx="4663440" cy="237744"/>
-          </a:xfrm>
-          <a:prstGeom prst="rect">
-            <a:avLst/>
-          </a:prstGeom>
-          <a:noFill/>
-        </p:spPr>
-        <p:txBody>
-          <a:bodyPr wrap="square" lIns="0" rIns="0" tIns="0" bIns="0" anchor="t">
-            <a:spAutoFit/>
-          </a:bodyPr>
-          <a:lstStyle/>
-          <a:p>
-            <a:pPr algn="l">
-              <a:spcAft>
-                <a:spcPts val="0"/>
-              </a:spcAft>
-            </a:pPr>
-            <a:r>
-              <a:rPr sz="1150" b="1">
-                <a:solidFill>
-                  <a:srgbClr val="1F3864"/>
-                </a:solidFill>
-                <a:latin typeface="Calibri"/>
-              </a:rPr>
-              <a:t>Each row is one observation — one client</a:t>
-            </a:r>
-          </a:p>
-        </p:txBody>
-      </p:sp>
-      <p:sp>
-        <p:nvSpPr>
-          <p:cNvPr id="39" name="TextBox 38"/>
-          <p:cNvSpPr txBox="1"/>
-          <p:nvPr/>
-        </p:nvSpPr>
-        <p:spPr>
-          <a:xfrm>
-            <a:off x="365760" y="5989320"/>
-            <a:ext cx="11475720" cy="640080"/>
-          </a:xfrm>
-          <a:prstGeom prst="rect">
-            <a:avLst/>
-          </a:prstGeom>
-          <a:noFill/>
-        </p:spPr>
-        <p:txBody>
-          <a:bodyPr wrap="square" lIns="0" rIns="0" tIns="0" bIns="0" anchor="t">
-            <a:spAutoFit/>
-          </a:bodyPr>
-          <a:lstStyle/>
-          <a:p>
-            <a:pPr algn="l">
-              <a:spcAft>
-                <a:spcPts val="0"/>
-              </a:spcAft>
-            </a:pPr>
-            <a:r>
-              <a:rPr sz="1100" b="0">
-                <a:solidFill>
-                  <a:srgbClr val="595959"/>
-                </a:solidFill>
-                <a:latin typeface="Calibri"/>
-              </a:rPr>
-              <a:t>Source: Variable structure adapted from Moro, S., Rita, P., and Cortez, P. (2014). Bank Marketing [Dataset]. UCI Machine Learning Repository. https://doi.org/10.24432/C5K306. The 20 client records shown here are simulated for illustration; the real data set contains 45,211 clients.</a:t>
-            </a:r>
-          </a:p>
-        </p:txBody>
-      </p:sp>
-    </p:spTree>
-    <p:extLst>
-      <p:ext uri="{BB962C8B-B14F-4D97-AF65-F5344CB8AC3E}">
-        <p14:creationId xmlns:p14="http://schemas.microsoft.com/office/powerpoint/2010/main" val="2364824393"/>
-      </p:ext>
-    </p:extLst>
-  </p:cSld>
-  <p:clrMapOvr>
-    <a:masterClrMapping/>
-  </p:clrMapOvr>
-</p:sld>
-</file>
-
-<file path=ppt/slides/slide6.xml><?xml version="1.0" encoding="utf-8"?>
+<file path=ppt/slides/slide8.xml><?xml version="1.0" encoding="utf-8"?>
 <p:sld xmlns:a="http://schemas.openxmlformats.org/drawingml/2006/main" xmlns:r="http://schemas.openxmlformats.org/officeDocument/2006/relationships" xmlns:p="http://schemas.openxmlformats.org/presentationml/2006/main">
   <p:cSld>
     <p:spTree>
@@ -12945,7 +14327,7 @@
 </p:sld>
 </file>
 
-<file path=ppt/slides/slide7.xml><?xml version="1.0" encoding="utf-8"?>
+<file path=ppt/slides/slide9.xml><?xml version="1.0" encoding="utf-8"?>
 <p:sld xmlns:a="http://schemas.openxmlformats.org/drawingml/2006/main" xmlns:r="http://schemas.openxmlformats.org/officeDocument/2006/relationships" xmlns:p="http://schemas.openxmlformats.org/presentationml/2006/main">
   <p:cSld>
     <p:spTree>
@@ -13039,897 +14421,6 @@
   <p:clrMapOvr>
     <a:masterClrMapping/>
   </p:clrMapOvr>
-</p:sld>
-</file>
-
-<file path=ppt/slides/slide8.xml><?xml version="1.0" encoding="utf-8"?>
-<p:sld xmlns:a="http://schemas.openxmlformats.org/drawingml/2006/main" xmlns:r="http://schemas.openxmlformats.org/officeDocument/2006/relationships" xmlns:p="http://schemas.openxmlformats.org/presentationml/2006/main">
-  <p:cSld>
-    <p:spTree>
-      <p:nvGrpSpPr>
-        <p:cNvPr id="1" name=""/>
-        <p:cNvGrpSpPr/>
-        <p:nvPr/>
-      </p:nvGrpSpPr>
-      <p:grpSpPr>
-        <a:xfrm>
-          <a:off x="0" y="0"/>
-          <a:ext cx="0" cy="0"/>
-          <a:chOff x="0" y="0"/>
-          <a:chExt cx="0" cy="0"/>
-        </a:xfrm>
-      </p:grpSpPr>
-      <p:sp>
-        <p:nvSpPr>
-          <p:cNvPr id="2" name="Title 1">
-            <a:extLst>
-              <a:ext uri="{FF2B5EF4-FFF2-40B4-BE49-F238E27FC236}">
-                <a16:creationId xmlns:a16="http://schemas.microsoft.com/office/drawing/2014/main" id="{96380C86-D709-6FB8-5A19-C2314095D583}"/>
-              </a:ext>
-            </a:extLst>
-          </p:cNvPr>
-          <p:cNvSpPr>
-            <a:spLocks noGrp="1"/>
-          </p:cNvSpPr>
-          <p:nvPr>
-            <p:ph type="title"/>
-          </p:nvPr>
-        </p:nvSpPr>
-        <p:spPr/>
-        <p:txBody>
-          <a:bodyPr/>
-          <a:lstStyle/>
-          <a:p>
-            <a:r>
-              <a:rPr lang="en-US" dirty="0"/>
-              <a:t>Types of Variables: Qualitative vs Quantitative</a:t>
-            </a:r>
-          </a:p>
-        </p:txBody>
-      </p:sp>
-      <p:sp>
-        <p:nvSpPr>
-          <p:cNvPr id="9" name="TextBox 8">
-            <a:extLst>
-              <a:ext uri="{FF2B5EF4-FFF2-40B4-BE49-F238E27FC236}">
-                <a16:creationId xmlns:a16="http://schemas.microsoft.com/office/drawing/2014/main" id="{D2B5399D-0B33-473E-D0B4-000D18CF4028}"/>
-              </a:ext>
-            </a:extLst>
-          </p:cNvPr>
-          <p:cNvSpPr txBox="1"/>
-          <p:nvPr/>
-        </p:nvSpPr>
-        <p:spPr>
-          <a:xfrm>
-            <a:off x="434109" y="1502921"/>
-            <a:ext cx="8146474" cy="4847481"/>
-          </a:xfrm>
-          <a:prstGeom prst="rect">
-            <a:avLst/>
-          </a:prstGeom>
-          <a:noFill/>
-        </p:spPr>
-        <p:txBody>
-          <a:bodyPr wrap="square">
-            <a:spAutoFit/>
-          </a:bodyPr>
-          <a:lstStyle/>
-          <a:p>
-            <a:pPr marL="0" marR="0" lvl="0" indent="0" algn="l" defTabSz="914400" rtl="0" eaLnBrk="1" fontAlgn="auto" latinLnBrk="0" hangingPunct="1">
-              <a:lnSpc>
-                <a:spcPct val="90000"/>
-              </a:lnSpc>
-              <a:spcBef>
-                <a:spcPts val="1000"/>
-              </a:spcBef>
-              <a:spcAft>
-                <a:spcPts val="0"/>
-              </a:spcAft>
-              <a:buClrTx/>
-              <a:buSzTx/>
-              <a:buFont typeface="Arial" panose="020B0604020202020204" pitchFamily="34" charset="0"/>
-              <a:buNone/>
-              <a:tabLst/>
-              <a:defRPr/>
-            </a:pPr>
-            <a:r>
-              <a:rPr kumimoji="0" lang="it-IT" sz="2400" b="1" i="0" u="none" strike="noStrike" kern="1200" cap="none" spc="0" normalizeH="0" baseline="0" noProof="0" dirty="0">
-                <a:ln>
-                  <a:noFill/>
-                </a:ln>
-                <a:solidFill>
-                  <a:prstClr val="black"/>
-                </a:solidFill>
-                <a:effectLst/>
-                <a:uLnTx/>
-                <a:uFillTx/>
-                <a:latin typeface="Calibri" panose="020F0502020204030204"/>
-                <a:ea typeface="+mn-ea"/>
-                <a:cs typeface="+mn-cs"/>
-              </a:rPr>
-              <a:t>Qualitative (Categorical) variable </a:t>
-            </a:r>
-            <a:r>
-              <a:rPr kumimoji="0" lang="it-IT" sz="2400" b="0" i="0" u="none" strike="noStrike" kern="1200" cap="none" spc="0" normalizeH="0" baseline="0" noProof="0" dirty="0">
-                <a:ln>
-                  <a:noFill/>
-                </a:ln>
-                <a:solidFill>
-                  <a:prstClr val="black"/>
-                </a:solidFill>
-                <a:effectLst/>
-                <a:uLnTx/>
-                <a:uFillTx/>
-                <a:latin typeface="Calibri" panose="020F0502020204030204"/>
-                <a:ea typeface="+mn-ea"/>
-                <a:cs typeface="+mn-cs"/>
-              </a:rPr>
-              <a:t>– non-numeric qualities or characteristics that can be placed in distinct categories </a:t>
-            </a:r>
-          </a:p>
-          <a:p>
-            <a:pPr lvl="1">
-              <a:lnSpc>
-                <a:spcPct val="90000"/>
-              </a:lnSpc>
-              <a:spcBef>
-                <a:spcPts val="1000"/>
-              </a:spcBef>
-              <a:defRPr/>
-            </a:pPr>
-            <a:r>
-              <a:rPr lang="it-IT" sz="2000" dirty="0">
-                <a:solidFill>
-                  <a:prstClr val="black"/>
-                </a:solidFill>
-                <a:latin typeface="Calibri" panose="020F0502020204030204"/>
-              </a:rPr>
-              <a:t>State/city (ID, WA, MT, ...)</a:t>
-            </a:r>
-          </a:p>
-          <a:p>
-            <a:pPr lvl="1">
-              <a:lnSpc>
-                <a:spcPct val="90000"/>
-              </a:lnSpc>
-              <a:spcBef>
-                <a:spcPts val="1000"/>
-              </a:spcBef>
-              <a:defRPr/>
-            </a:pPr>
-            <a:r>
-              <a:rPr lang="it-IT" sz="2000" dirty="0">
-                <a:solidFill>
-                  <a:prstClr val="black"/>
-                </a:solidFill>
-                <a:latin typeface="Calibri" panose="020F0502020204030204"/>
-              </a:rPr>
-              <a:t>Treatment (Drug/Placebo)</a:t>
-            </a:r>
-          </a:p>
-          <a:p>
-            <a:pPr lvl="1">
-              <a:lnSpc>
-                <a:spcPct val="90000"/>
-              </a:lnSpc>
-              <a:spcBef>
-                <a:spcPts val="1000"/>
-              </a:spcBef>
-              <a:defRPr/>
-            </a:pPr>
-            <a:r>
-              <a:rPr lang="it-IT" sz="2000" dirty="0">
-                <a:solidFill>
-                  <a:prstClr val="black"/>
-                </a:solidFill>
-                <a:latin typeface="Calibri" panose="020F0502020204030204"/>
-              </a:rPr>
-              <a:t>Genotype (AA, AT, TT)</a:t>
-            </a:r>
-          </a:p>
-          <a:p>
-            <a:pPr lvl="1">
-              <a:lnSpc>
-                <a:spcPct val="90000"/>
-              </a:lnSpc>
-              <a:spcBef>
-                <a:spcPts val="1000"/>
-              </a:spcBef>
-              <a:defRPr/>
-            </a:pPr>
-            <a:r>
-              <a:rPr lang="it-IT" sz="2000" dirty="0">
-                <a:solidFill>
-                  <a:prstClr val="black"/>
-                </a:solidFill>
-                <a:latin typeface="Calibri" panose="020F0502020204030204"/>
-              </a:rPr>
-              <a:t>Survival (live or die) </a:t>
-            </a:r>
-          </a:p>
-          <a:p>
-            <a:pPr>
-              <a:lnSpc>
-                <a:spcPct val="90000"/>
-              </a:lnSpc>
-              <a:spcBef>
-                <a:spcPts val="1000"/>
-              </a:spcBef>
-              <a:defRPr/>
-            </a:pPr>
-            <a:r>
-              <a:rPr kumimoji="0" lang="it-IT" sz="2400" b="1" i="0" u="none" strike="noStrike" kern="1200" cap="none" spc="0" normalizeH="0" baseline="0" noProof="0" dirty="0">
-                <a:ln>
-                  <a:noFill/>
-                </a:ln>
-                <a:solidFill>
-                  <a:prstClr val="black"/>
-                </a:solidFill>
-                <a:effectLst/>
-                <a:uLnTx/>
-                <a:uFillTx/>
-                <a:latin typeface="Calibri" panose="020F0502020204030204"/>
-                <a:ea typeface="+mn-ea"/>
-                <a:cs typeface="+mn-cs"/>
-              </a:rPr>
-              <a:t>Quantitative (numeric) variable </a:t>
-            </a:r>
-            <a:r>
-              <a:rPr kumimoji="0" lang="it-IT" sz="2400" b="0" i="0" u="none" strike="noStrike" kern="1200" cap="none" spc="0" normalizeH="0" baseline="0" noProof="0" dirty="0">
-                <a:ln>
-                  <a:noFill/>
-                </a:ln>
-                <a:solidFill>
-                  <a:prstClr val="black"/>
-                </a:solidFill>
-                <a:effectLst/>
-                <a:uLnTx/>
-                <a:uFillTx/>
-                <a:latin typeface="Calibri" panose="020F0502020204030204"/>
-                <a:ea typeface="+mn-ea"/>
-                <a:cs typeface="+mn-cs"/>
-              </a:rPr>
-              <a:t>– numerical characteristics - can be ordered or ranked</a:t>
-            </a:r>
-            <a:r>
-              <a:rPr kumimoji="0" lang="en-US" sz="2400" b="0" i="0" u="none" strike="noStrike" kern="1200" cap="none" spc="0" normalizeH="0" baseline="0" noProof="0" dirty="0">
-                <a:ln>
-                  <a:noFill/>
-                </a:ln>
-                <a:solidFill>
-                  <a:prstClr val="black"/>
-                </a:solidFill>
-                <a:effectLst/>
-                <a:uLnTx/>
-                <a:uFillTx/>
-                <a:latin typeface="Calibri" panose="020F0502020204030204"/>
-                <a:ea typeface="+mn-ea"/>
-                <a:cs typeface="+mn-cs"/>
-              </a:rPr>
-              <a:t> </a:t>
-            </a:r>
-          </a:p>
-          <a:p>
-            <a:pPr lvl="1">
-              <a:lnSpc>
-                <a:spcPct val="90000"/>
-              </a:lnSpc>
-              <a:spcBef>
-                <a:spcPts val="1000"/>
-              </a:spcBef>
-              <a:defRPr/>
-            </a:pPr>
-            <a:r>
-              <a:rPr lang="en-US" sz="2000" dirty="0">
-                <a:solidFill>
-                  <a:prstClr val="black"/>
-                </a:solidFill>
-                <a:latin typeface="Calibri" panose="020F0502020204030204"/>
-              </a:rPr>
-              <a:t>Height (inches/cm)</a:t>
-            </a:r>
-          </a:p>
-          <a:p>
-            <a:pPr lvl="1">
-              <a:lnSpc>
-                <a:spcPct val="90000"/>
-              </a:lnSpc>
-              <a:spcBef>
-                <a:spcPts val="1000"/>
-              </a:spcBef>
-              <a:defRPr/>
-            </a:pPr>
-            <a:r>
-              <a:rPr kumimoji="0" lang="en-US" sz="2000" b="0" i="0" u="none" strike="noStrike" kern="1200" cap="none" spc="0" normalizeH="0" baseline="0" noProof="0" dirty="0">
-                <a:ln>
-                  <a:noFill/>
-                </a:ln>
-                <a:solidFill>
-                  <a:prstClr val="black"/>
-                </a:solidFill>
-                <a:effectLst/>
-                <a:uLnTx/>
-                <a:uFillTx/>
-                <a:latin typeface="Calibri" panose="020F0502020204030204"/>
-                <a:ea typeface="+mn-ea"/>
-                <a:cs typeface="+mn-cs"/>
-              </a:rPr>
-              <a:t>Weight (</a:t>
-            </a:r>
-            <a:r>
-              <a:rPr kumimoji="0" lang="en-US" sz="2000" b="0" i="0" u="none" strike="noStrike" kern="1200" cap="none" spc="0" normalizeH="0" baseline="0" noProof="0" dirty="0" err="1">
-                <a:ln>
-                  <a:noFill/>
-                </a:ln>
-                <a:solidFill>
-                  <a:prstClr val="black"/>
-                </a:solidFill>
-                <a:effectLst/>
-                <a:uLnTx/>
-                <a:uFillTx/>
-                <a:latin typeface="Calibri" panose="020F0502020204030204"/>
-                <a:ea typeface="+mn-ea"/>
-                <a:cs typeface="+mn-cs"/>
-              </a:rPr>
-              <a:t>lbs</a:t>
-            </a:r>
-            <a:r>
-              <a:rPr lang="en-US" sz="2000" dirty="0">
-                <a:solidFill>
-                  <a:prstClr val="black"/>
-                </a:solidFill>
-                <a:latin typeface="Calibri" panose="020F0502020204030204"/>
-              </a:rPr>
-              <a:t>/kg)</a:t>
-            </a:r>
-          </a:p>
-          <a:p>
-            <a:pPr lvl="1">
-              <a:lnSpc>
-                <a:spcPct val="90000"/>
-              </a:lnSpc>
-              <a:spcBef>
-                <a:spcPts val="1000"/>
-              </a:spcBef>
-              <a:defRPr/>
-            </a:pPr>
-            <a:r>
-              <a:rPr kumimoji="0" lang="en-US" sz="2000" b="0" i="0" u="none" strike="noStrike" kern="1200" cap="none" spc="0" normalizeH="0" baseline="0" noProof="0" dirty="0">
-                <a:ln>
-                  <a:noFill/>
-                </a:ln>
-                <a:solidFill>
-                  <a:prstClr val="black"/>
-                </a:solidFill>
-                <a:effectLst/>
-                <a:uLnTx/>
-                <a:uFillTx/>
-                <a:latin typeface="Calibri" panose="020F0502020204030204"/>
-                <a:ea typeface="+mn-ea"/>
-                <a:cs typeface="+mn-cs"/>
-              </a:rPr>
-              <a:t>Longevity/Age (number of years)</a:t>
-            </a:r>
-            <a:endParaRPr lang="en-US" sz="2000" dirty="0">
-              <a:solidFill>
-                <a:prstClr val="black"/>
-              </a:solidFill>
-              <a:latin typeface="Calibri" panose="020F0502020204030204"/>
-            </a:endParaRPr>
-          </a:p>
-          <a:p>
-            <a:pPr lvl="1">
-              <a:lnSpc>
-                <a:spcPct val="90000"/>
-              </a:lnSpc>
-              <a:spcBef>
-                <a:spcPts val="1000"/>
-              </a:spcBef>
-              <a:defRPr/>
-            </a:pPr>
-            <a:r>
-              <a:rPr lang="en-US" sz="2000" dirty="0">
-                <a:solidFill>
-                  <a:prstClr val="black"/>
-                </a:solidFill>
-                <a:latin typeface="Calibri" panose="020F0502020204030204"/>
-              </a:rPr>
-              <a:t>Dose (micrograms per gram)</a:t>
-            </a:r>
-            <a:endParaRPr kumimoji="0" lang="en-US" sz="2000" b="0" i="0" u="none" strike="noStrike" kern="1200" cap="none" spc="0" normalizeH="0" baseline="0" noProof="0" dirty="0">
-              <a:ln>
-                <a:noFill/>
-              </a:ln>
-              <a:solidFill>
-                <a:prstClr val="black"/>
-              </a:solidFill>
-              <a:effectLst/>
-              <a:uLnTx/>
-              <a:uFillTx/>
-              <a:latin typeface="Calibri" panose="020F0502020204030204"/>
-              <a:ea typeface="+mn-ea"/>
-              <a:cs typeface="+mn-cs"/>
-            </a:endParaRPr>
-          </a:p>
-        </p:txBody>
-      </p:sp>
-      <p:pic>
-        <p:nvPicPr>
-          <p:cNvPr id="4" name="Picture 3" descr="A group of eyeballs with different colors&#10;&#10;Description automatically generated">
-            <a:extLst>
-              <a:ext uri="{FF2B5EF4-FFF2-40B4-BE49-F238E27FC236}">
-                <a16:creationId xmlns:a16="http://schemas.microsoft.com/office/drawing/2014/main" id="{C9CB58EF-0020-259B-BBA0-EDD86D22EA6B}"/>
-              </a:ext>
-            </a:extLst>
-          </p:cNvPr>
-          <p:cNvPicPr>
-            <a:picLocks noChangeAspect="1"/>
-          </p:cNvPicPr>
-          <p:nvPr/>
-        </p:nvPicPr>
-        <p:blipFill>
-          <a:blip r:embed="rId2">
-            <a:extLst>
-              <a:ext uri="{28A0092B-C50C-407E-A947-70E740481C1C}">
-                <a14:useLocalDpi xmlns:a14="http://schemas.microsoft.com/office/drawing/2010/main" val="0"/>
-              </a:ext>
-              <a:ext uri="{837473B0-CC2E-450A-ABE3-18F120FF3D39}">
-                <a1611:picAttrSrcUrl xmlns:a1611="http://schemas.microsoft.com/office/drawing/2016/11/main" r:id="rId3"/>
-              </a:ext>
-            </a:extLst>
-          </a:blip>
-          <a:stretch>
-            <a:fillRect/>
-          </a:stretch>
-        </p:blipFill>
-        <p:spPr>
-          <a:xfrm>
-            <a:off x="8843241" y="1290485"/>
-            <a:ext cx="2914650" cy="2914650"/>
-          </a:xfrm>
-          <a:prstGeom prst="rect">
-            <a:avLst/>
-          </a:prstGeom>
-        </p:spPr>
-      </p:pic>
-      <p:pic>
-        <p:nvPicPr>
-          <p:cNvPr id="8" name="Picture 7" descr="A person standing in front of a height chart&#10;&#10;Description automatically generated">
-            <a:extLst>
-              <a:ext uri="{FF2B5EF4-FFF2-40B4-BE49-F238E27FC236}">
-                <a16:creationId xmlns:a16="http://schemas.microsoft.com/office/drawing/2014/main" id="{89B104AB-C4AB-B363-BF96-947E6616FA75}"/>
-              </a:ext>
-            </a:extLst>
-          </p:cNvPr>
-          <p:cNvPicPr>
-            <a:picLocks noChangeAspect="1"/>
-          </p:cNvPicPr>
-          <p:nvPr/>
-        </p:nvPicPr>
-        <p:blipFill>
-          <a:blip r:embed="rId4">
-            <a:extLst>
-              <a:ext uri="{28A0092B-C50C-407E-A947-70E740481C1C}">
-                <a14:useLocalDpi xmlns:a14="http://schemas.microsoft.com/office/drawing/2010/main" val="0"/>
-              </a:ext>
-              <a:ext uri="{837473B0-CC2E-450A-ABE3-18F120FF3D39}">
-                <a1611:picAttrSrcUrl xmlns:a1611="http://schemas.microsoft.com/office/drawing/2016/11/main" r:id="rId5"/>
-              </a:ext>
-            </a:extLst>
-          </a:blip>
-          <a:stretch>
-            <a:fillRect/>
-          </a:stretch>
-        </p:blipFill>
-        <p:spPr>
-          <a:xfrm>
-            <a:off x="9568873" y="3994439"/>
-            <a:ext cx="2451676" cy="2725447"/>
-          </a:xfrm>
-          <a:prstGeom prst="rect">
-            <a:avLst/>
-          </a:prstGeom>
-        </p:spPr>
-      </p:pic>
-    </p:spTree>
-    <p:extLst>
-      <p:ext uri="{BB962C8B-B14F-4D97-AF65-F5344CB8AC3E}">
-        <p14:creationId xmlns:p14="http://schemas.microsoft.com/office/powerpoint/2010/main" val="3065098557"/>
-      </p:ext>
-    </p:extLst>
-  </p:cSld>
-  <p:clrMapOvr>
-    <a:masterClrMapping/>
-  </p:clrMapOvr>
-</p:sld>
-</file>
-
-<file path=ppt/slides/slide9.xml><?xml version="1.0" encoding="utf-8"?>
-<p:sld xmlns:a="http://schemas.openxmlformats.org/drawingml/2006/main" xmlns:r="http://schemas.openxmlformats.org/officeDocument/2006/relationships" xmlns:p="http://schemas.openxmlformats.org/presentationml/2006/main">
-  <p:cSld>
-    <p:spTree>
-      <p:nvGrpSpPr>
-        <p:cNvPr id="1" name=""/>
-        <p:cNvGrpSpPr/>
-        <p:nvPr/>
-      </p:nvGrpSpPr>
-      <p:grpSpPr>
-        <a:xfrm>
-          <a:off x="0" y="0"/>
-          <a:ext cx="0" cy="0"/>
-          <a:chOff x="0" y="0"/>
-          <a:chExt cx="0" cy="0"/>
-        </a:xfrm>
-      </p:grpSpPr>
-      <p:sp>
-        <p:nvSpPr>
-          <p:cNvPr id="2" name="Title 1">
-            <a:extLst>
-              <a:ext uri="{FF2B5EF4-FFF2-40B4-BE49-F238E27FC236}">
-                <a16:creationId xmlns:a16="http://schemas.microsoft.com/office/drawing/2014/main" id="{96380C86-D709-6FB8-5A19-C2314095D583}"/>
-              </a:ext>
-            </a:extLst>
-          </p:cNvPr>
-          <p:cNvSpPr>
-            <a:spLocks noGrp="1"/>
-          </p:cNvSpPr>
-          <p:nvPr>
-            <p:ph type="title"/>
-          </p:nvPr>
-        </p:nvSpPr>
-        <p:spPr>
-          <a:xfrm>
-            <a:off x="104775" y="69850"/>
-            <a:ext cx="10515600" cy="1325563"/>
-          </a:xfrm>
-        </p:spPr>
-        <p:txBody>
-          <a:bodyPr/>
-          <a:lstStyle/>
-          <a:p>
-            <a:r>
-              <a:rPr lang="en-US" dirty="0"/>
-              <a:t>Practice: Qualitative vs Quantitative</a:t>
-            </a:r>
-          </a:p>
-        </p:txBody>
-      </p:sp>
-      <p:sp>
-        <p:nvSpPr>
-          <p:cNvPr id="3" name="TextBox 2">
-            <a:extLst>
-              <a:ext uri="{FF2B5EF4-FFF2-40B4-BE49-F238E27FC236}">
-                <a16:creationId xmlns:a16="http://schemas.microsoft.com/office/drawing/2014/main" id="{8E831E4D-A6B4-F06F-3427-B337D4295CFB}"/>
-              </a:ext>
-            </a:extLst>
-          </p:cNvPr>
-          <p:cNvSpPr txBox="1"/>
-          <p:nvPr/>
-        </p:nvSpPr>
-        <p:spPr>
-          <a:xfrm>
-            <a:off x="434109" y="2159442"/>
-            <a:ext cx="5661891" cy="646331"/>
-          </a:xfrm>
-          <a:prstGeom prst="rect">
-            <a:avLst/>
-          </a:prstGeom>
-          <a:noFill/>
-        </p:spPr>
-        <p:txBody>
-          <a:bodyPr wrap="square">
-            <a:spAutoFit/>
-          </a:bodyPr>
-          <a:lstStyle/>
-          <a:p>
-            <a:pPr marL="0" marR="0" lvl="0" indent="0" algn="l" defTabSz="914400" rtl="0" eaLnBrk="1" fontAlgn="auto" latinLnBrk="0" hangingPunct="1">
-              <a:lnSpc>
-                <a:spcPct val="90000"/>
-              </a:lnSpc>
-              <a:spcBef>
-                <a:spcPts val="1000"/>
-              </a:spcBef>
-              <a:spcAft>
-                <a:spcPts val="0"/>
-              </a:spcAft>
-              <a:buClrTx/>
-              <a:buSzTx/>
-              <a:buFont typeface="Arial" panose="020B0604020202020204" pitchFamily="34" charset="0"/>
-              <a:buNone/>
-              <a:tabLst/>
-              <a:defRPr/>
-            </a:pPr>
-            <a:r>
-              <a:rPr kumimoji="0" lang="it-IT" sz="2000" b="0" i="0" u="none" strike="noStrike" kern="1200" cap="none" spc="0" normalizeH="0" baseline="0" noProof="0" dirty="0">
-                <a:ln>
-                  <a:noFill/>
-                </a:ln>
-                <a:solidFill>
-                  <a:prstClr val="black"/>
-                </a:solidFill>
-                <a:effectLst/>
-                <a:uLnTx/>
-                <a:uFillTx/>
-                <a:latin typeface="Calibri" panose="020F0502020204030204"/>
-                <a:ea typeface="+mn-ea"/>
-                <a:cs typeface="+mn-cs"/>
-              </a:rPr>
-              <a:t>From our example data of egyptian skulls, which variables are qualitative and which are quantitative?</a:t>
-            </a:r>
-          </a:p>
-        </p:txBody>
-      </p:sp>
-      <p:pic>
-        <p:nvPicPr>
-          <p:cNvPr id="4" name="Picture 3">
-            <a:extLst>
-              <a:ext uri="{FF2B5EF4-FFF2-40B4-BE49-F238E27FC236}">
-                <a16:creationId xmlns:a16="http://schemas.microsoft.com/office/drawing/2014/main" id="{3F312E28-59BC-B226-775F-D5CF9922FAB9}"/>
-              </a:ext>
-            </a:extLst>
-          </p:cNvPr>
-          <p:cNvPicPr>
-            <a:picLocks noChangeAspect="1"/>
-          </p:cNvPicPr>
-          <p:nvPr/>
-        </p:nvPicPr>
-        <p:blipFill>
-          <a:blip r:embed="rId2"/>
-          <a:stretch>
-            <a:fillRect/>
-          </a:stretch>
-        </p:blipFill>
-        <p:spPr>
-          <a:xfrm>
-            <a:off x="7304836" y="1072395"/>
-            <a:ext cx="4694327" cy="5785605"/>
-          </a:xfrm>
-          <a:prstGeom prst="rect">
-            <a:avLst/>
-          </a:prstGeom>
-        </p:spPr>
-      </p:pic>
-      <p:sp>
-        <p:nvSpPr>
-          <p:cNvPr id="5" name="TextBox 4">
-            <a:extLst>
-              <a:ext uri="{FF2B5EF4-FFF2-40B4-BE49-F238E27FC236}">
-                <a16:creationId xmlns:a16="http://schemas.microsoft.com/office/drawing/2014/main" id="{B9E6328E-BC34-D96A-EE97-4C6144D12878}"/>
-              </a:ext>
-            </a:extLst>
-          </p:cNvPr>
-          <p:cNvSpPr txBox="1"/>
-          <p:nvPr/>
-        </p:nvSpPr>
-        <p:spPr>
-          <a:xfrm>
-            <a:off x="591127" y="3805382"/>
-            <a:ext cx="3269673" cy="369332"/>
-          </a:xfrm>
-          <a:prstGeom prst="rect">
-            <a:avLst/>
-          </a:prstGeom>
-          <a:noFill/>
-        </p:spPr>
-        <p:txBody>
-          <a:bodyPr wrap="square" rtlCol="0">
-            <a:spAutoFit/>
-          </a:bodyPr>
-          <a:lstStyle/>
-          <a:p>
-            <a:r>
-              <a:rPr lang="en-US" dirty="0">
-                <a:solidFill>
-                  <a:srgbClr val="FF0000"/>
-                </a:solidFill>
-              </a:rPr>
-              <a:t>Qualitative: Epoch</a:t>
-            </a:r>
-          </a:p>
-        </p:txBody>
-      </p:sp>
-      <p:sp>
-        <p:nvSpPr>
-          <p:cNvPr id="6" name="TextBox 5">
-            <a:extLst>
-              <a:ext uri="{FF2B5EF4-FFF2-40B4-BE49-F238E27FC236}">
-                <a16:creationId xmlns:a16="http://schemas.microsoft.com/office/drawing/2014/main" id="{C34BFAB7-0B15-EF69-1025-9748F115FE7D}"/>
-              </a:ext>
-            </a:extLst>
-          </p:cNvPr>
-          <p:cNvSpPr txBox="1"/>
-          <p:nvPr/>
-        </p:nvSpPr>
-        <p:spPr>
-          <a:xfrm>
-            <a:off x="591126" y="5103091"/>
-            <a:ext cx="3269673" cy="369332"/>
-          </a:xfrm>
-          <a:prstGeom prst="rect">
-            <a:avLst/>
-          </a:prstGeom>
-          <a:noFill/>
-        </p:spPr>
-        <p:txBody>
-          <a:bodyPr wrap="square" rtlCol="0">
-            <a:spAutoFit/>
-          </a:bodyPr>
-          <a:lstStyle/>
-          <a:p>
-            <a:r>
-              <a:rPr lang="en-US" dirty="0">
-                <a:solidFill>
-                  <a:srgbClr val="FF0000"/>
-                </a:solidFill>
-              </a:rPr>
-              <a:t>Quantitative: mb, </a:t>
-            </a:r>
-            <a:r>
-              <a:rPr lang="en-US" dirty="0" err="1">
-                <a:solidFill>
-                  <a:srgbClr val="FF0000"/>
-                </a:solidFill>
-              </a:rPr>
-              <a:t>bh</a:t>
-            </a:r>
-            <a:r>
-              <a:rPr lang="en-US" dirty="0">
-                <a:solidFill>
-                  <a:srgbClr val="FF0000"/>
-                </a:solidFill>
-              </a:rPr>
-              <a:t>, bl, </a:t>
-            </a:r>
-            <a:r>
-              <a:rPr lang="en-US" dirty="0" err="1">
-                <a:solidFill>
-                  <a:srgbClr val="FF0000"/>
-                </a:solidFill>
-              </a:rPr>
-              <a:t>nh</a:t>
-            </a:r>
-            <a:endParaRPr lang="en-US" dirty="0">
-              <a:solidFill>
-                <a:srgbClr val="FF0000"/>
-              </a:solidFill>
-            </a:endParaRPr>
-          </a:p>
-        </p:txBody>
-      </p:sp>
-    </p:spTree>
-    <p:extLst>
-      <p:ext uri="{BB962C8B-B14F-4D97-AF65-F5344CB8AC3E}">
-        <p14:creationId xmlns:p14="http://schemas.microsoft.com/office/powerpoint/2010/main" val="2934979343"/>
-      </p:ext>
-    </p:extLst>
-  </p:cSld>
-  <p:clrMapOvr>
-    <a:masterClrMapping/>
-  </p:clrMapOvr>
-  <p:timing>
-    <p:tnLst>
-      <p:par>
-        <p:cTn id="1" dur="indefinite" restart="never" nodeType="tmRoot">
-          <p:childTnLst>
-            <p:seq concurrent="1" nextAc="seek">
-              <p:cTn id="2" dur="indefinite" nodeType="mainSeq">
-                <p:childTnLst>
-                  <p:par>
-                    <p:cTn id="3" fill="hold">
-                      <p:stCondLst>
-                        <p:cond delay="indefinite"/>
-                      </p:stCondLst>
-                      <p:childTnLst>
-                        <p:par>
-                          <p:cTn id="4" fill="hold">
-                            <p:stCondLst>
-                              <p:cond delay="0"/>
-                            </p:stCondLst>
-                            <p:childTnLst>
-                              <p:par>
-                                <p:cTn id="5" presetID="1" presetClass="entr" presetSubtype="0" fill="hold" grpId="0" nodeType="clickEffect">
-                                  <p:stCondLst>
-                                    <p:cond delay="0"/>
-                                  </p:stCondLst>
-                                  <p:childTnLst>
-                                    <p:set>
-                                      <p:cBhvr>
-                                        <p:cTn id="6" dur="1" fill="hold">
-                                          <p:stCondLst>
-                                            <p:cond delay="0"/>
-                                          </p:stCondLst>
-                                        </p:cTn>
-                                        <p:tgtEl>
-                                          <p:spTgt spid="5"/>
-                                        </p:tgtEl>
-                                        <p:attrNameLst>
-                                          <p:attrName>style.visibility</p:attrName>
-                                        </p:attrNameLst>
-                                      </p:cBhvr>
-                                      <p:to>
-                                        <p:strVal val="visible"/>
-                                      </p:to>
-                                    </p:set>
-                                  </p:childTnLst>
-                                </p:cTn>
-                              </p:par>
-                            </p:childTnLst>
-                          </p:cTn>
-                        </p:par>
-                      </p:childTnLst>
-                    </p:cTn>
-                  </p:par>
-                  <p:par>
-                    <p:cTn id="7" fill="hold">
-                      <p:stCondLst>
-                        <p:cond delay="indefinite"/>
-                      </p:stCondLst>
-                      <p:childTnLst>
-                        <p:par>
-                          <p:cTn id="8" fill="hold">
-                            <p:stCondLst>
-                              <p:cond delay="0"/>
-                            </p:stCondLst>
-                            <p:childTnLst>
-                              <p:par>
-                                <p:cTn id="9" presetID="1" presetClass="entr" presetSubtype="0" fill="hold" grpId="0" nodeType="clickEffect">
-                                  <p:stCondLst>
-                                    <p:cond delay="0"/>
-                                  </p:stCondLst>
-                                  <p:childTnLst>
-                                    <p:set>
-                                      <p:cBhvr>
-                                        <p:cTn id="10" dur="1" fill="hold">
-                                          <p:stCondLst>
-                                            <p:cond delay="0"/>
-                                          </p:stCondLst>
-                                        </p:cTn>
-                                        <p:tgtEl>
-                                          <p:spTgt spid="6"/>
-                                        </p:tgtEl>
-                                        <p:attrNameLst>
-                                          <p:attrName>style.visibility</p:attrName>
-                                        </p:attrNameLst>
-                                      </p:cBhvr>
-                                      <p:to>
-                                        <p:strVal val="visible"/>
-                                      </p:to>
-                                    </p:set>
-                                  </p:childTnLst>
-                                </p:cTn>
-                              </p:par>
-                            </p:childTnLst>
-                          </p:cTn>
-                        </p:par>
-                      </p:childTnLst>
-                    </p:cTn>
-                  </p:par>
-                </p:childTnLst>
-              </p:cTn>
-              <p:prevCondLst>
-                <p:cond evt="onPrev" delay="0">
-                  <p:tgtEl>
-                    <p:sldTgt/>
-                  </p:tgtEl>
-                </p:cond>
-              </p:prevCondLst>
-              <p:nextCondLst>
-                <p:cond evt="onNext" delay="0">
-                  <p:tgtEl>
-                    <p:sldTgt/>
-                  </p:tgtEl>
-                </p:cond>
-              </p:nextCondLst>
-            </p:seq>
-          </p:childTnLst>
-        </p:cTn>
-      </p:par>
-    </p:tnLst>
-    <p:bldLst>
-      <p:bldP spid="5" grpId="0"/>
-      <p:bldP spid="6" grpId="0"/>
-    </p:bldLst>
-  </p:timing>
 </p:sld>
 </file>
 
@@ -14226,4 +14717,26 @@
     </a:ext>
   </a:extLst>
 </a:theme>
+</file>
+
+<file path=ppt/webextensions/taskpanes.xml><?xml version="1.0" encoding="utf-8"?>
+<wetp:taskpanes xmlns:wetp="http://schemas.microsoft.com/office/webextensions/taskpanes/2010/11">
+  <wetp:taskpane dockstate="right" visibility="0" width="438" row="0">
+    <wetp:webextensionref xmlns:r="http://schemas.openxmlformats.org/officeDocument/2006/relationships" r:id="rId1"/>
+  </wetp:taskpane>
+</wetp:taskpanes>
+</file>
+
+<file path=ppt/webextensions/webextension1.xml><?xml version="1.0" encoding="utf-8"?>
+<we:webextension xmlns:we="http://schemas.microsoft.com/office/webextensions/webextension/2010/11" id="{205F6EF9-EBF7-49DD-8A6A-BEF98EE36C8A}">
+  <we:reference id="wa200010001" version="1.0.0.1" store="en-US" storeType="OMEX"/>
+  <we:alternateReferences>
+    <we:reference id="wa200010001" version="1.0.0.1" store="en-US" storeType="OMEX"/>
+  </we:alternateReferences>
+  <we:properties>
+    <we:property name="claude.fileId" value="&quot;12316abd-73cf-4a85-9b4b-f0bf15246e50&quot;"/>
+  </we:properties>
+  <we:bindings/>
+  <we:snapshot xmlns:r="http://schemas.openxmlformats.org/officeDocument/2006/relationships"/>
+</we:webextension>
 </file>
--- a/docs/lecture_slides/Week 1/Week1_Lecture1_Slides_1_10_2024.pptx
+++ b/docs/lecture_slides/Week 1/Week1_Lecture1_Slides_1_10_2024.pptx
@@ -6,9 +6,9 @@
   </p:sldMasterIdLst>
   <p:sldIdLst>
     <p:sldId id="258" r:id="rId2"/>
-    <p:sldId id="286" r:id="rId3"/>
-    <p:sldId id="285" r:id="rId4"/>
-    <p:sldId id="257" r:id="rId5"/>
+    <p:sldId id="285" r:id="rId3"/>
+    <p:sldId id="257" r:id="rId4"/>
+    <p:sldId id="286" r:id="rId5"/>
     <p:sldId id="293" r:id="rId6"/>
     <p:sldId id="259" r:id="rId7"/>
     <p:sldId id="261" r:id="rId8"/>
@@ -127,7 +127,7 @@
 </file>
 
 <file path=ppt/diagrams/colors1.xml><?xml version="1.0" encoding="utf-8"?>
-<dgm:colorsDef xmlns:dgm="http://schemas.openxmlformats.org/drawingml/2006/diagram" xmlns:a="http://schemas.openxmlformats.org/drawingml/2006/main" uniqueId="urn:microsoft.com/office/officeart/2005/8/colors/accent1_2">
+<dgm:colorsDef xmlns:dgm="http://schemas.openxmlformats.org/drawingml/2006/diagram" xmlns:a="http://schemas.openxmlformats.org/drawingml/2006/main" uniqueId="urn:microsoft.com/office/officeart/2005/8/colors/accent1_2#1">
   <dgm:title val=""/>
   <dgm:desc val=""/>
   <dgm:catLst>
@@ -877,7 +877,7 @@
 <dgm:dataModel xmlns:dgm="http://schemas.openxmlformats.org/drawingml/2006/diagram" xmlns:a="http://schemas.openxmlformats.org/drawingml/2006/main">
   <dgm:ptLst>
     <dgm:pt modelId="{28C7EA2F-9E63-4866-8ADB-4C7590AC9890}" type="doc">
-      <dgm:prSet loTypeId="urn:microsoft.com/office/officeart/2018/2/layout/IconVerticalSolidList" loCatId="icon" qsTypeId="urn:microsoft.com/office/officeart/2005/8/quickstyle/simple1" qsCatId="simple" csTypeId="urn:microsoft.com/office/officeart/2005/8/colors/accent1_2" csCatId="accent1" phldr="1"/>
+      <dgm:prSet loTypeId="urn:microsoft.com/office/officeart/2018/2/layout/IconVerticalSolidList" loCatId="icon" qsTypeId="urn:microsoft.com/office/officeart/2005/8/quickstyle/simple1#1" qsCatId="simple" csTypeId="urn:microsoft.com/office/officeart/2005/8/colors/accent1_2#1" csCatId="accent1" phldr="1"/>
       <dgm:spPr/>
       <dgm:t>
         <a:bodyPr/>
@@ -2010,7 +2010,7 @@
 </file>
 
 <file path=ppt/diagrams/quickStyle1.xml><?xml version="1.0" encoding="utf-8"?>
-<dgm:styleDef xmlns:dgm="http://schemas.openxmlformats.org/drawingml/2006/diagram" xmlns:a="http://schemas.openxmlformats.org/drawingml/2006/main" uniqueId="urn:microsoft.com/office/officeart/2005/8/quickstyle/simple1">
+<dgm:styleDef xmlns:dgm="http://schemas.openxmlformats.org/drawingml/2006/diagram" xmlns:a="http://schemas.openxmlformats.org/drawingml/2006/main" uniqueId="urn:microsoft.com/office/officeart/2005/8/quickstyle/simple1#1">
   <dgm:title val=""/>
   <dgm:desc val=""/>
   <dgm:catLst>
@@ -3190,7 +3190,7 @@
           <a:p>
             <a:fld id="{D808A37A-4640-4712-9D8F-F69B6FC23B38}" type="datetimeFigureOut">
               <a:rPr lang="en-US" smtClean="0"/>
-              <a:t>8/18/2026</a:t>
+              <a:t>8/26/2026</a:t>
             </a:fld>
             <a:endParaRPr lang="en-US"/>
           </a:p>
@@ -3388,7 +3388,7 @@
           <a:p>
             <a:fld id="{D808A37A-4640-4712-9D8F-F69B6FC23B38}" type="datetimeFigureOut">
               <a:rPr lang="en-US" smtClean="0"/>
-              <a:t>8/18/2026</a:t>
+              <a:t>8/26/2026</a:t>
             </a:fld>
             <a:endParaRPr lang="en-US"/>
           </a:p>
@@ -3596,7 +3596,7 @@
           <a:p>
             <a:fld id="{D808A37A-4640-4712-9D8F-F69B6FC23B38}" type="datetimeFigureOut">
               <a:rPr lang="en-US" smtClean="0"/>
-              <a:t>8/18/2026</a:t>
+              <a:t>8/26/2026</a:t>
             </a:fld>
             <a:endParaRPr lang="en-US"/>
           </a:p>
@@ -3794,7 +3794,7 @@
           <a:p>
             <a:fld id="{D808A37A-4640-4712-9D8F-F69B6FC23B38}" type="datetimeFigureOut">
               <a:rPr lang="en-US" smtClean="0"/>
-              <a:t>8/18/2026</a:t>
+              <a:t>8/26/2026</a:t>
             </a:fld>
             <a:endParaRPr lang="en-US"/>
           </a:p>
@@ -4069,7 +4069,7 @@
           <a:p>
             <a:fld id="{D808A37A-4640-4712-9D8F-F69B6FC23B38}" type="datetimeFigureOut">
               <a:rPr lang="en-US" smtClean="0"/>
-              <a:t>8/18/2026</a:t>
+              <a:t>8/26/2026</a:t>
             </a:fld>
             <a:endParaRPr lang="en-US"/>
           </a:p>
@@ -4334,7 +4334,7 @@
           <a:p>
             <a:fld id="{D808A37A-4640-4712-9D8F-F69B6FC23B38}" type="datetimeFigureOut">
               <a:rPr lang="en-US" smtClean="0"/>
-              <a:t>8/18/2026</a:t>
+              <a:t>8/26/2026</a:t>
             </a:fld>
             <a:endParaRPr lang="en-US"/>
           </a:p>
@@ -4746,7 +4746,7 @@
           <a:p>
             <a:fld id="{D808A37A-4640-4712-9D8F-F69B6FC23B38}" type="datetimeFigureOut">
               <a:rPr lang="en-US" smtClean="0"/>
-              <a:t>8/18/2026</a:t>
+              <a:t>8/26/2026</a:t>
             </a:fld>
             <a:endParaRPr lang="en-US"/>
           </a:p>
@@ -4887,7 +4887,7 @@
           <a:p>
             <a:fld id="{D808A37A-4640-4712-9D8F-F69B6FC23B38}" type="datetimeFigureOut">
               <a:rPr lang="en-US" smtClean="0"/>
-              <a:t>8/18/2026</a:t>
+              <a:t>8/26/2026</a:t>
             </a:fld>
             <a:endParaRPr lang="en-US"/>
           </a:p>
@@ -5000,7 +5000,7 @@
           <a:p>
             <a:fld id="{D808A37A-4640-4712-9D8F-F69B6FC23B38}" type="datetimeFigureOut">
               <a:rPr lang="en-US" smtClean="0"/>
-              <a:t>8/18/2026</a:t>
+              <a:t>8/26/2026</a:t>
             </a:fld>
             <a:endParaRPr lang="en-US"/>
           </a:p>
@@ -5311,7 +5311,7 @@
           <a:p>
             <a:fld id="{D808A37A-4640-4712-9D8F-F69B6FC23B38}" type="datetimeFigureOut">
               <a:rPr lang="en-US" smtClean="0"/>
-              <a:t>8/18/2026</a:t>
+              <a:t>8/26/2026</a:t>
             </a:fld>
             <a:endParaRPr lang="en-US"/>
           </a:p>
@@ -5599,7 +5599,7 @@
           <a:p>
             <a:fld id="{D808A37A-4640-4712-9D8F-F69B6FC23B38}" type="datetimeFigureOut">
               <a:rPr lang="en-US" smtClean="0"/>
-              <a:t>8/18/2026</a:t>
+              <a:t>8/26/2026</a:t>
             </a:fld>
             <a:endParaRPr lang="en-US"/>
           </a:p>
@@ -5840,7 +5840,7 @@
           <a:p>
             <a:fld id="{D808A37A-4640-4712-9D8F-F69B6FC23B38}" type="datetimeFigureOut">
               <a:rPr lang="en-US" smtClean="0"/>
-              <a:t>8/18/2026</a:t>
+              <a:t>8/26/2026</a:t>
             </a:fld>
             <a:endParaRPr lang="en-US"/>
           </a:p>
@@ -9336,1474 +9336,6 @@
       </p:grpSpPr>
       <p:sp>
         <p:nvSpPr>
-          <p:cNvPr id="2" name="Title 1"/>
-          <p:cNvSpPr>
-            <a:spLocks noGrp="1"/>
-          </p:cNvSpPr>
-          <p:nvPr>
-            <p:ph type="title"/>
-          </p:nvPr>
-        </p:nvSpPr>
-        <p:spPr>
-          <a:xfrm>
-            <a:off x="457200" y="182880"/>
-            <a:ext cx="11338560" cy="914400"/>
-          </a:xfrm>
-        </p:spPr>
-        <p:txBody>
-          <a:bodyPr/>
-          <a:lstStyle/>
-          <a:p>
-            <a:r>
-              <a:rPr sz="4000">
-                <a:solidFill>
-                  <a:srgbClr val="000000"/>
-                </a:solidFill>
-                <a:latin typeface="Calibri Light"/>
-              </a:rPr>
-              <a:t>Where does statistics come from?</a:t>
-            </a:r>
-          </a:p>
-        </p:txBody>
-      </p:sp>
-      <p:sp>
-        <p:nvSpPr>
-          <p:cNvPr id="3" name="TextBox 2"/>
-          <p:cNvSpPr txBox="1"/>
-          <p:nvPr/>
-        </p:nvSpPr>
-        <p:spPr>
-          <a:xfrm>
-            <a:off x="457200" y="1170432"/>
-            <a:ext cx="11292840" cy="411480"/>
-          </a:xfrm>
-          <a:prstGeom prst="rect">
-            <a:avLst/>
-          </a:prstGeom>
-          <a:noFill/>
-        </p:spPr>
-        <p:txBody>
-          <a:bodyPr wrap="square" lIns="0" tIns="0" rIns="0" bIns="0" anchor="t">
-            <a:spAutoFit/>
-          </a:bodyPr>
-          <a:lstStyle/>
-          <a:p>
-            <a:pPr algn="l">
-              <a:spcAft>
-                <a:spcPts val="0"/>
-              </a:spcAft>
-            </a:pPr>
-            <a:r>
-              <a:rPr sz="1600" b="0">
-                <a:solidFill>
-                  <a:srgbClr val="333333"/>
-                </a:solidFill>
-                <a:latin typeface="Calibri"/>
-              </a:rPr>
-              <a:t>Statistics began as bookkeeping about people — counting births, deaths, and taxpayers so that a state could describe itself.</a:t>
-            </a:r>
-          </a:p>
-        </p:txBody>
-      </p:sp>
-      <p:sp>
-        <p:nvSpPr>
-          <p:cNvPr id="4" name="Rectangle 3"/>
-          <p:cNvSpPr/>
-          <p:nvPr/>
-        </p:nvSpPr>
-        <p:spPr>
-          <a:xfrm>
-            <a:off x="457200" y="3893515"/>
-            <a:ext cx="11277295" cy="40233"/>
-          </a:xfrm>
-          <a:prstGeom prst="rect">
-            <a:avLst/>
-          </a:prstGeom>
-          <a:solidFill>
-            <a:srgbClr val="4472C4"/>
-          </a:solidFill>
-          <a:ln>
-            <a:noFill/>
-          </a:ln>
-          <a:effectLst/>
-        </p:spPr>
-        <p:style>
-          <a:lnRef idx="1">
-            <a:schemeClr val="accent1"/>
-          </a:lnRef>
-          <a:fillRef idx="3">
-            <a:schemeClr val="accent1"/>
-          </a:fillRef>
-          <a:effectRef idx="2">
-            <a:schemeClr val="accent1"/>
-          </a:effectRef>
-          <a:fontRef idx="minor">
-            <a:schemeClr val="lt1"/>
-          </a:fontRef>
-        </p:style>
-        <p:txBody>
-          <a:bodyPr wrap="square" rtlCol="0" anchor="ctr"/>
-          <a:lstStyle/>
-          <a:p>
-            <a:pPr algn="ctr"/>
-            <a:endParaRPr/>
-          </a:p>
-        </p:txBody>
-      </p:sp>
-      <p:sp>
-        <p:nvSpPr>
-          <p:cNvPr id="5" name="Rectangle 4"/>
-          <p:cNvSpPr/>
-          <p:nvPr/>
-        </p:nvSpPr>
-        <p:spPr>
-          <a:xfrm>
-            <a:off x="1590141" y="3529584"/>
-            <a:ext cx="20116" cy="384048"/>
-          </a:xfrm>
-          <a:prstGeom prst="rect">
-            <a:avLst/>
-          </a:prstGeom>
-          <a:solidFill>
-            <a:srgbClr val="4472C4"/>
-          </a:solidFill>
-          <a:ln>
-            <a:noFill/>
-          </a:ln>
-          <a:effectLst/>
-        </p:spPr>
-        <p:style>
-          <a:lnRef idx="1">
-            <a:schemeClr val="accent1"/>
-          </a:lnRef>
-          <a:fillRef idx="3">
-            <a:schemeClr val="accent1"/>
-          </a:fillRef>
-          <a:effectRef idx="2">
-            <a:schemeClr val="accent1"/>
-          </a:effectRef>
-          <a:fontRef idx="minor">
-            <a:schemeClr val="lt1"/>
-          </a:fontRef>
-        </p:style>
-        <p:txBody>
-          <a:bodyPr wrap="square" rtlCol="0" anchor="ctr"/>
-          <a:lstStyle/>
-          <a:p>
-            <a:pPr algn="ctr"/>
-            <a:endParaRPr/>
-          </a:p>
-        </p:txBody>
-      </p:sp>
-      <p:sp>
-        <p:nvSpPr>
-          <p:cNvPr id="6" name="Oval 5"/>
-          <p:cNvSpPr/>
-          <p:nvPr/>
-        </p:nvSpPr>
-        <p:spPr>
-          <a:xfrm>
-            <a:off x="1522476" y="3835908"/>
-            <a:ext cx="155448" cy="155448"/>
-          </a:xfrm>
-          <a:prstGeom prst="ellipse">
-            <a:avLst/>
-          </a:prstGeom>
-          <a:solidFill>
-            <a:srgbClr val="FFFFFF"/>
-          </a:solidFill>
-          <a:ln w="25400">
-            <a:solidFill>
-              <a:srgbClr val="4472C4"/>
-            </a:solidFill>
-          </a:ln>
-          <a:effectLst/>
-        </p:spPr>
-        <p:style>
-          <a:lnRef idx="1">
-            <a:schemeClr val="accent1"/>
-          </a:lnRef>
-          <a:fillRef idx="3">
-            <a:schemeClr val="accent1"/>
-          </a:fillRef>
-          <a:effectRef idx="2">
-            <a:schemeClr val="accent1"/>
-          </a:effectRef>
-          <a:fontRef idx="minor">
-            <a:schemeClr val="lt1"/>
-          </a:fontRef>
-        </p:style>
-        <p:txBody>
-          <a:bodyPr wrap="square" rtlCol="0" anchor="ctr"/>
-          <a:lstStyle/>
-          <a:p>
-            <a:pPr algn="ctr"/>
-            <a:endParaRPr/>
-          </a:p>
-        </p:txBody>
-      </p:sp>
-      <p:sp>
-        <p:nvSpPr>
-          <p:cNvPr id="7" name="Rectangle 6"/>
-          <p:cNvSpPr/>
-          <p:nvPr/>
-        </p:nvSpPr>
-        <p:spPr>
-          <a:xfrm>
-            <a:off x="457200" y="2231136"/>
-            <a:ext cx="2286000" cy="1298448"/>
-          </a:xfrm>
-          <a:prstGeom prst="rect">
-            <a:avLst/>
-          </a:prstGeom>
-          <a:solidFill>
-            <a:srgbClr val="EDF2FA"/>
-          </a:solidFill>
-          <a:ln>
-            <a:noFill/>
-          </a:ln>
-          <a:effectLst/>
-        </p:spPr>
-        <p:style>
-          <a:lnRef idx="1">
-            <a:schemeClr val="accent1"/>
-          </a:lnRef>
-          <a:fillRef idx="3">
-            <a:schemeClr val="accent1"/>
-          </a:fillRef>
-          <a:effectRef idx="2">
-            <a:schemeClr val="accent1"/>
-          </a:effectRef>
-          <a:fontRef idx="minor">
-            <a:schemeClr val="lt1"/>
-          </a:fontRef>
-        </p:style>
-        <p:txBody>
-          <a:bodyPr wrap="square" lIns="100584" tIns="73152" rIns="100584" bIns="73152" rtlCol="0" anchor="t"/>
-          <a:lstStyle/>
-          <a:p>
-            <a:pPr algn="l">
-              <a:spcAft>
-                <a:spcPts val="300"/>
-              </a:spcAft>
-            </a:pPr>
-            <a:r>
-              <a:rPr sz="1700" b="1">
-                <a:solidFill>
-                  <a:srgbClr val="4472C4"/>
-                </a:solidFill>
-                <a:latin typeface="Calibri"/>
-              </a:rPr>
-              <a:t>1662</a:t>
-            </a:r>
-          </a:p>
-          <a:p>
-            <a:pPr algn="l"/>
-            <a:r>
-              <a:rPr sz="1050">
-                <a:solidFill>
-                  <a:srgbClr val="262626"/>
-                </a:solidFill>
-                <a:latin typeface="Calibri"/>
-              </a:rPr>
-              <a:t>John Graunt studies London's Bills of Mortality — the first life table built from real data.</a:t>
-            </a:r>
-          </a:p>
-        </p:txBody>
-      </p:sp>
-      <p:sp>
-        <p:nvSpPr>
-          <p:cNvPr id="8" name="Rectangle 7"/>
-          <p:cNvSpPr/>
-          <p:nvPr/>
-        </p:nvSpPr>
-        <p:spPr>
-          <a:xfrm>
-            <a:off x="2874612" y="3913632"/>
-            <a:ext cx="20116" cy="384048"/>
-          </a:xfrm>
-          <a:prstGeom prst="rect">
-            <a:avLst/>
-          </a:prstGeom>
-          <a:solidFill>
-            <a:srgbClr val="4472C4"/>
-          </a:solidFill>
-          <a:ln>
-            <a:noFill/>
-          </a:ln>
-          <a:effectLst/>
-        </p:spPr>
-        <p:style>
-          <a:lnRef idx="1">
-            <a:schemeClr val="accent1"/>
-          </a:lnRef>
-          <a:fillRef idx="3">
-            <a:schemeClr val="accent1"/>
-          </a:fillRef>
-          <a:effectRef idx="2">
-            <a:schemeClr val="accent1"/>
-          </a:effectRef>
-          <a:fontRef idx="minor">
-            <a:schemeClr val="lt1"/>
-          </a:fontRef>
-        </p:style>
-        <p:txBody>
-          <a:bodyPr wrap="square" rtlCol="0" anchor="ctr"/>
-          <a:lstStyle/>
-          <a:p>
-            <a:pPr algn="ctr"/>
-            <a:endParaRPr/>
-          </a:p>
-        </p:txBody>
-      </p:sp>
-      <p:sp>
-        <p:nvSpPr>
-          <p:cNvPr id="9" name="Oval 8"/>
-          <p:cNvSpPr/>
-          <p:nvPr/>
-        </p:nvSpPr>
-        <p:spPr>
-          <a:xfrm>
-            <a:off x="2806946" y="3835908"/>
-            <a:ext cx="155448" cy="155448"/>
-          </a:xfrm>
-          <a:prstGeom prst="ellipse">
-            <a:avLst/>
-          </a:prstGeom>
-          <a:solidFill>
-            <a:srgbClr val="FFFFFF"/>
-          </a:solidFill>
-          <a:ln w="25400">
-            <a:solidFill>
-              <a:srgbClr val="4472C4"/>
-            </a:solidFill>
-          </a:ln>
-          <a:effectLst/>
-        </p:spPr>
-        <p:style>
-          <a:lnRef idx="1">
-            <a:schemeClr val="accent1"/>
-          </a:lnRef>
-          <a:fillRef idx="3">
-            <a:schemeClr val="accent1"/>
-          </a:fillRef>
-          <a:effectRef idx="2">
-            <a:schemeClr val="accent1"/>
-          </a:effectRef>
-          <a:fontRef idx="minor">
-            <a:schemeClr val="lt1"/>
-          </a:fontRef>
-        </p:style>
-        <p:txBody>
-          <a:bodyPr wrap="square" rtlCol="0" anchor="ctr"/>
-          <a:lstStyle/>
-          <a:p>
-            <a:pPr algn="ctr"/>
-            <a:endParaRPr/>
-          </a:p>
-        </p:txBody>
-      </p:sp>
-      <p:sp>
-        <p:nvSpPr>
-          <p:cNvPr id="10" name="Rectangle 9"/>
-          <p:cNvSpPr/>
-          <p:nvPr/>
-        </p:nvSpPr>
-        <p:spPr>
-          <a:xfrm>
-            <a:off x="1741670" y="4297680"/>
-            <a:ext cx="2286000" cy="1298448"/>
-          </a:xfrm>
-          <a:prstGeom prst="rect">
-            <a:avLst/>
-          </a:prstGeom>
-          <a:solidFill>
-            <a:srgbClr val="EDF2FA"/>
-          </a:solidFill>
-          <a:ln>
-            <a:noFill/>
-          </a:ln>
-          <a:effectLst/>
-        </p:spPr>
-        <p:style>
-          <a:lnRef idx="1">
-            <a:schemeClr val="accent1"/>
-          </a:lnRef>
-          <a:fillRef idx="3">
-            <a:schemeClr val="accent1"/>
-          </a:fillRef>
-          <a:effectRef idx="2">
-            <a:schemeClr val="accent1"/>
-          </a:effectRef>
-          <a:fontRef idx="minor">
-            <a:schemeClr val="lt1"/>
-          </a:fontRef>
-        </p:style>
-        <p:txBody>
-          <a:bodyPr wrap="square" lIns="100584" tIns="73152" rIns="100584" bIns="73152" rtlCol="0" anchor="t"/>
-          <a:lstStyle/>
-          <a:p>
-            <a:pPr algn="l">
-              <a:spcAft>
-                <a:spcPts val="300"/>
-              </a:spcAft>
-            </a:pPr>
-            <a:r>
-              <a:rPr sz="1700" b="1">
-                <a:solidFill>
-                  <a:srgbClr val="4472C4"/>
-                </a:solidFill>
-                <a:latin typeface="Calibri"/>
-              </a:rPr>
-              <a:t>1693</a:t>
-            </a:r>
-          </a:p>
-          <a:p>
-            <a:pPr algn="l"/>
-            <a:r>
-              <a:rPr sz="1050">
-                <a:solidFill>
-                  <a:srgbClr val="262626"/>
-                </a:solidFill>
-                <a:latin typeface="Calibri"/>
-              </a:rPr>
-              <a:t>Edmond Halley's Breslau life table makes it possible to price life annuities.</a:t>
-            </a:r>
-          </a:p>
-        </p:txBody>
-      </p:sp>
-      <p:sp>
-        <p:nvSpPr>
-          <p:cNvPr id="11" name="Rectangle 10"/>
-          <p:cNvSpPr/>
-          <p:nvPr/>
-        </p:nvSpPr>
-        <p:spPr>
-          <a:xfrm>
-            <a:off x="4159083" y="3529584"/>
-            <a:ext cx="20116" cy="384048"/>
-          </a:xfrm>
-          <a:prstGeom prst="rect">
-            <a:avLst/>
-          </a:prstGeom>
-          <a:solidFill>
-            <a:srgbClr val="4472C4"/>
-          </a:solidFill>
-          <a:ln>
-            <a:noFill/>
-          </a:ln>
-          <a:effectLst/>
-        </p:spPr>
-        <p:style>
-          <a:lnRef idx="1">
-            <a:schemeClr val="accent1"/>
-          </a:lnRef>
-          <a:fillRef idx="3">
-            <a:schemeClr val="accent1"/>
-          </a:fillRef>
-          <a:effectRef idx="2">
-            <a:schemeClr val="accent1"/>
-          </a:effectRef>
-          <a:fontRef idx="minor">
-            <a:schemeClr val="lt1"/>
-          </a:fontRef>
-        </p:style>
-        <p:txBody>
-          <a:bodyPr wrap="square" rtlCol="0" anchor="ctr"/>
-          <a:lstStyle/>
-          <a:p>
-            <a:pPr algn="ctr"/>
-            <a:endParaRPr/>
-          </a:p>
-        </p:txBody>
-      </p:sp>
-      <p:sp>
-        <p:nvSpPr>
-          <p:cNvPr id="12" name="Oval 11"/>
-          <p:cNvSpPr/>
-          <p:nvPr/>
-        </p:nvSpPr>
-        <p:spPr>
-          <a:xfrm>
-            <a:off x="4091417" y="3835908"/>
-            <a:ext cx="155448" cy="155448"/>
-          </a:xfrm>
-          <a:prstGeom prst="ellipse">
-            <a:avLst/>
-          </a:prstGeom>
-          <a:solidFill>
-            <a:srgbClr val="FFFFFF"/>
-          </a:solidFill>
-          <a:ln w="25400">
-            <a:solidFill>
-              <a:srgbClr val="4472C4"/>
-            </a:solidFill>
-          </a:ln>
-          <a:effectLst/>
-        </p:spPr>
-        <p:style>
-          <a:lnRef idx="1">
-            <a:schemeClr val="accent1"/>
-          </a:lnRef>
-          <a:fillRef idx="3">
-            <a:schemeClr val="accent1"/>
-          </a:fillRef>
-          <a:effectRef idx="2">
-            <a:schemeClr val="accent1"/>
-          </a:effectRef>
-          <a:fontRef idx="minor">
-            <a:schemeClr val="lt1"/>
-          </a:fontRef>
-        </p:style>
-        <p:txBody>
-          <a:bodyPr wrap="square" rtlCol="0" anchor="ctr"/>
-          <a:lstStyle/>
-          <a:p>
-            <a:pPr algn="ctr"/>
-            <a:endParaRPr/>
-          </a:p>
-        </p:txBody>
-      </p:sp>
-      <p:sp>
-        <p:nvSpPr>
-          <p:cNvPr id="13" name="Rectangle 12"/>
-          <p:cNvSpPr/>
-          <p:nvPr/>
-        </p:nvSpPr>
-        <p:spPr>
-          <a:xfrm>
-            <a:off x="3026141" y="2231136"/>
-            <a:ext cx="2286000" cy="1298448"/>
-          </a:xfrm>
-          <a:prstGeom prst="rect">
-            <a:avLst/>
-          </a:prstGeom>
-          <a:solidFill>
-            <a:srgbClr val="EDF2FA"/>
-          </a:solidFill>
-          <a:ln>
-            <a:noFill/>
-          </a:ln>
-          <a:effectLst/>
-        </p:spPr>
-        <p:style>
-          <a:lnRef idx="1">
-            <a:schemeClr val="accent1"/>
-          </a:lnRef>
-          <a:fillRef idx="3">
-            <a:schemeClr val="accent1"/>
-          </a:fillRef>
-          <a:effectRef idx="2">
-            <a:schemeClr val="accent1"/>
-          </a:effectRef>
-          <a:fontRef idx="minor">
-            <a:schemeClr val="lt1"/>
-          </a:fontRef>
-        </p:style>
-        <p:txBody>
-          <a:bodyPr wrap="square" lIns="100584" tIns="73152" rIns="100584" bIns="73152" rtlCol="0" anchor="t"/>
-          <a:lstStyle/>
-          <a:p>
-            <a:pPr algn="l">
-              <a:spcAft>
-                <a:spcPts val="300"/>
-              </a:spcAft>
-            </a:pPr>
-            <a:r>
-              <a:rPr sz="1700" b="1">
-                <a:solidFill>
-                  <a:srgbClr val="4472C4"/>
-                </a:solidFill>
-                <a:latin typeface="Calibri"/>
-              </a:rPr>
-              <a:t>1749</a:t>
-            </a:r>
-          </a:p>
-          <a:p>
-            <a:pPr algn="l"/>
-            <a:r>
-              <a:rPr sz="1050">
-                <a:solidFill>
-                  <a:srgbClr val="262626"/>
-                </a:solidFill>
-                <a:latin typeface="Calibri"/>
-              </a:rPr>
-              <a:t>Gottfried Achenwall coins “Statistik” — literally the science of the state.</a:t>
-            </a:r>
-          </a:p>
-        </p:txBody>
-      </p:sp>
-      <p:sp>
-        <p:nvSpPr>
-          <p:cNvPr id="14" name="Rectangle 13"/>
-          <p:cNvSpPr/>
-          <p:nvPr/>
-        </p:nvSpPr>
-        <p:spPr>
-          <a:xfrm>
-            <a:off x="5443553" y="3913632"/>
-            <a:ext cx="20116" cy="384048"/>
-          </a:xfrm>
-          <a:prstGeom prst="rect">
-            <a:avLst/>
-          </a:prstGeom>
-          <a:solidFill>
-            <a:srgbClr val="4472C4"/>
-          </a:solidFill>
-          <a:ln>
-            <a:noFill/>
-          </a:ln>
-          <a:effectLst/>
-        </p:spPr>
-        <p:style>
-          <a:lnRef idx="1">
-            <a:schemeClr val="accent1"/>
-          </a:lnRef>
-          <a:fillRef idx="3">
-            <a:schemeClr val="accent1"/>
-          </a:fillRef>
-          <a:effectRef idx="2">
-            <a:schemeClr val="accent1"/>
-          </a:effectRef>
-          <a:fontRef idx="minor">
-            <a:schemeClr val="lt1"/>
-          </a:fontRef>
-        </p:style>
-        <p:txBody>
-          <a:bodyPr wrap="square" rtlCol="0" anchor="ctr"/>
-          <a:lstStyle/>
-          <a:p>
-            <a:pPr algn="ctr"/>
-            <a:endParaRPr/>
-          </a:p>
-        </p:txBody>
-      </p:sp>
-      <p:sp>
-        <p:nvSpPr>
-          <p:cNvPr id="15" name="Oval 14"/>
-          <p:cNvSpPr/>
-          <p:nvPr/>
-        </p:nvSpPr>
-        <p:spPr>
-          <a:xfrm>
-            <a:off x="5375888" y="3835908"/>
-            <a:ext cx="155448" cy="155448"/>
-          </a:xfrm>
-          <a:prstGeom prst="ellipse">
-            <a:avLst/>
-          </a:prstGeom>
-          <a:solidFill>
-            <a:srgbClr val="FFFFFF"/>
-          </a:solidFill>
-          <a:ln w="25400">
-            <a:solidFill>
-              <a:srgbClr val="4472C4"/>
-            </a:solidFill>
-          </a:ln>
-          <a:effectLst/>
-        </p:spPr>
-        <p:style>
-          <a:lnRef idx="1">
-            <a:schemeClr val="accent1"/>
-          </a:lnRef>
-          <a:fillRef idx="3">
-            <a:schemeClr val="accent1"/>
-          </a:fillRef>
-          <a:effectRef idx="2">
-            <a:schemeClr val="accent1"/>
-          </a:effectRef>
-          <a:fontRef idx="minor">
-            <a:schemeClr val="lt1"/>
-          </a:fontRef>
-        </p:style>
-        <p:txBody>
-          <a:bodyPr wrap="square" rtlCol="0" anchor="ctr"/>
-          <a:lstStyle/>
-          <a:p>
-            <a:pPr algn="ctr"/>
-            <a:endParaRPr/>
-          </a:p>
-        </p:txBody>
-      </p:sp>
-      <p:sp>
-        <p:nvSpPr>
-          <p:cNvPr id="16" name="Rectangle 15"/>
-          <p:cNvSpPr/>
-          <p:nvPr/>
-        </p:nvSpPr>
-        <p:spPr>
-          <a:xfrm>
-            <a:off x="4310612" y="4297680"/>
-            <a:ext cx="2286000" cy="1298448"/>
-          </a:xfrm>
-          <a:prstGeom prst="rect">
-            <a:avLst/>
-          </a:prstGeom>
-          <a:solidFill>
-            <a:srgbClr val="EDF2FA"/>
-          </a:solidFill>
-          <a:ln>
-            <a:noFill/>
-          </a:ln>
-          <a:effectLst/>
-        </p:spPr>
-        <p:style>
-          <a:lnRef idx="1">
-            <a:schemeClr val="accent1"/>
-          </a:lnRef>
-          <a:fillRef idx="3">
-            <a:schemeClr val="accent1"/>
-          </a:fillRef>
-          <a:effectRef idx="2">
-            <a:schemeClr val="accent1"/>
-          </a:effectRef>
-          <a:fontRef idx="minor">
-            <a:schemeClr val="lt1"/>
-          </a:fontRef>
-        </p:style>
-        <p:txBody>
-          <a:bodyPr wrap="square" lIns="100584" tIns="73152" rIns="100584" bIns="73152" rtlCol="0" anchor="t"/>
-          <a:lstStyle/>
-          <a:p>
-            <a:pPr algn="l">
-              <a:spcAft>
-                <a:spcPts val="300"/>
-              </a:spcAft>
-            </a:pPr>
-            <a:r>
-              <a:rPr sz="1700" b="1">
-                <a:solidFill>
-                  <a:srgbClr val="4472C4"/>
-                </a:solidFill>
-                <a:latin typeface="Calibri"/>
-              </a:rPr>
-              <a:t>1790</a:t>
-            </a:r>
-          </a:p>
-          <a:p>
-            <a:pPr algn="l"/>
-            <a:r>
-              <a:rPr sz="1050">
-                <a:solidFill>
-                  <a:srgbClr val="262626"/>
-                </a:solidFill>
-                <a:latin typeface="Calibri"/>
-              </a:rPr>
-              <a:t>The first U.S. census counts the population. Great Britain follows in 1801.</a:t>
-            </a:r>
-          </a:p>
-        </p:txBody>
-      </p:sp>
-      <p:sp>
-        <p:nvSpPr>
-          <p:cNvPr id="17" name="Rectangle 16"/>
-          <p:cNvSpPr/>
-          <p:nvPr/>
-        </p:nvSpPr>
-        <p:spPr>
-          <a:xfrm>
-            <a:off x="6728024" y="3529584"/>
-            <a:ext cx="20116" cy="384048"/>
-          </a:xfrm>
-          <a:prstGeom prst="rect">
-            <a:avLst/>
-          </a:prstGeom>
-          <a:solidFill>
-            <a:srgbClr val="4472C4"/>
-          </a:solidFill>
-          <a:ln>
-            <a:noFill/>
-          </a:ln>
-          <a:effectLst/>
-        </p:spPr>
-        <p:style>
-          <a:lnRef idx="1">
-            <a:schemeClr val="accent1"/>
-          </a:lnRef>
-          <a:fillRef idx="3">
-            <a:schemeClr val="accent1"/>
-          </a:fillRef>
-          <a:effectRef idx="2">
-            <a:schemeClr val="accent1"/>
-          </a:effectRef>
-          <a:fontRef idx="minor">
-            <a:schemeClr val="lt1"/>
-          </a:fontRef>
-        </p:style>
-        <p:txBody>
-          <a:bodyPr wrap="square" rtlCol="0" anchor="ctr"/>
-          <a:lstStyle/>
-          <a:p>
-            <a:pPr algn="ctr"/>
-            <a:endParaRPr/>
-          </a:p>
-        </p:txBody>
-      </p:sp>
-      <p:sp>
-        <p:nvSpPr>
-          <p:cNvPr id="18" name="Oval 17"/>
-          <p:cNvSpPr/>
-          <p:nvPr/>
-        </p:nvSpPr>
-        <p:spPr>
-          <a:xfrm>
-            <a:off x="6660358" y="3835908"/>
-            <a:ext cx="155448" cy="155448"/>
-          </a:xfrm>
-          <a:prstGeom prst="ellipse">
-            <a:avLst/>
-          </a:prstGeom>
-          <a:solidFill>
-            <a:srgbClr val="FFFFFF"/>
-          </a:solidFill>
-          <a:ln w="25400">
-            <a:solidFill>
-              <a:srgbClr val="4472C4"/>
-            </a:solidFill>
-          </a:ln>
-          <a:effectLst/>
-        </p:spPr>
-        <p:style>
-          <a:lnRef idx="1">
-            <a:schemeClr val="accent1"/>
-          </a:lnRef>
-          <a:fillRef idx="3">
-            <a:schemeClr val="accent1"/>
-          </a:fillRef>
-          <a:effectRef idx="2">
-            <a:schemeClr val="accent1"/>
-          </a:effectRef>
-          <a:fontRef idx="minor">
-            <a:schemeClr val="lt1"/>
-          </a:fontRef>
-        </p:style>
-        <p:txBody>
-          <a:bodyPr wrap="square" rtlCol="0" anchor="ctr"/>
-          <a:lstStyle/>
-          <a:p>
-            <a:pPr algn="ctr"/>
-            <a:endParaRPr/>
-          </a:p>
-        </p:txBody>
-      </p:sp>
-      <p:sp>
-        <p:nvSpPr>
-          <p:cNvPr id="19" name="Rectangle 18"/>
-          <p:cNvSpPr/>
-          <p:nvPr/>
-        </p:nvSpPr>
-        <p:spPr>
-          <a:xfrm>
-            <a:off x="5595082" y="2231136"/>
-            <a:ext cx="2286000" cy="1298448"/>
-          </a:xfrm>
-          <a:prstGeom prst="rect">
-            <a:avLst/>
-          </a:prstGeom>
-          <a:solidFill>
-            <a:srgbClr val="EDF2FA"/>
-          </a:solidFill>
-          <a:ln>
-            <a:noFill/>
-          </a:ln>
-          <a:effectLst/>
-        </p:spPr>
-        <p:style>
-          <a:lnRef idx="1">
-            <a:schemeClr val="accent1"/>
-          </a:lnRef>
-          <a:fillRef idx="3">
-            <a:schemeClr val="accent1"/>
-          </a:fillRef>
-          <a:effectRef idx="2">
-            <a:schemeClr val="accent1"/>
-          </a:effectRef>
-          <a:fontRef idx="minor">
-            <a:schemeClr val="lt1"/>
-          </a:fontRef>
-        </p:style>
-        <p:txBody>
-          <a:bodyPr wrap="square" lIns="100584" tIns="73152" rIns="100584" bIns="73152" rtlCol="0" anchor="t"/>
-          <a:lstStyle/>
-          <a:p>
-            <a:pPr algn="l">
-              <a:spcAft>
-                <a:spcPts val="300"/>
-              </a:spcAft>
-            </a:pPr>
-            <a:r>
-              <a:rPr sz="1700" b="1">
-                <a:solidFill>
-                  <a:srgbClr val="4472C4"/>
-                </a:solidFill>
-                <a:latin typeface="Calibri"/>
-              </a:rPr>
-              <a:t>1830s</a:t>
-            </a:r>
-          </a:p>
-          <a:p>
-            <a:pPr algn="l"/>
-            <a:r>
-              <a:rPr sz="1050">
-                <a:solidFill>
-                  <a:srgbClr val="262626"/>
-                </a:solidFill>
-                <a:latin typeface="Calibri"/>
-              </a:rPr>
-              <a:t>Adolphe Quetelet applies the normal curve to human traits and invents “the average man.”</a:t>
-            </a:r>
-          </a:p>
-        </p:txBody>
-      </p:sp>
-      <p:sp>
-        <p:nvSpPr>
-          <p:cNvPr id="20" name="Rectangle 19"/>
-          <p:cNvSpPr/>
-          <p:nvPr/>
-        </p:nvSpPr>
-        <p:spPr>
-          <a:xfrm>
-            <a:off x="8012495" y="3913632"/>
-            <a:ext cx="20116" cy="384048"/>
-          </a:xfrm>
-          <a:prstGeom prst="rect">
-            <a:avLst/>
-          </a:prstGeom>
-          <a:solidFill>
-            <a:srgbClr val="4472C4"/>
-          </a:solidFill>
-          <a:ln>
-            <a:noFill/>
-          </a:ln>
-          <a:effectLst/>
-        </p:spPr>
-        <p:style>
-          <a:lnRef idx="1">
-            <a:schemeClr val="accent1"/>
-          </a:lnRef>
-          <a:fillRef idx="3">
-            <a:schemeClr val="accent1"/>
-          </a:fillRef>
-          <a:effectRef idx="2">
-            <a:schemeClr val="accent1"/>
-          </a:effectRef>
-          <a:fontRef idx="minor">
-            <a:schemeClr val="lt1"/>
-          </a:fontRef>
-        </p:style>
-        <p:txBody>
-          <a:bodyPr wrap="square" rtlCol="0" anchor="ctr"/>
-          <a:lstStyle/>
-          <a:p>
-            <a:pPr algn="ctr"/>
-            <a:endParaRPr/>
-          </a:p>
-        </p:txBody>
-      </p:sp>
-      <p:sp>
-        <p:nvSpPr>
-          <p:cNvPr id="21" name="Oval 20"/>
-          <p:cNvSpPr/>
-          <p:nvPr/>
-        </p:nvSpPr>
-        <p:spPr>
-          <a:xfrm>
-            <a:off x="7944829" y="3835908"/>
-            <a:ext cx="155448" cy="155448"/>
-          </a:xfrm>
-          <a:prstGeom prst="ellipse">
-            <a:avLst/>
-          </a:prstGeom>
-          <a:solidFill>
-            <a:srgbClr val="FFFFFF"/>
-          </a:solidFill>
-          <a:ln w="25400">
-            <a:solidFill>
-              <a:srgbClr val="4472C4"/>
-            </a:solidFill>
-          </a:ln>
-          <a:effectLst/>
-        </p:spPr>
-        <p:style>
-          <a:lnRef idx="1">
-            <a:schemeClr val="accent1"/>
-          </a:lnRef>
-          <a:fillRef idx="3">
-            <a:schemeClr val="accent1"/>
-          </a:fillRef>
-          <a:effectRef idx="2">
-            <a:schemeClr val="accent1"/>
-          </a:effectRef>
-          <a:fontRef idx="minor">
-            <a:schemeClr val="lt1"/>
-          </a:fontRef>
-        </p:style>
-        <p:txBody>
-          <a:bodyPr wrap="square" rtlCol="0" anchor="ctr"/>
-          <a:lstStyle/>
-          <a:p>
-            <a:pPr algn="ctr"/>
-            <a:endParaRPr/>
-          </a:p>
-        </p:txBody>
-      </p:sp>
-      <p:sp>
-        <p:nvSpPr>
-          <p:cNvPr id="22" name="Rectangle 21"/>
-          <p:cNvSpPr/>
-          <p:nvPr/>
-        </p:nvSpPr>
-        <p:spPr>
-          <a:xfrm>
-            <a:off x="6879553" y="4297680"/>
-            <a:ext cx="2286000" cy="1298448"/>
-          </a:xfrm>
-          <a:prstGeom prst="rect">
-            <a:avLst/>
-          </a:prstGeom>
-          <a:solidFill>
-            <a:srgbClr val="EDF2FA"/>
-          </a:solidFill>
-          <a:ln>
-            <a:noFill/>
-          </a:ln>
-          <a:effectLst/>
-        </p:spPr>
-        <p:style>
-          <a:lnRef idx="1">
-            <a:schemeClr val="accent1"/>
-          </a:lnRef>
-          <a:fillRef idx="3">
-            <a:schemeClr val="accent1"/>
-          </a:fillRef>
-          <a:effectRef idx="2">
-            <a:schemeClr val="accent1"/>
-          </a:effectRef>
-          <a:fontRef idx="minor">
-            <a:schemeClr val="lt1"/>
-          </a:fontRef>
-        </p:style>
-        <p:txBody>
-          <a:bodyPr wrap="square" lIns="100584" tIns="73152" rIns="100584" bIns="73152" rtlCol="0" anchor="t"/>
-          <a:lstStyle/>
-          <a:p>
-            <a:pPr algn="l">
-              <a:spcAft>
-                <a:spcPts val="300"/>
-              </a:spcAft>
-            </a:pPr>
-            <a:r>
-              <a:rPr sz="1700" b="1">
-                <a:solidFill>
-                  <a:srgbClr val="4472C4"/>
-                </a:solidFill>
-                <a:latin typeface="Calibri"/>
-              </a:rPr>
-              <a:t>1900</a:t>
-            </a:r>
-          </a:p>
-          <a:p>
-            <a:pPr algn="l"/>
-            <a:r>
-              <a:rPr sz="1050">
-                <a:solidFill>
-                  <a:srgbClr val="262626"/>
-                </a:solidFill>
-                <a:latin typeface="Calibri"/>
-              </a:rPr>
-              <a:t>Galton and Pearson develop correlation, regression, and the chi-square test.</a:t>
-            </a:r>
-          </a:p>
-        </p:txBody>
-      </p:sp>
-      <p:sp>
-        <p:nvSpPr>
-          <p:cNvPr id="23" name="Rectangle 22"/>
-          <p:cNvSpPr/>
-          <p:nvPr/>
-        </p:nvSpPr>
-        <p:spPr>
-          <a:xfrm>
-            <a:off x="9296966" y="3529584"/>
-            <a:ext cx="20116" cy="384048"/>
-          </a:xfrm>
-          <a:prstGeom prst="rect">
-            <a:avLst/>
-          </a:prstGeom>
-          <a:solidFill>
-            <a:srgbClr val="4472C4"/>
-          </a:solidFill>
-          <a:ln>
-            <a:noFill/>
-          </a:ln>
-          <a:effectLst/>
-        </p:spPr>
-        <p:style>
-          <a:lnRef idx="1">
-            <a:schemeClr val="accent1"/>
-          </a:lnRef>
-          <a:fillRef idx="3">
-            <a:schemeClr val="accent1"/>
-          </a:fillRef>
-          <a:effectRef idx="2">
-            <a:schemeClr val="accent1"/>
-          </a:effectRef>
-          <a:fontRef idx="minor">
-            <a:schemeClr val="lt1"/>
-          </a:fontRef>
-        </p:style>
-        <p:txBody>
-          <a:bodyPr wrap="square" rtlCol="0" anchor="ctr"/>
-          <a:lstStyle/>
-          <a:p>
-            <a:pPr algn="ctr"/>
-            <a:endParaRPr/>
-          </a:p>
-        </p:txBody>
-      </p:sp>
-      <p:sp>
-        <p:nvSpPr>
-          <p:cNvPr id="24" name="Oval 23"/>
-          <p:cNvSpPr/>
-          <p:nvPr/>
-        </p:nvSpPr>
-        <p:spPr>
-          <a:xfrm>
-            <a:off x="9229300" y="3835908"/>
-            <a:ext cx="155448" cy="155448"/>
-          </a:xfrm>
-          <a:prstGeom prst="ellipse">
-            <a:avLst/>
-          </a:prstGeom>
-          <a:solidFill>
-            <a:srgbClr val="FFFFFF"/>
-          </a:solidFill>
-          <a:ln w="25400">
-            <a:solidFill>
-              <a:srgbClr val="4472C4"/>
-            </a:solidFill>
-          </a:ln>
-          <a:effectLst/>
-        </p:spPr>
-        <p:style>
-          <a:lnRef idx="1">
-            <a:schemeClr val="accent1"/>
-          </a:lnRef>
-          <a:fillRef idx="3">
-            <a:schemeClr val="accent1"/>
-          </a:fillRef>
-          <a:effectRef idx="2">
-            <a:schemeClr val="accent1"/>
-          </a:effectRef>
-          <a:fontRef idx="minor">
-            <a:schemeClr val="lt1"/>
-          </a:fontRef>
-        </p:style>
-        <p:txBody>
-          <a:bodyPr wrap="square" rtlCol="0" anchor="ctr"/>
-          <a:lstStyle/>
-          <a:p>
-            <a:pPr algn="ctr"/>
-            <a:endParaRPr/>
-          </a:p>
-        </p:txBody>
-      </p:sp>
-      <p:sp>
-        <p:nvSpPr>
-          <p:cNvPr id="25" name="Rectangle 24"/>
-          <p:cNvSpPr/>
-          <p:nvPr/>
-        </p:nvSpPr>
-        <p:spPr>
-          <a:xfrm>
-            <a:off x="8164024" y="2231136"/>
-            <a:ext cx="2286000" cy="1298448"/>
-          </a:xfrm>
-          <a:prstGeom prst="rect">
-            <a:avLst/>
-          </a:prstGeom>
-          <a:solidFill>
-            <a:srgbClr val="EDF2FA"/>
-          </a:solidFill>
-          <a:ln>
-            <a:noFill/>
-          </a:ln>
-          <a:effectLst/>
-        </p:spPr>
-        <p:style>
-          <a:lnRef idx="1">
-            <a:schemeClr val="accent1"/>
-          </a:lnRef>
-          <a:fillRef idx="3">
-            <a:schemeClr val="accent1"/>
-          </a:fillRef>
-          <a:effectRef idx="2">
-            <a:schemeClr val="accent1"/>
-          </a:effectRef>
-          <a:fontRef idx="minor">
-            <a:schemeClr val="lt1"/>
-          </a:fontRef>
-        </p:style>
-        <p:txBody>
-          <a:bodyPr wrap="square" lIns="100584" tIns="73152" rIns="100584" bIns="73152" rtlCol="0" anchor="t"/>
-          <a:lstStyle/>
-          <a:p>
-            <a:pPr algn="l">
-              <a:spcAft>
-                <a:spcPts val="300"/>
-              </a:spcAft>
-            </a:pPr>
-            <a:r>
-              <a:rPr sz="1700" b="1">
-                <a:solidFill>
-                  <a:srgbClr val="4472C4"/>
-                </a:solidFill>
-                <a:latin typeface="Calibri"/>
-              </a:rPr>
-              <a:t>1925</a:t>
-            </a:r>
-          </a:p>
-          <a:p>
-            <a:pPr algn="l"/>
-            <a:r>
-              <a:rPr sz="1050">
-                <a:solidFill>
-                  <a:srgbClr val="262626"/>
-                </a:solidFill>
-                <a:latin typeface="Calibri"/>
-              </a:rPr>
-              <a:t>R. A. Fisher formalizes experimental design, ANOVA, and significance testing.</a:t>
-            </a:r>
-          </a:p>
-        </p:txBody>
-      </p:sp>
-      <p:sp>
-        <p:nvSpPr>
-          <p:cNvPr id="26" name="Rectangle 25"/>
-          <p:cNvSpPr/>
-          <p:nvPr/>
-        </p:nvSpPr>
-        <p:spPr>
-          <a:xfrm>
-            <a:off x="10581436" y="3913632"/>
-            <a:ext cx="20116" cy="384048"/>
-          </a:xfrm>
-          <a:prstGeom prst="rect">
-            <a:avLst/>
-          </a:prstGeom>
-          <a:solidFill>
-            <a:srgbClr val="C5540F"/>
-          </a:solidFill>
-          <a:ln>
-            <a:noFill/>
-          </a:ln>
-          <a:effectLst/>
-        </p:spPr>
-        <p:style>
-          <a:lnRef idx="1">
-            <a:schemeClr val="accent1"/>
-          </a:lnRef>
-          <a:fillRef idx="3">
-            <a:schemeClr val="accent1"/>
-          </a:fillRef>
-          <a:effectRef idx="2">
-            <a:schemeClr val="accent1"/>
-          </a:effectRef>
-          <a:fontRef idx="minor">
-            <a:schemeClr val="lt1"/>
-          </a:fontRef>
-        </p:style>
-        <p:txBody>
-          <a:bodyPr wrap="square" rtlCol="0" anchor="ctr"/>
-          <a:lstStyle/>
-          <a:p>
-            <a:pPr algn="ctr"/>
-            <a:endParaRPr/>
-          </a:p>
-        </p:txBody>
-      </p:sp>
-      <p:sp>
-        <p:nvSpPr>
-          <p:cNvPr id="27" name="Oval 26"/>
-          <p:cNvSpPr/>
-          <p:nvPr/>
-        </p:nvSpPr>
-        <p:spPr>
-          <a:xfrm>
-            <a:off x="10513771" y="3835908"/>
-            <a:ext cx="155448" cy="155448"/>
-          </a:xfrm>
-          <a:prstGeom prst="ellipse">
-            <a:avLst/>
-          </a:prstGeom>
-          <a:solidFill>
-            <a:srgbClr val="FFFFFF"/>
-          </a:solidFill>
-          <a:ln w="25400">
-            <a:solidFill>
-              <a:srgbClr val="C5540F"/>
-            </a:solidFill>
-          </a:ln>
-          <a:effectLst/>
-        </p:spPr>
-        <p:style>
-          <a:lnRef idx="1">
-            <a:schemeClr val="accent1"/>
-          </a:lnRef>
-          <a:fillRef idx="3">
-            <a:schemeClr val="accent1"/>
-          </a:fillRef>
-          <a:effectRef idx="2">
-            <a:schemeClr val="accent1"/>
-          </a:effectRef>
-          <a:fontRef idx="minor">
-            <a:schemeClr val="lt1"/>
-          </a:fontRef>
-        </p:style>
-        <p:txBody>
-          <a:bodyPr wrap="square" rtlCol="0" anchor="ctr"/>
-          <a:lstStyle/>
-          <a:p>
-            <a:pPr algn="ctr"/>
-            <a:endParaRPr/>
-          </a:p>
-        </p:txBody>
-      </p:sp>
-      <p:sp>
-        <p:nvSpPr>
-          <p:cNvPr id="28" name="Rectangle 27"/>
-          <p:cNvSpPr/>
-          <p:nvPr/>
-        </p:nvSpPr>
-        <p:spPr>
-          <a:xfrm>
-            <a:off x="9448495" y="4297680"/>
-            <a:ext cx="2286000" cy="1298448"/>
-          </a:xfrm>
-          <a:prstGeom prst="rect">
-            <a:avLst/>
-          </a:prstGeom>
-          <a:solidFill>
-            <a:srgbClr val="FCE6D5"/>
-          </a:solidFill>
-          <a:ln>
-            <a:noFill/>
-          </a:ln>
-          <a:effectLst/>
-        </p:spPr>
-        <p:style>
-          <a:lnRef idx="1">
-            <a:schemeClr val="accent1"/>
-          </a:lnRef>
-          <a:fillRef idx="3">
-            <a:schemeClr val="accent1"/>
-          </a:fillRef>
-          <a:effectRef idx="2">
-            <a:schemeClr val="accent1"/>
-          </a:effectRef>
-          <a:fontRef idx="minor">
-            <a:schemeClr val="lt1"/>
-          </a:fontRef>
-        </p:style>
-        <p:txBody>
-          <a:bodyPr wrap="square" lIns="100584" tIns="73152" rIns="100584" bIns="73152" rtlCol="0" anchor="t"/>
-          <a:lstStyle/>
-          <a:p>
-            <a:pPr algn="l">
-              <a:spcAft>
-                <a:spcPts val="300"/>
-              </a:spcAft>
-            </a:pPr>
-            <a:r>
-              <a:rPr sz="1700" b="1">
-                <a:solidFill>
-                  <a:srgbClr val="C5540F"/>
-                </a:solidFill>
-                <a:latin typeface="Calibri"/>
-              </a:rPr>
-              <a:t>Today</a:t>
-            </a:r>
-          </a:p>
-          <a:p>
-            <a:pPr algn="l"/>
-            <a:r>
-              <a:rPr sz="1050">
-                <a:solidFill>
-                  <a:srgbClr val="262626"/>
-                </a:solidFill>
-                <a:latin typeface="Calibri"/>
-              </a:rPr>
-              <a:t>The same ideas, now run by computers on data far larger than Graunt could count.</a:t>
-            </a:r>
-          </a:p>
-        </p:txBody>
-      </p:sp>
-      <p:sp>
-        <p:nvSpPr>
-          <p:cNvPr id="29" name="TextBox 28"/>
-          <p:cNvSpPr txBox="1"/>
-          <p:nvPr/>
-        </p:nvSpPr>
-        <p:spPr>
-          <a:xfrm>
-            <a:off x="457200" y="6144768"/>
-            <a:ext cx="11292840" cy="566928"/>
-          </a:xfrm>
-          <a:prstGeom prst="rect">
-            <a:avLst/>
-          </a:prstGeom>
-          <a:noFill/>
-        </p:spPr>
-        <p:txBody>
-          <a:bodyPr wrap="square" lIns="0" tIns="0" rIns="0" bIns="0" anchor="t">
-            <a:spAutoFit/>
-          </a:bodyPr>
-          <a:lstStyle/>
-          <a:p>
-            <a:pPr algn="l">
-              <a:spcAft>
-                <a:spcPts val="0"/>
-              </a:spcAft>
-            </a:pPr>
-            <a:r>
-              <a:rPr sz="900" b="0">
-                <a:solidFill>
-                  <a:srgbClr val="595959"/>
-                </a:solidFill>
-                <a:latin typeface="Calibri"/>
-              </a:rPr>
-              <a:t>Sources: J. Graunt (1662), Natural and Political Observations Made upon the Bills of Mortality. E. Halley (1693), Phil. Trans. R. Soc. 17:596–610. G. Achenwall (1749), Abriss der neuesten Staatswissenschaft. A. Quetelet (1835), Sur l’homme et le développement de ses facultés. R. A. Fisher (1925), Statistical Methods for Research Workers.</a:t>
-            </a:r>
-          </a:p>
-        </p:txBody>
-      </p:sp>
-    </p:spTree>
-  </p:cSld>
-  <p:clrMapOvr>
-    <a:masterClrMapping/>
-  </p:clrMapOvr>
-</p:sld>
-</file>
-
-<file path=ppt/slides/slide3.xml><?xml version="1.0" encoding="utf-8"?>
-<p:sld xmlns:a="http://schemas.openxmlformats.org/drawingml/2006/main" xmlns:r="http://schemas.openxmlformats.org/officeDocument/2006/relationships" xmlns:p="http://schemas.openxmlformats.org/presentationml/2006/main">
-  <p:cSld>
-    <p:spTree>
-      <p:nvGrpSpPr>
-        <p:cNvPr id="1" name=""/>
-        <p:cNvGrpSpPr/>
-        <p:nvPr/>
-      </p:nvGrpSpPr>
-      <p:grpSpPr>
-        <a:xfrm>
-          <a:off x="0" y="0"/>
-          <a:ext cx="0" cy="0"/>
-          <a:chOff x="0" y="0"/>
-          <a:chExt cx="0" cy="0"/>
-        </a:xfrm>
-      </p:grpSpPr>
-      <p:sp>
-        <p:nvSpPr>
           <p:cNvPr id="2" name="Title 1">
             <a:extLst>
               <a:ext uri="{FF2B5EF4-FFF2-40B4-BE49-F238E27FC236}">
@@ -10949,7 +9481,7 @@
 </p:sld>
 </file>
 
-<file path=ppt/slides/slide4.xml><?xml version="1.0" encoding="utf-8"?>
+<file path=ppt/slides/slide3.xml><?xml version="1.0" encoding="utf-8"?>
 <p:sld xmlns:a="http://schemas.openxmlformats.org/drawingml/2006/main" xmlns:r="http://schemas.openxmlformats.org/officeDocument/2006/relationships" xmlns:p="http://schemas.openxmlformats.org/presentationml/2006/main">
   <p:cSld>
     <p:bg>
@@ -11662,6 +10194,1474 @@
         <p14:creationId xmlns:p14="http://schemas.microsoft.com/office/powerpoint/2010/main" val="1912649442"/>
       </p:ext>
     </p:extLst>
+  </p:cSld>
+  <p:clrMapOvr>
+    <a:masterClrMapping/>
+  </p:clrMapOvr>
+</p:sld>
+</file>
+
+<file path=ppt/slides/slide4.xml><?xml version="1.0" encoding="utf-8"?>
+<p:sld xmlns:a="http://schemas.openxmlformats.org/drawingml/2006/main" xmlns:r="http://schemas.openxmlformats.org/officeDocument/2006/relationships" xmlns:p="http://schemas.openxmlformats.org/presentationml/2006/main">
+  <p:cSld>
+    <p:spTree>
+      <p:nvGrpSpPr>
+        <p:cNvPr id="1" name=""/>
+        <p:cNvGrpSpPr/>
+        <p:nvPr/>
+      </p:nvGrpSpPr>
+      <p:grpSpPr>
+        <a:xfrm>
+          <a:off x="0" y="0"/>
+          <a:ext cx="0" cy="0"/>
+          <a:chOff x="0" y="0"/>
+          <a:chExt cx="0" cy="0"/>
+        </a:xfrm>
+      </p:grpSpPr>
+      <p:sp>
+        <p:nvSpPr>
+          <p:cNvPr id="2" name="Title 1"/>
+          <p:cNvSpPr>
+            <a:spLocks noGrp="1"/>
+          </p:cNvSpPr>
+          <p:nvPr>
+            <p:ph type="title"/>
+          </p:nvPr>
+        </p:nvSpPr>
+        <p:spPr>
+          <a:xfrm>
+            <a:off x="457200" y="182880"/>
+            <a:ext cx="11338560" cy="914400"/>
+          </a:xfrm>
+        </p:spPr>
+        <p:txBody>
+          <a:bodyPr/>
+          <a:lstStyle/>
+          <a:p>
+            <a:r>
+              <a:rPr sz="4000">
+                <a:solidFill>
+                  <a:srgbClr val="000000"/>
+                </a:solidFill>
+                <a:latin typeface="Calibri Light"/>
+              </a:rPr>
+              <a:t>Where does statistics come from?</a:t>
+            </a:r>
+          </a:p>
+        </p:txBody>
+      </p:sp>
+      <p:sp>
+        <p:nvSpPr>
+          <p:cNvPr id="3" name="TextBox 2"/>
+          <p:cNvSpPr txBox="1"/>
+          <p:nvPr/>
+        </p:nvSpPr>
+        <p:spPr>
+          <a:xfrm>
+            <a:off x="457200" y="1170432"/>
+            <a:ext cx="11292840" cy="411480"/>
+          </a:xfrm>
+          <a:prstGeom prst="rect">
+            <a:avLst/>
+          </a:prstGeom>
+          <a:noFill/>
+        </p:spPr>
+        <p:txBody>
+          <a:bodyPr wrap="square" lIns="0" tIns="0" rIns="0" bIns="0" anchor="t">
+            <a:spAutoFit/>
+          </a:bodyPr>
+          <a:lstStyle/>
+          <a:p>
+            <a:pPr algn="l">
+              <a:spcAft>
+                <a:spcPts val="0"/>
+              </a:spcAft>
+            </a:pPr>
+            <a:r>
+              <a:rPr sz="1600" b="0">
+                <a:solidFill>
+                  <a:srgbClr val="333333"/>
+                </a:solidFill>
+                <a:latin typeface="Calibri"/>
+              </a:rPr>
+              <a:t>Statistics began as bookkeeping about people — counting births, deaths, and taxpayers so that a state could describe itself.</a:t>
+            </a:r>
+          </a:p>
+        </p:txBody>
+      </p:sp>
+      <p:sp>
+        <p:nvSpPr>
+          <p:cNvPr id="4" name="Rectangle 3"/>
+          <p:cNvSpPr/>
+          <p:nvPr/>
+        </p:nvSpPr>
+        <p:spPr>
+          <a:xfrm>
+            <a:off x="457200" y="3893515"/>
+            <a:ext cx="11277295" cy="40233"/>
+          </a:xfrm>
+          <a:prstGeom prst="rect">
+            <a:avLst/>
+          </a:prstGeom>
+          <a:solidFill>
+            <a:srgbClr val="4472C4"/>
+          </a:solidFill>
+          <a:ln>
+            <a:noFill/>
+          </a:ln>
+          <a:effectLst/>
+        </p:spPr>
+        <p:style>
+          <a:lnRef idx="1">
+            <a:schemeClr val="accent1"/>
+          </a:lnRef>
+          <a:fillRef idx="3">
+            <a:schemeClr val="accent1"/>
+          </a:fillRef>
+          <a:effectRef idx="2">
+            <a:schemeClr val="accent1"/>
+          </a:effectRef>
+          <a:fontRef idx="minor">
+            <a:schemeClr val="lt1"/>
+          </a:fontRef>
+        </p:style>
+        <p:txBody>
+          <a:bodyPr wrap="square" rtlCol="0" anchor="ctr"/>
+          <a:lstStyle/>
+          <a:p>
+            <a:pPr algn="ctr"/>
+            <a:endParaRPr/>
+          </a:p>
+        </p:txBody>
+      </p:sp>
+      <p:sp>
+        <p:nvSpPr>
+          <p:cNvPr id="5" name="Rectangle 4"/>
+          <p:cNvSpPr/>
+          <p:nvPr/>
+        </p:nvSpPr>
+        <p:spPr>
+          <a:xfrm>
+            <a:off x="1590141" y="3529584"/>
+            <a:ext cx="20116" cy="384048"/>
+          </a:xfrm>
+          <a:prstGeom prst="rect">
+            <a:avLst/>
+          </a:prstGeom>
+          <a:solidFill>
+            <a:srgbClr val="4472C4"/>
+          </a:solidFill>
+          <a:ln>
+            <a:noFill/>
+          </a:ln>
+          <a:effectLst/>
+        </p:spPr>
+        <p:style>
+          <a:lnRef idx="1">
+            <a:schemeClr val="accent1"/>
+          </a:lnRef>
+          <a:fillRef idx="3">
+            <a:schemeClr val="accent1"/>
+          </a:fillRef>
+          <a:effectRef idx="2">
+            <a:schemeClr val="accent1"/>
+          </a:effectRef>
+          <a:fontRef idx="minor">
+            <a:schemeClr val="lt1"/>
+          </a:fontRef>
+        </p:style>
+        <p:txBody>
+          <a:bodyPr wrap="square" rtlCol="0" anchor="ctr"/>
+          <a:lstStyle/>
+          <a:p>
+            <a:pPr algn="ctr"/>
+            <a:endParaRPr/>
+          </a:p>
+        </p:txBody>
+      </p:sp>
+      <p:sp>
+        <p:nvSpPr>
+          <p:cNvPr id="6" name="Oval 5"/>
+          <p:cNvSpPr/>
+          <p:nvPr/>
+        </p:nvSpPr>
+        <p:spPr>
+          <a:xfrm>
+            <a:off x="1522476" y="3835908"/>
+            <a:ext cx="155448" cy="155448"/>
+          </a:xfrm>
+          <a:prstGeom prst="ellipse">
+            <a:avLst/>
+          </a:prstGeom>
+          <a:solidFill>
+            <a:srgbClr val="FFFFFF"/>
+          </a:solidFill>
+          <a:ln w="25400">
+            <a:solidFill>
+              <a:srgbClr val="4472C4"/>
+            </a:solidFill>
+          </a:ln>
+          <a:effectLst/>
+        </p:spPr>
+        <p:style>
+          <a:lnRef idx="1">
+            <a:schemeClr val="accent1"/>
+          </a:lnRef>
+          <a:fillRef idx="3">
+            <a:schemeClr val="accent1"/>
+          </a:fillRef>
+          <a:effectRef idx="2">
+            <a:schemeClr val="accent1"/>
+          </a:effectRef>
+          <a:fontRef idx="minor">
+            <a:schemeClr val="lt1"/>
+          </a:fontRef>
+        </p:style>
+        <p:txBody>
+          <a:bodyPr wrap="square" rtlCol="0" anchor="ctr"/>
+          <a:lstStyle/>
+          <a:p>
+            <a:pPr algn="ctr"/>
+            <a:endParaRPr/>
+          </a:p>
+        </p:txBody>
+      </p:sp>
+      <p:sp>
+        <p:nvSpPr>
+          <p:cNvPr id="7" name="Rectangle 6"/>
+          <p:cNvSpPr/>
+          <p:nvPr/>
+        </p:nvSpPr>
+        <p:spPr>
+          <a:xfrm>
+            <a:off x="457200" y="2231136"/>
+            <a:ext cx="2286000" cy="1298448"/>
+          </a:xfrm>
+          <a:prstGeom prst="rect">
+            <a:avLst/>
+          </a:prstGeom>
+          <a:solidFill>
+            <a:srgbClr val="EDF2FA"/>
+          </a:solidFill>
+          <a:ln>
+            <a:noFill/>
+          </a:ln>
+          <a:effectLst/>
+        </p:spPr>
+        <p:style>
+          <a:lnRef idx="1">
+            <a:schemeClr val="accent1"/>
+          </a:lnRef>
+          <a:fillRef idx="3">
+            <a:schemeClr val="accent1"/>
+          </a:fillRef>
+          <a:effectRef idx="2">
+            <a:schemeClr val="accent1"/>
+          </a:effectRef>
+          <a:fontRef idx="minor">
+            <a:schemeClr val="lt1"/>
+          </a:fontRef>
+        </p:style>
+        <p:txBody>
+          <a:bodyPr wrap="square" lIns="100584" tIns="73152" rIns="100584" bIns="73152" rtlCol="0" anchor="t"/>
+          <a:lstStyle/>
+          <a:p>
+            <a:pPr algn="l">
+              <a:spcAft>
+                <a:spcPts val="300"/>
+              </a:spcAft>
+            </a:pPr>
+            <a:r>
+              <a:rPr sz="1700" b="1">
+                <a:solidFill>
+                  <a:srgbClr val="4472C4"/>
+                </a:solidFill>
+                <a:latin typeface="Calibri"/>
+              </a:rPr>
+              <a:t>1662</a:t>
+            </a:r>
+          </a:p>
+          <a:p>
+            <a:pPr algn="l"/>
+            <a:r>
+              <a:rPr sz="1050">
+                <a:solidFill>
+                  <a:srgbClr val="262626"/>
+                </a:solidFill>
+                <a:latin typeface="Calibri"/>
+              </a:rPr>
+              <a:t>John Graunt studies London's Bills of Mortality — the first life table built from real data.</a:t>
+            </a:r>
+          </a:p>
+        </p:txBody>
+      </p:sp>
+      <p:sp>
+        <p:nvSpPr>
+          <p:cNvPr id="8" name="Rectangle 7"/>
+          <p:cNvSpPr/>
+          <p:nvPr/>
+        </p:nvSpPr>
+        <p:spPr>
+          <a:xfrm>
+            <a:off x="2874612" y="3913632"/>
+            <a:ext cx="20116" cy="384048"/>
+          </a:xfrm>
+          <a:prstGeom prst="rect">
+            <a:avLst/>
+          </a:prstGeom>
+          <a:solidFill>
+            <a:srgbClr val="4472C4"/>
+          </a:solidFill>
+          <a:ln>
+            <a:noFill/>
+          </a:ln>
+          <a:effectLst/>
+        </p:spPr>
+        <p:style>
+          <a:lnRef idx="1">
+            <a:schemeClr val="accent1"/>
+          </a:lnRef>
+          <a:fillRef idx="3">
+            <a:schemeClr val="accent1"/>
+          </a:fillRef>
+          <a:effectRef idx="2">
+            <a:schemeClr val="accent1"/>
+          </a:effectRef>
+          <a:fontRef idx="minor">
+            <a:schemeClr val="lt1"/>
+          </a:fontRef>
+        </p:style>
+        <p:txBody>
+          <a:bodyPr wrap="square" rtlCol="0" anchor="ctr"/>
+          <a:lstStyle/>
+          <a:p>
+            <a:pPr algn="ctr"/>
+            <a:endParaRPr/>
+          </a:p>
+        </p:txBody>
+      </p:sp>
+      <p:sp>
+        <p:nvSpPr>
+          <p:cNvPr id="9" name="Oval 8"/>
+          <p:cNvSpPr/>
+          <p:nvPr/>
+        </p:nvSpPr>
+        <p:spPr>
+          <a:xfrm>
+            <a:off x="2806946" y="3835908"/>
+            <a:ext cx="155448" cy="155448"/>
+          </a:xfrm>
+          <a:prstGeom prst="ellipse">
+            <a:avLst/>
+          </a:prstGeom>
+          <a:solidFill>
+            <a:srgbClr val="FFFFFF"/>
+          </a:solidFill>
+          <a:ln w="25400">
+            <a:solidFill>
+              <a:srgbClr val="4472C4"/>
+            </a:solidFill>
+          </a:ln>
+          <a:effectLst/>
+        </p:spPr>
+        <p:style>
+          <a:lnRef idx="1">
+            <a:schemeClr val="accent1"/>
+          </a:lnRef>
+          <a:fillRef idx="3">
+            <a:schemeClr val="accent1"/>
+          </a:fillRef>
+          <a:effectRef idx="2">
+            <a:schemeClr val="accent1"/>
+          </a:effectRef>
+          <a:fontRef idx="minor">
+            <a:schemeClr val="lt1"/>
+          </a:fontRef>
+        </p:style>
+        <p:txBody>
+          <a:bodyPr wrap="square" rtlCol="0" anchor="ctr"/>
+          <a:lstStyle/>
+          <a:p>
+            <a:pPr algn="ctr"/>
+            <a:endParaRPr/>
+          </a:p>
+        </p:txBody>
+      </p:sp>
+      <p:sp>
+        <p:nvSpPr>
+          <p:cNvPr id="10" name="Rectangle 9"/>
+          <p:cNvSpPr/>
+          <p:nvPr/>
+        </p:nvSpPr>
+        <p:spPr>
+          <a:xfrm>
+            <a:off x="1741670" y="4297680"/>
+            <a:ext cx="2286000" cy="1298448"/>
+          </a:xfrm>
+          <a:prstGeom prst="rect">
+            <a:avLst/>
+          </a:prstGeom>
+          <a:solidFill>
+            <a:srgbClr val="EDF2FA"/>
+          </a:solidFill>
+          <a:ln>
+            <a:noFill/>
+          </a:ln>
+          <a:effectLst/>
+        </p:spPr>
+        <p:style>
+          <a:lnRef idx="1">
+            <a:schemeClr val="accent1"/>
+          </a:lnRef>
+          <a:fillRef idx="3">
+            <a:schemeClr val="accent1"/>
+          </a:fillRef>
+          <a:effectRef idx="2">
+            <a:schemeClr val="accent1"/>
+          </a:effectRef>
+          <a:fontRef idx="minor">
+            <a:schemeClr val="lt1"/>
+          </a:fontRef>
+        </p:style>
+        <p:txBody>
+          <a:bodyPr wrap="square" lIns="100584" tIns="73152" rIns="100584" bIns="73152" rtlCol="0" anchor="t"/>
+          <a:lstStyle/>
+          <a:p>
+            <a:pPr algn="l">
+              <a:spcAft>
+                <a:spcPts val="300"/>
+              </a:spcAft>
+            </a:pPr>
+            <a:r>
+              <a:rPr sz="1700" b="1">
+                <a:solidFill>
+                  <a:srgbClr val="4472C4"/>
+                </a:solidFill>
+                <a:latin typeface="Calibri"/>
+              </a:rPr>
+              <a:t>1693</a:t>
+            </a:r>
+          </a:p>
+          <a:p>
+            <a:pPr algn="l"/>
+            <a:r>
+              <a:rPr sz="1050">
+                <a:solidFill>
+                  <a:srgbClr val="262626"/>
+                </a:solidFill>
+                <a:latin typeface="Calibri"/>
+              </a:rPr>
+              <a:t>Edmond Halley's Breslau life table makes it possible to price life annuities.</a:t>
+            </a:r>
+          </a:p>
+        </p:txBody>
+      </p:sp>
+      <p:sp>
+        <p:nvSpPr>
+          <p:cNvPr id="11" name="Rectangle 10"/>
+          <p:cNvSpPr/>
+          <p:nvPr/>
+        </p:nvSpPr>
+        <p:spPr>
+          <a:xfrm>
+            <a:off x="4159083" y="3529584"/>
+            <a:ext cx="20116" cy="384048"/>
+          </a:xfrm>
+          <a:prstGeom prst="rect">
+            <a:avLst/>
+          </a:prstGeom>
+          <a:solidFill>
+            <a:srgbClr val="4472C4"/>
+          </a:solidFill>
+          <a:ln>
+            <a:noFill/>
+          </a:ln>
+          <a:effectLst/>
+        </p:spPr>
+        <p:style>
+          <a:lnRef idx="1">
+            <a:schemeClr val="accent1"/>
+          </a:lnRef>
+          <a:fillRef idx="3">
+            <a:schemeClr val="accent1"/>
+          </a:fillRef>
+          <a:effectRef idx="2">
+            <a:schemeClr val="accent1"/>
+          </a:effectRef>
+          <a:fontRef idx="minor">
+            <a:schemeClr val="lt1"/>
+          </a:fontRef>
+        </p:style>
+        <p:txBody>
+          <a:bodyPr wrap="square" rtlCol="0" anchor="ctr"/>
+          <a:lstStyle/>
+          <a:p>
+            <a:pPr algn="ctr"/>
+            <a:endParaRPr/>
+          </a:p>
+        </p:txBody>
+      </p:sp>
+      <p:sp>
+        <p:nvSpPr>
+          <p:cNvPr id="12" name="Oval 11"/>
+          <p:cNvSpPr/>
+          <p:nvPr/>
+        </p:nvSpPr>
+        <p:spPr>
+          <a:xfrm>
+            <a:off x="4091417" y="3835908"/>
+            <a:ext cx="155448" cy="155448"/>
+          </a:xfrm>
+          <a:prstGeom prst="ellipse">
+            <a:avLst/>
+          </a:prstGeom>
+          <a:solidFill>
+            <a:srgbClr val="FFFFFF"/>
+          </a:solidFill>
+          <a:ln w="25400">
+            <a:solidFill>
+              <a:srgbClr val="4472C4"/>
+            </a:solidFill>
+          </a:ln>
+          <a:effectLst/>
+        </p:spPr>
+        <p:style>
+          <a:lnRef idx="1">
+            <a:schemeClr val="accent1"/>
+          </a:lnRef>
+          <a:fillRef idx="3">
+            <a:schemeClr val="accent1"/>
+          </a:fillRef>
+          <a:effectRef idx="2">
+            <a:schemeClr val="accent1"/>
+          </a:effectRef>
+          <a:fontRef idx="minor">
+            <a:schemeClr val="lt1"/>
+          </a:fontRef>
+        </p:style>
+        <p:txBody>
+          <a:bodyPr wrap="square" rtlCol="0" anchor="ctr"/>
+          <a:lstStyle/>
+          <a:p>
+            <a:pPr algn="ctr"/>
+            <a:endParaRPr/>
+          </a:p>
+        </p:txBody>
+      </p:sp>
+      <p:sp>
+        <p:nvSpPr>
+          <p:cNvPr id="13" name="Rectangle 12"/>
+          <p:cNvSpPr/>
+          <p:nvPr/>
+        </p:nvSpPr>
+        <p:spPr>
+          <a:xfrm>
+            <a:off x="3026141" y="2231136"/>
+            <a:ext cx="2286000" cy="1298448"/>
+          </a:xfrm>
+          <a:prstGeom prst="rect">
+            <a:avLst/>
+          </a:prstGeom>
+          <a:solidFill>
+            <a:srgbClr val="EDF2FA"/>
+          </a:solidFill>
+          <a:ln>
+            <a:noFill/>
+          </a:ln>
+          <a:effectLst/>
+        </p:spPr>
+        <p:style>
+          <a:lnRef idx="1">
+            <a:schemeClr val="accent1"/>
+          </a:lnRef>
+          <a:fillRef idx="3">
+            <a:schemeClr val="accent1"/>
+          </a:fillRef>
+          <a:effectRef idx="2">
+            <a:schemeClr val="accent1"/>
+          </a:effectRef>
+          <a:fontRef idx="minor">
+            <a:schemeClr val="lt1"/>
+          </a:fontRef>
+        </p:style>
+        <p:txBody>
+          <a:bodyPr wrap="square" lIns="100584" tIns="73152" rIns="100584" bIns="73152" rtlCol="0" anchor="t"/>
+          <a:lstStyle/>
+          <a:p>
+            <a:pPr algn="l">
+              <a:spcAft>
+                <a:spcPts val="300"/>
+              </a:spcAft>
+            </a:pPr>
+            <a:r>
+              <a:rPr sz="1700" b="1">
+                <a:solidFill>
+                  <a:srgbClr val="4472C4"/>
+                </a:solidFill>
+                <a:latin typeface="Calibri"/>
+              </a:rPr>
+              <a:t>1749</a:t>
+            </a:r>
+          </a:p>
+          <a:p>
+            <a:pPr algn="l"/>
+            <a:r>
+              <a:rPr sz="1050">
+                <a:solidFill>
+                  <a:srgbClr val="262626"/>
+                </a:solidFill>
+                <a:latin typeface="Calibri"/>
+              </a:rPr>
+              <a:t>Gottfried Achenwall coins “Statistik” — literally the science of the state.</a:t>
+            </a:r>
+          </a:p>
+        </p:txBody>
+      </p:sp>
+      <p:sp>
+        <p:nvSpPr>
+          <p:cNvPr id="14" name="Rectangle 13"/>
+          <p:cNvSpPr/>
+          <p:nvPr/>
+        </p:nvSpPr>
+        <p:spPr>
+          <a:xfrm>
+            <a:off x="5443553" y="3913632"/>
+            <a:ext cx="20116" cy="384048"/>
+          </a:xfrm>
+          <a:prstGeom prst="rect">
+            <a:avLst/>
+          </a:prstGeom>
+          <a:solidFill>
+            <a:srgbClr val="4472C4"/>
+          </a:solidFill>
+          <a:ln>
+            <a:noFill/>
+          </a:ln>
+          <a:effectLst/>
+        </p:spPr>
+        <p:style>
+          <a:lnRef idx="1">
+            <a:schemeClr val="accent1"/>
+          </a:lnRef>
+          <a:fillRef idx="3">
+            <a:schemeClr val="accent1"/>
+          </a:fillRef>
+          <a:effectRef idx="2">
+            <a:schemeClr val="accent1"/>
+          </a:effectRef>
+          <a:fontRef idx="minor">
+            <a:schemeClr val="lt1"/>
+          </a:fontRef>
+        </p:style>
+        <p:txBody>
+          <a:bodyPr wrap="square" rtlCol="0" anchor="ctr"/>
+          <a:lstStyle/>
+          <a:p>
+            <a:pPr algn="ctr"/>
+            <a:endParaRPr/>
+          </a:p>
+        </p:txBody>
+      </p:sp>
+      <p:sp>
+        <p:nvSpPr>
+          <p:cNvPr id="15" name="Oval 14"/>
+          <p:cNvSpPr/>
+          <p:nvPr/>
+        </p:nvSpPr>
+        <p:spPr>
+          <a:xfrm>
+            <a:off x="5375888" y="3835908"/>
+            <a:ext cx="155448" cy="155448"/>
+          </a:xfrm>
+          <a:prstGeom prst="ellipse">
+            <a:avLst/>
+          </a:prstGeom>
+          <a:solidFill>
+            <a:srgbClr val="FFFFFF"/>
+          </a:solidFill>
+          <a:ln w="25400">
+            <a:solidFill>
+              <a:srgbClr val="4472C4"/>
+            </a:solidFill>
+          </a:ln>
+          <a:effectLst/>
+        </p:spPr>
+        <p:style>
+          <a:lnRef idx="1">
+            <a:schemeClr val="accent1"/>
+          </a:lnRef>
+          <a:fillRef idx="3">
+            <a:schemeClr val="accent1"/>
+          </a:fillRef>
+          <a:effectRef idx="2">
+            <a:schemeClr val="accent1"/>
+          </a:effectRef>
+          <a:fontRef idx="minor">
+            <a:schemeClr val="lt1"/>
+          </a:fontRef>
+        </p:style>
+        <p:txBody>
+          <a:bodyPr wrap="square" rtlCol="0" anchor="ctr"/>
+          <a:lstStyle/>
+          <a:p>
+            <a:pPr algn="ctr"/>
+            <a:endParaRPr/>
+          </a:p>
+        </p:txBody>
+      </p:sp>
+      <p:sp>
+        <p:nvSpPr>
+          <p:cNvPr id="16" name="Rectangle 15"/>
+          <p:cNvSpPr/>
+          <p:nvPr/>
+        </p:nvSpPr>
+        <p:spPr>
+          <a:xfrm>
+            <a:off x="4310612" y="4297680"/>
+            <a:ext cx="2286000" cy="1298448"/>
+          </a:xfrm>
+          <a:prstGeom prst="rect">
+            <a:avLst/>
+          </a:prstGeom>
+          <a:solidFill>
+            <a:srgbClr val="EDF2FA"/>
+          </a:solidFill>
+          <a:ln>
+            <a:noFill/>
+          </a:ln>
+          <a:effectLst/>
+        </p:spPr>
+        <p:style>
+          <a:lnRef idx="1">
+            <a:schemeClr val="accent1"/>
+          </a:lnRef>
+          <a:fillRef idx="3">
+            <a:schemeClr val="accent1"/>
+          </a:fillRef>
+          <a:effectRef idx="2">
+            <a:schemeClr val="accent1"/>
+          </a:effectRef>
+          <a:fontRef idx="minor">
+            <a:schemeClr val="lt1"/>
+          </a:fontRef>
+        </p:style>
+        <p:txBody>
+          <a:bodyPr wrap="square" lIns="100584" tIns="73152" rIns="100584" bIns="73152" rtlCol="0" anchor="t"/>
+          <a:lstStyle/>
+          <a:p>
+            <a:pPr algn="l">
+              <a:spcAft>
+                <a:spcPts val="300"/>
+              </a:spcAft>
+            </a:pPr>
+            <a:r>
+              <a:rPr sz="1700" b="1">
+                <a:solidFill>
+                  <a:srgbClr val="4472C4"/>
+                </a:solidFill>
+                <a:latin typeface="Calibri"/>
+              </a:rPr>
+              <a:t>1790</a:t>
+            </a:r>
+          </a:p>
+          <a:p>
+            <a:pPr algn="l"/>
+            <a:r>
+              <a:rPr sz="1050">
+                <a:solidFill>
+                  <a:srgbClr val="262626"/>
+                </a:solidFill>
+                <a:latin typeface="Calibri"/>
+              </a:rPr>
+              <a:t>The first U.S. census counts the population. Great Britain follows in 1801.</a:t>
+            </a:r>
+          </a:p>
+        </p:txBody>
+      </p:sp>
+      <p:sp>
+        <p:nvSpPr>
+          <p:cNvPr id="17" name="Rectangle 16"/>
+          <p:cNvSpPr/>
+          <p:nvPr/>
+        </p:nvSpPr>
+        <p:spPr>
+          <a:xfrm>
+            <a:off x="6728024" y="3529584"/>
+            <a:ext cx="20116" cy="384048"/>
+          </a:xfrm>
+          <a:prstGeom prst="rect">
+            <a:avLst/>
+          </a:prstGeom>
+          <a:solidFill>
+            <a:srgbClr val="4472C4"/>
+          </a:solidFill>
+          <a:ln>
+            <a:noFill/>
+          </a:ln>
+          <a:effectLst/>
+        </p:spPr>
+        <p:style>
+          <a:lnRef idx="1">
+            <a:schemeClr val="accent1"/>
+          </a:lnRef>
+          <a:fillRef idx="3">
+            <a:schemeClr val="accent1"/>
+          </a:fillRef>
+          <a:effectRef idx="2">
+            <a:schemeClr val="accent1"/>
+          </a:effectRef>
+          <a:fontRef idx="minor">
+            <a:schemeClr val="lt1"/>
+          </a:fontRef>
+        </p:style>
+        <p:txBody>
+          <a:bodyPr wrap="square" rtlCol="0" anchor="ctr"/>
+          <a:lstStyle/>
+          <a:p>
+            <a:pPr algn="ctr"/>
+            <a:endParaRPr/>
+          </a:p>
+        </p:txBody>
+      </p:sp>
+      <p:sp>
+        <p:nvSpPr>
+          <p:cNvPr id="18" name="Oval 17"/>
+          <p:cNvSpPr/>
+          <p:nvPr/>
+        </p:nvSpPr>
+        <p:spPr>
+          <a:xfrm>
+            <a:off x="6660358" y="3835908"/>
+            <a:ext cx="155448" cy="155448"/>
+          </a:xfrm>
+          <a:prstGeom prst="ellipse">
+            <a:avLst/>
+          </a:prstGeom>
+          <a:solidFill>
+            <a:srgbClr val="FFFFFF"/>
+          </a:solidFill>
+          <a:ln w="25400">
+            <a:solidFill>
+              <a:srgbClr val="4472C4"/>
+            </a:solidFill>
+          </a:ln>
+          <a:effectLst/>
+        </p:spPr>
+        <p:style>
+          <a:lnRef idx="1">
+            <a:schemeClr val="accent1"/>
+          </a:lnRef>
+          <a:fillRef idx="3">
+            <a:schemeClr val="accent1"/>
+          </a:fillRef>
+          <a:effectRef idx="2">
+            <a:schemeClr val="accent1"/>
+          </a:effectRef>
+          <a:fontRef idx="minor">
+            <a:schemeClr val="lt1"/>
+          </a:fontRef>
+        </p:style>
+        <p:txBody>
+          <a:bodyPr wrap="square" rtlCol="0" anchor="ctr"/>
+          <a:lstStyle/>
+          <a:p>
+            <a:pPr algn="ctr"/>
+            <a:endParaRPr/>
+          </a:p>
+        </p:txBody>
+      </p:sp>
+      <p:sp>
+        <p:nvSpPr>
+          <p:cNvPr id="19" name="Rectangle 18"/>
+          <p:cNvSpPr/>
+          <p:nvPr/>
+        </p:nvSpPr>
+        <p:spPr>
+          <a:xfrm>
+            <a:off x="5595082" y="2231136"/>
+            <a:ext cx="2286000" cy="1298448"/>
+          </a:xfrm>
+          <a:prstGeom prst="rect">
+            <a:avLst/>
+          </a:prstGeom>
+          <a:solidFill>
+            <a:srgbClr val="EDF2FA"/>
+          </a:solidFill>
+          <a:ln>
+            <a:noFill/>
+          </a:ln>
+          <a:effectLst/>
+        </p:spPr>
+        <p:style>
+          <a:lnRef idx="1">
+            <a:schemeClr val="accent1"/>
+          </a:lnRef>
+          <a:fillRef idx="3">
+            <a:schemeClr val="accent1"/>
+          </a:fillRef>
+          <a:effectRef idx="2">
+            <a:schemeClr val="accent1"/>
+          </a:effectRef>
+          <a:fontRef idx="minor">
+            <a:schemeClr val="lt1"/>
+          </a:fontRef>
+        </p:style>
+        <p:txBody>
+          <a:bodyPr wrap="square" lIns="100584" tIns="73152" rIns="100584" bIns="73152" rtlCol="0" anchor="t"/>
+          <a:lstStyle/>
+          <a:p>
+            <a:pPr algn="l">
+              <a:spcAft>
+                <a:spcPts val="300"/>
+              </a:spcAft>
+            </a:pPr>
+            <a:r>
+              <a:rPr sz="1700" b="1">
+                <a:solidFill>
+                  <a:srgbClr val="4472C4"/>
+                </a:solidFill>
+                <a:latin typeface="Calibri"/>
+              </a:rPr>
+              <a:t>1830s</a:t>
+            </a:r>
+          </a:p>
+          <a:p>
+            <a:pPr algn="l"/>
+            <a:r>
+              <a:rPr sz="1050">
+                <a:solidFill>
+                  <a:srgbClr val="262626"/>
+                </a:solidFill>
+                <a:latin typeface="Calibri"/>
+              </a:rPr>
+              <a:t>Adolphe Quetelet applies the normal curve to human traits and invents “the average man.”</a:t>
+            </a:r>
+          </a:p>
+        </p:txBody>
+      </p:sp>
+      <p:sp>
+        <p:nvSpPr>
+          <p:cNvPr id="20" name="Rectangle 19"/>
+          <p:cNvSpPr/>
+          <p:nvPr/>
+        </p:nvSpPr>
+        <p:spPr>
+          <a:xfrm>
+            <a:off x="8012495" y="3913632"/>
+            <a:ext cx="20116" cy="384048"/>
+          </a:xfrm>
+          <a:prstGeom prst="rect">
+            <a:avLst/>
+          </a:prstGeom>
+          <a:solidFill>
+            <a:srgbClr val="4472C4"/>
+          </a:solidFill>
+          <a:ln>
+            <a:noFill/>
+          </a:ln>
+          <a:effectLst/>
+        </p:spPr>
+        <p:style>
+          <a:lnRef idx="1">
+            <a:schemeClr val="accent1"/>
+          </a:lnRef>
+          <a:fillRef idx="3">
+            <a:schemeClr val="accent1"/>
+          </a:fillRef>
+          <a:effectRef idx="2">
+            <a:schemeClr val="accent1"/>
+          </a:effectRef>
+          <a:fontRef idx="minor">
+            <a:schemeClr val="lt1"/>
+          </a:fontRef>
+        </p:style>
+        <p:txBody>
+          <a:bodyPr wrap="square" rtlCol="0" anchor="ctr"/>
+          <a:lstStyle/>
+          <a:p>
+            <a:pPr algn="ctr"/>
+            <a:endParaRPr/>
+          </a:p>
+        </p:txBody>
+      </p:sp>
+      <p:sp>
+        <p:nvSpPr>
+          <p:cNvPr id="21" name="Oval 20"/>
+          <p:cNvSpPr/>
+          <p:nvPr/>
+        </p:nvSpPr>
+        <p:spPr>
+          <a:xfrm>
+            <a:off x="7944829" y="3835908"/>
+            <a:ext cx="155448" cy="155448"/>
+          </a:xfrm>
+          <a:prstGeom prst="ellipse">
+            <a:avLst/>
+          </a:prstGeom>
+          <a:solidFill>
+            <a:srgbClr val="FFFFFF"/>
+          </a:solidFill>
+          <a:ln w="25400">
+            <a:solidFill>
+              <a:srgbClr val="4472C4"/>
+            </a:solidFill>
+          </a:ln>
+          <a:effectLst/>
+        </p:spPr>
+        <p:style>
+          <a:lnRef idx="1">
+            <a:schemeClr val="accent1"/>
+          </a:lnRef>
+          <a:fillRef idx="3">
+            <a:schemeClr val="accent1"/>
+          </a:fillRef>
+          <a:effectRef idx="2">
+            <a:schemeClr val="accent1"/>
+          </a:effectRef>
+          <a:fontRef idx="minor">
+            <a:schemeClr val="lt1"/>
+          </a:fontRef>
+        </p:style>
+        <p:txBody>
+          <a:bodyPr wrap="square" rtlCol="0" anchor="ctr"/>
+          <a:lstStyle/>
+          <a:p>
+            <a:pPr algn="ctr"/>
+            <a:endParaRPr/>
+          </a:p>
+        </p:txBody>
+      </p:sp>
+      <p:sp>
+        <p:nvSpPr>
+          <p:cNvPr id="22" name="Rectangle 21"/>
+          <p:cNvSpPr/>
+          <p:nvPr/>
+        </p:nvSpPr>
+        <p:spPr>
+          <a:xfrm>
+            <a:off x="6879553" y="4297680"/>
+            <a:ext cx="2286000" cy="1298448"/>
+          </a:xfrm>
+          <a:prstGeom prst="rect">
+            <a:avLst/>
+          </a:prstGeom>
+          <a:solidFill>
+            <a:srgbClr val="EDF2FA"/>
+          </a:solidFill>
+          <a:ln>
+            <a:noFill/>
+          </a:ln>
+          <a:effectLst/>
+        </p:spPr>
+        <p:style>
+          <a:lnRef idx="1">
+            <a:schemeClr val="accent1"/>
+          </a:lnRef>
+          <a:fillRef idx="3">
+            <a:schemeClr val="accent1"/>
+          </a:fillRef>
+          <a:effectRef idx="2">
+            <a:schemeClr val="accent1"/>
+          </a:effectRef>
+          <a:fontRef idx="minor">
+            <a:schemeClr val="lt1"/>
+          </a:fontRef>
+        </p:style>
+        <p:txBody>
+          <a:bodyPr wrap="square" lIns="100584" tIns="73152" rIns="100584" bIns="73152" rtlCol="0" anchor="t"/>
+          <a:lstStyle/>
+          <a:p>
+            <a:pPr algn="l">
+              <a:spcAft>
+                <a:spcPts val="300"/>
+              </a:spcAft>
+            </a:pPr>
+            <a:r>
+              <a:rPr sz="1700" b="1">
+                <a:solidFill>
+                  <a:srgbClr val="4472C4"/>
+                </a:solidFill>
+                <a:latin typeface="Calibri"/>
+              </a:rPr>
+              <a:t>1900</a:t>
+            </a:r>
+          </a:p>
+          <a:p>
+            <a:pPr algn="l"/>
+            <a:r>
+              <a:rPr sz="1050">
+                <a:solidFill>
+                  <a:srgbClr val="262626"/>
+                </a:solidFill>
+                <a:latin typeface="Calibri"/>
+              </a:rPr>
+              <a:t>Galton and Pearson develop correlation, regression, and the chi-square test.</a:t>
+            </a:r>
+          </a:p>
+        </p:txBody>
+      </p:sp>
+      <p:sp>
+        <p:nvSpPr>
+          <p:cNvPr id="23" name="Rectangle 22"/>
+          <p:cNvSpPr/>
+          <p:nvPr/>
+        </p:nvSpPr>
+        <p:spPr>
+          <a:xfrm>
+            <a:off x="9296966" y="3529584"/>
+            <a:ext cx="20116" cy="384048"/>
+          </a:xfrm>
+          <a:prstGeom prst="rect">
+            <a:avLst/>
+          </a:prstGeom>
+          <a:solidFill>
+            <a:srgbClr val="4472C4"/>
+          </a:solidFill>
+          <a:ln>
+            <a:noFill/>
+          </a:ln>
+          <a:effectLst/>
+        </p:spPr>
+        <p:style>
+          <a:lnRef idx="1">
+            <a:schemeClr val="accent1"/>
+          </a:lnRef>
+          <a:fillRef idx="3">
+            <a:schemeClr val="accent1"/>
+          </a:fillRef>
+          <a:effectRef idx="2">
+            <a:schemeClr val="accent1"/>
+          </a:effectRef>
+          <a:fontRef idx="minor">
+            <a:schemeClr val="lt1"/>
+          </a:fontRef>
+        </p:style>
+        <p:txBody>
+          <a:bodyPr wrap="square" rtlCol="0" anchor="ctr"/>
+          <a:lstStyle/>
+          <a:p>
+            <a:pPr algn="ctr"/>
+            <a:endParaRPr/>
+          </a:p>
+        </p:txBody>
+      </p:sp>
+      <p:sp>
+        <p:nvSpPr>
+          <p:cNvPr id="24" name="Oval 23"/>
+          <p:cNvSpPr/>
+          <p:nvPr/>
+        </p:nvSpPr>
+        <p:spPr>
+          <a:xfrm>
+            <a:off x="9229300" y="3835908"/>
+            <a:ext cx="155448" cy="155448"/>
+          </a:xfrm>
+          <a:prstGeom prst="ellipse">
+            <a:avLst/>
+          </a:prstGeom>
+          <a:solidFill>
+            <a:srgbClr val="FFFFFF"/>
+          </a:solidFill>
+          <a:ln w="25400">
+            <a:solidFill>
+              <a:srgbClr val="4472C4"/>
+            </a:solidFill>
+          </a:ln>
+          <a:effectLst/>
+        </p:spPr>
+        <p:style>
+          <a:lnRef idx="1">
+            <a:schemeClr val="accent1"/>
+          </a:lnRef>
+          <a:fillRef idx="3">
+            <a:schemeClr val="accent1"/>
+          </a:fillRef>
+          <a:effectRef idx="2">
+            <a:schemeClr val="accent1"/>
+          </a:effectRef>
+          <a:fontRef idx="minor">
+            <a:schemeClr val="lt1"/>
+          </a:fontRef>
+        </p:style>
+        <p:txBody>
+          <a:bodyPr wrap="square" rtlCol="0" anchor="ctr"/>
+          <a:lstStyle/>
+          <a:p>
+            <a:pPr algn="ctr"/>
+            <a:endParaRPr/>
+          </a:p>
+        </p:txBody>
+      </p:sp>
+      <p:sp>
+        <p:nvSpPr>
+          <p:cNvPr id="25" name="Rectangle 24"/>
+          <p:cNvSpPr/>
+          <p:nvPr/>
+        </p:nvSpPr>
+        <p:spPr>
+          <a:xfrm>
+            <a:off x="8164024" y="2231136"/>
+            <a:ext cx="2286000" cy="1298448"/>
+          </a:xfrm>
+          <a:prstGeom prst="rect">
+            <a:avLst/>
+          </a:prstGeom>
+          <a:solidFill>
+            <a:srgbClr val="EDF2FA"/>
+          </a:solidFill>
+          <a:ln>
+            <a:noFill/>
+          </a:ln>
+          <a:effectLst/>
+        </p:spPr>
+        <p:style>
+          <a:lnRef idx="1">
+            <a:schemeClr val="accent1"/>
+          </a:lnRef>
+          <a:fillRef idx="3">
+            <a:schemeClr val="accent1"/>
+          </a:fillRef>
+          <a:effectRef idx="2">
+            <a:schemeClr val="accent1"/>
+          </a:effectRef>
+          <a:fontRef idx="minor">
+            <a:schemeClr val="lt1"/>
+          </a:fontRef>
+        </p:style>
+        <p:txBody>
+          <a:bodyPr wrap="square" lIns="100584" tIns="73152" rIns="100584" bIns="73152" rtlCol="0" anchor="t"/>
+          <a:lstStyle/>
+          <a:p>
+            <a:pPr algn="l">
+              <a:spcAft>
+                <a:spcPts val="300"/>
+              </a:spcAft>
+            </a:pPr>
+            <a:r>
+              <a:rPr sz="1700" b="1">
+                <a:solidFill>
+                  <a:srgbClr val="4472C4"/>
+                </a:solidFill>
+                <a:latin typeface="Calibri"/>
+              </a:rPr>
+              <a:t>1925</a:t>
+            </a:r>
+          </a:p>
+          <a:p>
+            <a:pPr algn="l"/>
+            <a:r>
+              <a:rPr sz="1050">
+                <a:solidFill>
+                  <a:srgbClr val="262626"/>
+                </a:solidFill>
+                <a:latin typeface="Calibri"/>
+              </a:rPr>
+              <a:t>R. A. Fisher formalizes experimental design, ANOVA, and significance testing.</a:t>
+            </a:r>
+          </a:p>
+        </p:txBody>
+      </p:sp>
+      <p:sp>
+        <p:nvSpPr>
+          <p:cNvPr id="26" name="Rectangle 25"/>
+          <p:cNvSpPr/>
+          <p:nvPr/>
+        </p:nvSpPr>
+        <p:spPr>
+          <a:xfrm>
+            <a:off x="10581436" y="3913632"/>
+            <a:ext cx="20116" cy="384048"/>
+          </a:xfrm>
+          <a:prstGeom prst="rect">
+            <a:avLst/>
+          </a:prstGeom>
+          <a:solidFill>
+            <a:srgbClr val="C5540F"/>
+          </a:solidFill>
+          <a:ln>
+            <a:noFill/>
+          </a:ln>
+          <a:effectLst/>
+        </p:spPr>
+        <p:style>
+          <a:lnRef idx="1">
+            <a:schemeClr val="accent1"/>
+          </a:lnRef>
+          <a:fillRef idx="3">
+            <a:schemeClr val="accent1"/>
+          </a:fillRef>
+          <a:effectRef idx="2">
+            <a:schemeClr val="accent1"/>
+          </a:effectRef>
+          <a:fontRef idx="minor">
+            <a:schemeClr val="lt1"/>
+          </a:fontRef>
+        </p:style>
+        <p:txBody>
+          <a:bodyPr wrap="square" rtlCol="0" anchor="ctr"/>
+          <a:lstStyle/>
+          <a:p>
+            <a:pPr algn="ctr"/>
+            <a:endParaRPr/>
+          </a:p>
+        </p:txBody>
+      </p:sp>
+      <p:sp>
+        <p:nvSpPr>
+          <p:cNvPr id="27" name="Oval 26"/>
+          <p:cNvSpPr/>
+          <p:nvPr/>
+        </p:nvSpPr>
+        <p:spPr>
+          <a:xfrm>
+            <a:off x="10513771" y="3835908"/>
+            <a:ext cx="155448" cy="155448"/>
+          </a:xfrm>
+          <a:prstGeom prst="ellipse">
+            <a:avLst/>
+          </a:prstGeom>
+          <a:solidFill>
+            <a:srgbClr val="FFFFFF"/>
+          </a:solidFill>
+          <a:ln w="25400">
+            <a:solidFill>
+              <a:srgbClr val="C5540F"/>
+            </a:solidFill>
+          </a:ln>
+          <a:effectLst/>
+        </p:spPr>
+        <p:style>
+          <a:lnRef idx="1">
+            <a:schemeClr val="accent1"/>
+          </a:lnRef>
+          <a:fillRef idx="3">
+            <a:schemeClr val="accent1"/>
+          </a:fillRef>
+          <a:effectRef idx="2">
+            <a:schemeClr val="accent1"/>
+          </a:effectRef>
+          <a:fontRef idx="minor">
+            <a:schemeClr val="lt1"/>
+          </a:fontRef>
+        </p:style>
+        <p:txBody>
+          <a:bodyPr wrap="square" rtlCol="0" anchor="ctr"/>
+          <a:lstStyle/>
+          <a:p>
+            <a:pPr algn="ctr"/>
+            <a:endParaRPr/>
+          </a:p>
+        </p:txBody>
+      </p:sp>
+      <p:sp>
+        <p:nvSpPr>
+          <p:cNvPr id="28" name="Rectangle 27"/>
+          <p:cNvSpPr/>
+          <p:nvPr/>
+        </p:nvSpPr>
+        <p:spPr>
+          <a:xfrm>
+            <a:off x="9448495" y="4297680"/>
+            <a:ext cx="2286000" cy="1298448"/>
+          </a:xfrm>
+          <a:prstGeom prst="rect">
+            <a:avLst/>
+          </a:prstGeom>
+          <a:solidFill>
+            <a:srgbClr val="FCE6D5"/>
+          </a:solidFill>
+          <a:ln>
+            <a:noFill/>
+          </a:ln>
+          <a:effectLst/>
+        </p:spPr>
+        <p:style>
+          <a:lnRef idx="1">
+            <a:schemeClr val="accent1"/>
+          </a:lnRef>
+          <a:fillRef idx="3">
+            <a:schemeClr val="accent1"/>
+          </a:fillRef>
+          <a:effectRef idx="2">
+            <a:schemeClr val="accent1"/>
+          </a:effectRef>
+          <a:fontRef idx="minor">
+            <a:schemeClr val="lt1"/>
+          </a:fontRef>
+        </p:style>
+        <p:txBody>
+          <a:bodyPr wrap="square" lIns="100584" tIns="73152" rIns="100584" bIns="73152" rtlCol="0" anchor="t"/>
+          <a:lstStyle/>
+          <a:p>
+            <a:pPr algn="l">
+              <a:spcAft>
+                <a:spcPts val="300"/>
+              </a:spcAft>
+            </a:pPr>
+            <a:r>
+              <a:rPr sz="1700" b="1">
+                <a:solidFill>
+                  <a:srgbClr val="C5540F"/>
+                </a:solidFill>
+                <a:latin typeface="Calibri"/>
+              </a:rPr>
+              <a:t>Today</a:t>
+            </a:r>
+          </a:p>
+          <a:p>
+            <a:pPr algn="l"/>
+            <a:r>
+              <a:rPr sz="1050">
+                <a:solidFill>
+                  <a:srgbClr val="262626"/>
+                </a:solidFill>
+                <a:latin typeface="Calibri"/>
+              </a:rPr>
+              <a:t>The same ideas, now run by computers on data far larger than Graunt could count.</a:t>
+            </a:r>
+          </a:p>
+        </p:txBody>
+      </p:sp>
+      <p:sp>
+        <p:nvSpPr>
+          <p:cNvPr id="29" name="TextBox 28"/>
+          <p:cNvSpPr txBox="1"/>
+          <p:nvPr/>
+        </p:nvSpPr>
+        <p:spPr>
+          <a:xfrm>
+            <a:off x="457200" y="6144768"/>
+            <a:ext cx="11292840" cy="566928"/>
+          </a:xfrm>
+          <a:prstGeom prst="rect">
+            <a:avLst/>
+          </a:prstGeom>
+          <a:noFill/>
+        </p:spPr>
+        <p:txBody>
+          <a:bodyPr wrap="square" lIns="0" tIns="0" rIns="0" bIns="0" anchor="t">
+            <a:spAutoFit/>
+          </a:bodyPr>
+          <a:lstStyle/>
+          <a:p>
+            <a:pPr algn="l">
+              <a:spcAft>
+                <a:spcPts val="0"/>
+              </a:spcAft>
+            </a:pPr>
+            <a:r>
+              <a:rPr sz="900" b="0">
+                <a:solidFill>
+                  <a:srgbClr val="595959"/>
+                </a:solidFill>
+                <a:latin typeface="Calibri"/>
+              </a:rPr>
+              <a:t>Sources: J. Graunt (1662), Natural and Political Observations Made upon the Bills of Mortality. E. Halley (1693), Phil. Trans. R. Soc. 17:596–610. G. Achenwall (1749), Abriss der neuesten Staatswissenschaft. A. Quetelet (1835), Sur l’homme et le développement de ses facultés. R. A. Fisher (1925), Statistical Methods for Research Workers.</a:t>
+            </a:r>
+          </a:p>
+        </p:txBody>
+      </p:sp>
+    </p:spTree>
   </p:cSld>
   <p:clrMapOvr>
     <a:masterClrMapping/>
